--- a/AI Parte 1, Presentazione.pptx
+++ b/AI Parte 1, Presentazione.pptx
@@ -119,46 +119,46 @@
   <p:extLst>
     <p:ext uri="{521415D9-36F7-43E2-AB2F-B90AF26B5E84}">
       <p14:sectionLst xmlns:p14="http://schemas.microsoft.com/office/powerpoint/2010/main">
-        <p14:section name="Apertura" id="{7fa005f6-ae5f-134b-ceab-920fc8db923c}">
+        <p14:section name="Apertura" id="{cf1ea5b6-b2b5-41ac-43ca-01faa4f0e323}">
           <p14:sldIdLst>
             <p14:sldId id="256"/>
             <p14:sldId id="257"/>
           </p14:sldIdLst>
         </p14:section>
-        <p14:section name="Perché" id="{68c7c518-0364-4677-b4ea-6f02db3a97ad}">
+        <p14:section name="Perché" id="{1cbac470-3cd6-69ba-50f0-cb67e859a1a1}">
           <p14:sldIdLst>
             <p14:sldId id="258"/>
             <p14:sldId id="259"/>
             <p14:sldId id="260"/>
           </p14:sldIdLst>
         </p14:section>
-        <p14:section name="Capire" id="{341d4204-9767-bbf7-ff59-879de878191a}">
+        <p14:section name="Capire" id="{fda675f1-2c65-71a3-8627-d107f94bcfdc}">
           <p14:sldIdLst>
             <p14:sldId id="261"/>
           </p14:sldIdLst>
         </p14:section>
-        <p14:section name="Regole chiave" id="{0d68ce2f-ee7a-f11d-6c36-12ec74e8dc5c}">
+        <p14:section name="Regole chiave" id="{3f028836-9aa1-85c0-36b7-ca8fe765085c}">
           <p14:sldIdLst>
             <p14:sldId id="262"/>
           </p14:sldIdLst>
         </p14:section>
-        <p14:section name="In azienda" id="{00852f20-7b37-aa47-19c0-57a82ada4e7d}">
+        <p14:section name="In azienda" id="{6bab4054-576a-4e81-5f1e-c614ba7a489e}">
           <p14:sldIdLst>
             <p14:sldId id="263"/>
           </p14:sldIdLst>
         </p14:section>
-        <p14:section name="Il materiale" id="{bc192994-2d2f-a7ca-7afc-6294ec2b389a}">
+        <p14:section name="Il materiale" id="{a44a6aa4-0619-e521-fcaa-99850474527a}">
           <p14:sldIdLst>
             <p14:sldId id="264"/>
           </p14:sldIdLst>
         </p14:section>
-        <p14:section name="Adesso" id="{4fcc21e5-0cdf-3601-4fd1-798f4f75242b}">
+        <p14:section name="Adesso" id="{3989a252-17e0-6b42-f2fe-377c28eac48d}">
           <p14:sldIdLst>
             <p14:sldId id="265"/>
             <p14:sldId id="266"/>
           </p14:sldIdLst>
         </p14:section>
-        <p14:section name="Chiusura" id="{8feffbcb-0a17-3ebb-6438-702c6bfc1565}">
+        <p14:section name="Chiusura" id="{710b032b-3b76-a812-a5c4-e1550f12cbd2}">
           <p14:sldIdLst>
             <p14:sldId id="267"/>
             <p14:sldId id="268"/>
@@ -744,7 +744,7 @@
           <a:p>
             <a:r>
               <a:rPr lang="en-US" dirty="0"/>
-              <a:t>Il materiale è un file da aprire nel browser, funziona anche senza internet. Mostrate dal vivo dove sono l’interruttore della lingua, il menu dei capitoli e la checklist. Il programma è indicativo: decidetelo con il vostro responsabile.</a:t>
+              <a:t>Il materiale si apre da un link nel browser, anche dal telefono, e non serve nessun account. Mostrate dal vivo dove sono l’interruttore della lingua, il menu dei capitoli e la checklist. Il programma è indicativo: decidetelo con il vostro responsabile.</a:t>
             </a:r>
             <a:endParaRPr lang="en-US" dirty="0"/>
           </a:p>
@@ -4353,7 +4353,7 @@
                 <a:ea typeface="Arial" pitchFamily="34" charset="-122"/>
                 <a:cs typeface="Arial" pitchFamily="34" charset="-120"/>
               </a:rPr>
-              <a:t>Apri il file nel browser, anche dal telefono</a:t>
+              <a:t>Apri il link nel browser, anche dal telefono</a:t>
             </a:r>
             <a:endParaRPr lang="en-US" sz="1500" dirty="0"/>
           </a:p>

--- a/AI Parte 1, Presentazione.pptx
+++ b/AI Parte 1, Presentazione.pptx
@@ -119,46 +119,46 @@
   <p:extLst>
     <p:ext uri="{521415D9-36F7-43E2-AB2F-B90AF26B5E84}">
       <p14:sectionLst xmlns:p14="http://schemas.microsoft.com/office/powerpoint/2010/main">
-        <p14:section name="Apertura" id="{cf1ea5b6-b2b5-41ac-43ca-01faa4f0e323}">
+        <p14:section name="Apertura" id="{145ec069-4118-8c12-9274-7dfb17d0689b}">
           <p14:sldIdLst>
             <p14:sldId id="256"/>
             <p14:sldId id="257"/>
           </p14:sldIdLst>
         </p14:section>
-        <p14:section name="Perché" id="{1cbac470-3cd6-69ba-50f0-cb67e859a1a1}">
+        <p14:section name="Perché" id="{fc42f74a-ab24-069b-b8a4-008f02596223}">
           <p14:sldIdLst>
             <p14:sldId id="258"/>
             <p14:sldId id="259"/>
             <p14:sldId id="260"/>
           </p14:sldIdLst>
         </p14:section>
-        <p14:section name="Capire" id="{fda675f1-2c65-71a3-8627-d107f94bcfdc}">
+        <p14:section name="Capire" id="{fa0cbade-0907-8c70-a765-3a9ec3d2c26c}">
           <p14:sldIdLst>
             <p14:sldId id="261"/>
           </p14:sldIdLst>
         </p14:section>
-        <p14:section name="Regole chiave" id="{3f028836-9aa1-85c0-36b7-ca8fe765085c}">
+        <p14:section name="Regole chiave" id="{07c2e3cc-ec22-ce88-eed4-d92c8aacf638}">
           <p14:sldIdLst>
             <p14:sldId id="262"/>
           </p14:sldIdLst>
         </p14:section>
-        <p14:section name="In azienda" id="{6bab4054-576a-4e81-5f1e-c614ba7a489e}">
+        <p14:section name="In azienda" id="{1b5dce08-6d34-20e6-775a-d54e351822fe}">
           <p14:sldIdLst>
             <p14:sldId id="263"/>
           </p14:sldIdLst>
         </p14:section>
-        <p14:section name="Il materiale" id="{a44a6aa4-0619-e521-fcaa-99850474527a}">
+        <p14:section name="Il materiale" id="{8fde333d-8eee-c87e-543d-427180f2f67a}">
           <p14:sldIdLst>
             <p14:sldId id="264"/>
           </p14:sldIdLst>
         </p14:section>
-        <p14:section name="Adesso" id="{3989a252-17e0-6b42-f2fe-377c28eac48d}">
+        <p14:section name="Adesso" id="{06353669-71fe-c9de-b836-8d6e8ad643c0}">
           <p14:sldIdLst>
             <p14:sldId id="265"/>
             <p14:sldId id="266"/>
           </p14:sldIdLst>
         </p14:section>
-        <p14:section name="Chiusura" id="{710b032b-3b76-a812-a5c4-e1550f12cbd2}">
+        <p14:section name="Chiusura" id="{267defe5-f82f-9f12-6f2d-923e869f18fd}">
           <p14:sldIdLst>
             <p14:sldId id="267"/>
             <p14:sldId id="268"/>
@@ -568,7 +568,7 @@
           <a:p>
             <a:r>
               <a:rPr lang="en-US" dirty="0"/>
-              <a:t>Oggi parliamo di intelligenza artificiale al lavoro: cosa fa bene, dove sbaglia, quali dati non darle mai e come usarla bene. Non serve saper programmare. Come per la sicurezza, oggi c’è l’introduzione e il resto è nel materiale.</a:t>
+              <a:t>Oggi parliamo di intelligenza artificiale al lavoro: cosa fa bene, dove sbaglia, quali dati non darle mai e come usarla bene. Non serve saper programmare. Come per la sicurezza: oggi l’introduzione, il resto è nel materiale.</a:t>
             </a:r>
             <a:endParaRPr lang="en-US" dirty="0"/>
           </a:p>
@@ -1008,7 +1008,7 @@
           <a:p>
             <a:r>
               <a:rPr lang="en-US" dirty="0"/>
-              <a:t>Quattro temi, che nel materiale diventano le sezioni A, B, C e D. Prima capiamo cos’è e perché sbaglia. Poi la sicurezza: quali dati sì e quali no. Poi come usarla bene ogni giorno. Infine come un’azienda si organizza per farla lavorare davvero: dati in ordine, connettori, skill e agenti.</a:t>
+              <a:t>Quattro temi, che nel materiale sono le sezioni A, B, C e D. Prima cos’è e perché sbaglia. Poi la sicurezza: quali dati sì e quali no. Poi come usarla bene ogni giorno. Infine come un’azienda si organizza per farla lavorare davvero: dati in ordine, connettori, skill e agenti.</a:t>
             </a:r>
             <a:endParaRPr lang="en-US" dirty="0"/>
           </a:p>
@@ -1184,7 +1184,7 @@
           <a:p>
             <a:r>
               <a:rPr lang="en-US" dirty="0"/>
-              <a:t>Tre numeri. Due persone su tre usano l’AI con account personali, quindi con dati aziendali fuori dal controllo dell’azienda. I truffatori la usano già per scrivere email perfette. E secondo Gartner, entro il 2026 sarà abbandonato il 60% dei progetti AI senza dati pronti.</a:t>
+              <a:t>Tre numeri. Due persone su tre usano l’AI con account personali: dati aziendali fuori dal controllo dell’azienda. I truffatori la usano già per scrivere email perfette. E secondo Gartner, entro il 2026 sarà abbandonato il 60% dei progetti AI senza dati pronti.</a:t>
             </a:r>
             <a:endParaRPr lang="en-US" dirty="0"/>
           </a:p>
@@ -1448,7 +1448,7 @@
           <a:p>
             <a:r>
               <a:rPr lang="en-US" dirty="0"/>
-              <a:t>Le stesse quattro classi di dati della Sicurezza Parte 2, applicate all’AI. Pubblico sì. Interno solo negli strumenti approvati dall’azienda. Confidenziale solo lì e anonimizzato, salvo uno strumento che l’azienda approva per iscritto anche per i dati veri, per esempio l’account aziendale. Segreto mai, in nessuna AI. E l’AI non deve mai poter fare pagamenti o cancellare file e account da sola.</a:t>
+              <a:t>Le quattro classi di dati della Sicurezza Parte 2, applicate all’AI. Pubblico sì. Interno solo negli strumenti approvati dall’azienda. Confidenziale solo lì e anonimizzato, salvo uno strumento approvato per iscritto anche per i dati veri, per esempio l’account aziendale. Segreto mai, in nessuna AI. E l’AI non deve mai poter fare pagamenti o cancellare file e account da sola.</a:t>
             </a:r>
             <a:endParaRPr lang="en-US" dirty="0"/>
           </a:p>
@@ -6048,7 +6048,7 @@
         </p:nvSpPr>
         <p:spPr>
           <a:xfrm>
-            <a:off x="685800" y="5989320"/>
+            <a:off x="685800" y="5760720"/>
             <a:ext cx="10820095" cy="256032"/>
           </a:xfrm>
           <a:prstGeom prst="rect">
@@ -6076,6 +6076,45 @@
               <a:t>Tutte le fonti, con i link, sono anche nell’ultimo capitolo del materiale.</a:t>
             </a:r>
             <a:endParaRPr lang="en-US" sz="1100" dirty="0"/>
+          </a:p>
+        </p:txBody>
+      </p:sp>
+      <p:sp>
+        <p:nvSpPr>
+          <p:cNvPr id="10" name="Crediti"/>
+          <p:cNvSpPr txBox="1"/>
+          <p:nvPr/>
+        </p:nvSpPr>
+        <p:spPr>
+          <a:xfrm>
+            <a:off x="685800" y="6016752"/>
+            <a:ext cx="10820095" cy="329184"/>
+          </a:xfrm>
+          <a:prstGeom prst="rect">
+            <a:avLst/>
+          </a:prstGeom>
+          <a:noFill/>
+          <a:ln/>
+        </p:spPr>
+        <p:txBody>
+          <a:bodyPr wrap="square" lIns="0" tIns="0" rIns="0" bIns="0" rtlCol="0" anchor="t"/>
+          <a:lstStyle/>
+          <a:p>
+            <a:pPr indent="0" marL="0">
+              <a:buNone/>
+            </a:pPr>
+            <a:r>
+              <a:rPr lang="en-US" sz="1000" dirty="0">
+                <a:solidFill>
+                  <a:schemeClr val="accent6"/>
+                </a:solidFill>
+                <a:latin typeface="Arial" pitchFamily="34" charset="0"/>
+                <a:ea typeface="Arial" pitchFamily="34" charset="-122"/>
+                <a:cs typeface="Arial" pitchFamily="34" charset="-120"/>
+              </a:rPr>
+              <a:t>© 2026 Aron Clementi. Materiale formativo a scopo informativo: non sostituisce una consulenza legale o tecnica né le regole della tua azienda. Fonti verificate alla data indicata; strumenti e prezzi cambiano.</a:t>
+            </a:r>
+            <a:endParaRPr lang="en-US" sz="1000" dirty="0"/>
           </a:p>
         </p:txBody>
       </p:sp>
@@ -9059,7 +9098,7 @@
                 <a:ea typeface="Arial" pitchFamily="34" charset="-122"/>
                 <a:cs typeface="Arial" pitchFamily="34" charset="-120"/>
               </a:rPr>
-              <a:t>Chiedi le fonti e ricontrolla nomi, date e numeri. Per i calcoli, fagli usare Excel o il codice.</a:t>
+              <a:t>Chiedi le fonti e ricontrolla nomi, date e numeri. Per i calcoli, falle usare Excel o il codice.</a:t>
             </a:r>
             <a:endParaRPr lang="en-US" sz="1500" dirty="0"/>
           </a:p>

--- a/AI Parte 1, Presentazione.pptx
+++ b/AI Parte 1, Presentazione.pptx
@@ -119,46 +119,46 @@
   <p:extLst>
     <p:ext uri="{521415D9-36F7-43E2-AB2F-B90AF26B5E84}">
       <p14:sectionLst xmlns:p14="http://schemas.microsoft.com/office/powerpoint/2010/main">
-        <p14:section name="Apertura" id="{145ec069-4118-8c12-9274-7dfb17d0689b}">
+        <p14:section name="Apertura" id="{44647646-e91b-012b-710a-fe5881409049}">
           <p14:sldIdLst>
             <p14:sldId id="256"/>
             <p14:sldId id="257"/>
           </p14:sldIdLst>
         </p14:section>
-        <p14:section name="Perché" id="{fc42f74a-ab24-069b-b8a4-008f02596223}">
+        <p14:section name="Perché" id="{c8dcd249-b193-5bf4-a8bc-120f26b44c36}">
           <p14:sldIdLst>
             <p14:sldId id="258"/>
             <p14:sldId id="259"/>
             <p14:sldId id="260"/>
           </p14:sldIdLst>
         </p14:section>
-        <p14:section name="Capire" id="{fa0cbade-0907-8c70-a765-3a9ec3d2c26c}">
+        <p14:section name="Capire" id="{4440a227-4d31-de50-8517-eaddc606923c}">
           <p14:sldIdLst>
             <p14:sldId id="261"/>
           </p14:sldIdLst>
         </p14:section>
-        <p14:section name="Regole chiave" id="{07c2e3cc-ec22-ce88-eed4-d92c8aacf638}">
+        <p14:section name="Regole chiave" id="{dfcd32c3-1b35-66b8-9eaa-6bbb97136e44}">
           <p14:sldIdLst>
             <p14:sldId id="262"/>
           </p14:sldIdLst>
         </p14:section>
-        <p14:section name="In azienda" id="{1b5dce08-6d34-20e6-775a-d54e351822fe}">
+        <p14:section name="In azienda" id="{ac0659a8-1420-dba4-3f32-912b0d692f39}">
           <p14:sldIdLst>
             <p14:sldId id="263"/>
           </p14:sldIdLst>
         </p14:section>
-        <p14:section name="Il materiale" id="{8fde333d-8eee-c87e-543d-427180f2f67a}">
+        <p14:section name="Il materiale" id="{7f77b256-fe76-5a68-a04f-c2450b228790}">
           <p14:sldIdLst>
             <p14:sldId id="264"/>
           </p14:sldIdLst>
         </p14:section>
-        <p14:section name="Adesso" id="{06353669-71fe-c9de-b836-8d6e8ad643c0}">
+        <p14:section name="Adesso" id="{de275968-ab7b-37be-3af7-91fb872e5bbe}">
           <p14:sldIdLst>
             <p14:sldId id="265"/>
             <p14:sldId id="266"/>
           </p14:sldIdLst>
         </p14:section>
-        <p14:section name="Chiusura" id="{267defe5-f82f-9f12-6f2d-923e869f18fd}">
+        <p14:section name="Chiusura" id="{fb679aca-bad8-700b-bec6-c00d922c40e3}">
           <p14:sldIdLst>
             <p14:sldId id="267"/>
             <p14:sldId id="268"/>

--- a/AI Parte 1, Presentazione.pptx
+++ b/AI Parte 1, Presentazione.pptx
@@ -119,46 +119,46 @@
   <p:extLst>
     <p:ext uri="{521415D9-36F7-43E2-AB2F-B90AF26B5E84}">
       <p14:sectionLst xmlns:p14="http://schemas.microsoft.com/office/powerpoint/2010/main">
-        <p14:section name="Apertura" id="{44647646-e91b-012b-710a-fe5881409049}">
+        <p14:section name="Apertura" id="{44afbf48-d307-72d2-a021-a66cac9cbdda}">
           <p14:sldIdLst>
             <p14:sldId id="256"/>
             <p14:sldId id="257"/>
           </p14:sldIdLst>
         </p14:section>
-        <p14:section name="Perché" id="{c8dcd249-b193-5bf4-a8bc-120f26b44c36}">
+        <p14:section name="Perché" id="{245d62f3-830c-f04a-c490-1aaf9418d089}">
           <p14:sldIdLst>
             <p14:sldId id="258"/>
             <p14:sldId id="259"/>
             <p14:sldId id="260"/>
           </p14:sldIdLst>
         </p14:section>
-        <p14:section name="Capire" id="{4440a227-4d31-de50-8517-eaddc606923c}">
+        <p14:section name="Capire" id="{8e9705c2-c46a-5fce-6e96-14becf825581}">
           <p14:sldIdLst>
             <p14:sldId id="261"/>
           </p14:sldIdLst>
         </p14:section>
-        <p14:section name="Regole chiave" id="{dfcd32c3-1b35-66b8-9eaa-6bbb97136e44}">
+        <p14:section name="Regole chiave" id="{42672046-1c30-4915-dd89-b207589e0704}">
           <p14:sldIdLst>
             <p14:sldId id="262"/>
           </p14:sldIdLst>
         </p14:section>
-        <p14:section name="In azienda" id="{ac0659a8-1420-dba4-3f32-912b0d692f39}">
+        <p14:section name="In azienda" id="{9fc5b7c6-3977-aa78-097b-d8da3ee20ed2}">
           <p14:sldIdLst>
             <p14:sldId id="263"/>
           </p14:sldIdLst>
         </p14:section>
-        <p14:section name="Il materiale" id="{7f77b256-fe76-5a68-a04f-c2450b228790}">
+        <p14:section name="Il materiale" id="{9766cd91-c801-055f-fab1-ff59c2be33d4}">
           <p14:sldIdLst>
             <p14:sldId id="264"/>
           </p14:sldIdLst>
         </p14:section>
-        <p14:section name="Adesso" id="{de275968-ab7b-37be-3af7-91fb872e5bbe}">
+        <p14:section name="Adesso" id="{fa5be2f2-54dd-3547-0333-413858884d7d}">
           <p14:sldIdLst>
             <p14:sldId id="265"/>
             <p14:sldId id="266"/>
           </p14:sldIdLst>
         </p14:section>
-        <p14:section name="Chiusura" id="{fb679aca-bad8-700b-bec6-c00d922c40e3}">
+        <p14:section name="Chiusura" id="{ce1ed49b-d050-2e11-1970-bbc2a3b394b0}">
           <p14:sldIdLst>
             <p14:sldId id="267"/>
             <p14:sldId id="268"/>

--- a/AI Parte 1, Presentazione.pptx
+++ b/AI Parte 1, Presentazione.pptx
@@ -119,46 +119,46 @@
   <p:extLst>
     <p:ext uri="{521415D9-36F7-43E2-AB2F-B90AF26B5E84}">
       <p14:sectionLst xmlns:p14="http://schemas.microsoft.com/office/powerpoint/2010/main">
-        <p14:section name="Apertura" id="{44afbf48-d307-72d2-a021-a66cac9cbdda}">
+        <p14:section name="Apertura" id="{7087b253-69bd-ce71-77a7-a5718816fd05}">
           <p14:sldIdLst>
             <p14:sldId id="256"/>
             <p14:sldId id="257"/>
           </p14:sldIdLst>
         </p14:section>
-        <p14:section name="Perché" id="{245d62f3-830c-f04a-c490-1aaf9418d089}">
+        <p14:section name="Perché" id="{487b8028-f8eb-1396-7170-7fdcf9dcaf35}">
           <p14:sldIdLst>
             <p14:sldId id="258"/>
             <p14:sldId id="259"/>
             <p14:sldId id="260"/>
           </p14:sldIdLst>
         </p14:section>
-        <p14:section name="Capire" id="{8e9705c2-c46a-5fce-6e96-14becf825581}">
+        <p14:section name="Capire" id="{3d4c07d4-bd22-f721-23ac-08e48e7dac4a}">
           <p14:sldIdLst>
             <p14:sldId id="261"/>
           </p14:sldIdLst>
         </p14:section>
-        <p14:section name="Regole chiave" id="{42672046-1c30-4915-dd89-b207589e0704}">
+        <p14:section name="Regole chiave" id="{5473490e-0634-dcb3-301e-db537e52a3f0}">
           <p14:sldIdLst>
             <p14:sldId id="262"/>
           </p14:sldIdLst>
         </p14:section>
-        <p14:section name="In azienda" id="{9fc5b7c6-3977-aa78-097b-d8da3ee20ed2}">
+        <p14:section name="In azienda" id="{df4f8525-f876-da57-3aac-205454b17803}">
           <p14:sldIdLst>
             <p14:sldId id="263"/>
           </p14:sldIdLst>
         </p14:section>
-        <p14:section name="Il materiale" id="{9766cd91-c801-055f-fab1-ff59c2be33d4}">
+        <p14:section name="Il materiale" id="{3377b915-457e-fd19-400c-266ecafd1c4a}">
           <p14:sldIdLst>
             <p14:sldId id="264"/>
           </p14:sldIdLst>
         </p14:section>
-        <p14:section name="Adesso" id="{fa5be2f2-54dd-3547-0333-413858884d7d}">
+        <p14:section name="Adesso" id="{2e182571-040f-3cd3-fbf8-e434042e3fc7}">
           <p14:sldIdLst>
             <p14:sldId id="265"/>
             <p14:sldId id="266"/>
           </p14:sldIdLst>
         </p14:section>
-        <p14:section name="Chiusura" id="{ce1ed49b-d050-2e11-1970-bbc2a3b394b0}">
+        <p14:section name="Chiusura" id="{8e9f050c-686e-5dfc-95af-c44b8acb4155}">
           <p14:sldIdLst>
             <p14:sldId id="267"/>
             <p14:sldId id="268"/>

--- a/AI Parte 1, Presentazione.pptx
+++ b/AI Parte 1, Presentazione.pptx
@@ -18,9 +18,11 @@
     <p:sldId id="266" r:id="rId12"/>
     <p:sldId id="267" r:id="rId13"/>
     <p:sldId id="268" r:id="rId14"/>
+    <p:sldId id="269" r:id="rId15"/>
+    <p:sldId id="270" r:id="rId16"/>
   </p:sldIdLst>
   <p:notesMasterIdLst>
-    <p:notesMasterId r:id="rId15"/>
+    <p:notesMasterId r:id="rId17"/>
   </p:notesMasterIdLst>
   <p:sldSz cx="12192000" cy="6858000"/>
   <p:notesSz cx="6858000" cy="12192000"/>
@@ -119,49 +121,51 @@
   <p:extLst>
     <p:ext uri="{521415D9-36F7-43E2-AB2F-B90AF26B5E84}">
       <p14:sectionLst xmlns:p14="http://schemas.microsoft.com/office/powerpoint/2010/main">
-        <p14:section name="Apertura" id="{7087b253-69bd-ce71-77a7-a5718816fd05}">
+        <p14:section name="Apertura" id="{94320d4a-86bd-55cc-72b6-5e4a32c76fec}">
           <p14:sldIdLst>
             <p14:sldId id="256"/>
             <p14:sldId id="257"/>
           </p14:sldIdLst>
         </p14:section>
-        <p14:section name="Perché" id="{487b8028-f8eb-1396-7170-7fdcf9dcaf35}">
+        <p14:section name="Perché" id="{bc421386-5e49-f069-7f13-a0cdf1c5f605}">
           <p14:sldIdLst>
             <p14:sldId id="258"/>
             <p14:sldId id="259"/>
             <p14:sldId id="260"/>
           </p14:sldIdLst>
         </p14:section>
-        <p14:section name="Capire" id="{3d4c07d4-bd22-f721-23ac-08e48e7dac4a}">
+        <p14:section name="Capire" id="{f0e7d683-02d5-e6bc-0542-b9457a6ae302}">
           <p14:sldIdLst>
             <p14:sldId id="261"/>
           </p14:sldIdLst>
         </p14:section>
-        <p14:section name="Regole chiave" id="{5473490e-0634-dcb3-301e-db537e52a3f0}">
+        <p14:section name="Regole chiave" id="{4b62b8e3-83c6-0e68-d148-dce1106b8d8d}">
           <p14:sldIdLst>
             <p14:sldId id="262"/>
           </p14:sldIdLst>
         </p14:section>
-        <p14:section name="In azienda" id="{df4f8525-f876-da57-3aac-205454b17803}">
+        <p14:section name="In azienda" id="{57f8b36a-e9c6-a80c-12a5-20b55263907c}">
           <p14:sldIdLst>
             <p14:sldId id="263"/>
+            <p14:sldId id="264"/>
+            <p14:sldId id="265"/>
           </p14:sldIdLst>
         </p14:section>
-        <p14:section name="Il materiale" id="{3377b915-457e-fd19-400c-266ecafd1c4a}">
+        <p14:section name="Il materiale" id="{07c4cab4-e49a-50da-dcca-a29643d38723}">
           <p14:sldIdLst>
-            <p14:sldId id="264"/>
-          </p14:sldIdLst>
-        </p14:section>
-        <p14:section name="Adesso" id="{2e182571-040f-3cd3-fbf8-e434042e3fc7}">
-          <p14:sldIdLst>
-            <p14:sldId id="265"/>
             <p14:sldId id="266"/>
           </p14:sldIdLst>
         </p14:section>
-        <p14:section name="Chiusura" id="{8e9f050c-686e-5dfc-95af-c44b8acb4155}">
+        <p14:section name="Adesso" id="{49b1b3f1-b04d-b5e7-dba4-b5733265740e}">
           <p14:sldIdLst>
             <p14:sldId id="267"/>
             <p14:sldId id="268"/>
+          </p14:sldIdLst>
+        </p14:section>
+        <p14:section name="Chiusura" id="{b3d6bcaa-80de-b181-4484-d8365d6da4e5}">
+          <p14:sldIdLst>
+            <p14:sldId id="269"/>
+            <p14:sldId id="270"/>
           </p14:sldIdLst>
         </p14:section>
       </p14:sectionLst>
@@ -656,7 +660,7 @@
           <a:p>
             <a:r>
               <a:rPr lang="en-US" dirty="0"/>
-              <a:t>Facciamolo adesso. Primo: spegnere l’addestramento, così le vostre chat non servono a istruire il modello. Secondo: le istruzioni personalizzate, che tolgono all’AI l’abitudine di scrivere troppo. Terzo: un prompt pronto per il vostro lavoro, per vedere subito il risultato.</a:t>
+              <a:t>Un esempio completo. Chiedete in italiano, per esempio: prepara l’offerta per il cliente A partendo dall’ultima email e dal listino in Drive. Claude riconosce la skill giusta, la segue passo per passo, legge la email e il listino tramite i connettori e salva l’offerta nella cartella giusta. Vi dice anche cosa manca. Voi controllate prima di mandarla. Nel materiale, sezione D, ci sono gli esempi e le regole sugli accessi.</a:t>
             </a:r>
             <a:endParaRPr lang="en-US" dirty="0"/>
           </a:p>
@@ -744,7 +748,7 @@
           <a:p>
             <a:r>
               <a:rPr lang="en-US" dirty="0"/>
-              <a:t>Il materiale si apre da un link nel browser, anche dal telefono, e non serve nessun account. Mostrate dal vivo dove sono l’interruttore della lingua, il menu dei capitoli e la checklist. Il programma è indicativo: decidetelo con il vostro responsabile.</a:t>
+              <a:t>Cinque sezioni, tutte per tutti. A, B e C: capire, usare in sicurezza, usare bene, con 27 prompt pronti per amministrazione, comunicazione, vendite, tecnico e cantiere, sviluppo, marketing, design, legale e direzione. La sezione D è la più importante per il lavoro in azienda: connettori e MCP, skill, agenti e basi di vibe coding. La E chiude con strumenti, checklist e test.</a:t>
             </a:r>
             <a:endParaRPr lang="en-US" dirty="0"/>
           </a:p>
@@ -832,7 +836,7 @@
           <a:p>
             <a:r>
               <a:rPr lang="en-US" dirty="0"/>
-              <a:t>Tre frasi da ricordare. L’AI è uno strumento potente: usata con le regole giuste fa risparmiare ore ogni settimana. Se avete dubbi su uno strumento o su un dato, chiedete prima di usarlo.</a:t>
+              <a:t>Facciamolo adesso. Primo: spegnere l’addestramento, così le vostre chat non servono a istruire il modello. Secondo: le istruzioni personalizzate, che tolgono all’AI l’abitudine di scrivere troppo. Terzo: un prompt pronto per il vostro lavoro, per vedere subito il risultato.</a:t>
             </a:r>
             <a:endParaRPr lang="en-US" dirty="0"/>
           </a:p>
@@ -920,7 +924,7 @@
           <a:p>
             <a:r>
               <a:rPr lang="en-US" dirty="0"/>
-              <a:t>Le fonti dei numeri e dei casi citati. Tutte verificabili, con data.</a:t>
+              <a:t>Il materiale si apre da un link nel browser, anche dal telefono, e non serve nessun account. Mostrate dal vivo dove sono l’interruttore della lingua, il menu dei capitoli e la checklist. Il programma è indicativo: decidetelo con il vostro responsabile.</a:t>
             </a:r>
             <a:endParaRPr lang="en-US" dirty="0"/>
           </a:p>
@@ -944,6 +948,182 @@
             <a:fld id="{F7021451-1387-4CA6-816F-3879F97B5CBC}" type="slidenum">
               <a:rPr lang="en-US"/>
               <a:t>13</a:t>
+            </a:fld>
+            <a:endParaRPr lang="en-US"/>
+          </a:p>
+        </p:txBody>
+      </p:sp>
+    </p:spTree>
+    <p:extLst>
+      <p:ext uri="{BB962C8B-B14F-4D97-AF65-F5344CB8AC3E}">
+        <p14:creationId xmlns:p14="http://schemas.microsoft.com/office/powerpoint/2010/main" val="1024086991"/>
+      </p:ext>
+    </p:extLst>
+  </p:cSld>
+  <p:clrMapOvr>
+    <a:masterClrMapping/>
+  </p:clrMapOvr>
+</p:notes>
+</file>
+
+<file path=ppt/notesSlides/notesSlide14.xml><?xml version="1.0" encoding="utf-8"?>
+<p:notes xmlns:a="http://schemas.openxmlformats.org/drawingml/2006/main" xmlns:r="http://schemas.openxmlformats.org/officeDocument/2006/relationships" xmlns:p="http://schemas.openxmlformats.org/presentationml/2006/main">
+  <p:cSld>
+    <p:spTree>
+      <p:nvGrpSpPr>
+        <p:cNvPr id="1" name=""/>
+        <p:cNvGrpSpPr/>
+        <p:nvPr/>
+      </p:nvGrpSpPr>
+      <p:grpSpPr>
+        <a:xfrm>
+          <a:off x="0" y="0"/>
+          <a:ext cx="0" cy="0"/>
+          <a:chOff x="0" y="0"/>
+          <a:chExt cx="0" cy="0"/>
+        </a:xfrm>
+      </p:grpSpPr>
+      <p:sp>
+        <p:nvSpPr>
+          <p:cNvPr id="2" name="Slide Image Placeholder 1"/>
+          <p:cNvSpPr>
+            <a:spLocks noGrp="1" noRot="1" noChangeAspect="1"/>
+          </p:cNvSpPr>
+          <p:nvPr>
+            <p:ph type="sldImg"/>
+          </p:nvPr>
+        </p:nvSpPr>
+        <p:spPr/>
+      </p:sp>
+      <p:sp>
+        <p:nvSpPr>
+          <p:cNvPr id="3" name="Notes Placeholder 2"/>
+          <p:cNvSpPr>
+            <a:spLocks noGrp="1"/>
+          </p:cNvSpPr>
+          <p:nvPr>
+            <p:ph type="body" idx="1"/>
+          </p:nvPr>
+        </p:nvSpPr>
+        <p:spPr/>
+        <p:txBody>
+          <a:bodyPr/>
+          <a:lstStyle/>
+          <a:p>
+            <a:r>
+              <a:rPr lang="en-US" dirty="0"/>
+              <a:t>Tre frasi da ricordare. L’AI è uno strumento potente: usata con le regole giuste fa risparmiare ore ogni settimana. Se avete dubbi su uno strumento o su un dato, chiedete prima di usarlo.</a:t>
+            </a:r>
+            <a:endParaRPr lang="en-US" dirty="0"/>
+          </a:p>
+        </p:txBody>
+      </p:sp>
+      <p:sp>
+        <p:nvSpPr>
+          <p:cNvPr id="4" name="Slide Number Placeholder 3"/>
+          <p:cNvSpPr>
+            <a:spLocks noGrp="1"/>
+          </p:cNvSpPr>
+          <p:nvPr>
+            <p:ph type="sldNum" sz="quarter" idx="10"/>
+          </p:nvPr>
+        </p:nvSpPr>
+        <p:spPr/>
+        <p:txBody>
+          <a:bodyPr/>
+          <a:lstStyle/>
+          <a:p>
+            <a:fld id="{F7021451-1387-4CA6-816F-3879F97B5CBC}" type="slidenum">
+              <a:rPr lang="en-US"/>
+              <a:t>14</a:t>
+            </a:fld>
+            <a:endParaRPr lang="en-US"/>
+          </a:p>
+        </p:txBody>
+      </p:sp>
+    </p:spTree>
+    <p:extLst>
+      <p:ext uri="{BB962C8B-B14F-4D97-AF65-F5344CB8AC3E}">
+        <p14:creationId xmlns:p14="http://schemas.microsoft.com/office/powerpoint/2010/main" val="1024086991"/>
+      </p:ext>
+    </p:extLst>
+  </p:cSld>
+  <p:clrMapOvr>
+    <a:masterClrMapping/>
+  </p:clrMapOvr>
+</p:notes>
+</file>
+
+<file path=ppt/notesSlides/notesSlide15.xml><?xml version="1.0" encoding="utf-8"?>
+<p:notes xmlns:a="http://schemas.openxmlformats.org/drawingml/2006/main" xmlns:r="http://schemas.openxmlformats.org/officeDocument/2006/relationships" xmlns:p="http://schemas.openxmlformats.org/presentationml/2006/main">
+  <p:cSld>
+    <p:spTree>
+      <p:nvGrpSpPr>
+        <p:cNvPr id="1" name=""/>
+        <p:cNvGrpSpPr/>
+        <p:nvPr/>
+      </p:nvGrpSpPr>
+      <p:grpSpPr>
+        <a:xfrm>
+          <a:off x="0" y="0"/>
+          <a:ext cx="0" cy="0"/>
+          <a:chOff x="0" y="0"/>
+          <a:chExt cx="0" cy="0"/>
+        </a:xfrm>
+      </p:grpSpPr>
+      <p:sp>
+        <p:nvSpPr>
+          <p:cNvPr id="2" name="Slide Image Placeholder 1"/>
+          <p:cNvSpPr>
+            <a:spLocks noGrp="1" noRot="1" noChangeAspect="1"/>
+          </p:cNvSpPr>
+          <p:nvPr>
+            <p:ph type="sldImg"/>
+          </p:nvPr>
+        </p:nvSpPr>
+        <p:spPr/>
+      </p:sp>
+      <p:sp>
+        <p:nvSpPr>
+          <p:cNvPr id="3" name="Notes Placeholder 2"/>
+          <p:cNvSpPr>
+            <a:spLocks noGrp="1"/>
+          </p:cNvSpPr>
+          <p:nvPr>
+            <p:ph type="body" idx="1"/>
+          </p:nvPr>
+        </p:nvSpPr>
+        <p:spPr/>
+        <p:txBody>
+          <a:bodyPr/>
+          <a:lstStyle/>
+          <a:p>
+            <a:r>
+              <a:rPr lang="en-US" dirty="0"/>
+              <a:t>Le fonti dei numeri e dei casi citati. Tutte verificabili, con data.</a:t>
+            </a:r>
+            <a:endParaRPr lang="en-US" dirty="0"/>
+          </a:p>
+        </p:txBody>
+      </p:sp>
+      <p:sp>
+        <p:nvSpPr>
+          <p:cNvPr id="4" name="Slide Number Placeholder 3"/>
+          <p:cNvSpPr>
+            <a:spLocks noGrp="1"/>
+          </p:cNvSpPr>
+          <p:nvPr>
+            <p:ph type="sldNum" sz="quarter" idx="10"/>
+          </p:nvPr>
+        </p:nvSpPr>
+        <p:spPr/>
+        <p:txBody>
+          <a:bodyPr/>
+          <a:lstStyle/>
+          <a:p>
+            <a:fld id="{F7021451-1387-4CA6-816F-3879F97B5CBC}" type="slidenum">
+              <a:rPr lang="en-US"/>
+              <a:t>15</a:t>
             </a:fld>
             <a:endParaRPr lang="en-US"/>
           </a:p>
@@ -1624,7 +1804,7 @@
           <a:p>
             <a:r>
               <a:rPr lang="en-US" dirty="0"/>
-              <a:t>Cinque sezioni, tutte per tutti. A, B e C: capire, usare in sicurezza, usare bene, con 27 prompt pronti per amministrazione, comunicazione, vendite, tecnico e cantiere, sviluppo, marketing, design, legale e direzione. La sezione D è la più importante per il lavoro in azienda: connettori e MCP, skill, agenti e basi di vibe coding. La E chiude con strumenti, checklist e test.</a:t>
+              <a:t>Tre parole che sentirete spesso. Il connettore, o MCP, è il cavo: permette all’AI di leggere e scrivere in un altro programma, per esempio Google Drive o la posta. MCP è lo standard aperto con cui si costruiscono. La skill è la procedura scritta, come il manuale che dareste a un nuovo collega: istruzioni, modelli, esempi. Claude la apre da solo quando la richiesta corrisponde. Il plugin è la cassetta degli attrezzi: mette insieme più skill, connettori e comandi, si installa in un clic e fa lavorare tutti allo stesso modo. Se avete un plugin del vostro settore, qui è il momento giusto per una demo dal vivo.</a:t>
             </a:r>
             <a:endParaRPr lang="en-US" dirty="0"/>
           </a:p>
@@ -3251,7 +3431,7 @@
                 <a:ea typeface="Arial" pitchFamily="34" charset="-122"/>
                 <a:cs typeface="Arial" pitchFamily="34" charset="-120"/>
               </a:rPr>
-              <a:t>ADESSO, INSIEME</a:t>
+              <a:t>COME LAVORANO INSIEME</a:t>
             </a:r>
             <a:endParaRPr lang="en-US" sz="1200" dirty="0"/>
           </a:p>
@@ -3292,7 +3472,7 @@
                 <a:ea typeface="Georgia" pitchFamily="34" charset="-122"/>
                 <a:cs typeface="Georgia" pitchFamily="34" charset="-120"/>
               </a:rPr>
-              <a:t>Tre cose da fare in 10 minuti</a:t>
+              <a:t>Una richiesta, dall’inizio alla fine</a:t>
             </a:r>
             <a:endParaRPr lang="en-US" sz="3400" dirty="0"/>
           </a:p>
@@ -3300,108 +3480,57 @@
       </p:sp>
       <p:sp>
         <p:nvSpPr>
-          <p:cNvPr id="4" name="Tempo"/>
+          <p:cNvPr id="4" name="Colonna ENTRA"/>
+          <p:cNvSpPr txBox="1"/>
+          <p:nvPr/>
+        </p:nvSpPr>
+        <p:spPr>
+          <a:xfrm>
+            <a:off x="685800" y="1783080"/>
+            <a:ext cx="3154680" cy="274320"/>
+          </a:xfrm>
+          <a:prstGeom prst="rect">
+            <a:avLst/>
+          </a:prstGeom>
+          <a:noFill/>
+          <a:ln/>
+        </p:spPr>
+        <p:txBody>
+          <a:bodyPr wrap="square" lIns="0" tIns="0" rIns="0" bIns="0" rtlCol="0" anchor="t"/>
+          <a:lstStyle/>
+          <a:p>
+            <a:pPr indent="0" marL="0">
+              <a:buNone/>
+            </a:pPr>
+            <a:r>
+              <a:rPr lang="en-US" sz="1200" b="1" spc="200" kern="0" dirty="0">
+                <a:solidFill>
+                  <a:schemeClr val="accent1"/>
+                </a:solidFill>
+                <a:latin typeface="Arial" pitchFamily="34" charset="0"/>
+                <a:ea typeface="Arial" pitchFamily="34" charset="-122"/>
+                <a:cs typeface="Arial" pitchFamily="34" charset="-120"/>
+              </a:rPr>
+              <a:t>ENTRA</a:t>
+            </a:r>
+            <a:endParaRPr lang="en-US" sz="1200" dirty="0"/>
+          </a:p>
+        </p:txBody>
+      </p:sp>
+      <p:sp>
+        <p:nvSpPr>
+          <p:cNvPr id="5" name="ENTRA La richiesta"/>
           <p:cNvSpPr/>
           <p:nvPr/>
         </p:nvSpPr>
         <p:spPr>
           <a:xfrm>
-            <a:off x="9905695" y="868680"/>
-            <a:ext cx="1600200" cy="457200"/>
+            <a:off x="685800" y="2167128"/>
+            <a:ext cx="3154680" cy="731520"/>
           </a:xfrm>
           <a:prstGeom prst="roundRect">
             <a:avLst>
-              <a:gd name="adj" fmla="val 50000"/>
-            </a:avLst>
-          </a:prstGeom>
-          <a:solidFill>
-            <a:srgbClr val="ECFDF3"/>
-          </a:solidFill>
-          <a:ln w="12700">
-            <a:solidFill>
-              <a:srgbClr val="ECFDF3"/>
-            </a:solidFill>
-            <a:prstDash val="solid"/>
-          </a:ln>
-        </p:spPr>
-      </p:sp>
-      <p:pic>
-        <p:nvPicPr>
-          <p:cNvPr id="5" name="Tempo icona" descr="preencoded.png">    </p:cNvPr>
-          <p:cNvPicPr>
-            <a:picLocks noChangeAspect="1"/>
-          </p:cNvPicPr>
-          <p:nvPr/>
-        </p:nvPicPr>
-        <p:blipFill>
-          <a:blip r:embed="rId1"/>
-          <a:stretch>
-            <a:fillRect/>
-          </a:stretch>
-        </p:blipFill>
-        <p:spPr>
-          <a:xfrm>
-            <a:off x="10088575" y="978408"/>
-            <a:ext cx="237744" cy="237744"/>
-          </a:xfrm>
-          <a:prstGeom prst="rect">
-            <a:avLst/>
-          </a:prstGeom>
-        </p:spPr>
-      </p:pic>
-      <p:sp>
-        <p:nvSpPr>
-          <p:cNvPr id="6" name="Tempo testo"/>
-          <p:cNvSpPr txBox="1"/>
-          <p:nvPr/>
-        </p:nvSpPr>
-        <p:spPr>
-          <a:xfrm>
-            <a:off x="10362895" y="868680"/>
-            <a:ext cx="1051560" cy="457200"/>
-          </a:xfrm>
-          <a:prstGeom prst="rect">
-            <a:avLst/>
-          </a:prstGeom>
-          <a:noFill/>
-          <a:ln/>
-        </p:spPr>
-        <p:txBody>
-          <a:bodyPr wrap="square" lIns="0" tIns="0" rIns="0" bIns="0" rtlCol="0" anchor="ctr"/>
-          <a:lstStyle/>
-          <a:p>
-            <a:pPr indent="0" marL="0">
-              <a:buNone/>
-            </a:pPr>
-            <a:r>
-              <a:rPr lang="en-US" sz="1400" b="1" dirty="0">
-                <a:solidFill>
-                  <a:schemeClr val="accent3"/>
-                </a:solidFill>
-                <a:latin typeface="Arial" pitchFamily="34" charset="0"/>
-                <a:ea typeface="Arial" pitchFamily="34" charset="-122"/>
-                <a:cs typeface="Arial" pitchFamily="34" charset="-120"/>
-              </a:rPr>
-              <a:t>10 minuti</a:t>
-            </a:r>
-            <a:endParaRPr lang="en-US" sz="1400" dirty="0"/>
-          </a:p>
-        </p:txBody>
-      </p:sp>
-      <p:sp>
-        <p:nvSpPr>
-          <p:cNvPr id="7" name="Azione 1"/>
-          <p:cNvSpPr/>
-          <p:nvPr/>
-        </p:nvSpPr>
-        <p:spPr>
-          <a:xfrm>
-            <a:off x="685800" y="1828800"/>
-            <a:ext cx="10820095" cy="1188720"/>
-          </a:xfrm>
-          <a:prstGeom prst="roundRect">
-            <a:avLst>
-              <a:gd name="adj" fmla="val 10769"/>
+              <a:gd name="adj" fmla="val 12500"/>
             </a:avLst>
           </a:prstGeom>
           <a:solidFill>
@@ -3417,82 +3546,18 @@
       </p:sp>
       <p:sp>
         <p:nvSpPr>
-          <p:cNvPr id="8" name="numero 1"/>
+          <p:cNvPr id="6" name="ENTRA icona 0 fondo"/>
           <p:cNvSpPr/>
           <p:nvPr/>
         </p:nvSpPr>
         <p:spPr>
           <a:xfrm>
-            <a:off x="960120" y="2167128"/>
-            <a:ext cx="512064" cy="512064"/>
-          </a:xfrm>
-          <a:prstGeom prst="ellipse">
-            <a:avLst/>
-          </a:prstGeom>
-          <a:solidFill>
-            <a:srgbClr val="1B4D89"/>
-          </a:solidFill>
-          <a:ln w="12700">
-            <a:solidFill>
-              <a:srgbClr val="1B4D89"/>
-            </a:solidFill>
-            <a:prstDash val="solid"/>
-          </a:ln>
-        </p:spPr>
-      </p:sp>
-      <p:sp>
-        <p:nvSpPr>
-          <p:cNvPr id="9" name="numero testo 1"/>
-          <p:cNvSpPr txBox="1"/>
-          <p:nvPr/>
-        </p:nvSpPr>
-        <p:spPr>
-          <a:xfrm>
-            <a:off x="960120" y="2167128"/>
-            <a:ext cx="512064" cy="512064"/>
-          </a:xfrm>
-          <a:prstGeom prst="rect">
-            <a:avLst/>
-          </a:prstGeom>
-          <a:noFill/>
-          <a:ln/>
-        </p:spPr>
-        <p:txBody>
-          <a:bodyPr wrap="square" lIns="0" tIns="0" rIns="0" bIns="0" rtlCol="0" anchor="ctr"/>
-          <a:lstStyle/>
-          <a:p>
-            <a:pPr algn="ctr" indent="0" marL="0">
-              <a:buNone/>
-            </a:pPr>
-            <a:r>
-              <a:rPr lang="en-US" sz="1800" b="1" dirty="0">
-                <a:solidFill>
-                  <a:schemeClr val="bg1"/>
-                </a:solidFill>
-                <a:latin typeface="Arial" pitchFamily="34" charset="0"/>
-                <a:ea typeface="Arial" pitchFamily="34" charset="-122"/>
-                <a:cs typeface="Arial" pitchFamily="34" charset="-120"/>
-              </a:rPr>
-              <a:t>1</a:t>
-            </a:r>
-            <a:endParaRPr lang="en-US" sz="1800" dirty="0"/>
-          </a:p>
-        </p:txBody>
-      </p:sp>
-      <p:sp>
-        <p:nvSpPr>
-          <p:cNvPr id="10" name="Icona azione 1 fondo"/>
-          <p:cNvSpPr/>
-          <p:nvPr/>
-        </p:nvSpPr>
-        <p:spPr>
-          <a:xfrm>
-            <a:off x="1691640" y="2103120"/>
-            <a:ext cx="640080" cy="640080"/>
+            <a:off x="822960" y="2322576"/>
+            <a:ext cx="420624" cy="420624"/>
           </a:xfrm>
           <a:prstGeom prst="roundRect">
             <a:avLst>
-              <a:gd name="adj" fmla="val 20000"/>
+              <a:gd name="adj" fmla="val 22000"/>
             </a:avLst>
           </a:prstGeom>
           <a:solidFill>
@@ -3508,22 +3573,22 @@
       </p:sp>
       <p:pic>
         <p:nvPicPr>
-          <p:cNvPr id="11" name="Icona azione 1" descr="preencoded.png">    </p:cNvPr>
+          <p:cNvPr id="7" name="ENTRA icona 0" descr="preencoded.png">    </p:cNvPr>
           <p:cNvPicPr>
             <a:picLocks noChangeAspect="1"/>
           </p:cNvPicPr>
           <p:nvPr/>
         </p:nvPicPr>
         <p:blipFill>
-          <a:blip r:embed="rId2"/>
+          <a:blip r:embed="rId1"/>
           <a:stretch>
             <a:fillRect/>
           </a:stretch>
         </p:blipFill>
         <p:spPr>
           <a:xfrm>
-            <a:off x="1845259" y="2256739"/>
-            <a:ext cx="332842" cy="332842"/>
+            <a:off x="923910" y="2423526"/>
+            <a:ext cx="218724" cy="218724"/>
           </a:xfrm>
           <a:prstGeom prst="rect">
             <a:avLst/>
@@ -3532,30 +3597,30 @@
       </p:pic>
       <p:sp>
         <p:nvSpPr>
-          <p:cNvPr id="12" name="Azione titolo 1"/>
+          <p:cNvPr id="8" name="ENTRA testo 0"/>
           <p:cNvSpPr txBox="1"/>
           <p:nvPr/>
         </p:nvSpPr>
         <p:spPr>
           <a:xfrm>
-            <a:off x="2560320" y="2011680"/>
-            <a:ext cx="8625535" cy="411480"/>
-          </a:xfrm>
-          <a:prstGeom prst="rect">
-            <a:avLst/>
-          </a:prstGeom>
-          <a:noFill/>
-          <a:ln/>
-        </p:spPr>
-        <p:txBody>
-          <a:bodyPr wrap="square" lIns="0" tIns="0" rIns="0" bIns="0" rtlCol="0" anchor="t"/>
-          <a:lstStyle/>
-          <a:p>
-            <a:pPr indent="0" marL="0">
-              <a:buNone/>
-            </a:pPr>
-            <a:r>
-              <a:rPr lang="en-US" sz="2000" b="1" dirty="0">
+            <a:off x="1371600" y="2167128"/>
+            <a:ext cx="2377440" cy="731520"/>
+          </a:xfrm>
+          <a:prstGeom prst="rect">
+            <a:avLst/>
+          </a:prstGeom>
+          <a:noFill/>
+          <a:ln/>
+        </p:spPr>
+        <p:txBody>
+          <a:bodyPr wrap="square" lIns="0" tIns="0" rIns="0" bIns="0" rtlCol="0" anchor="ctr"/>
+          <a:lstStyle/>
+          <a:p>
+            <a:pPr indent="0" marL="0">
+              <a:buNone/>
+            </a:pPr>
+            <a:r>
+              <a:rPr lang="en-US" sz="1350" b="1" dirty="0">
                 <a:solidFill>
                   <a:schemeClr val="tx1"/>
                 </a:solidFill>
@@ -3563,65 +3628,43 @@
                 <a:ea typeface="Arial" pitchFamily="34" charset="-122"/>
                 <a:cs typeface="Arial" pitchFamily="34" charset="-120"/>
               </a:rPr>
-              <a:t>Spegni l’addestramento sulle tue chat</a:t>
-            </a:r>
-            <a:endParaRPr lang="en-US" sz="2000" dirty="0"/>
-          </a:p>
-        </p:txBody>
-      </p:sp>
-      <p:sp>
-        <p:nvSpPr>
-          <p:cNvPr id="13" name="Azione testo 1"/>
-          <p:cNvSpPr txBox="1"/>
-          <p:nvPr/>
-        </p:nvSpPr>
-        <p:spPr>
-          <a:xfrm>
-            <a:off x="2560320" y="2450592"/>
-            <a:ext cx="8625535" cy="457200"/>
-          </a:xfrm>
-          <a:prstGeom prst="rect">
-            <a:avLst/>
-          </a:prstGeom>
-          <a:noFill/>
-          <a:ln/>
-        </p:spPr>
-        <p:txBody>
-          <a:bodyPr wrap="square" lIns="0" tIns="0" rIns="0" bIns="0" rtlCol="0" anchor="t"/>
-          <a:lstStyle/>
-          <a:p>
-            <a:pPr indent="0" marL="0">
-              <a:buNone/>
-            </a:pPr>
-            <a:r>
-              <a:rPr lang="en-US" sz="1500" dirty="0">
-                <a:solidFill>
-                  <a:srgbClr val="374151"/>
-                </a:solidFill>
-                <a:latin typeface="Arial" pitchFamily="34" charset="0"/>
-                <a:ea typeface="Arial" pitchFamily="34" charset="-122"/>
-                <a:cs typeface="Arial" pitchFamily="34" charset="-120"/>
-              </a:rPr>
-              <a:t>Nelle impostazioni privacy dello strumento che usi. I percorsi per 5 strumenti sono nel capitolo 4.</a:t>
-            </a:r>
-            <a:endParaRPr lang="en-US" sz="1500" dirty="0"/>
-          </a:p>
-        </p:txBody>
-      </p:sp>
-      <p:sp>
-        <p:nvSpPr>
-          <p:cNvPr id="14" name="Azione 2"/>
+              <a:t>La richiesta</a:t>
+            </a:r>
+            <a:endParaRPr lang="en-US" sz="1350" dirty="0"/>
+          </a:p>
+          <a:p>
+            <a:pPr indent="0" marL="0">
+              <a:buNone/>
+            </a:pPr>
+            <a:r>
+              <a:rPr lang="en-US" sz="1150" dirty="0">
+                <a:solidFill>
+                  <a:srgbClr val="6B7280"/>
+                </a:solidFill>
+                <a:latin typeface="Arial" pitchFamily="34" charset="0"/>
+                <a:ea typeface="Arial" pitchFamily="34" charset="-122"/>
+                <a:cs typeface="Arial" pitchFamily="34" charset="-120"/>
+              </a:rPr>
+              <a:t>in italiano, come a un collega</a:t>
+            </a:r>
+            <a:endParaRPr lang="en-US" sz="1350" dirty="0"/>
+          </a:p>
+        </p:txBody>
+      </p:sp>
+      <p:sp>
+        <p:nvSpPr>
+          <p:cNvPr id="9" name="ENTRA I documenti"/>
           <p:cNvSpPr/>
           <p:nvPr/>
         </p:nvSpPr>
         <p:spPr>
           <a:xfrm>
-            <a:off x="685800" y="3200400"/>
-            <a:ext cx="10820095" cy="1188720"/>
+            <a:off x="685800" y="2990088"/>
+            <a:ext cx="3154680" cy="731520"/>
           </a:xfrm>
           <a:prstGeom prst="roundRect">
             <a:avLst>
-              <a:gd name="adj" fmla="val 10769"/>
+              <a:gd name="adj" fmla="val 12500"/>
             </a:avLst>
           </a:prstGeom>
           <a:solidFill>
@@ -3637,82 +3680,18 @@
       </p:sp>
       <p:sp>
         <p:nvSpPr>
-          <p:cNvPr id="15" name="numero 2"/>
+          <p:cNvPr id="10" name="ENTRA icona 1 fondo"/>
           <p:cNvSpPr/>
           <p:nvPr/>
         </p:nvSpPr>
         <p:spPr>
           <a:xfrm>
-            <a:off x="960120" y="3538728"/>
-            <a:ext cx="512064" cy="512064"/>
-          </a:xfrm>
-          <a:prstGeom prst="ellipse">
-            <a:avLst/>
-          </a:prstGeom>
-          <a:solidFill>
-            <a:srgbClr val="1B4D89"/>
-          </a:solidFill>
-          <a:ln w="12700">
-            <a:solidFill>
-              <a:srgbClr val="1B4D89"/>
-            </a:solidFill>
-            <a:prstDash val="solid"/>
-          </a:ln>
-        </p:spPr>
-      </p:sp>
-      <p:sp>
-        <p:nvSpPr>
-          <p:cNvPr id="16" name="numero testo 2"/>
-          <p:cNvSpPr txBox="1"/>
-          <p:nvPr/>
-        </p:nvSpPr>
-        <p:spPr>
-          <a:xfrm>
-            <a:off x="960120" y="3538728"/>
-            <a:ext cx="512064" cy="512064"/>
-          </a:xfrm>
-          <a:prstGeom prst="rect">
-            <a:avLst/>
-          </a:prstGeom>
-          <a:noFill/>
-          <a:ln/>
-        </p:spPr>
-        <p:txBody>
-          <a:bodyPr wrap="square" lIns="0" tIns="0" rIns="0" bIns="0" rtlCol="0" anchor="ctr"/>
-          <a:lstStyle/>
-          <a:p>
-            <a:pPr algn="ctr" indent="0" marL="0">
-              <a:buNone/>
-            </a:pPr>
-            <a:r>
-              <a:rPr lang="en-US" sz="1800" b="1" dirty="0">
-                <a:solidFill>
-                  <a:schemeClr val="bg1"/>
-                </a:solidFill>
-                <a:latin typeface="Arial" pitchFamily="34" charset="0"/>
-                <a:ea typeface="Arial" pitchFamily="34" charset="-122"/>
-                <a:cs typeface="Arial" pitchFamily="34" charset="-120"/>
-              </a:rPr>
-              <a:t>2</a:t>
-            </a:r>
-            <a:endParaRPr lang="en-US" sz="1800" dirty="0"/>
-          </a:p>
-        </p:txBody>
-      </p:sp>
-      <p:sp>
-        <p:nvSpPr>
-          <p:cNvPr id="17" name="Icona azione 2 fondo"/>
-          <p:cNvSpPr/>
-          <p:nvPr/>
-        </p:nvSpPr>
-        <p:spPr>
-          <a:xfrm>
-            <a:off x="1691640" y="3474720"/>
-            <a:ext cx="640080" cy="640080"/>
+            <a:off x="822960" y="3145536"/>
+            <a:ext cx="420624" cy="420624"/>
           </a:xfrm>
           <a:prstGeom prst="roundRect">
             <a:avLst>
-              <a:gd name="adj" fmla="val 20000"/>
+              <a:gd name="adj" fmla="val 22000"/>
             </a:avLst>
           </a:prstGeom>
           <a:solidFill>
@@ -3728,22 +3707,22 @@
       </p:sp>
       <p:pic>
         <p:nvPicPr>
-          <p:cNvPr id="18" name="Icona azione 2" descr="preencoded.png">    </p:cNvPr>
+          <p:cNvPr id="11" name="ENTRA icona 1" descr="preencoded.png">    </p:cNvPr>
           <p:cNvPicPr>
             <a:picLocks noChangeAspect="1"/>
           </p:cNvPicPr>
           <p:nvPr/>
         </p:nvPicPr>
         <p:blipFill>
-          <a:blip r:embed="rId3"/>
+          <a:blip r:embed="rId2"/>
           <a:stretch>
             <a:fillRect/>
           </a:stretch>
         </p:blipFill>
         <p:spPr>
           <a:xfrm>
-            <a:off x="1845259" y="3628339"/>
-            <a:ext cx="332842" cy="332842"/>
+            <a:off x="923910" y="3246486"/>
+            <a:ext cx="218724" cy="218724"/>
           </a:xfrm>
           <a:prstGeom prst="rect">
             <a:avLst/>
@@ -3752,30 +3731,30 @@
       </p:pic>
       <p:sp>
         <p:nvSpPr>
-          <p:cNvPr id="19" name="Azione titolo 2"/>
+          <p:cNvPr id="12" name="ENTRA testo 1"/>
           <p:cNvSpPr txBox="1"/>
           <p:nvPr/>
         </p:nvSpPr>
         <p:spPr>
           <a:xfrm>
-            <a:off x="2560320" y="3383280"/>
-            <a:ext cx="8625535" cy="411480"/>
-          </a:xfrm>
-          <a:prstGeom prst="rect">
-            <a:avLst/>
-          </a:prstGeom>
-          <a:noFill/>
-          <a:ln/>
-        </p:spPr>
-        <p:txBody>
-          <a:bodyPr wrap="square" lIns="0" tIns="0" rIns="0" bIns="0" rtlCol="0" anchor="t"/>
-          <a:lstStyle/>
-          <a:p>
-            <a:pPr indent="0" marL="0">
-              <a:buNone/>
-            </a:pPr>
-            <a:r>
-              <a:rPr lang="en-US" sz="2000" b="1" dirty="0">
+            <a:off x="1371600" y="2990088"/>
+            <a:ext cx="2377440" cy="731520"/>
+          </a:xfrm>
+          <a:prstGeom prst="rect">
+            <a:avLst/>
+          </a:prstGeom>
+          <a:noFill/>
+          <a:ln/>
+        </p:spPr>
+        <p:txBody>
+          <a:bodyPr wrap="square" lIns="0" tIns="0" rIns="0" bIns="0" rtlCol="0" anchor="ctr"/>
+          <a:lstStyle/>
+          <a:p>
+            <a:pPr indent="0" marL="0">
+              <a:buNone/>
+            </a:pPr>
+            <a:r>
+              <a:rPr lang="en-US" sz="1350" b="1" dirty="0">
                 <a:solidFill>
                   <a:schemeClr val="tx1"/>
                 </a:solidFill>
@@ -3783,65 +3762,43 @@
                 <a:ea typeface="Arial" pitchFamily="34" charset="-122"/>
                 <a:cs typeface="Arial" pitchFamily="34" charset="-120"/>
               </a:rPr>
-              <a:t>Imposta le istruzioni personalizzate</a:t>
-            </a:r>
-            <a:endParaRPr lang="en-US" sz="2000" dirty="0"/>
-          </a:p>
-        </p:txBody>
-      </p:sp>
-      <p:sp>
-        <p:nvSpPr>
-          <p:cNvPr id="20" name="Azione testo 2"/>
-          <p:cNvSpPr txBox="1"/>
-          <p:nvPr/>
-        </p:nvSpPr>
-        <p:spPr>
-          <a:xfrm>
-            <a:off x="2560320" y="3822192"/>
-            <a:ext cx="8625535" cy="457200"/>
-          </a:xfrm>
-          <a:prstGeom prst="rect">
-            <a:avLst/>
-          </a:prstGeom>
-          <a:noFill/>
-          <a:ln/>
-        </p:spPr>
-        <p:txBody>
-          <a:bodyPr wrap="square" lIns="0" tIns="0" rIns="0" bIns="0" rtlCol="0" anchor="t"/>
-          <a:lstStyle/>
-          <a:p>
-            <a:pPr indent="0" marL="0">
-              <a:buNone/>
-            </a:pPr>
-            <a:r>
-              <a:rPr lang="en-US" sz="1500" dirty="0">
-                <a:solidFill>
-                  <a:srgbClr val="374151"/>
-                </a:solidFill>
-                <a:latin typeface="Arial" pitchFamily="34" charset="0"/>
-                <a:ea typeface="Arial" pitchFamily="34" charset="-122"/>
-                <a:cs typeface="Arial" pitchFamily="34" charset="-120"/>
-              </a:rPr>
-              <a:t>Chi sei e come vuoi le risposte: brevi, in italiano, con le fonti. Testo pronto da copiare nel capitolo 8.</a:t>
-            </a:r>
-            <a:endParaRPr lang="en-US" sz="1500" dirty="0"/>
-          </a:p>
-        </p:txBody>
-      </p:sp>
-      <p:sp>
-        <p:nvSpPr>
-          <p:cNvPr id="21" name="Azione 3"/>
+              <a:t>I documenti</a:t>
+            </a:r>
+            <a:endParaRPr lang="en-US" sz="1350" dirty="0"/>
+          </a:p>
+          <a:p>
+            <a:pPr indent="0" marL="0">
+              <a:buNone/>
+            </a:pPr>
+            <a:r>
+              <a:rPr lang="en-US" sz="1150" dirty="0">
+                <a:solidFill>
+                  <a:srgbClr val="6B7280"/>
+                </a:solidFill>
+                <a:latin typeface="Arial" pitchFamily="34" charset="0"/>
+                <a:ea typeface="Arial" pitchFamily="34" charset="-122"/>
+                <a:cs typeface="Arial" pitchFamily="34" charset="-120"/>
+              </a:rPr>
+              <a:t>da Drive, tramite il connettore</a:t>
+            </a:r>
+            <a:endParaRPr lang="en-US" sz="1350" dirty="0"/>
+          </a:p>
+        </p:txBody>
+      </p:sp>
+      <p:sp>
+        <p:nvSpPr>
+          <p:cNvPr id="13" name="ENTRA Le email"/>
           <p:cNvSpPr/>
           <p:nvPr/>
         </p:nvSpPr>
         <p:spPr>
           <a:xfrm>
-            <a:off x="685800" y="4572000"/>
-            <a:ext cx="10820095" cy="1188720"/>
+            <a:off x="685800" y="3813048"/>
+            <a:ext cx="3154680" cy="731520"/>
           </a:xfrm>
           <a:prstGeom prst="roundRect">
             <a:avLst>
-              <a:gd name="adj" fmla="val 10769"/>
+              <a:gd name="adj" fmla="val 12500"/>
             </a:avLst>
           </a:prstGeom>
           <a:solidFill>
@@ -3857,82 +3814,18 @@
       </p:sp>
       <p:sp>
         <p:nvSpPr>
-          <p:cNvPr id="22" name="numero 3"/>
+          <p:cNvPr id="14" name="ENTRA icona 2 fondo"/>
           <p:cNvSpPr/>
           <p:nvPr/>
         </p:nvSpPr>
         <p:spPr>
           <a:xfrm>
-            <a:off x="960120" y="4910328"/>
-            <a:ext cx="512064" cy="512064"/>
-          </a:xfrm>
-          <a:prstGeom prst="ellipse">
-            <a:avLst/>
-          </a:prstGeom>
-          <a:solidFill>
-            <a:srgbClr val="1B4D89"/>
-          </a:solidFill>
-          <a:ln w="12700">
-            <a:solidFill>
-              <a:srgbClr val="1B4D89"/>
-            </a:solidFill>
-            <a:prstDash val="solid"/>
-          </a:ln>
-        </p:spPr>
-      </p:sp>
-      <p:sp>
-        <p:nvSpPr>
-          <p:cNvPr id="23" name="numero testo 3"/>
-          <p:cNvSpPr txBox="1"/>
-          <p:nvPr/>
-        </p:nvSpPr>
-        <p:spPr>
-          <a:xfrm>
-            <a:off x="960120" y="4910328"/>
-            <a:ext cx="512064" cy="512064"/>
-          </a:xfrm>
-          <a:prstGeom prst="rect">
-            <a:avLst/>
-          </a:prstGeom>
-          <a:noFill/>
-          <a:ln/>
-        </p:spPr>
-        <p:txBody>
-          <a:bodyPr wrap="square" lIns="0" tIns="0" rIns="0" bIns="0" rtlCol="0" anchor="ctr"/>
-          <a:lstStyle/>
-          <a:p>
-            <a:pPr algn="ctr" indent="0" marL="0">
-              <a:buNone/>
-            </a:pPr>
-            <a:r>
-              <a:rPr lang="en-US" sz="1800" b="1" dirty="0">
-                <a:solidFill>
-                  <a:schemeClr val="bg1"/>
-                </a:solidFill>
-                <a:latin typeface="Arial" pitchFamily="34" charset="0"/>
-                <a:ea typeface="Arial" pitchFamily="34" charset="-122"/>
-                <a:cs typeface="Arial" pitchFamily="34" charset="-120"/>
-              </a:rPr>
-              <a:t>3</a:t>
-            </a:r>
-            <a:endParaRPr lang="en-US" sz="1800" dirty="0"/>
-          </a:p>
-        </p:txBody>
-      </p:sp>
-      <p:sp>
-        <p:nvSpPr>
-          <p:cNvPr id="24" name="Icona azione 3 fondo"/>
-          <p:cNvSpPr/>
-          <p:nvPr/>
-        </p:nvSpPr>
-        <p:spPr>
-          <a:xfrm>
-            <a:off x="1691640" y="4846320"/>
-            <a:ext cx="640080" cy="640080"/>
+            <a:off x="822960" y="3968496"/>
+            <a:ext cx="420624" cy="420624"/>
           </a:xfrm>
           <a:prstGeom prst="roundRect">
             <a:avLst>
-              <a:gd name="adj" fmla="val 20000"/>
+              <a:gd name="adj" fmla="val 22000"/>
             </a:avLst>
           </a:prstGeom>
           <a:solidFill>
@@ -3948,7 +3841,180 @@
       </p:sp>
       <p:pic>
         <p:nvPicPr>
-          <p:cNvPr id="25" name="Icona azione 3" descr="preencoded.png">    </p:cNvPr>
+          <p:cNvPr id="15" name="ENTRA icona 2" descr="preencoded.png">    </p:cNvPr>
+          <p:cNvPicPr>
+            <a:picLocks noChangeAspect="1"/>
+          </p:cNvPicPr>
+          <p:nvPr/>
+        </p:nvPicPr>
+        <p:blipFill>
+          <a:blip r:embed="rId3"/>
+          <a:stretch>
+            <a:fillRect/>
+          </a:stretch>
+        </p:blipFill>
+        <p:spPr>
+          <a:xfrm>
+            <a:off x="923910" y="4069446"/>
+            <a:ext cx="218724" cy="218724"/>
+          </a:xfrm>
+          <a:prstGeom prst="rect">
+            <a:avLst/>
+          </a:prstGeom>
+        </p:spPr>
+      </p:pic>
+      <p:sp>
+        <p:nvSpPr>
+          <p:cNvPr id="16" name="ENTRA testo 2"/>
+          <p:cNvSpPr txBox="1"/>
+          <p:nvPr/>
+        </p:nvSpPr>
+        <p:spPr>
+          <a:xfrm>
+            <a:off x="1371600" y="3813048"/>
+            <a:ext cx="2377440" cy="731520"/>
+          </a:xfrm>
+          <a:prstGeom prst="rect">
+            <a:avLst/>
+          </a:prstGeom>
+          <a:noFill/>
+          <a:ln/>
+        </p:spPr>
+        <p:txBody>
+          <a:bodyPr wrap="square" lIns="0" tIns="0" rIns="0" bIns="0" rtlCol="0" anchor="ctr"/>
+          <a:lstStyle/>
+          <a:p>
+            <a:pPr indent="0" marL="0">
+              <a:buNone/>
+            </a:pPr>
+            <a:r>
+              <a:rPr lang="en-US" sz="1350" b="1" dirty="0">
+                <a:solidFill>
+                  <a:schemeClr val="tx1"/>
+                </a:solidFill>
+                <a:latin typeface="Arial" pitchFamily="34" charset="0"/>
+                <a:ea typeface="Arial" pitchFamily="34" charset="-122"/>
+                <a:cs typeface="Arial" pitchFamily="34" charset="-120"/>
+              </a:rPr>
+              <a:t>Le email</a:t>
+            </a:r>
+            <a:endParaRPr lang="en-US" sz="1350" dirty="0"/>
+          </a:p>
+          <a:p>
+            <a:pPr indent="0" marL="0">
+              <a:buNone/>
+            </a:pPr>
+            <a:r>
+              <a:rPr lang="en-US" sz="1150" dirty="0">
+                <a:solidFill>
+                  <a:srgbClr val="6B7280"/>
+                </a:solidFill>
+                <a:latin typeface="Arial" pitchFamily="34" charset="0"/>
+                <a:ea typeface="Arial" pitchFamily="34" charset="-122"/>
+                <a:cs typeface="Arial" pitchFamily="34" charset="-120"/>
+              </a:rPr>
+              <a:t>dalla posta, tramite il connettore</a:t>
+            </a:r>
+            <a:endParaRPr lang="en-US" sz="1350" dirty="0"/>
+          </a:p>
+        </p:txBody>
+      </p:sp>
+      <p:sp>
+        <p:nvSpPr>
+          <p:cNvPr id="17" name="Colonna ESCE"/>
+          <p:cNvSpPr txBox="1"/>
+          <p:nvPr/>
+        </p:nvSpPr>
+        <p:spPr>
+          <a:xfrm>
+            <a:off x="8366760" y="1783080"/>
+            <a:ext cx="3139135" cy="274320"/>
+          </a:xfrm>
+          <a:prstGeom prst="rect">
+            <a:avLst/>
+          </a:prstGeom>
+          <a:noFill/>
+          <a:ln/>
+        </p:spPr>
+        <p:txBody>
+          <a:bodyPr wrap="square" lIns="0" tIns="0" rIns="0" bIns="0" rtlCol="0" anchor="t"/>
+          <a:lstStyle/>
+          <a:p>
+            <a:pPr indent="0" marL="0">
+              <a:buNone/>
+            </a:pPr>
+            <a:r>
+              <a:rPr lang="en-US" sz="1200" b="1" spc="200" kern="0" dirty="0">
+                <a:solidFill>
+                  <a:schemeClr val="accent1"/>
+                </a:solidFill>
+                <a:latin typeface="Arial" pitchFamily="34" charset="0"/>
+                <a:ea typeface="Arial" pitchFamily="34" charset="-122"/>
+                <a:cs typeface="Arial" pitchFamily="34" charset="-120"/>
+              </a:rPr>
+              <a:t>ESCE</a:t>
+            </a:r>
+            <a:endParaRPr lang="en-US" sz="1200" dirty="0"/>
+          </a:p>
+        </p:txBody>
+      </p:sp>
+      <p:sp>
+        <p:nvSpPr>
+          <p:cNvPr id="18" name="ESCE Il documento"/>
+          <p:cNvSpPr/>
+          <p:nvPr/>
+        </p:nvSpPr>
+        <p:spPr>
+          <a:xfrm>
+            <a:off x="8366760" y="2167128"/>
+            <a:ext cx="3139135" cy="594360"/>
+          </a:xfrm>
+          <a:prstGeom prst="roundRect">
+            <a:avLst>
+              <a:gd name="adj" fmla="val 15385"/>
+            </a:avLst>
+          </a:prstGeom>
+          <a:solidFill>
+            <a:srgbClr val="F6F8FB"/>
+          </a:solidFill>
+          <a:ln w="12700">
+            <a:solidFill>
+              <a:srgbClr val="E4E8EE"/>
+            </a:solidFill>
+            <a:prstDash val="solid"/>
+          </a:ln>
+        </p:spPr>
+      </p:sp>
+      <p:sp>
+        <p:nvSpPr>
+          <p:cNvPr id="19" name="ESCE icona 0 fondo"/>
+          <p:cNvSpPr/>
+          <p:nvPr/>
+        </p:nvSpPr>
+        <p:spPr>
+          <a:xfrm>
+            <a:off x="8503920" y="2253996"/>
+            <a:ext cx="420624" cy="420624"/>
+          </a:xfrm>
+          <a:prstGeom prst="roundRect">
+            <a:avLst>
+              <a:gd name="adj" fmla="val 22000"/>
+            </a:avLst>
+          </a:prstGeom>
+          <a:solidFill>
+            <a:srgbClr val="EAF2FC"/>
+          </a:solidFill>
+          <a:ln w="12700">
+            <a:solidFill>
+              <a:srgbClr val="EAF2FC"/>
+            </a:solidFill>
+            <a:prstDash val="solid"/>
+          </a:ln>
+        </p:spPr>
+      </p:sp>
+      <p:pic>
+        <p:nvPicPr>
+          <p:cNvPr id="20" name="ESCE icona 0" descr="preencoded.png">    </p:cNvPr>
           <p:cNvPicPr>
             <a:picLocks noChangeAspect="1"/>
           </p:cNvPicPr>
@@ -3962,8 +4028,8 @@
         </p:blipFill>
         <p:spPr>
           <a:xfrm>
-            <a:off x="1845259" y="4999939"/>
-            <a:ext cx="332842" cy="332842"/>
+            <a:off x="8604870" y="2354946"/>
+            <a:ext cx="218724" cy="218724"/>
           </a:xfrm>
           <a:prstGeom prst="rect">
             <a:avLst/>
@@ -3972,14 +4038,338 @@
       </p:pic>
       <p:sp>
         <p:nvSpPr>
-          <p:cNvPr id="26" name="Azione titolo 3"/>
+          <p:cNvPr id="21" name="ESCE testo 0"/>
           <p:cNvSpPr txBox="1"/>
           <p:nvPr/>
         </p:nvSpPr>
         <p:spPr>
           <a:xfrm>
-            <a:off x="2560320" y="4754880"/>
-            <a:ext cx="8625535" cy="411480"/>
+            <a:off x="9052560" y="2167128"/>
+            <a:ext cx="2361895" cy="594360"/>
+          </a:xfrm>
+          <a:prstGeom prst="rect">
+            <a:avLst/>
+          </a:prstGeom>
+          <a:noFill/>
+          <a:ln/>
+        </p:spPr>
+        <p:txBody>
+          <a:bodyPr wrap="square" lIns="0" tIns="0" rIns="0" bIns="0" rtlCol="0" anchor="ctr"/>
+          <a:lstStyle/>
+          <a:p>
+            <a:pPr indent="0" marL="0">
+              <a:buNone/>
+            </a:pPr>
+            <a:r>
+              <a:rPr lang="en-US" sz="1350" b="1" dirty="0">
+                <a:solidFill>
+                  <a:schemeClr val="tx1"/>
+                </a:solidFill>
+                <a:latin typeface="Arial" pitchFamily="34" charset="0"/>
+                <a:ea typeface="Arial" pitchFamily="34" charset="-122"/>
+                <a:cs typeface="Arial" pitchFamily="34" charset="-120"/>
+              </a:rPr>
+              <a:t>Il documento</a:t>
+            </a:r>
+            <a:endParaRPr lang="en-US" sz="1350" dirty="0"/>
+          </a:p>
+          <a:p>
+            <a:pPr indent="0" marL="0">
+              <a:buNone/>
+            </a:pPr>
+            <a:r>
+              <a:rPr lang="en-US" sz="1150" dirty="0">
+                <a:solidFill>
+                  <a:srgbClr val="6B7280"/>
+                </a:solidFill>
+                <a:latin typeface="Arial" pitchFamily="34" charset="0"/>
+                <a:ea typeface="Arial" pitchFamily="34" charset="-122"/>
+                <a:cs typeface="Arial" pitchFamily="34" charset="-120"/>
+              </a:rPr>
+              <a:t>nel formato aziendale</a:t>
+            </a:r>
+            <a:endParaRPr lang="en-US" sz="1350" dirty="0"/>
+          </a:p>
+        </p:txBody>
+      </p:sp>
+      <p:sp>
+        <p:nvSpPr>
+          <p:cNvPr id="22" name="ESCE Cosa manca"/>
+          <p:cNvSpPr/>
+          <p:nvPr/>
+        </p:nvSpPr>
+        <p:spPr>
+          <a:xfrm>
+            <a:off x="8366760" y="2852928"/>
+            <a:ext cx="3139135" cy="594360"/>
+          </a:xfrm>
+          <a:prstGeom prst="roundRect">
+            <a:avLst>
+              <a:gd name="adj" fmla="val 15385"/>
+            </a:avLst>
+          </a:prstGeom>
+          <a:solidFill>
+            <a:srgbClr val="F6F8FB"/>
+          </a:solidFill>
+          <a:ln w="12700">
+            <a:solidFill>
+              <a:srgbClr val="E4E8EE"/>
+            </a:solidFill>
+            <a:prstDash val="solid"/>
+          </a:ln>
+        </p:spPr>
+      </p:sp>
+      <p:sp>
+        <p:nvSpPr>
+          <p:cNvPr id="23" name="ESCE icona 1 fondo"/>
+          <p:cNvSpPr/>
+          <p:nvPr/>
+        </p:nvSpPr>
+        <p:spPr>
+          <a:xfrm>
+            <a:off x="8503920" y="2939796"/>
+            <a:ext cx="420624" cy="420624"/>
+          </a:xfrm>
+          <a:prstGeom prst="roundRect">
+            <a:avLst>
+              <a:gd name="adj" fmla="val 22000"/>
+            </a:avLst>
+          </a:prstGeom>
+          <a:solidFill>
+            <a:srgbClr val="EAF2FC"/>
+          </a:solidFill>
+          <a:ln w="12700">
+            <a:solidFill>
+              <a:srgbClr val="EAF2FC"/>
+            </a:solidFill>
+            <a:prstDash val="solid"/>
+          </a:ln>
+        </p:spPr>
+      </p:sp>
+      <p:pic>
+        <p:nvPicPr>
+          <p:cNvPr id="24" name="ESCE icona 1" descr="preencoded.png">    </p:cNvPr>
+          <p:cNvPicPr>
+            <a:picLocks noChangeAspect="1"/>
+          </p:cNvPicPr>
+          <p:nvPr/>
+        </p:nvPicPr>
+        <p:blipFill>
+          <a:blip r:embed="rId5"/>
+          <a:stretch>
+            <a:fillRect/>
+          </a:stretch>
+        </p:blipFill>
+        <p:spPr>
+          <a:xfrm>
+            <a:off x="8604870" y="3040746"/>
+            <a:ext cx="218724" cy="218724"/>
+          </a:xfrm>
+          <a:prstGeom prst="rect">
+            <a:avLst/>
+          </a:prstGeom>
+        </p:spPr>
+      </p:pic>
+      <p:sp>
+        <p:nvSpPr>
+          <p:cNvPr id="25" name="ESCE testo 1"/>
+          <p:cNvSpPr txBox="1"/>
+          <p:nvPr/>
+        </p:nvSpPr>
+        <p:spPr>
+          <a:xfrm>
+            <a:off x="9052560" y="2852928"/>
+            <a:ext cx="2361895" cy="594360"/>
+          </a:xfrm>
+          <a:prstGeom prst="rect">
+            <a:avLst/>
+          </a:prstGeom>
+          <a:noFill/>
+          <a:ln/>
+        </p:spPr>
+        <p:txBody>
+          <a:bodyPr wrap="square" lIns="0" tIns="0" rIns="0" bIns="0" rtlCol="0" anchor="ctr"/>
+          <a:lstStyle/>
+          <a:p>
+            <a:pPr indent="0" marL="0">
+              <a:buNone/>
+            </a:pPr>
+            <a:r>
+              <a:rPr lang="en-US" sz="1350" b="1" dirty="0">
+                <a:solidFill>
+                  <a:schemeClr val="tx1"/>
+                </a:solidFill>
+                <a:latin typeface="Arial" pitchFamily="34" charset="0"/>
+                <a:ea typeface="Arial" pitchFamily="34" charset="-122"/>
+                <a:cs typeface="Arial" pitchFamily="34" charset="-120"/>
+              </a:rPr>
+              <a:t>Cosa manca</a:t>
+            </a:r>
+            <a:endParaRPr lang="en-US" sz="1350" dirty="0"/>
+          </a:p>
+          <a:p>
+            <a:pPr indent="0" marL="0">
+              <a:buNone/>
+            </a:pPr>
+            <a:r>
+              <a:rPr lang="en-US" sz="1150" dirty="0">
+                <a:solidFill>
+                  <a:srgbClr val="6B7280"/>
+                </a:solidFill>
+                <a:latin typeface="Arial" pitchFamily="34" charset="0"/>
+                <a:ea typeface="Arial" pitchFamily="34" charset="-122"/>
+                <a:cs typeface="Arial" pitchFamily="34" charset="-120"/>
+              </a:rPr>
+              <a:t>dati da verificare, con le fonti</a:t>
+            </a:r>
+            <a:endParaRPr lang="en-US" sz="1350" dirty="0"/>
+          </a:p>
+        </p:txBody>
+      </p:sp>
+      <p:sp>
+        <p:nvSpPr>
+          <p:cNvPr id="26" name="ESCE Salvato"/>
+          <p:cNvSpPr/>
+          <p:nvPr/>
+        </p:nvSpPr>
+        <p:spPr>
+          <a:xfrm>
+            <a:off x="8366760" y="3538728"/>
+            <a:ext cx="3139135" cy="594360"/>
+          </a:xfrm>
+          <a:prstGeom prst="roundRect">
+            <a:avLst>
+              <a:gd name="adj" fmla="val 15385"/>
+            </a:avLst>
+          </a:prstGeom>
+          <a:solidFill>
+            <a:srgbClr val="F6F8FB"/>
+          </a:solidFill>
+          <a:ln w="12700">
+            <a:solidFill>
+              <a:srgbClr val="E4E8EE"/>
+            </a:solidFill>
+            <a:prstDash val="solid"/>
+          </a:ln>
+        </p:spPr>
+      </p:sp>
+      <p:sp>
+        <p:nvSpPr>
+          <p:cNvPr id="27" name="ESCE icona 2 fondo"/>
+          <p:cNvSpPr/>
+          <p:nvPr/>
+        </p:nvSpPr>
+        <p:spPr>
+          <a:xfrm>
+            <a:off x="8503920" y="3625596"/>
+            <a:ext cx="420624" cy="420624"/>
+          </a:xfrm>
+          <a:prstGeom prst="roundRect">
+            <a:avLst>
+              <a:gd name="adj" fmla="val 22000"/>
+            </a:avLst>
+          </a:prstGeom>
+          <a:solidFill>
+            <a:srgbClr val="EAF2FC"/>
+          </a:solidFill>
+          <a:ln w="12700">
+            <a:solidFill>
+              <a:srgbClr val="EAF2FC"/>
+            </a:solidFill>
+            <a:prstDash val="solid"/>
+          </a:ln>
+        </p:spPr>
+      </p:sp>
+      <p:pic>
+        <p:nvPicPr>
+          <p:cNvPr id="28" name="ESCE icona 2" descr="preencoded.png">    </p:cNvPr>
+          <p:cNvPicPr>
+            <a:picLocks noChangeAspect="1"/>
+          </p:cNvPicPr>
+          <p:nvPr/>
+        </p:nvPicPr>
+        <p:blipFill>
+          <a:blip r:embed="rId6"/>
+          <a:stretch>
+            <a:fillRect/>
+          </a:stretch>
+        </p:blipFill>
+        <p:spPr>
+          <a:xfrm>
+            <a:off x="8604870" y="3726546"/>
+            <a:ext cx="218724" cy="218724"/>
+          </a:xfrm>
+          <a:prstGeom prst="rect">
+            <a:avLst/>
+          </a:prstGeom>
+        </p:spPr>
+      </p:pic>
+      <p:sp>
+        <p:nvSpPr>
+          <p:cNvPr id="29" name="ESCE testo 2"/>
+          <p:cNvSpPr txBox="1"/>
+          <p:nvPr/>
+        </p:nvSpPr>
+        <p:spPr>
+          <a:xfrm>
+            <a:off x="9052560" y="3538728"/>
+            <a:ext cx="2361895" cy="594360"/>
+          </a:xfrm>
+          <a:prstGeom prst="rect">
+            <a:avLst/>
+          </a:prstGeom>
+          <a:noFill/>
+          <a:ln/>
+        </p:spPr>
+        <p:txBody>
+          <a:bodyPr wrap="square" lIns="0" tIns="0" rIns="0" bIns="0" rtlCol="0" anchor="ctr"/>
+          <a:lstStyle/>
+          <a:p>
+            <a:pPr indent="0" marL="0">
+              <a:buNone/>
+            </a:pPr>
+            <a:r>
+              <a:rPr lang="en-US" sz="1350" b="1" dirty="0">
+                <a:solidFill>
+                  <a:schemeClr val="tx1"/>
+                </a:solidFill>
+                <a:latin typeface="Arial" pitchFamily="34" charset="0"/>
+                <a:ea typeface="Arial" pitchFamily="34" charset="-122"/>
+                <a:cs typeface="Arial" pitchFamily="34" charset="-120"/>
+              </a:rPr>
+              <a:t>Salvato</a:t>
+            </a:r>
+            <a:endParaRPr lang="en-US" sz="1350" dirty="0"/>
+          </a:p>
+          <a:p>
+            <a:pPr indent="0" marL="0">
+              <a:buNone/>
+            </a:pPr>
+            <a:r>
+              <a:rPr lang="en-US" sz="1150" dirty="0">
+                <a:solidFill>
+                  <a:srgbClr val="6B7280"/>
+                </a:solidFill>
+                <a:latin typeface="Arial" pitchFamily="34" charset="0"/>
+                <a:ea typeface="Arial" pitchFamily="34" charset="-122"/>
+                <a:cs typeface="Arial" pitchFamily="34" charset="-120"/>
+              </a:rPr>
+              <a:t>nella cartella giusta</a:t>
+            </a:r>
+            <a:endParaRPr lang="en-US" sz="1350" dirty="0"/>
+          </a:p>
+        </p:txBody>
+      </p:sp>
+      <p:sp>
+        <p:nvSpPr>
+          <p:cNvPr id="30" name="Colonna LAVORA"/>
+          <p:cNvSpPr txBox="1"/>
+          <p:nvPr/>
+        </p:nvSpPr>
+        <p:spPr>
+          <a:xfrm>
+            <a:off x="4389120" y="1783080"/>
+            <a:ext cx="3429000" cy="274320"/>
           </a:xfrm>
           <a:prstGeom prst="rect">
             <a:avLst/>
@@ -3995,30 +4385,174 @@
               <a:buNone/>
             </a:pPr>
             <a:r>
-              <a:rPr lang="en-US" sz="2000" b="1" dirty="0">
-                <a:solidFill>
-                  <a:schemeClr val="tx1"/>
-                </a:solidFill>
-                <a:latin typeface="Arial" pitchFamily="34" charset="0"/>
-                <a:ea typeface="Arial" pitchFamily="34" charset="-122"/>
-                <a:cs typeface="Arial" pitchFamily="34" charset="-120"/>
-              </a:rPr>
-              <a:t>Prova un prompt pronto per il tuo ruolo</a:t>
-            </a:r>
-            <a:endParaRPr lang="en-US" sz="2000" dirty="0"/>
-          </a:p>
-        </p:txBody>
-      </p:sp>
-      <p:sp>
-        <p:nvSpPr>
-          <p:cNvPr id="27" name="Azione testo 3"/>
+              <a:rPr lang="en-US" sz="1200" b="1" spc="200" kern="0" dirty="0">
+                <a:solidFill>
+                  <a:schemeClr val="accent1"/>
+                </a:solidFill>
+                <a:latin typeface="Arial" pitchFamily="34" charset="0"/>
+                <a:ea typeface="Arial" pitchFamily="34" charset="-122"/>
+                <a:cs typeface="Arial" pitchFamily="34" charset="-120"/>
+              </a:rPr>
+              <a:t>LAVORA</a:t>
+            </a:r>
+            <a:endParaRPr lang="en-US" sz="1200" dirty="0"/>
+          </a:p>
+        </p:txBody>
+      </p:sp>
+      <p:sp>
+        <p:nvSpPr>
+          <p:cNvPr id="31" name="Motore"/>
+          <p:cNvSpPr/>
+          <p:nvPr/>
+        </p:nvSpPr>
+        <p:spPr>
+          <a:xfrm>
+            <a:off x="4389120" y="2167128"/>
+            <a:ext cx="3429000" cy="4023360"/>
+          </a:xfrm>
+          <a:prstGeom prst="roundRect">
+            <a:avLst>
+              <a:gd name="adj" fmla="val 3733"/>
+            </a:avLst>
+          </a:prstGeom>
+          <a:solidFill>
+            <a:srgbClr val="EAF2FC"/>
+          </a:solidFill>
+          <a:ln w="12700">
+            <a:solidFill>
+              <a:srgbClr val="1B4D89"/>
+            </a:solidFill>
+            <a:prstDash val="solid"/>
+          </a:ln>
+        </p:spPr>
+      </p:sp>
+      <p:sp>
+        <p:nvSpPr>
+          <p:cNvPr id="32" name="Motore icona fondo"/>
+          <p:cNvSpPr/>
+          <p:nvPr/>
+        </p:nvSpPr>
+        <p:spPr>
+          <a:xfrm>
+            <a:off x="4663440" y="2423160"/>
+            <a:ext cx="548640" cy="548640"/>
+          </a:xfrm>
+          <a:prstGeom prst="roundRect">
+            <a:avLst>
+              <a:gd name="adj" fmla="val 22000"/>
+            </a:avLst>
+          </a:prstGeom>
+          <a:solidFill>
+            <a:srgbClr val="FFFFFF"/>
+          </a:solidFill>
+          <a:ln w="12700">
+            <a:solidFill>
+              <a:srgbClr val="FFFFFF"/>
+            </a:solidFill>
+            <a:prstDash val="solid"/>
+          </a:ln>
+        </p:spPr>
+      </p:sp>
+      <p:pic>
+        <p:nvPicPr>
+          <p:cNvPr id="33" name="Motore icona" descr="preencoded.png">    </p:cNvPr>
+          <p:cNvPicPr>
+            <a:picLocks noChangeAspect="1"/>
+          </p:cNvPicPr>
+          <p:nvPr/>
+        </p:nvPicPr>
+        <p:blipFill>
+          <a:blip r:embed="rId7"/>
+          <a:stretch>
+            <a:fillRect/>
+          </a:stretch>
+        </p:blipFill>
+        <p:spPr>
+          <a:xfrm>
+            <a:off x="4795114" y="2554834"/>
+            <a:ext cx="285293" cy="285293"/>
+          </a:xfrm>
+          <a:prstGeom prst="rect">
+            <a:avLst/>
+          </a:prstGeom>
+        </p:spPr>
+      </p:pic>
+      <p:sp>
+        <p:nvSpPr>
+          <p:cNvPr id="34" name="Motore nome"/>
           <p:cNvSpPr txBox="1"/>
           <p:nvPr/>
         </p:nvSpPr>
         <p:spPr>
           <a:xfrm>
-            <a:off x="2560320" y="5193792"/>
-            <a:ext cx="8625535" cy="457200"/>
+            <a:off x="5349240" y="2423160"/>
+            <a:ext cx="2331720" cy="548640"/>
+          </a:xfrm>
+          <a:prstGeom prst="rect">
+            <a:avLst/>
+          </a:prstGeom>
+          <a:noFill/>
+          <a:ln/>
+        </p:spPr>
+        <p:txBody>
+          <a:bodyPr wrap="square" lIns="0" tIns="0" rIns="0" bIns="0" rtlCol="0" anchor="ctr"/>
+          <a:lstStyle/>
+          <a:p>
+            <a:pPr indent="0" marL="0">
+              <a:buNone/>
+            </a:pPr>
+            <a:r>
+              <a:rPr lang="en-US" sz="1900" b="1" dirty="0">
+                <a:solidFill>
+                  <a:schemeClr val="accent1"/>
+                </a:solidFill>
+                <a:latin typeface="Georgia" pitchFamily="34" charset="0"/>
+                <a:ea typeface="Georgia" pitchFamily="34" charset="-122"/>
+                <a:cs typeface="Georgia" pitchFamily="34" charset="-120"/>
+              </a:rPr>
+              <a:t>Claude</a:t>
+            </a:r>
+            <a:endParaRPr lang="en-US" sz="1900" dirty="0"/>
+          </a:p>
+        </p:txBody>
+      </p:sp>
+      <p:sp>
+        <p:nvSpPr>
+          <p:cNvPr id="35" name="Blocco Sceglie la skill"/>
+          <p:cNvSpPr/>
+          <p:nvPr/>
+        </p:nvSpPr>
+        <p:spPr>
+          <a:xfrm>
+            <a:off x="4617720" y="3172968"/>
+            <a:ext cx="2971800" cy="960628"/>
+          </a:xfrm>
+          <a:prstGeom prst="roundRect">
+            <a:avLst>
+              <a:gd name="adj" fmla="val 9519"/>
+            </a:avLst>
+          </a:prstGeom>
+          <a:solidFill>
+            <a:srgbClr val="FFFFFF"/>
+          </a:solidFill>
+          <a:ln w="12700">
+            <a:solidFill>
+              <a:srgbClr val="FFFFFF"/>
+            </a:solidFill>
+            <a:prstDash val="solid"/>
+          </a:ln>
+        </p:spPr>
+      </p:sp>
+      <p:sp>
+        <p:nvSpPr>
+          <p:cNvPr id="36" name="Blocco testo Sceglie la skill"/>
+          <p:cNvSpPr txBox="1"/>
+          <p:nvPr/>
+        </p:nvSpPr>
+        <p:spPr>
+          <a:xfrm>
+            <a:off x="4800600" y="3264408"/>
+            <a:ext cx="2606040" cy="823468"/>
           </a:xfrm>
           <a:prstGeom prst="rect">
             <a:avLst/>
@@ -4034,7 +4568,24 @@
               <a:buNone/>
             </a:pPr>
             <a:r>
-              <a:rPr lang="en-US" sz="1500" dirty="0">
+              <a:rPr lang="en-US" sz="1400" b="1" dirty="0">
+                <a:solidFill>
+                  <a:srgbClr val="1B4D89"/>
+                </a:solidFill>
+                <a:latin typeface="Arial" pitchFamily="34" charset="0"/>
+                <a:ea typeface="Arial" pitchFamily="34" charset="-122"/>
+                <a:cs typeface="Arial" pitchFamily="34" charset="-120"/>
+              </a:rPr>
+              <a:t>Sceglie la skill</a:t>
+            </a:r>
+            <a:endParaRPr lang="en-US" sz="1400" dirty="0"/>
+          </a:p>
+          <a:p>
+            <a:pPr indent="0" marL="0">
+              <a:buNone/>
+            </a:pPr>
+            <a:r>
+              <a:rPr lang="en-US" sz="1300" dirty="0">
                 <a:solidFill>
                   <a:srgbClr val="374151"/>
                 </a:solidFill>
@@ -4042,12 +4593,182 @@
                 <a:ea typeface="Arial" pitchFamily="34" charset="-122"/>
                 <a:cs typeface="Arial" pitchFamily="34" charset="-120"/>
               </a:rPr>
-              <a:t>Capitolo 9: scegli il tuo ruolo, copia un prompt e provalo su un caso vero, senza dati riservati.</a:t>
-            </a:r>
-            <a:endParaRPr lang="en-US" sz="1500" dirty="0"/>
-          </a:p>
-        </p:txBody>
-      </p:sp>
+              <a:t>e segue i passi, i modelli e i controlli scritti dentro.</a:t>
+            </a:r>
+            <a:endParaRPr lang="en-US" sz="1400" dirty="0"/>
+          </a:p>
+        </p:txBody>
+      </p:sp>
+      <p:sp>
+        <p:nvSpPr>
+          <p:cNvPr id="37" name="Blocco Usa i connettori"/>
+          <p:cNvSpPr/>
+          <p:nvPr/>
+        </p:nvSpPr>
+        <p:spPr>
+          <a:xfrm>
+            <a:off x="4617720" y="4270756"/>
+            <a:ext cx="2971800" cy="960628"/>
+          </a:xfrm>
+          <a:prstGeom prst="roundRect">
+            <a:avLst>
+              <a:gd name="adj" fmla="val 9519"/>
+            </a:avLst>
+          </a:prstGeom>
+          <a:solidFill>
+            <a:srgbClr val="FFFFFF"/>
+          </a:solidFill>
+          <a:ln w="12700">
+            <a:solidFill>
+              <a:srgbClr val="FFFFFF"/>
+            </a:solidFill>
+            <a:prstDash val="solid"/>
+          </a:ln>
+        </p:spPr>
+      </p:sp>
+      <p:sp>
+        <p:nvSpPr>
+          <p:cNvPr id="38" name="Blocco testo Usa i connettori"/>
+          <p:cNvSpPr txBox="1"/>
+          <p:nvPr/>
+        </p:nvSpPr>
+        <p:spPr>
+          <a:xfrm>
+            <a:off x="4800600" y="4362196"/>
+            <a:ext cx="2606040" cy="823468"/>
+          </a:xfrm>
+          <a:prstGeom prst="rect">
+            <a:avLst/>
+          </a:prstGeom>
+          <a:noFill/>
+          <a:ln/>
+        </p:spPr>
+        <p:txBody>
+          <a:bodyPr wrap="square" lIns="0" tIns="0" rIns="0" bIns="0" rtlCol="0" anchor="t"/>
+          <a:lstStyle/>
+          <a:p>
+            <a:pPr indent="0" marL="0">
+              <a:buNone/>
+            </a:pPr>
+            <a:r>
+              <a:rPr lang="en-US" sz="1400" b="1" dirty="0">
+                <a:solidFill>
+                  <a:srgbClr val="1B4D89"/>
+                </a:solidFill>
+                <a:latin typeface="Arial" pitchFamily="34" charset="0"/>
+                <a:ea typeface="Arial" pitchFamily="34" charset="-122"/>
+                <a:cs typeface="Arial" pitchFamily="34" charset="-120"/>
+              </a:rPr>
+              <a:t>Usa i connettori</a:t>
+            </a:r>
+            <a:endParaRPr lang="en-US" sz="1400" dirty="0"/>
+          </a:p>
+          <a:p>
+            <a:pPr indent="0" marL="0">
+              <a:buNone/>
+            </a:pPr>
+            <a:r>
+              <a:rPr lang="en-US" sz="1300" dirty="0">
+                <a:solidFill>
+                  <a:srgbClr val="374151"/>
+                </a:solidFill>
+                <a:latin typeface="Arial" pitchFamily="34" charset="0"/>
+                <a:ea typeface="Arial" pitchFamily="34" charset="-122"/>
+                <a:cs typeface="Arial" pitchFamily="34" charset="-120"/>
+              </a:rPr>
+              <a:t>legge e salva solo dove ha accesso.</a:t>
+            </a:r>
+            <a:endParaRPr lang="en-US" sz="1400" dirty="0"/>
+          </a:p>
+        </p:txBody>
+      </p:sp>
+      <p:sp>
+        <p:nvSpPr>
+          <p:cNvPr id="39" name="Motore nota"/>
+          <p:cNvSpPr txBox="1"/>
+          <p:nvPr/>
+        </p:nvSpPr>
+        <p:spPr>
+          <a:xfrm>
+            <a:off x="4663440" y="5504688"/>
+            <a:ext cx="2880360" cy="594360"/>
+          </a:xfrm>
+          <a:prstGeom prst="rect">
+            <a:avLst/>
+          </a:prstGeom>
+          <a:noFill/>
+          <a:ln/>
+        </p:spPr>
+        <p:txBody>
+          <a:bodyPr wrap="square" lIns="0" tIns="0" rIns="0" bIns="0" rtlCol="0" anchor="b"/>
+          <a:lstStyle/>
+          <a:p>
+            <a:pPr indent="0" marL="0">
+              <a:buNone/>
+            </a:pPr>
+            <a:r>
+              <a:rPr lang="en-US" sz="1200" i="1" dirty="0">
+                <a:solidFill>
+                  <a:srgbClr val="1B4D89"/>
+                </a:solidFill>
+                <a:latin typeface="Arial" pitchFamily="34" charset="0"/>
+                <a:ea typeface="Arial" pitchFamily="34" charset="-122"/>
+                <a:cs typeface="Arial" pitchFamily="34" charset="-120"/>
+              </a:rPr>
+              <a:t>Il risultato lo ricontrolli tu.</a:t>
+            </a:r>
+            <a:endParaRPr lang="en-US" sz="1200" dirty="0"/>
+          </a:p>
+        </p:txBody>
+      </p:sp>
+      <p:pic>
+        <p:nvPicPr>
+          <p:cNvPr id="40" name="Freccia flusso" descr="preencoded.png">    </p:cNvPr>
+          <p:cNvPicPr>
+            <a:picLocks noChangeAspect="1"/>
+          </p:cNvPicPr>
+          <p:nvPr/>
+        </p:nvPicPr>
+        <p:blipFill>
+          <a:blip r:embed="rId8"/>
+          <a:stretch>
+            <a:fillRect/>
+          </a:stretch>
+        </p:blipFill>
+        <p:spPr>
+          <a:xfrm>
+            <a:off x="3913632" y="3977640"/>
+            <a:ext cx="402336" cy="402336"/>
+          </a:xfrm>
+          <a:prstGeom prst="rect">
+            <a:avLst/>
+          </a:prstGeom>
+        </p:spPr>
+      </p:pic>
+      <p:pic>
+        <p:nvPicPr>
+          <p:cNvPr id="41" name="Freccia flusso" descr="preencoded.png">    </p:cNvPr>
+          <p:cNvPicPr>
+            <a:picLocks noChangeAspect="1"/>
+          </p:cNvPicPr>
+          <p:nvPr/>
+        </p:nvPicPr>
+        <p:blipFill>
+          <a:blip r:embed="rId9"/>
+          <a:stretch>
+            <a:fillRect/>
+          </a:stretch>
+        </p:blipFill>
+        <p:spPr>
+          <a:xfrm>
+            <a:off x="7891272" y="3977640"/>
+            <a:ext cx="402336" cy="402336"/>
+          </a:xfrm>
+          <a:prstGeom prst="rect">
+            <a:avLst/>
+          </a:prstGeom>
+        </p:spPr>
+      </p:pic>
       <p:sp>
         <p:nvSpPr>
           <p:cNvPr id="25" name="Slide Number Placeholder 0"/>
@@ -4156,7 +4877,7 @@
                 <a:ea typeface="Arial" pitchFamily="34" charset="-122"/>
                 <a:cs typeface="Arial" pitchFamily="34" charset="-120"/>
               </a:rPr>
-              <a:t>DOPO L’INCONTRO</a:t>
+              <a:t>IL MATERIALE</a:t>
             </a:r>
             <a:endParaRPr lang="en-US" sz="1200" dirty="0"/>
           </a:p>
@@ -4197,7 +4918,7 @@
                 <a:ea typeface="Georgia" pitchFamily="34" charset="-122"/>
                 <a:cs typeface="Georgia" pitchFamily="34" charset="-120"/>
               </a:rPr>
-              <a:t>Il resto lo leggi con calma</a:t>
+              <a:t>Cosa trovi nel materiale</a:t>
             </a:r>
             <a:endParaRPr lang="en-US" sz="3400" dirty="0"/>
           </a:p>
@@ -4205,18 +4926,18 @@
       </p:sp>
       <p:sp>
         <p:nvSpPr>
-          <p:cNvPr id="4" name="Come si usa"/>
+          <p:cNvPr id="4" name="Sezione Capire"/>
           <p:cNvSpPr/>
           <p:nvPr/>
         </p:nvSpPr>
         <p:spPr>
           <a:xfrm>
             <a:off x="685800" y="1828800"/>
-            <a:ext cx="4983480" cy="4206240"/>
+            <a:ext cx="10820095" cy="714086"/>
           </a:xfrm>
           <a:prstGeom prst="roundRect">
             <a:avLst>
-              <a:gd name="adj" fmla="val 3043"/>
+              <a:gd name="adj" fmla="val 15366"/>
             </a:avLst>
           </a:prstGeom>
           <a:solidFill>
@@ -4232,458 +4953,189 @@
       </p:sp>
       <p:sp>
         <p:nvSpPr>
-          <p:cNvPr id="5" name="Come si usa titolo"/>
+          <p:cNvPr id="5" name="Nome Capire"/>
           <p:cNvSpPr txBox="1"/>
           <p:nvPr/>
         </p:nvSpPr>
         <p:spPr>
           <a:xfrm>
-            <a:off x="1005840" y="2103120"/>
-            <a:ext cx="4343400" cy="274320"/>
-          </a:xfrm>
-          <a:prstGeom prst="rect">
-            <a:avLst/>
-          </a:prstGeom>
-          <a:noFill/>
-          <a:ln/>
-        </p:spPr>
-        <p:txBody>
-          <a:bodyPr wrap="square" lIns="0" tIns="0" rIns="0" bIns="0" rtlCol="0" anchor="t"/>
-          <a:lstStyle/>
-          <a:p>
-            <a:pPr indent="0" marL="0">
-              <a:buNone/>
-            </a:pPr>
-            <a:r>
-              <a:rPr lang="en-US" sz="1200" b="1" spc="200" kern="0" dirty="0">
-                <a:solidFill>
-                  <a:schemeClr val="accent1"/>
-                </a:solidFill>
-                <a:latin typeface="Arial" pitchFamily="34" charset="0"/>
-                <a:ea typeface="Arial" pitchFamily="34" charset="-122"/>
-                <a:cs typeface="Arial" pitchFamily="34" charset="-120"/>
-              </a:rPr>
-              <a:t>COME SI USA IL MATERIALE</a:t>
-            </a:r>
-            <a:endParaRPr lang="en-US" sz="1200" dirty="0"/>
-          </a:p>
-        </p:txBody>
-      </p:sp>
-      <p:sp>
-        <p:nvSpPr>
-          <p:cNvPr id="6" name="Uso 0 fondo"/>
+            <a:off x="941832" y="1828800"/>
+            <a:ext cx="2788920" cy="714086"/>
+          </a:xfrm>
+          <a:prstGeom prst="rect">
+            <a:avLst/>
+          </a:prstGeom>
+          <a:noFill/>
+          <a:ln/>
+        </p:spPr>
+        <p:txBody>
+          <a:bodyPr wrap="square" lIns="0" tIns="0" rIns="0" bIns="0" rtlCol="0" anchor="ctr"/>
+          <a:lstStyle/>
+          <a:p>
+            <a:pPr indent="0" marL="0">
+              <a:buNone/>
+            </a:pPr>
+            <a:r>
+              <a:rPr lang="en-US" sz="1100" b="1" spc="200" kern="0" dirty="0">
+                <a:solidFill>
+                  <a:srgbClr val="1B4D89"/>
+                </a:solidFill>
+                <a:latin typeface="Arial" pitchFamily="34" charset="0"/>
+                <a:ea typeface="Arial" pitchFamily="34" charset="-122"/>
+                <a:cs typeface="Arial" pitchFamily="34" charset="-120"/>
+              </a:rPr>
+              <a:t>SEZIONE A</a:t>
+            </a:r>
+            <a:endParaRPr lang="en-US" sz="1500" dirty="0"/>
+          </a:p>
+          <a:p>
+            <a:pPr indent="0" marL="0">
+              <a:buNone/>
+            </a:pPr>
+            <a:r>
+              <a:rPr lang="en-US" sz="1600" b="1" dirty="0">
+                <a:solidFill>
+                  <a:schemeClr val="tx1"/>
+                </a:solidFill>
+                <a:latin typeface="Arial" pitchFamily="34" charset="0"/>
+                <a:ea typeface="Arial" pitchFamily="34" charset="-122"/>
+                <a:cs typeface="Arial" pitchFamily="34" charset="-120"/>
+              </a:rPr>
+              <a:t>Capire</a:t>
+            </a:r>
+            <a:endParaRPr lang="en-US" sz="1500" dirty="0"/>
+          </a:p>
+        </p:txBody>
+      </p:sp>
+      <p:sp>
+        <p:nvSpPr>
+          <p:cNvPr id="6" name="Capitoli Capire"/>
+          <p:cNvSpPr txBox="1"/>
+          <p:nvPr/>
+        </p:nvSpPr>
+        <p:spPr>
+          <a:xfrm>
+            <a:off x="3931920" y="1828800"/>
+            <a:ext cx="7299655" cy="714086"/>
+          </a:xfrm>
+          <a:prstGeom prst="rect">
+            <a:avLst/>
+          </a:prstGeom>
+          <a:noFill/>
+          <a:ln/>
+        </p:spPr>
+        <p:txBody>
+          <a:bodyPr wrap="square" lIns="0" tIns="0" rIns="0" bIns="0" rtlCol="0" anchor="ctr"/>
+          <a:lstStyle/>
+          <a:p>
+            <a:pPr indent="0" marL="0">
+              <a:buNone/>
+            </a:pPr>
+            <a:r>
+              <a:rPr lang="en-US" sz="1400" b="1" dirty="0">
+                <a:solidFill>
+                  <a:srgbClr val="1B4D89"/>
+                </a:solidFill>
+                <a:latin typeface="Arial" pitchFamily="34" charset="0"/>
+                <a:ea typeface="Arial" pitchFamily="34" charset="-122"/>
+                <a:cs typeface="Arial" pitchFamily="34" charset="-120"/>
+              </a:rPr>
+              <a:t>1  </a:t>
+            </a:r>
+            <a:pPr indent="0" marL="0">
+              <a:buNone/>
+            </a:pPr>
+            <a:r>
+              <a:rPr lang="en-US" sz="1400" dirty="0">
+                <a:solidFill>
+                  <a:srgbClr val="374151"/>
+                </a:solidFill>
+                <a:latin typeface="Arial" pitchFamily="34" charset="0"/>
+                <a:ea typeface="Arial" pitchFamily="34" charset="-122"/>
+                <a:cs typeface="Arial" pitchFamily="34" charset="-120"/>
+              </a:rPr>
+              <a:t>Cos’è l’AI e cosa non è     </a:t>
+            </a:r>
+            <a:pPr indent="0" marL="0">
+              <a:buNone/>
+            </a:pPr>
+            <a:r>
+              <a:rPr lang="en-US" sz="1400" b="1" dirty="0">
+                <a:solidFill>
+                  <a:srgbClr val="1B4D89"/>
+                </a:solidFill>
+                <a:latin typeface="Arial" pitchFamily="34" charset="0"/>
+                <a:ea typeface="Arial" pitchFamily="34" charset="-122"/>
+                <a:cs typeface="Arial" pitchFamily="34" charset="-120"/>
+              </a:rPr>
+              <a:t>2  </a:t>
+            </a:r>
+            <a:pPr indent="0" marL="0">
+              <a:buNone/>
+            </a:pPr>
+            <a:r>
+              <a:rPr lang="en-US" sz="1400" dirty="0">
+                <a:solidFill>
+                  <a:srgbClr val="374151"/>
+                </a:solidFill>
+                <a:latin typeface="Arial" pitchFamily="34" charset="0"/>
+                <a:ea typeface="Arial" pitchFamily="34" charset="-122"/>
+                <a:cs typeface="Arial" pitchFamily="34" charset="-120"/>
+              </a:rPr>
+              <a:t>Come funziona e perché sbaglia     </a:t>
+            </a:r>
+            <a:pPr indent="0" marL="0">
+              <a:buNone/>
+            </a:pPr>
+            <a:r>
+              <a:rPr lang="en-US" sz="1400" b="1" dirty="0">
+                <a:solidFill>
+                  <a:srgbClr val="1B4D89"/>
+                </a:solidFill>
+                <a:latin typeface="Arial" pitchFamily="34" charset="0"/>
+                <a:ea typeface="Arial" pitchFamily="34" charset="-122"/>
+                <a:cs typeface="Arial" pitchFamily="34" charset="-120"/>
+              </a:rPr>
+              <a:t>3  </a:t>
+            </a:r>
+            <a:pPr indent="0" marL="0">
+              <a:buNone/>
+            </a:pPr>
+            <a:r>
+              <a:rPr lang="en-US" sz="1400" dirty="0">
+                <a:solidFill>
+                  <a:srgbClr val="374151"/>
+                </a:solidFill>
+                <a:latin typeface="Arial" pitchFamily="34" charset="0"/>
+                <a:ea typeface="Arial" pitchFamily="34" charset="-122"/>
+                <a:cs typeface="Arial" pitchFamily="34" charset="-120"/>
+              </a:rPr>
+              <a:t>Gli strumenti</a:t>
+            </a:r>
+            <a:endParaRPr lang="en-US" sz="1400" dirty="0"/>
+          </a:p>
+        </p:txBody>
+      </p:sp>
+      <p:sp>
+        <p:nvSpPr>
+          <p:cNvPr id="7" name="Sezione Usare in sicurezza"/>
           <p:cNvSpPr/>
           <p:nvPr/>
         </p:nvSpPr>
         <p:spPr>
           <a:xfrm>
-            <a:off x="1005840" y="2606040"/>
-            <a:ext cx="502920" cy="502920"/>
+            <a:off x="685800" y="2670902"/>
+            <a:ext cx="10820095" cy="714086"/>
           </a:xfrm>
           <a:prstGeom prst="roundRect">
             <a:avLst>
-              <a:gd name="adj" fmla="val 22000"/>
+              <a:gd name="adj" fmla="val 15366"/>
             </a:avLst>
           </a:prstGeom>
           <a:solidFill>
-            <a:srgbClr val="FFFFFF"/>
+            <a:srgbClr val="F6F8FB"/>
           </a:solidFill>
           <a:ln w="12700">
-            <a:solidFill>
-              <a:srgbClr val="FFFFFF"/>
-            </a:solidFill>
-            <a:prstDash val="solid"/>
-          </a:ln>
-        </p:spPr>
-      </p:sp>
-      <p:pic>
-        <p:nvPicPr>
-          <p:cNvPr id="7" name="Uso 0" descr="preencoded.png">    </p:cNvPr>
-          <p:cNvPicPr>
-            <a:picLocks noChangeAspect="1"/>
-          </p:cNvPicPr>
-          <p:nvPr/>
-        </p:nvPicPr>
-        <p:blipFill>
-          <a:blip r:embed="rId1"/>
-          <a:stretch>
-            <a:fillRect/>
-          </a:stretch>
-        </p:blipFill>
-        <p:spPr>
-          <a:xfrm>
-            <a:off x="1126541" y="2726741"/>
-            <a:ext cx="261518" cy="261518"/>
-          </a:xfrm>
-          <a:prstGeom prst="rect">
-            <a:avLst/>
-          </a:prstGeom>
-        </p:spPr>
-      </p:pic>
-      <p:sp>
-        <p:nvSpPr>
-          <p:cNvPr id="8" name="Uso testo 0"/>
-          <p:cNvSpPr txBox="1"/>
-          <p:nvPr/>
-        </p:nvSpPr>
-        <p:spPr>
-          <a:xfrm>
-            <a:off x="1691640" y="2560320"/>
-            <a:ext cx="3657600" cy="594360"/>
-          </a:xfrm>
-          <a:prstGeom prst="rect">
-            <a:avLst/>
-          </a:prstGeom>
-          <a:noFill/>
-          <a:ln/>
-        </p:spPr>
-        <p:txBody>
-          <a:bodyPr wrap="square" lIns="0" tIns="0" rIns="0" bIns="0" rtlCol="0" anchor="ctr"/>
-          <a:lstStyle/>
-          <a:p>
-            <a:pPr indent="0" marL="0">
-              <a:buNone/>
-            </a:pPr>
-            <a:r>
-              <a:rPr lang="en-US" sz="1500" dirty="0">
-                <a:solidFill>
-                  <a:srgbClr val="374151"/>
-                </a:solidFill>
-                <a:latin typeface="Arial" pitchFamily="34" charset="0"/>
-                <a:ea typeface="Arial" pitchFamily="34" charset="-122"/>
-                <a:cs typeface="Arial" pitchFamily="34" charset="-120"/>
-              </a:rPr>
-              <a:t>Apri il link nel browser, anche dal telefono</a:t>
-            </a:r>
-            <a:endParaRPr lang="en-US" sz="1500" dirty="0"/>
-          </a:p>
-        </p:txBody>
-      </p:sp>
-      <p:sp>
-        <p:nvSpPr>
-          <p:cNvPr id="9" name="Uso 1 fondo"/>
-          <p:cNvSpPr/>
-          <p:nvPr/>
-        </p:nvSpPr>
-        <p:spPr>
-          <a:xfrm>
-            <a:off x="1005840" y="3429000"/>
-            <a:ext cx="502920" cy="502920"/>
-          </a:xfrm>
-          <a:prstGeom prst="roundRect">
-            <a:avLst>
-              <a:gd name="adj" fmla="val 22000"/>
-            </a:avLst>
-          </a:prstGeom>
-          <a:solidFill>
-            <a:srgbClr val="FFFFFF"/>
-          </a:solidFill>
-          <a:ln w="12700">
-            <a:solidFill>
-              <a:srgbClr val="FFFFFF"/>
-            </a:solidFill>
-            <a:prstDash val="solid"/>
-          </a:ln>
-        </p:spPr>
-      </p:sp>
-      <p:pic>
-        <p:nvPicPr>
-          <p:cNvPr id="10" name="Uso 1" descr="preencoded.png">    </p:cNvPr>
-          <p:cNvPicPr>
-            <a:picLocks noChangeAspect="1"/>
-          </p:cNvPicPr>
-          <p:nvPr/>
-        </p:nvPicPr>
-        <p:blipFill>
-          <a:blip r:embed="rId2"/>
-          <a:stretch>
-            <a:fillRect/>
-          </a:stretch>
-        </p:blipFill>
-        <p:spPr>
-          <a:xfrm>
-            <a:off x="1126541" y="3549701"/>
-            <a:ext cx="261518" cy="261518"/>
-          </a:xfrm>
-          <a:prstGeom prst="rect">
-            <a:avLst/>
-          </a:prstGeom>
-        </p:spPr>
-      </p:pic>
-      <p:sp>
-        <p:nvSpPr>
-          <p:cNvPr id="11" name="Uso testo 1"/>
-          <p:cNvSpPr txBox="1"/>
-          <p:nvPr/>
-        </p:nvSpPr>
-        <p:spPr>
-          <a:xfrm>
-            <a:off x="1691640" y="3383280"/>
-            <a:ext cx="3657600" cy="594360"/>
-          </a:xfrm>
-          <a:prstGeom prst="rect">
-            <a:avLst/>
-          </a:prstGeom>
-          <a:noFill/>
-          <a:ln/>
-        </p:spPr>
-        <p:txBody>
-          <a:bodyPr wrap="square" lIns="0" tIns="0" rIns="0" bIns="0" rtlCol="0" anchor="ctr"/>
-          <a:lstStyle/>
-          <a:p>
-            <a:pPr indent="0" marL="0">
-              <a:buNone/>
-            </a:pPr>
-            <a:r>
-              <a:rPr lang="en-US" sz="1500" dirty="0">
-                <a:solidFill>
-                  <a:srgbClr val="374151"/>
-                </a:solidFill>
-                <a:latin typeface="Arial" pitchFamily="34" charset="0"/>
-                <a:ea typeface="Arial" pitchFamily="34" charset="-122"/>
-                <a:cs typeface="Arial" pitchFamily="34" charset="-120"/>
-              </a:rPr>
-              <a:t>Italiano o inglese: interruttore in alto a destra</a:t>
-            </a:r>
-            <a:endParaRPr lang="en-US" sz="1500" dirty="0"/>
-          </a:p>
-        </p:txBody>
-      </p:sp>
-      <p:sp>
-        <p:nvSpPr>
-          <p:cNvPr id="12" name="Uso 2 fondo"/>
-          <p:cNvSpPr/>
-          <p:nvPr/>
-        </p:nvSpPr>
-        <p:spPr>
-          <a:xfrm>
-            <a:off x="1005840" y="4251960"/>
-            <a:ext cx="502920" cy="502920"/>
-          </a:xfrm>
-          <a:prstGeom prst="roundRect">
-            <a:avLst>
-              <a:gd name="adj" fmla="val 22000"/>
-            </a:avLst>
-          </a:prstGeom>
-          <a:solidFill>
-            <a:srgbClr val="FFFFFF"/>
-          </a:solidFill>
-          <a:ln w="12700">
-            <a:solidFill>
-              <a:srgbClr val="FFFFFF"/>
-            </a:solidFill>
-            <a:prstDash val="solid"/>
-          </a:ln>
-        </p:spPr>
-      </p:sp>
-      <p:pic>
-        <p:nvPicPr>
-          <p:cNvPr id="13" name="Uso 2" descr="preencoded.png">    </p:cNvPr>
-          <p:cNvPicPr>
-            <a:picLocks noChangeAspect="1"/>
-          </p:cNvPicPr>
-          <p:nvPr/>
-        </p:nvPicPr>
-        <p:blipFill>
-          <a:blip r:embed="rId3"/>
-          <a:stretch>
-            <a:fillRect/>
-          </a:stretch>
-        </p:blipFill>
-        <p:spPr>
-          <a:xfrm>
-            <a:off x="1126541" y="4372661"/>
-            <a:ext cx="261518" cy="261518"/>
-          </a:xfrm>
-          <a:prstGeom prst="rect">
-            <a:avLst/>
-          </a:prstGeom>
-        </p:spPr>
-      </p:pic>
-      <p:sp>
-        <p:nvSpPr>
-          <p:cNvPr id="14" name="Uso testo 2"/>
-          <p:cNvSpPr txBox="1"/>
-          <p:nvPr/>
-        </p:nvSpPr>
-        <p:spPr>
-          <a:xfrm>
-            <a:off x="1691640" y="4206240"/>
-            <a:ext cx="3657600" cy="594360"/>
-          </a:xfrm>
-          <a:prstGeom prst="rect">
-            <a:avLst/>
-          </a:prstGeom>
-          <a:noFill/>
-          <a:ln/>
-        </p:spPr>
-        <p:txBody>
-          <a:bodyPr wrap="square" lIns="0" tIns="0" rIns="0" bIns="0" rtlCol="0" anchor="ctr"/>
-          <a:lstStyle/>
-          <a:p>
-            <a:pPr indent="0" marL="0">
-              <a:buNone/>
-            </a:pPr>
-            <a:r>
-              <a:rPr lang="en-US" sz="1500" dirty="0">
-                <a:solidFill>
-                  <a:srgbClr val="374151"/>
-                </a:solidFill>
-                <a:latin typeface="Arial" pitchFamily="34" charset="0"/>
-                <a:ea typeface="Arial" pitchFamily="34" charset="-122"/>
-                <a:cs typeface="Arial" pitchFamily="34" charset="-120"/>
-              </a:rPr>
-              <a:t>Capitoli nel menu a sinistra, ognuno con il riassunto in cima</a:t>
-            </a:r>
-            <a:endParaRPr lang="en-US" sz="1500" dirty="0"/>
-          </a:p>
-        </p:txBody>
-      </p:sp>
-      <p:sp>
-        <p:nvSpPr>
-          <p:cNvPr id="15" name="Uso 3 fondo"/>
-          <p:cNvSpPr/>
-          <p:nvPr/>
-        </p:nvSpPr>
-        <p:spPr>
-          <a:xfrm>
-            <a:off x="1005840" y="5074920"/>
-            <a:ext cx="502920" cy="502920"/>
-          </a:xfrm>
-          <a:prstGeom prst="roundRect">
-            <a:avLst>
-              <a:gd name="adj" fmla="val 22000"/>
-            </a:avLst>
-          </a:prstGeom>
-          <a:solidFill>
-            <a:srgbClr val="FFFFFF"/>
-          </a:solidFill>
-          <a:ln w="12700">
-            <a:solidFill>
-              <a:srgbClr val="FFFFFF"/>
-            </a:solidFill>
-            <a:prstDash val="solid"/>
-          </a:ln>
-        </p:spPr>
-      </p:sp>
-      <p:pic>
-        <p:nvPicPr>
-          <p:cNvPr id="16" name="Uso 3" descr="preencoded.png">    </p:cNvPr>
-          <p:cNvPicPr>
-            <a:picLocks noChangeAspect="1"/>
-          </p:cNvPicPr>
-          <p:nvPr/>
-        </p:nvPicPr>
-        <p:blipFill>
-          <a:blip r:embed="rId4"/>
-          <a:stretch>
-            <a:fillRect/>
-          </a:stretch>
-        </p:blipFill>
-        <p:spPr>
-          <a:xfrm>
-            <a:off x="1126541" y="5195621"/>
-            <a:ext cx="261518" cy="261518"/>
-          </a:xfrm>
-          <a:prstGeom prst="rect">
-            <a:avLst/>
-          </a:prstGeom>
-        </p:spPr>
-      </p:pic>
-      <p:sp>
-        <p:nvSpPr>
-          <p:cNvPr id="17" name="Uso testo 3"/>
-          <p:cNvSpPr txBox="1"/>
-          <p:nvPr/>
-        </p:nvSpPr>
-        <p:spPr>
-          <a:xfrm>
-            <a:off x="1691640" y="5029200"/>
-            <a:ext cx="3657600" cy="594360"/>
-          </a:xfrm>
-          <a:prstGeom prst="rect">
-            <a:avLst/>
-          </a:prstGeom>
-          <a:noFill/>
-          <a:ln/>
-        </p:spPr>
-        <p:txBody>
-          <a:bodyPr wrap="square" lIns="0" tIns="0" rIns="0" bIns="0" rtlCol="0" anchor="ctr"/>
-          <a:lstStyle/>
-          <a:p>
-            <a:pPr indent="0" marL="0">
-              <a:buNone/>
-            </a:pPr>
-            <a:r>
-              <a:rPr lang="en-US" sz="1500" dirty="0">
-                <a:solidFill>
-                  <a:srgbClr val="374151"/>
-                </a:solidFill>
-                <a:latin typeface="Arial" pitchFamily="34" charset="0"/>
-                <a:ea typeface="Arial" pitchFamily="34" charset="-122"/>
-                <a:cs typeface="Arial" pitchFamily="34" charset="-120"/>
-              </a:rPr>
-              <a:t>La checklist si salva da sola sul tuo dispositivo</a:t>
-            </a:r>
-            <a:endParaRPr lang="en-US" sz="1500" dirty="0"/>
-          </a:p>
-        </p:txBody>
-      </p:sp>
-      <p:sp>
-        <p:nvSpPr>
-          <p:cNvPr id="18" name="Programma titolo"/>
-          <p:cNvSpPr txBox="1"/>
-          <p:nvPr/>
-        </p:nvSpPr>
-        <p:spPr>
-          <a:xfrm>
-            <a:off x="5989320" y="2103120"/>
-            <a:ext cx="5516575" cy="274320"/>
-          </a:xfrm>
-          <a:prstGeom prst="rect">
-            <a:avLst/>
-          </a:prstGeom>
-          <a:noFill/>
-          <a:ln/>
-        </p:spPr>
-        <p:txBody>
-          <a:bodyPr wrap="square" lIns="0" tIns="0" rIns="0" bIns="0" rtlCol="0" anchor="t"/>
-          <a:lstStyle/>
-          <a:p>
-            <a:pPr indent="0" marL="0">
-              <a:buNone/>
-            </a:pPr>
-            <a:r>
-              <a:rPr lang="en-US" sz="1200" b="1" spc="200" kern="0" dirty="0">
-                <a:solidFill>
-                  <a:schemeClr val="accent1"/>
-                </a:solidFill>
-                <a:latin typeface="Arial" pitchFamily="34" charset="0"/>
-                <a:ea typeface="Arial" pitchFamily="34" charset="-122"/>
-                <a:cs typeface="Arial" pitchFamily="34" charset="-120"/>
-              </a:rPr>
-              <a:t>IL TUO PROGRAMMA</a:t>
-            </a:r>
-            <a:endParaRPr lang="en-US" sz="1200" dirty="0"/>
-          </a:p>
-        </p:txBody>
-      </p:sp>
-      <p:sp>
-        <p:nvSpPr>
-          <p:cNvPr id="19" name="Linea programma"/>
-          <p:cNvSpPr/>
-          <p:nvPr/>
-        </p:nvSpPr>
-        <p:spPr>
-          <a:xfrm>
-            <a:off x="6117336" y="2697480"/>
-            <a:ext cx="0" cy="2346960"/>
-          </a:xfrm>
-          <a:prstGeom prst="line">
-            <a:avLst/>
-          </a:prstGeom>
-          <a:noFill/>
-          <a:ln w="25400">
             <a:solidFill>
               <a:srgbClr val="E4E8EE"/>
             </a:solidFill>
@@ -4693,24 +5145,191 @@
       </p:sp>
       <p:sp>
         <p:nvSpPr>
-          <p:cNvPr id="20" name="Punto Entro una settimana"/>
+          <p:cNvPr id="8" name="Nome Usare in sicurezza"/>
+          <p:cNvSpPr txBox="1"/>
+          <p:nvPr/>
+        </p:nvSpPr>
+        <p:spPr>
+          <a:xfrm>
+            <a:off x="941832" y="2670902"/>
+            <a:ext cx="2788920" cy="714086"/>
+          </a:xfrm>
+          <a:prstGeom prst="rect">
+            <a:avLst/>
+          </a:prstGeom>
+          <a:noFill/>
+          <a:ln/>
+        </p:spPr>
+        <p:txBody>
+          <a:bodyPr wrap="square" lIns="0" tIns="0" rIns="0" bIns="0" rtlCol="0" anchor="ctr"/>
+          <a:lstStyle/>
+          <a:p>
+            <a:pPr indent="0" marL="0">
+              <a:buNone/>
+            </a:pPr>
+            <a:r>
+              <a:rPr lang="en-US" sz="1100" b="1" spc="200" kern="0" dirty="0">
+                <a:solidFill>
+                  <a:srgbClr val="1B4D89"/>
+                </a:solidFill>
+                <a:latin typeface="Arial" pitchFamily="34" charset="0"/>
+                <a:ea typeface="Arial" pitchFamily="34" charset="-122"/>
+                <a:cs typeface="Arial" pitchFamily="34" charset="-120"/>
+              </a:rPr>
+              <a:t>SEZIONE B</a:t>
+            </a:r>
+            <a:endParaRPr lang="en-US" sz="1500" dirty="0"/>
+          </a:p>
+          <a:p>
+            <a:pPr indent="0" marL="0">
+              <a:buNone/>
+            </a:pPr>
+            <a:r>
+              <a:rPr lang="en-US" sz="1600" b="1" dirty="0">
+                <a:solidFill>
+                  <a:schemeClr val="tx1"/>
+                </a:solidFill>
+                <a:latin typeface="Arial" pitchFamily="34" charset="0"/>
+                <a:ea typeface="Arial" pitchFamily="34" charset="-122"/>
+                <a:cs typeface="Arial" pitchFamily="34" charset="-120"/>
+              </a:rPr>
+              <a:t>Usare in sicurezza</a:t>
+            </a:r>
+            <a:endParaRPr lang="en-US" sz="1500" dirty="0"/>
+          </a:p>
+        </p:txBody>
+      </p:sp>
+      <p:sp>
+        <p:nvSpPr>
+          <p:cNvPr id="9" name="Capitoli Usare in sicurezza"/>
+          <p:cNvSpPr txBox="1"/>
+          <p:nvPr/>
+        </p:nvSpPr>
+        <p:spPr>
+          <a:xfrm>
+            <a:off x="3931920" y="2670902"/>
+            <a:ext cx="7299655" cy="714086"/>
+          </a:xfrm>
+          <a:prstGeom prst="rect">
+            <a:avLst/>
+          </a:prstGeom>
+          <a:noFill/>
+          <a:ln/>
+        </p:spPr>
+        <p:txBody>
+          <a:bodyPr wrap="square" lIns="0" tIns="0" rIns="0" bIns="0" rtlCol="0" anchor="ctr"/>
+          <a:lstStyle/>
+          <a:p>
+            <a:pPr indent="0" marL="0">
+              <a:buNone/>
+            </a:pPr>
+            <a:r>
+              <a:rPr lang="en-US" sz="1400" b="1" dirty="0">
+                <a:solidFill>
+                  <a:srgbClr val="1B4D89"/>
+                </a:solidFill>
+                <a:latin typeface="Arial" pitchFamily="34" charset="0"/>
+                <a:ea typeface="Arial" pitchFamily="34" charset="-122"/>
+                <a:cs typeface="Arial" pitchFamily="34" charset="-120"/>
+              </a:rPr>
+              <a:t>4  </a:t>
+            </a:r>
+            <a:pPr indent="0" marL="0">
+              <a:buNone/>
+            </a:pPr>
+            <a:r>
+              <a:rPr lang="en-US" sz="1400" dirty="0">
+                <a:solidFill>
+                  <a:srgbClr val="374151"/>
+                </a:solidFill>
+                <a:latin typeface="Arial" pitchFamily="34" charset="0"/>
+                <a:ea typeface="Arial" pitchFamily="34" charset="-122"/>
+                <a:cs typeface="Arial" pitchFamily="34" charset="-120"/>
+              </a:rPr>
+              <a:t>Dati e privacy: spegni l’addestramento     </a:t>
+            </a:r>
+            <a:pPr indent="0" marL="0">
+              <a:buNone/>
+            </a:pPr>
+            <a:r>
+              <a:rPr lang="en-US" sz="1400" b="1" dirty="0">
+                <a:solidFill>
+                  <a:srgbClr val="1B4D89"/>
+                </a:solidFill>
+                <a:latin typeface="Arial" pitchFamily="34" charset="0"/>
+                <a:ea typeface="Arial" pitchFamily="34" charset="-122"/>
+                <a:cs typeface="Arial" pitchFamily="34" charset="-120"/>
+              </a:rPr>
+              <a:t>5  </a:t>
+            </a:r>
+            <a:pPr indent="0" marL="0">
+              <a:buNone/>
+            </a:pPr>
+            <a:r>
+              <a:rPr lang="en-US" sz="1400" dirty="0">
+                <a:solidFill>
+                  <a:srgbClr val="374151"/>
+                </a:solidFill>
+                <a:latin typeface="Arial" pitchFamily="34" charset="0"/>
+                <a:ea typeface="Arial" pitchFamily="34" charset="-122"/>
+                <a:cs typeface="Arial" pitchFamily="34" charset="-120"/>
+              </a:rPr>
+              <a:t>Rischi dell’AI e come verificare     </a:t>
+            </a:r>
+            <a:pPr indent="0" marL="0">
+              <a:buNone/>
+            </a:pPr>
+            <a:r>
+              <a:rPr lang="en-US" sz="1400" b="1" dirty="0">
+                <a:solidFill>
+                  <a:srgbClr val="1B4D89"/>
+                </a:solidFill>
+                <a:latin typeface="Arial" pitchFamily="34" charset="0"/>
+                <a:ea typeface="Arial" pitchFamily="34" charset="-122"/>
+                <a:cs typeface="Arial" pitchFamily="34" charset="-120"/>
+              </a:rPr>
+              <a:t>6  </a:t>
+            </a:r>
+            <a:pPr indent="0" marL="0">
+              <a:buNone/>
+            </a:pPr>
+            <a:r>
+              <a:rPr lang="en-US" sz="1400" dirty="0">
+                <a:solidFill>
+                  <a:srgbClr val="374151"/>
+                </a:solidFill>
+                <a:latin typeface="Arial" pitchFamily="34" charset="0"/>
+                <a:ea typeface="Arial" pitchFamily="34" charset="-122"/>
+                <a:cs typeface="Arial" pitchFamily="34" charset="-120"/>
+              </a:rPr>
+              <a:t>Le regole in azienda</a:t>
+            </a:r>
+            <a:endParaRPr lang="en-US" sz="1400" dirty="0"/>
+          </a:p>
+        </p:txBody>
+      </p:sp>
+      <p:sp>
+        <p:nvSpPr>
+          <p:cNvPr id="10" name="Sezione Usare bene"/>
           <p:cNvSpPr/>
           <p:nvPr/>
         </p:nvSpPr>
         <p:spPr>
           <a:xfrm>
-            <a:off x="5989320" y="2624328"/>
-            <a:ext cx="256032" cy="256032"/>
-          </a:xfrm>
-          <a:prstGeom prst="ellipse">
-            <a:avLst/>
+            <a:off x="685800" y="3513003"/>
+            <a:ext cx="10820095" cy="912340"/>
+          </a:xfrm>
+          <a:prstGeom prst="roundRect">
+            <a:avLst>
+              <a:gd name="adj" fmla="val 12027"/>
+            </a:avLst>
           </a:prstGeom>
           <a:solidFill>
-            <a:srgbClr val="1B4D89"/>
+            <a:srgbClr val="EAF2FC"/>
           </a:solidFill>
-          <a:ln w="25400">
+          <a:ln w="12700">
             <a:solidFill>
-              <a:srgbClr val="FFFFFF"/>
+              <a:srgbClr val="1B4D89"/>
             </a:solidFill>
             <a:prstDash val="solid"/>
           </a:ln>
@@ -4718,24 +5337,41 @@
       </p:sp>
       <p:sp>
         <p:nvSpPr>
-          <p:cNvPr id="21" name="Quando Entro una settimana"/>
+          <p:cNvPr id="11" name="Nome Usare bene"/>
           <p:cNvSpPr txBox="1"/>
           <p:nvPr/>
         </p:nvSpPr>
         <p:spPr>
           <a:xfrm>
-            <a:off x="6492240" y="2560320"/>
-            <a:ext cx="5013655" cy="329184"/>
-          </a:xfrm>
-          <a:prstGeom prst="rect">
-            <a:avLst/>
-          </a:prstGeom>
-          <a:noFill/>
-          <a:ln/>
-        </p:spPr>
-        <p:txBody>
-          <a:bodyPr wrap="square" lIns="0" tIns="0" rIns="0" bIns="0" rtlCol="0" anchor="t"/>
-          <a:lstStyle/>
+            <a:off x="941832" y="3513003"/>
+            <a:ext cx="2788920" cy="912340"/>
+          </a:xfrm>
+          <a:prstGeom prst="rect">
+            <a:avLst/>
+          </a:prstGeom>
+          <a:noFill/>
+          <a:ln/>
+        </p:spPr>
+        <p:txBody>
+          <a:bodyPr wrap="square" lIns="0" tIns="0" rIns="0" bIns="0" rtlCol="0" anchor="ctr"/>
+          <a:lstStyle/>
+          <a:p>
+            <a:pPr indent="0" marL="0">
+              <a:buNone/>
+            </a:pPr>
+            <a:r>
+              <a:rPr lang="en-US" sz="1100" b="1" spc="200" kern="0" dirty="0">
+                <a:solidFill>
+                  <a:srgbClr val="1B4D89"/>
+                </a:solidFill>
+                <a:latin typeface="Arial" pitchFamily="34" charset="0"/>
+                <a:ea typeface="Arial" pitchFamily="34" charset="-122"/>
+                <a:cs typeface="Arial" pitchFamily="34" charset="-120"/>
+              </a:rPr>
+              <a:t>SEZIONE C</a:t>
+            </a:r>
+            <a:endParaRPr lang="en-US" sz="1500" dirty="0"/>
+          </a:p>
           <a:p>
             <a:pPr indent="0" marL="0">
               <a:buNone/>
@@ -4743,44 +5379,58 @@
             <a:r>
               <a:rPr lang="en-US" sz="1600" b="1" dirty="0">
                 <a:solidFill>
-                  <a:schemeClr val="accent1"/>
-                </a:solidFill>
-                <a:latin typeface="Arial" pitchFamily="34" charset="0"/>
-                <a:ea typeface="Arial" pitchFamily="34" charset="-122"/>
-                <a:cs typeface="Arial" pitchFamily="34" charset="-120"/>
-              </a:rPr>
-              <a:t>Entro una settimana</a:t>
-            </a:r>
-            <a:endParaRPr lang="en-US" sz="1600" dirty="0"/>
-          </a:p>
-        </p:txBody>
-      </p:sp>
-      <p:sp>
-        <p:nvSpPr>
-          <p:cNvPr id="22" name="Cosa Entro una settimana"/>
+                  <a:schemeClr val="tx1"/>
+                </a:solidFill>
+                <a:latin typeface="Arial" pitchFamily="34" charset="0"/>
+                <a:ea typeface="Arial" pitchFamily="34" charset="-122"/>
+                <a:cs typeface="Arial" pitchFamily="34" charset="-120"/>
+              </a:rPr>
+              <a:t>Usare bene</a:t>
+            </a:r>
+            <a:endParaRPr lang="en-US" sz="1500" dirty="0"/>
+          </a:p>
+        </p:txBody>
+      </p:sp>
+      <p:sp>
+        <p:nvSpPr>
+          <p:cNvPr id="12" name="Capitoli Usare bene"/>
           <p:cNvSpPr txBox="1"/>
           <p:nvPr/>
         </p:nvSpPr>
         <p:spPr>
           <a:xfrm>
-            <a:off x="6492240" y="2907792"/>
-            <a:ext cx="5013655" cy="789432"/>
-          </a:xfrm>
-          <a:prstGeom prst="rect">
-            <a:avLst/>
-          </a:prstGeom>
-          <a:noFill/>
-          <a:ln/>
-        </p:spPr>
-        <p:txBody>
-          <a:bodyPr wrap="square" lIns="0" tIns="0" rIns="0" bIns="0" rtlCol="0" anchor="t"/>
-          <a:lstStyle/>
-          <a:p>
-            <a:pPr indent="0" marL="0">
-              <a:buNone/>
-            </a:pPr>
-            <a:r>
-              <a:rPr lang="en-US" sz="1500" dirty="0">
+            <a:off x="3931920" y="3513003"/>
+            <a:ext cx="7299655" cy="912340"/>
+          </a:xfrm>
+          <a:prstGeom prst="rect">
+            <a:avLst/>
+          </a:prstGeom>
+          <a:noFill/>
+          <a:ln/>
+        </p:spPr>
+        <p:txBody>
+          <a:bodyPr wrap="square" lIns="0" tIns="0" rIns="0" bIns="0" rtlCol="0" anchor="ctr"/>
+          <a:lstStyle/>
+          <a:p>
+            <a:pPr indent="0" marL="0">
+              <a:buNone/>
+            </a:pPr>
+            <a:r>
+              <a:rPr lang="en-US" sz="1400" b="1" dirty="0">
+                <a:solidFill>
+                  <a:srgbClr val="1B4D89"/>
+                </a:solidFill>
+                <a:latin typeface="Arial" pitchFamily="34" charset="0"/>
+                <a:ea typeface="Arial" pitchFamily="34" charset="-122"/>
+                <a:cs typeface="Arial" pitchFamily="34" charset="-120"/>
+              </a:rPr>
+              <a:t>7  </a:t>
+            </a:r>
+            <a:pPr indent="0" marL="0">
+              <a:buNone/>
+            </a:pPr>
+            <a:r>
+              <a:rPr lang="en-US" sz="1400" dirty="0">
                 <a:solidFill>
                   <a:srgbClr val="374151"/>
                 </a:solidFill>
@@ -4788,32 +5438,146 @@
                 <a:ea typeface="Arial" pitchFamily="34" charset="-122"/>
                 <a:cs typeface="Arial" pitchFamily="34" charset="-120"/>
               </a:rPr>
-              <a:t>Leggi tutto il materiale, sezione D compresa. Circa 45 minuti.</a:t>
-            </a:r>
-            <a:endParaRPr lang="en-US" sz="1500" dirty="0"/>
-          </a:p>
-        </p:txBody>
-      </p:sp>
-      <p:sp>
-        <p:nvSpPr>
-          <p:cNvPr id="23" name="Punto Entro due settimane"/>
+              <a:t>Scrivere un buon prompt     </a:t>
+            </a:r>
+            <a:pPr indent="0" marL="0">
+              <a:buNone/>
+            </a:pPr>
+            <a:r>
+              <a:rPr lang="en-US" sz="1400" b="1" dirty="0">
+                <a:solidFill>
+                  <a:srgbClr val="1B4D89"/>
+                </a:solidFill>
+                <a:latin typeface="Arial" pitchFamily="34" charset="0"/>
+                <a:ea typeface="Arial" pitchFamily="34" charset="-122"/>
+                <a:cs typeface="Arial" pitchFamily="34" charset="-120"/>
+              </a:rPr>
+              <a:t>8  </a:t>
+            </a:r>
+            <a:pPr indent="0" marL="0">
+              <a:buNone/>
+            </a:pPr>
+            <a:r>
+              <a:rPr lang="en-US" sz="1400" dirty="0">
+                <a:solidFill>
+                  <a:srgbClr val="374151"/>
+                </a:solidFill>
+                <a:latin typeface="Arial" pitchFamily="34" charset="0"/>
+                <a:ea typeface="Arial" pitchFamily="34" charset="-122"/>
+                <a:cs typeface="Arial" pitchFamily="34" charset="-120"/>
+              </a:rPr>
+              <a:t>Progetti, memoria, istruzioni e regole     </a:t>
+            </a:r>
+            <a:pPr indent="0" marL="0">
+              <a:buNone/>
+            </a:pPr>
+            <a:r>
+              <a:rPr lang="en-US" sz="1400" b="1" dirty="0">
+                <a:solidFill>
+                  <a:srgbClr val="1B4D89"/>
+                </a:solidFill>
+                <a:latin typeface="Arial" pitchFamily="34" charset="0"/>
+                <a:ea typeface="Arial" pitchFamily="34" charset="-122"/>
+                <a:cs typeface="Arial" pitchFamily="34" charset="-120"/>
+              </a:rPr>
+              <a:t>9  </a:t>
+            </a:r>
+            <a:pPr indent="0" marL="0">
+              <a:buNone/>
+            </a:pPr>
+            <a:r>
+              <a:rPr lang="en-US" sz="1400" dirty="0">
+                <a:solidFill>
+                  <a:srgbClr val="374151"/>
+                </a:solidFill>
+                <a:latin typeface="Arial" pitchFamily="34" charset="0"/>
+                <a:ea typeface="Arial" pitchFamily="34" charset="-122"/>
+                <a:cs typeface="Arial" pitchFamily="34" charset="-120"/>
+              </a:rPr>
+              <a:t>Prompt pronti per ruolo     </a:t>
+            </a:r>
+            <a:pPr indent="0" marL="0">
+              <a:buNone/>
+            </a:pPr>
+            <a:r>
+              <a:rPr lang="en-US" sz="1400" b="1" dirty="0">
+                <a:solidFill>
+                  <a:srgbClr val="1B4D89"/>
+                </a:solidFill>
+                <a:latin typeface="Arial" pitchFamily="34" charset="0"/>
+                <a:ea typeface="Arial" pitchFamily="34" charset="-122"/>
+                <a:cs typeface="Arial" pitchFamily="34" charset="-120"/>
+              </a:rPr>
+              <a:t>10  </a:t>
+            </a:r>
+            <a:pPr indent="0" marL="0">
+              <a:buNone/>
+            </a:pPr>
+            <a:r>
+              <a:rPr lang="en-US" sz="1400" dirty="0">
+                <a:solidFill>
+                  <a:srgbClr val="374151"/>
+                </a:solidFill>
+                <a:latin typeface="Arial" pitchFamily="34" charset="0"/>
+                <a:ea typeface="Arial" pitchFamily="34" charset="-122"/>
+                <a:cs typeface="Arial" pitchFamily="34" charset="-120"/>
+              </a:rPr>
+              <a:t>Documenti, dati e ricerca     </a:t>
+            </a:r>
+            <a:pPr indent="0" marL="0">
+              <a:buNone/>
+            </a:pPr>
+            <a:r>
+              <a:rPr lang="en-US" sz="1400" b="1" dirty="0">
+                <a:solidFill>
+                  <a:srgbClr val="1B4D89"/>
+                </a:solidFill>
+                <a:latin typeface="Arial" pitchFamily="34" charset="0"/>
+                <a:ea typeface="Arial" pitchFamily="34" charset="-122"/>
+                <a:cs typeface="Arial" pitchFamily="34" charset="-120"/>
+              </a:rPr>
+              <a:t>11  </a:t>
+            </a:r>
+            <a:pPr indent="0" marL="0">
+              <a:buNone/>
+            </a:pPr>
+            <a:r>
+              <a:rPr lang="en-US" sz="1400" dirty="0">
+                <a:solidFill>
+                  <a:srgbClr val="374151"/>
+                </a:solidFill>
+                <a:latin typeface="Arial" pitchFamily="34" charset="0"/>
+                <a:ea typeface="Arial" pitchFamily="34" charset="-122"/>
+                <a:cs typeface="Arial" pitchFamily="34" charset="-120"/>
+              </a:rPr>
+              <a:t>L’azienda pronta per l’AI</a:t>
+            </a:r>
+            <a:endParaRPr lang="en-US" sz="1400" dirty="0"/>
+          </a:p>
+        </p:txBody>
+      </p:sp>
+      <p:sp>
+        <p:nvSpPr>
+          <p:cNvPr id="13" name="Sezione Collegare e automatizzare"/>
           <p:cNvSpPr/>
           <p:nvPr/>
         </p:nvSpPr>
         <p:spPr>
           <a:xfrm>
-            <a:off x="5989320" y="3797808"/>
-            <a:ext cx="256032" cy="256032"/>
-          </a:xfrm>
-          <a:prstGeom prst="ellipse">
-            <a:avLst/>
+            <a:off x="685800" y="4553359"/>
+            <a:ext cx="10820095" cy="714086"/>
+          </a:xfrm>
+          <a:prstGeom prst="roundRect">
+            <a:avLst>
+              <a:gd name="adj" fmla="val 15366"/>
+            </a:avLst>
           </a:prstGeom>
           <a:solidFill>
-            <a:srgbClr val="1B4D89"/>
+            <a:srgbClr val="EAF2FC"/>
           </a:solidFill>
-          <a:ln w="25400">
+          <a:ln w="12700">
             <a:solidFill>
-              <a:srgbClr val="FFFFFF"/>
+              <a:srgbClr val="1B4D89"/>
             </a:solidFill>
             <a:prstDash val="solid"/>
           </a:ln>
@@ -4821,24 +5585,41 @@
       </p:sp>
       <p:sp>
         <p:nvSpPr>
-          <p:cNvPr id="24" name="Quando Entro due settimane"/>
+          <p:cNvPr id="14" name="Nome Collegare e automatizzare"/>
           <p:cNvSpPr txBox="1"/>
           <p:nvPr/>
         </p:nvSpPr>
         <p:spPr>
           <a:xfrm>
-            <a:off x="6492240" y="3733800"/>
-            <a:ext cx="5013655" cy="329184"/>
-          </a:xfrm>
-          <a:prstGeom prst="rect">
-            <a:avLst/>
-          </a:prstGeom>
-          <a:noFill/>
-          <a:ln/>
-        </p:spPr>
-        <p:txBody>
-          <a:bodyPr wrap="square" lIns="0" tIns="0" rIns="0" bIns="0" rtlCol="0" anchor="t"/>
-          <a:lstStyle/>
+            <a:off x="941832" y="4553359"/>
+            <a:ext cx="2788920" cy="714086"/>
+          </a:xfrm>
+          <a:prstGeom prst="rect">
+            <a:avLst/>
+          </a:prstGeom>
+          <a:noFill/>
+          <a:ln/>
+        </p:spPr>
+        <p:txBody>
+          <a:bodyPr wrap="square" lIns="0" tIns="0" rIns="0" bIns="0" rtlCol="0" anchor="ctr"/>
+          <a:lstStyle/>
+          <a:p>
+            <a:pPr indent="0" marL="0">
+              <a:buNone/>
+            </a:pPr>
+            <a:r>
+              <a:rPr lang="en-US" sz="1100" b="1" spc="200" kern="0" dirty="0">
+                <a:solidFill>
+                  <a:srgbClr val="1B4D89"/>
+                </a:solidFill>
+                <a:latin typeface="Arial" pitchFamily="34" charset="0"/>
+                <a:ea typeface="Arial" pitchFamily="34" charset="-122"/>
+                <a:cs typeface="Arial" pitchFamily="34" charset="-120"/>
+              </a:rPr>
+              <a:t>SEZIONE D</a:t>
+            </a:r>
+            <a:endParaRPr lang="en-US" sz="1500" dirty="0"/>
+          </a:p>
           <a:p>
             <a:pPr indent="0" marL="0">
               <a:buNone/>
@@ -4846,44 +5627,58 @@
             <a:r>
               <a:rPr lang="en-US" sz="1600" b="1" dirty="0">
                 <a:solidFill>
-                  <a:schemeClr val="accent1"/>
-                </a:solidFill>
-                <a:latin typeface="Arial" pitchFamily="34" charset="0"/>
-                <a:ea typeface="Arial" pitchFamily="34" charset="-122"/>
-                <a:cs typeface="Arial" pitchFamily="34" charset="-120"/>
-              </a:rPr>
-              <a:t>Entro due settimane</a:t>
-            </a:r>
-            <a:endParaRPr lang="en-US" sz="1600" dirty="0"/>
-          </a:p>
-        </p:txBody>
-      </p:sp>
-      <p:sp>
-        <p:nvSpPr>
-          <p:cNvPr id="25" name="Cosa Entro due settimane"/>
+                  <a:schemeClr val="tx1"/>
+                </a:solidFill>
+                <a:latin typeface="Arial" pitchFamily="34" charset="0"/>
+                <a:ea typeface="Arial" pitchFamily="34" charset="-122"/>
+                <a:cs typeface="Arial" pitchFamily="34" charset="-120"/>
+              </a:rPr>
+              <a:t>Collegare e automatizzare</a:t>
+            </a:r>
+            <a:endParaRPr lang="en-US" sz="1500" dirty="0"/>
+          </a:p>
+        </p:txBody>
+      </p:sp>
+      <p:sp>
+        <p:nvSpPr>
+          <p:cNvPr id="15" name="Capitoli Collegare e automatizzare"/>
           <p:cNvSpPr txBox="1"/>
           <p:nvPr/>
         </p:nvSpPr>
         <p:spPr>
           <a:xfrm>
-            <a:off x="6492240" y="4081272"/>
-            <a:ext cx="5013655" cy="789432"/>
-          </a:xfrm>
-          <a:prstGeom prst="rect">
-            <a:avLst/>
-          </a:prstGeom>
-          <a:noFill/>
-          <a:ln/>
-        </p:spPr>
-        <p:txBody>
-          <a:bodyPr wrap="square" lIns="0" tIns="0" rIns="0" bIns="0" rtlCol="0" anchor="t"/>
-          <a:lstStyle/>
-          <a:p>
-            <a:pPr indent="0" marL="0">
-              <a:buNone/>
-            </a:pPr>
-            <a:r>
-              <a:rPr lang="en-US" sz="1500" dirty="0">
+            <a:off x="3931920" y="4553359"/>
+            <a:ext cx="7299655" cy="714086"/>
+          </a:xfrm>
+          <a:prstGeom prst="rect">
+            <a:avLst/>
+          </a:prstGeom>
+          <a:noFill/>
+          <a:ln/>
+        </p:spPr>
+        <p:txBody>
+          <a:bodyPr wrap="square" lIns="0" tIns="0" rIns="0" bIns="0" rtlCol="0" anchor="ctr"/>
+          <a:lstStyle/>
+          <a:p>
+            <a:pPr indent="0" marL="0">
+              <a:buNone/>
+            </a:pPr>
+            <a:r>
+              <a:rPr lang="en-US" sz="1400" b="1" dirty="0">
+                <a:solidFill>
+                  <a:srgbClr val="1B4D89"/>
+                </a:solidFill>
+                <a:latin typeface="Arial" pitchFamily="34" charset="0"/>
+                <a:ea typeface="Arial" pitchFamily="34" charset="-122"/>
+                <a:cs typeface="Arial" pitchFamily="34" charset="-120"/>
+              </a:rPr>
+              <a:t>12  </a:t>
+            </a:r>
+            <a:pPr indent="0" marL="0">
+              <a:buNone/>
+            </a:pPr>
+            <a:r>
+              <a:rPr lang="en-US" sz="1400" dirty="0">
                 <a:solidFill>
                   <a:srgbClr val="374151"/>
                 </a:solidFill>
@@ -4891,32 +5686,118 @@
                 <a:ea typeface="Arial" pitchFamily="34" charset="-122"/>
                 <a:cs typeface="Arial" pitchFamily="34" charset="-120"/>
               </a:rPr>
-              <a:t>Strumenti configurati, checklist da 18 punti e test. Circa 1 ora di pratica.</a:t>
-            </a:r>
-            <a:endParaRPr lang="en-US" sz="1500" dirty="0"/>
-          </a:p>
-        </p:txBody>
-      </p:sp>
-      <p:sp>
-        <p:nvSpPr>
-          <p:cNvPr id="26" name="Punto Poi"/>
+              <a:t>Connettori e MCP     </a:t>
+            </a:r>
+            <a:pPr indent="0" marL="0">
+              <a:buNone/>
+            </a:pPr>
+            <a:r>
+              <a:rPr lang="en-US" sz="1400" b="1" dirty="0">
+                <a:solidFill>
+                  <a:srgbClr val="1B4D89"/>
+                </a:solidFill>
+                <a:latin typeface="Arial" pitchFamily="34" charset="0"/>
+                <a:ea typeface="Arial" pitchFamily="34" charset="-122"/>
+                <a:cs typeface="Arial" pitchFamily="34" charset="-120"/>
+              </a:rPr>
+              <a:t>13  </a:t>
+            </a:r>
+            <a:pPr indent="0" marL="0">
+              <a:buNone/>
+            </a:pPr>
+            <a:r>
+              <a:rPr lang="en-US" sz="1400" dirty="0">
+                <a:solidFill>
+                  <a:srgbClr val="374151"/>
+                </a:solidFill>
+                <a:latin typeface="Arial" pitchFamily="34" charset="0"/>
+                <a:ea typeface="Arial" pitchFamily="34" charset="-122"/>
+                <a:cs typeface="Arial" pitchFamily="34" charset="-120"/>
+              </a:rPr>
+              <a:t>Skill     </a:t>
+            </a:r>
+            <a:pPr indent="0" marL="0">
+              <a:buNone/>
+            </a:pPr>
+            <a:r>
+              <a:rPr lang="en-US" sz="1400" b="1" dirty="0">
+                <a:solidFill>
+                  <a:srgbClr val="1B4D89"/>
+                </a:solidFill>
+                <a:latin typeface="Arial" pitchFamily="34" charset="0"/>
+                <a:ea typeface="Arial" pitchFamily="34" charset="-122"/>
+                <a:cs typeface="Arial" pitchFamily="34" charset="-120"/>
+              </a:rPr>
+              <a:t>14  </a:t>
+            </a:r>
+            <a:pPr indent="0" marL="0">
+              <a:buNone/>
+            </a:pPr>
+            <a:r>
+              <a:rPr lang="en-US" sz="1400" dirty="0">
+                <a:solidFill>
+                  <a:srgbClr val="374151"/>
+                </a:solidFill>
+                <a:latin typeface="Arial" pitchFamily="34" charset="0"/>
+                <a:ea typeface="Arial" pitchFamily="34" charset="-122"/>
+                <a:cs typeface="Arial" pitchFamily="34" charset="-120"/>
+              </a:rPr>
+              <a:t>Automazioni e agenti     </a:t>
+            </a:r>
+            <a:pPr indent="0" marL="0">
+              <a:buNone/>
+            </a:pPr>
+            <a:r>
+              <a:rPr lang="en-US" sz="1400" b="1" dirty="0">
+                <a:solidFill>
+                  <a:srgbClr val="1B4D89"/>
+                </a:solidFill>
+                <a:latin typeface="Arial" pitchFamily="34" charset="0"/>
+                <a:ea typeface="Arial" pitchFamily="34" charset="-122"/>
+                <a:cs typeface="Arial" pitchFamily="34" charset="-120"/>
+              </a:rPr>
+              <a:t>15  </a:t>
+            </a:r>
+            <a:pPr indent="0" marL="0">
+              <a:buNone/>
+            </a:pPr>
+            <a:r>
+              <a:rPr lang="en-US" sz="1400" dirty="0">
+                <a:solidFill>
+                  <a:srgbClr val="374151"/>
+                </a:solidFill>
+                <a:latin typeface="Arial" pitchFamily="34" charset="0"/>
+                <a:ea typeface="Arial" pitchFamily="34" charset="-122"/>
+                <a:cs typeface="Arial" pitchFamily="34" charset="-120"/>
+              </a:rPr>
+              <a:t>Vibe coding: basi</a:t>
+            </a:r>
+            <a:endParaRPr lang="en-US" sz="1400" dirty="0"/>
+          </a:p>
+        </p:txBody>
+      </p:sp>
+      <p:sp>
+        <p:nvSpPr>
+          <p:cNvPr id="16" name="Sezione Strumenti e verifica"/>
           <p:cNvSpPr/>
           <p:nvPr/>
         </p:nvSpPr>
         <p:spPr>
           <a:xfrm>
-            <a:off x="5989320" y="4971288"/>
-            <a:ext cx="256032" cy="256032"/>
-          </a:xfrm>
-          <a:prstGeom prst="ellipse">
-            <a:avLst/>
+            <a:off x="685800" y="5395461"/>
+            <a:ext cx="10820095" cy="685299"/>
+          </a:xfrm>
+          <a:prstGeom prst="roundRect">
+            <a:avLst>
+              <a:gd name="adj" fmla="val 16012"/>
+            </a:avLst>
           </a:prstGeom>
           <a:solidFill>
-            <a:srgbClr val="1B4D89"/>
+            <a:srgbClr val="F6F8FB"/>
           </a:solidFill>
-          <a:ln w="25400">
+          <a:ln w="12700">
             <a:solidFill>
-              <a:srgbClr val="FFFFFF"/>
+              <a:srgbClr val="E4E8EE"/>
             </a:solidFill>
             <a:prstDash val="solid"/>
           </a:ln>
@@ -4924,24 +5805,41 @@
       </p:sp>
       <p:sp>
         <p:nvSpPr>
-          <p:cNvPr id="27" name="Quando Poi"/>
+          <p:cNvPr id="17" name="Nome Strumenti e verifica"/>
           <p:cNvSpPr txBox="1"/>
           <p:nvPr/>
         </p:nvSpPr>
         <p:spPr>
           <a:xfrm>
-            <a:off x="6492240" y="4907280"/>
-            <a:ext cx="5013655" cy="329184"/>
-          </a:xfrm>
-          <a:prstGeom prst="rect">
-            <a:avLst/>
-          </a:prstGeom>
-          <a:noFill/>
-          <a:ln/>
-        </p:spPr>
-        <p:txBody>
-          <a:bodyPr wrap="square" lIns="0" tIns="0" rIns="0" bIns="0" rtlCol="0" anchor="t"/>
-          <a:lstStyle/>
+            <a:off x="941832" y="5395461"/>
+            <a:ext cx="2788920" cy="685299"/>
+          </a:xfrm>
+          <a:prstGeom prst="rect">
+            <a:avLst/>
+          </a:prstGeom>
+          <a:noFill/>
+          <a:ln/>
+        </p:spPr>
+        <p:txBody>
+          <a:bodyPr wrap="square" lIns="0" tIns="0" rIns="0" bIns="0" rtlCol="0" anchor="ctr"/>
+          <a:lstStyle/>
+          <a:p>
+            <a:pPr indent="0" marL="0">
+              <a:buNone/>
+            </a:pPr>
+            <a:r>
+              <a:rPr lang="en-US" sz="1100" b="1" spc="200" kern="0" dirty="0">
+                <a:solidFill>
+                  <a:srgbClr val="1B4D89"/>
+                </a:solidFill>
+                <a:latin typeface="Arial" pitchFamily="34" charset="0"/>
+                <a:ea typeface="Arial" pitchFamily="34" charset="-122"/>
+                <a:cs typeface="Arial" pitchFamily="34" charset="-120"/>
+              </a:rPr>
+              <a:t>SEZIONE E</a:t>
+            </a:r>
+            <a:endParaRPr lang="en-US" sz="1500" dirty="0"/>
+          </a:p>
           <a:p>
             <a:pPr indent="0" marL="0">
               <a:buNone/>
@@ -4949,44 +5847,58 @@
             <a:r>
               <a:rPr lang="en-US" sz="1600" b="1" dirty="0">
                 <a:solidFill>
-                  <a:schemeClr val="accent1"/>
-                </a:solidFill>
-                <a:latin typeface="Arial" pitchFamily="34" charset="0"/>
-                <a:ea typeface="Arial" pitchFamily="34" charset="-122"/>
-                <a:cs typeface="Arial" pitchFamily="34" charset="-120"/>
-              </a:rPr>
-              <a:t>Poi</a:t>
-            </a:r>
-            <a:endParaRPr lang="en-US" sz="1600" dirty="0"/>
-          </a:p>
-        </p:txBody>
-      </p:sp>
-      <p:sp>
-        <p:nvSpPr>
-          <p:cNvPr id="28" name="Cosa Poi"/>
+                  <a:schemeClr val="tx1"/>
+                </a:solidFill>
+                <a:latin typeface="Arial" pitchFamily="34" charset="0"/>
+                <a:ea typeface="Arial" pitchFamily="34" charset="-122"/>
+                <a:cs typeface="Arial" pitchFamily="34" charset="-120"/>
+              </a:rPr>
+              <a:t>Strumenti e verifica</a:t>
+            </a:r>
+            <a:endParaRPr lang="en-US" sz="1500" dirty="0"/>
+          </a:p>
+        </p:txBody>
+      </p:sp>
+      <p:sp>
+        <p:nvSpPr>
+          <p:cNvPr id="18" name="Capitoli Strumenti e verifica"/>
           <p:cNvSpPr txBox="1"/>
           <p:nvPr/>
         </p:nvSpPr>
         <p:spPr>
           <a:xfrm>
-            <a:off x="6492240" y="5254752"/>
-            <a:ext cx="5013655" cy="789432"/>
-          </a:xfrm>
-          <a:prstGeom prst="rect">
-            <a:avLst/>
-          </a:prstGeom>
-          <a:noFill/>
-          <a:ln/>
-        </p:spPr>
-        <p:txBody>
-          <a:bodyPr wrap="square" lIns="0" tIns="0" rIns="0" bIns="0" rtlCol="0" anchor="t"/>
-          <a:lstStyle/>
-          <a:p>
-            <a:pPr indent="0" marL="0">
-              <a:buNone/>
-            </a:pPr>
-            <a:r>
-              <a:rPr lang="en-US" sz="1500" dirty="0">
+            <a:off x="3931920" y="5395461"/>
+            <a:ext cx="7299655" cy="685299"/>
+          </a:xfrm>
+          <a:prstGeom prst="rect">
+            <a:avLst/>
+          </a:prstGeom>
+          <a:noFill/>
+          <a:ln/>
+        </p:spPr>
+        <p:txBody>
+          <a:bodyPr wrap="square" lIns="0" tIns="0" rIns="0" bIns="0" rtlCol="0" anchor="ctr"/>
+          <a:lstStyle/>
+          <a:p>
+            <a:pPr indent="0" marL="0">
+              <a:buNone/>
+            </a:pPr>
+            <a:r>
+              <a:rPr lang="en-US" sz="1400" b="1" dirty="0">
+                <a:solidFill>
+                  <a:srgbClr val="1B4D89"/>
+                </a:solidFill>
+                <a:latin typeface="Arial" pitchFamily="34" charset="0"/>
+                <a:ea typeface="Arial" pitchFamily="34" charset="-122"/>
+                <a:cs typeface="Arial" pitchFamily="34" charset="-120"/>
+              </a:rPr>
+              <a:t>16  </a:t>
+            </a:r>
+            <a:pPr indent="0" marL="0">
+              <a:buNone/>
+            </a:pPr>
+            <a:r>
+              <a:rPr lang="en-US" sz="1400" dirty="0">
                 <a:solidFill>
                   <a:srgbClr val="374151"/>
                 </a:solidFill>
@@ -4994,9 +5906,121 @@
                 <a:ea typeface="Arial" pitchFamily="34" charset="-122"/>
                 <a:cs typeface="Arial" pitchFamily="34" charset="-120"/>
               </a:rPr>
-              <a:t>Collega i primi strumenti con la sezione D: connettori e skill, con accessi minimi. Ripasso ogni 6 mesi.</a:t>
-            </a:r>
-            <a:endParaRPr lang="en-US" sz="1500" dirty="0"/>
+              <a:t>Tech stack AI     </a:t>
+            </a:r>
+            <a:pPr indent="0" marL="0">
+              <a:buNone/>
+            </a:pPr>
+            <a:r>
+              <a:rPr lang="en-US" sz="1400" b="1" dirty="0">
+                <a:solidFill>
+                  <a:srgbClr val="1B4D89"/>
+                </a:solidFill>
+                <a:latin typeface="Arial" pitchFamily="34" charset="0"/>
+                <a:ea typeface="Arial" pitchFamily="34" charset="-122"/>
+                <a:cs typeface="Arial" pitchFamily="34" charset="-120"/>
+              </a:rPr>
+              <a:t>17  </a:t>
+            </a:r>
+            <a:pPr indent="0" marL="0">
+              <a:buNone/>
+            </a:pPr>
+            <a:r>
+              <a:rPr lang="en-US" sz="1400" dirty="0">
+                <a:solidFill>
+                  <a:srgbClr val="374151"/>
+                </a:solidFill>
+                <a:latin typeface="Arial" pitchFamily="34" charset="0"/>
+                <a:ea typeface="Arial" pitchFamily="34" charset="-122"/>
+                <a:cs typeface="Arial" pitchFamily="34" charset="-120"/>
+              </a:rPr>
+              <a:t>Checklist     </a:t>
+            </a:r>
+            <a:pPr indent="0" marL="0">
+              <a:buNone/>
+            </a:pPr>
+            <a:r>
+              <a:rPr lang="en-US" sz="1400" b="1" dirty="0">
+                <a:solidFill>
+                  <a:srgbClr val="1B4D89"/>
+                </a:solidFill>
+                <a:latin typeface="Arial" pitchFamily="34" charset="0"/>
+                <a:ea typeface="Arial" pitchFamily="34" charset="-122"/>
+                <a:cs typeface="Arial" pitchFamily="34" charset="-120"/>
+              </a:rPr>
+              <a:t>18  </a:t>
+            </a:r>
+            <a:pPr indent="0" marL="0">
+              <a:buNone/>
+            </a:pPr>
+            <a:r>
+              <a:rPr lang="en-US" sz="1400" dirty="0">
+                <a:solidFill>
+                  <a:srgbClr val="374151"/>
+                </a:solidFill>
+                <a:latin typeface="Arial" pitchFamily="34" charset="0"/>
+                <a:ea typeface="Arial" pitchFamily="34" charset="-122"/>
+                <a:cs typeface="Arial" pitchFamily="34" charset="-120"/>
+              </a:rPr>
+              <a:t>Test     </a:t>
+            </a:r>
+            <a:pPr indent="0" marL="0">
+              <a:buNone/>
+            </a:pPr>
+            <a:r>
+              <a:rPr lang="en-US" sz="1400" b="1" dirty="0">
+                <a:solidFill>
+                  <a:srgbClr val="1B4D89"/>
+                </a:solidFill>
+                <a:latin typeface="Arial" pitchFamily="34" charset="0"/>
+                <a:ea typeface="Arial" pitchFamily="34" charset="-122"/>
+                <a:cs typeface="Arial" pitchFamily="34" charset="-120"/>
+              </a:rPr>
+              <a:t>19  </a:t>
+            </a:r>
+            <a:pPr indent="0" marL="0">
+              <a:buNone/>
+            </a:pPr>
+            <a:r>
+              <a:rPr lang="en-US" sz="1400" dirty="0">
+                <a:solidFill>
+                  <a:srgbClr val="374151"/>
+                </a:solidFill>
+                <a:latin typeface="Arial" pitchFamily="34" charset="0"/>
+                <a:ea typeface="Arial" pitchFamily="34" charset="-122"/>
+                <a:cs typeface="Arial" pitchFamily="34" charset="-120"/>
+              </a:rPr>
+              <a:t>Glossario     </a:t>
+            </a:r>
+            <a:pPr indent="0" marL="0">
+              <a:buNone/>
+            </a:pPr>
+            <a:r>
+              <a:rPr lang="en-US" sz="1400" b="1" dirty="0">
+                <a:solidFill>
+                  <a:srgbClr val="1B4D89"/>
+                </a:solidFill>
+                <a:latin typeface="Arial" pitchFamily="34" charset="0"/>
+                <a:ea typeface="Arial" pitchFamily="34" charset="-122"/>
+                <a:cs typeface="Arial" pitchFamily="34" charset="-120"/>
+              </a:rPr>
+              <a:t>20  </a:t>
+            </a:r>
+            <a:pPr indent="0" marL="0">
+              <a:buNone/>
+            </a:pPr>
+            <a:r>
+              <a:rPr lang="en-US" sz="1400" dirty="0">
+                <a:solidFill>
+                  <a:srgbClr val="374151"/>
+                </a:solidFill>
+                <a:latin typeface="Arial" pitchFamily="34" charset="0"/>
+                <a:ea typeface="Arial" pitchFamily="34" charset="-122"/>
+                <a:cs typeface="Arial" pitchFamily="34" charset="-120"/>
+              </a:rPr>
+              <a:t>Fonti</a:t>
+            </a:r>
+            <a:endParaRPr lang="en-US" sz="1400" dirty="0"/>
           </a:p>
         </p:txBody>
       </p:sp>
@@ -5083,7 +6107,7 @@
         </p:nvSpPr>
         <p:spPr>
           <a:xfrm>
-            <a:off x="685800" y="685800"/>
+            <a:off x="685800" y="502920"/>
             <a:ext cx="10820095" cy="274320"/>
           </a:xfrm>
           <a:prstGeom prst="rect">
@@ -5108,7 +6132,7 @@
                 <a:ea typeface="Arial" pitchFamily="34" charset="-122"/>
                 <a:cs typeface="Arial" pitchFamily="34" charset="-120"/>
               </a:rPr>
-              <a:t>PER CHIUDERE</a:t>
+              <a:t>ADESSO, INSIEME</a:t>
             </a:r>
             <a:endParaRPr lang="en-US" sz="1200" dirty="0"/>
           </a:p>
@@ -5116,14 +6140,16 @@
       </p:sp>
       <p:sp>
         <p:nvSpPr>
-          <p:cNvPr id="3" name="Domande"/>
-          <p:cNvSpPr txBox="1"/>
-          <p:nvPr/>
-        </p:nvSpPr>
-        <p:spPr>
-          <a:xfrm>
-            <a:off x="685800" y="1051560"/>
-            <a:ext cx="10820095" cy="914400"/>
+          <p:cNvPr id="3" name="Text 0"/>
+          <p:cNvSpPr/>
+          <p:nvPr>
+            <p:ph idx="101" type="title" hasCustomPrompt="1"/>
+          </p:nvPr>
+        </p:nvSpPr>
+        <p:spPr>
+          <a:xfrm>
+            <a:off x="685800" y="804672"/>
+            <a:ext cx="10820095" cy="822960"/>
           </a:xfrm>
           <a:prstGeom prst="rect">
             <a:avLst/>
@@ -5135,66 +6161,54 @@
           <a:bodyPr wrap="square" lIns="0" tIns="0" rIns="0" bIns="0" rtlCol="0" anchor="t"/>
           <a:lstStyle/>
           <a:p>
-            <a:pPr indent="0" marL="0">
-              <a:buNone/>
-            </a:pPr>
-            <a:r>
-              <a:rPr lang="en-US" sz="5400" b="1" dirty="0">
-                <a:solidFill>
-                  <a:schemeClr val="accent1"/>
+            <a:pPr algn="l" indent="0" marL="0">
+              <a:buNone/>
+            </a:pPr>
+            <a:r>
+              <a:rPr lang="en-US" sz="3400" b="1" dirty="0">
+                <a:solidFill>
+                  <a:schemeClr val="tx1"/>
                 </a:solidFill>
                 <a:latin typeface="Georgia" pitchFamily="34" charset="0"/>
                 <a:ea typeface="Georgia" pitchFamily="34" charset="-122"/>
                 <a:cs typeface="Georgia" pitchFamily="34" charset="-120"/>
               </a:rPr>
-              <a:t>Domande?</a:t>
-            </a:r>
-            <a:endParaRPr lang="en-US" sz="5400" dirty="0"/>
-          </a:p>
-        </p:txBody>
-      </p:sp>
-      <p:sp>
-        <p:nvSpPr>
-          <p:cNvPr id="4" name="Da portare a casa"/>
-          <p:cNvSpPr txBox="1"/>
-          <p:nvPr/>
-        </p:nvSpPr>
-        <p:spPr>
-          <a:xfrm>
-            <a:off x="685800" y="2286000"/>
-            <a:ext cx="10820095" cy="274320"/>
-          </a:xfrm>
-          <a:prstGeom prst="rect">
-            <a:avLst/>
-          </a:prstGeom>
-          <a:noFill/>
-          <a:ln/>
-        </p:spPr>
-        <p:txBody>
-          <a:bodyPr wrap="square" lIns="0" tIns="0" rIns="0" bIns="0" rtlCol="0" anchor="t"/>
-          <a:lstStyle/>
-          <a:p>
-            <a:pPr indent="0" marL="0">
-              <a:buNone/>
-            </a:pPr>
-            <a:r>
-              <a:rPr lang="en-US" sz="1200" b="1" spc="200" kern="0" dirty="0">
-                <a:solidFill>
-                  <a:srgbClr val="374151"/>
-                </a:solidFill>
-                <a:latin typeface="Arial" pitchFamily="34" charset="0"/>
-                <a:ea typeface="Arial" pitchFamily="34" charset="-122"/>
-                <a:cs typeface="Arial" pitchFamily="34" charset="-120"/>
-              </a:rPr>
-              <a:t>DA PORTARE A CASA</a:t>
-            </a:r>
-            <a:endParaRPr lang="en-US" sz="1200" dirty="0"/>
-          </a:p>
-        </p:txBody>
+              <a:t>Tre cose da fare in 10 minuti</a:t>
+            </a:r>
+            <a:endParaRPr lang="en-US" sz="3400" dirty="0"/>
+          </a:p>
+        </p:txBody>
+      </p:sp>
+      <p:sp>
+        <p:nvSpPr>
+          <p:cNvPr id="4" name="Tempo"/>
+          <p:cNvSpPr/>
+          <p:nvPr/>
+        </p:nvSpPr>
+        <p:spPr>
+          <a:xfrm>
+            <a:off x="9905695" y="868680"/>
+            <a:ext cx="1600200" cy="457200"/>
+          </a:xfrm>
+          <a:prstGeom prst="roundRect">
+            <a:avLst>
+              <a:gd name="adj" fmla="val 50000"/>
+            </a:avLst>
+          </a:prstGeom>
+          <a:solidFill>
+            <a:srgbClr val="ECFDF3"/>
+          </a:solidFill>
+          <a:ln w="12700">
+            <a:solidFill>
+              <a:srgbClr val="ECFDF3"/>
+            </a:solidFill>
+            <a:prstDash val="solid"/>
+          </a:ln>
+        </p:spPr>
       </p:sp>
       <p:pic>
         <p:nvPicPr>
-          <p:cNvPr id="5" name="Spunta 0" descr="preencoded.png">    </p:cNvPr>
+          <p:cNvPr id="5" name="Tempo icona" descr="preencoded.png">    </p:cNvPr>
           <p:cNvPicPr>
             <a:picLocks noChangeAspect="1"/>
           </p:cNvPicPr>
@@ -5208,8 +6222,8 @@
         </p:blipFill>
         <p:spPr>
           <a:xfrm>
-            <a:off x="685800" y="2761488"/>
-            <a:ext cx="329184" cy="329184"/>
+            <a:off x="10088575" y="978408"/>
+            <a:ext cx="237744" cy="237744"/>
           </a:xfrm>
           <a:prstGeom prst="rect">
             <a:avLst/>
@@ -5218,14 +6232,14 @@
       </p:pic>
       <p:sp>
         <p:nvSpPr>
-          <p:cNvPr id="6" name="Punto 0"/>
+          <p:cNvPr id="6" name="Tempo testo"/>
           <p:cNvSpPr txBox="1"/>
           <p:nvPr/>
         </p:nvSpPr>
         <p:spPr>
           <a:xfrm>
-            <a:off x="1234440" y="2697480"/>
-            <a:ext cx="10271455" cy="457200"/>
+            <a:off x="10362895" y="868680"/>
+            <a:ext cx="1051560" cy="457200"/>
           </a:xfrm>
           <a:prstGeom prst="rect">
             <a:avLst/>
@@ -5241,23 +6255,141 @@
               <a:buNone/>
             </a:pPr>
             <a:r>
-              <a:rPr lang="en-US" sz="2100" dirty="0">
-                <a:solidFill>
-                  <a:schemeClr val="tx1"/>
-                </a:solidFill>
-                <a:latin typeface="Arial" pitchFamily="34" charset="0"/>
-                <a:ea typeface="Arial" pitchFamily="34" charset="-122"/>
-                <a:cs typeface="Arial" pitchFamily="34" charset="-120"/>
-              </a:rPr>
-              <a:t>Dati giusti nello strumento giusto. Segreto mai, in nessuna AI</a:t>
-            </a:r>
-            <a:endParaRPr lang="en-US" sz="2100" dirty="0"/>
-          </a:p>
-        </p:txBody>
+              <a:rPr lang="en-US" sz="1400" b="1" dirty="0">
+                <a:solidFill>
+                  <a:schemeClr val="accent3"/>
+                </a:solidFill>
+                <a:latin typeface="Arial" pitchFamily="34" charset="0"/>
+                <a:ea typeface="Arial" pitchFamily="34" charset="-122"/>
+                <a:cs typeface="Arial" pitchFamily="34" charset="-120"/>
+              </a:rPr>
+              <a:t>10 minuti</a:t>
+            </a:r>
+            <a:endParaRPr lang="en-US" sz="1400" dirty="0"/>
+          </a:p>
+        </p:txBody>
+      </p:sp>
+      <p:sp>
+        <p:nvSpPr>
+          <p:cNvPr id="7" name="Azione 1"/>
+          <p:cNvSpPr/>
+          <p:nvPr/>
+        </p:nvSpPr>
+        <p:spPr>
+          <a:xfrm>
+            <a:off x="685800" y="1828800"/>
+            <a:ext cx="10820095" cy="1188720"/>
+          </a:xfrm>
+          <a:prstGeom prst="roundRect">
+            <a:avLst>
+              <a:gd name="adj" fmla="val 10769"/>
+            </a:avLst>
+          </a:prstGeom>
+          <a:solidFill>
+            <a:srgbClr val="F6F8FB"/>
+          </a:solidFill>
+          <a:ln w="12700">
+            <a:solidFill>
+              <a:srgbClr val="E4E8EE"/>
+            </a:solidFill>
+            <a:prstDash val="solid"/>
+          </a:ln>
+        </p:spPr>
+      </p:sp>
+      <p:sp>
+        <p:nvSpPr>
+          <p:cNvPr id="8" name="numero 1"/>
+          <p:cNvSpPr/>
+          <p:nvPr/>
+        </p:nvSpPr>
+        <p:spPr>
+          <a:xfrm>
+            <a:off x="960120" y="2167128"/>
+            <a:ext cx="512064" cy="512064"/>
+          </a:xfrm>
+          <a:prstGeom prst="ellipse">
+            <a:avLst/>
+          </a:prstGeom>
+          <a:solidFill>
+            <a:srgbClr val="1B4D89"/>
+          </a:solidFill>
+          <a:ln w="12700">
+            <a:solidFill>
+              <a:srgbClr val="1B4D89"/>
+            </a:solidFill>
+            <a:prstDash val="solid"/>
+          </a:ln>
+        </p:spPr>
+      </p:sp>
+      <p:sp>
+        <p:nvSpPr>
+          <p:cNvPr id="9" name="numero testo 1"/>
+          <p:cNvSpPr txBox="1"/>
+          <p:nvPr/>
+        </p:nvSpPr>
+        <p:spPr>
+          <a:xfrm>
+            <a:off x="960120" y="2167128"/>
+            <a:ext cx="512064" cy="512064"/>
+          </a:xfrm>
+          <a:prstGeom prst="rect">
+            <a:avLst/>
+          </a:prstGeom>
+          <a:noFill/>
+          <a:ln/>
+        </p:spPr>
+        <p:txBody>
+          <a:bodyPr wrap="square" lIns="0" tIns="0" rIns="0" bIns="0" rtlCol="0" anchor="ctr"/>
+          <a:lstStyle/>
+          <a:p>
+            <a:pPr algn="ctr" indent="0" marL="0">
+              <a:buNone/>
+            </a:pPr>
+            <a:r>
+              <a:rPr lang="en-US" sz="1800" b="1" dirty="0">
+                <a:solidFill>
+                  <a:schemeClr val="bg1"/>
+                </a:solidFill>
+                <a:latin typeface="Arial" pitchFamily="34" charset="0"/>
+                <a:ea typeface="Arial" pitchFamily="34" charset="-122"/>
+                <a:cs typeface="Arial" pitchFamily="34" charset="-120"/>
+              </a:rPr>
+              <a:t>1</a:t>
+            </a:r>
+            <a:endParaRPr lang="en-US" sz="1800" dirty="0"/>
+          </a:p>
+        </p:txBody>
+      </p:sp>
+      <p:sp>
+        <p:nvSpPr>
+          <p:cNvPr id="10" name="Icona azione 1 fondo"/>
+          <p:cNvSpPr/>
+          <p:nvPr/>
+        </p:nvSpPr>
+        <p:spPr>
+          <a:xfrm>
+            <a:off x="1691640" y="2103120"/>
+            <a:ext cx="640080" cy="640080"/>
+          </a:xfrm>
+          <a:prstGeom prst="roundRect">
+            <a:avLst>
+              <a:gd name="adj" fmla="val 20000"/>
+            </a:avLst>
+          </a:prstGeom>
+          <a:solidFill>
+            <a:srgbClr val="EAF2FC"/>
+          </a:solidFill>
+          <a:ln w="12700">
+            <a:solidFill>
+              <a:srgbClr val="EAF2FC"/>
+            </a:solidFill>
+            <a:prstDash val="solid"/>
+          </a:ln>
+        </p:spPr>
       </p:sp>
       <p:pic>
         <p:nvPicPr>
-          <p:cNvPr id="7" name="Spunta 1" descr="preencoded.png">    </p:cNvPr>
+          <p:cNvPr id="11" name="Icona azione 1" descr="preencoded.png">    </p:cNvPr>
           <p:cNvPicPr>
             <a:picLocks noChangeAspect="1"/>
           </p:cNvPicPr>
@@ -5271,8 +6403,8 @@
         </p:blipFill>
         <p:spPr>
           <a:xfrm>
-            <a:off x="685800" y="3419856"/>
-            <a:ext cx="329184" cy="329184"/>
+            <a:off x="1845259" y="2256739"/>
+            <a:ext cx="332842" cy="332842"/>
           </a:xfrm>
           <a:prstGeom prst="rect">
             <a:avLst/>
@@ -5281,14 +6413,144 @@
       </p:pic>
       <p:sp>
         <p:nvSpPr>
-          <p:cNvPr id="8" name="Punto 1"/>
+          <p:cNvPr id="12" name="Azione titolo 1"/>
           <p:cNvSpPr txBox="1"/>
           <p:nvPr/>
         </p:nvSpPr>
         <p:spPr>
           <a:xfrm>
-            <a:off x="1234440" y="3355848"/>
-            <a:ext cx="10271455" cy="457200"/>
+            <a:off x="2560320" y="2011680"/>
+            <a:ext cx="8625535" cy="411480"/>
+          </a:xfrm>
+          <a:prstGeom prst="rect">
+            <a:avLst/>
+          </a:prstGeom>
+          <a:noFill/>
+          <a:ln/>
+        </p:spPr>
+        <p:txBody>
+          <a:bodyPr wrap="square" lIns="0" tIns="0" rIns="0" bIns="0" rtlCol="0" anchor="t"/>
+          <a:lstStyle/>
+          <a:p>
+            <a:pPr indent="0" marL="0">
+              <a:buNone/>
+            </a:pPr>
+            <a:r>
+              <a:rPr lang="en-US" sz="2000" b="1" dirty="0">
+                <a:solidFill>
+                  <a:schemeClr val="tx1"/>
+                </a:solidFill>
+                <a:latin typeface="Arial" pitchFamily="34" charset="0"/>
+                <a:ea typeface="Arial" pitchFamily="34" charset="-122"/>
+                <a:cs typeface="Arial" pitchFamily="34" charset="-120"/>
+              </a:rPr>
+              <a:t>Spegni l’addestramento sulle tue chat</a:t>
+            </a:r>
+            <a:endParaRPr lang="en-US" sz="2000" dirty="0"/>
+          </a:p>
+        </p:txBody>
+      </p:sp>
+      <p:sp>
+        <p:nvSpPr>
+          <p:cNvPr id="13" name="Azione testo 1"/>
+          <p:cNvSpPr txBox="1"/>
+          <p:nvPr/>
+        </p:nvSpPr>
+        <p:spPr>
+          <a:xfrm>
+            <a:off x="2560320" y="2450592"/>
+            <a:ext cx="8625535" cy="457200"/>
+          </a:xfrm>
+          <a:prstGeom prst="rect">
+            <a:avLst/>
+          </a:prstGeom>
+          <a:noFill/>
+          <a:ln/>
+        </p:spPr>
+        <p:txBody>
+          <a:bodyPr wrap="square" lIns="0" tIns="0" rIns="0" bIns="0" rtlCol="0" anchor="t"/>
+          <a:lstStyle/>
+          <a:p>
+            <a:pPr indent="0" marL="0">
+              <a:buNone/>
+            </a:pPr>
+            <a:r>
+              <a:rPr lang="en-US" sz="1500" dirty="0">
+                <a:solidFill>
+                  <a:srgbClr val="374151"/>
+                </a:solidFill>
+                <a:latin typeface="Arial" pitchFamily="34" charset="0"/>
+                <a:ea typeface="Arial" pitchFamily="34" charset="-122"/>
+                <a:cs typeface="Arial" pitchFamily="34" charset="-120"/>
+              </a:rPr>
+              <a:t>Nelle impostazioni privacy dello strumento che usi. I percorsi per 5 strumenti sono nel capitolo 4.</a:t>
+            </a:r>
+            <a:endParaRPr lang="en-US" sz="1500" dirty="0"/>
+          </a:p>
+        </p:txBody>
+      </p:sp>
+      <p:sp>
+        <p:nvSpPr>
+          <p:cNvPr id="14" name="Azione 2"/>
+          <p:cNvSpPr/>
+          <p:nvPr/>
+        </p:nvSpPr>
+        <p:spPr>
+          <a:xfrm>
+            <a:off x="685800" y="3200400"/>
+            <a:ext cx="10820095" cy="1188720"/>
+          </a:xfrm>
+          <a:prstGeom prst="roundRect">
+            <a:avLst>
+              <a:gd name="adj" fmla="val 10769"/>
+            </a:avLst>
+          </a:prstGeom>
+          <a:solidFill>
+            <a:srgbClr val="F6F8FB"/>
+          </a:solidFill>
+          <a:ln w="12700">
+            <a:solidFill>
+              <a:srgbClr val="E4E8EE"/>
+            </a:solidFill>
+            <a:prstDash val="solid"/>
+          </a:ln>
+        </p:spPr>
+      </p:sp>
+      <p:sp>
+        <p:nvSpPr>
+          <p:cNvPr id="15" name="numero 2"/>
+          <p:cNvSpPr/>
+          <p:nvPr/>
+        </p:nvSpPr>
+        <p:spPr>
+          <a:xfrm>
+            <a:off x="960120" y="3538728"/>
+            <a:ext cx="512064" cy="512064"/>
+          </a:xfrm>
+          <a:prstGeom prst="ellipse">
+            <a:avLst/>
+          </a:prstGeom>
+          <a:solidFill>
+            <a:srgbClr val="1B4D89"/>
+          </a:solidFill>
+          <a:ln w="12700">
+            <a:solidFill>
+              <a:srgbClr val="1B4D89"/>
+            </a:solidFill>
+            <a:prstDash val="solid"/>
+          </a:ln>
+        </p:spPr>
+      </p:sp>
+      <p:sp>
+        <p:nvSpPr>
+          <p:cNvPr id="16" name="numero testo 2"/>
+          <p:cNvSpPr txBox="1"/>
+          <p:nvPr/>
+        </p:nvSpPr>
+        <p:spPr>
+          <a:xfrm>
+            <a:off x="960120" y="3538728"/>
+            <a:ext cx="512064" cy="512064"/>
           </a:xfrm>
           <a:prstGeom prst="rect">
             <a:avLst/>
@@ -5300,27 +6562,54 @@
           <a:bodyPr wrap="square" lIns="0" tIns="0" rIns="0" bIns="0" rtlCol="0" anchor="ctr"/>
           <a:lstStyle/>
           <a:p>
-            <a:pPr indent="0" marL="0">
-              <a:buNone/>
-            </a:pPr>
-            <a:r>
-              <a:rPr lang="en-US" sz="2100" dirty="0">
-                <a:solidFill>
-                  <a:schemeClr val="tx1"/>
-                </a:solidFill>
-                <a:latin typeface="Arial" pitchFamily="34" charset="0"/>
-                <a:ea typeface="Arial" pitchFamily="34" charset="-122"/>
-                <a:cs typeface="Arial" pitchFamily="34" charset="-120"/>
-              </a:rPr>
-              <a:t>L’AI prevede, non sa: ricontrolla nomi, date e numeri</a:t>
-            </a:r>
-            <a:endParaRPr lang="en-US" sz="2100" dirty="0"/>
-          </a:p>
-        </p:txBody>
+            <a:pPr algn="ctr" indent="0" marL="0">
+              <a:buNone/>
+            </a:pPr>
+            <a:r>
+              <a:rPr lang="en-US" sz="1800" b="1" dirty="0">
+                <a:solidFill>
+                  <a:schemeClr val="bg1"/>
+                </a:solidFill>
+                <a:latin typeface="Arial" pitchFamily="34" charset="0"/>
+                <a:ea typeface="Arial" pitchFamily="34" charset="-122"/>
+                <a:cs typeface="Arial" pitchFamily="34" charset="-120"/>
+              </a:rPr>
+              <a:t>2</a:t>
+            </a:r>
+            <a:endParaRPr lang="en-US" sz="1800" dirty="0"/>
+          </a:p>
+        </p:txBody>
+      </p:sp>
+      <p:sp>
+        <p:nvSpPr>
+          <p:cNvPr id="17" name="Icona azione 2 fondo"/>
+          <p:cNvSpPr/>
+          <p:nvPr/>
+        </p:nvSpPr>
+        <p:spPr>
+          <a:xfrm>
+            <a:off x="1691640" y="3474720"/>
+            <a:ext cx="640080" cy="640080"/>
+          </a:xfrm>
+          <a:prstGeom prst="roundRect">
+            <a:avLst>
+              <a:gd name="adj" fmla="val 20000"/>
+            </a:avLst>
+          </a:prstGeom>
+          <a:solidFill>
+            <a:srgbClr val="EAF2FC"/>
+          </a:solidFill>
+          <a:ln w="12700">
+            <a:solidFill>
+              <a:srgbClr val="EAF2FC"/>
+            </a:solidFill>
+            <a:prstDash val="solid"/>
+          </a:ln>
+        </p:spPr>
       </p:sp>
       <p:pic>
         <p:nvPicPr>
-          <p:cNvPr id="9" name="Spunta 2" descr="preencoded.png">    </p:cNvPr>
+          <p:cNvPr id="18" name="Icona azione 2" descr="preencoded.png">    </p:cNvPr>
           <p:cNvPicPr>
             <a:picLocks noChangeAspect="1"/>
           </p:cNvPicPr>
@@ -5334,8 +6623,8 @@
         </p:blipFill>
         <p:spPr>
           <a:xfrm>
-            <a:off x="685800" y="4078224"/>
-            <a:ext cx="329184" cy="329184"/>
+            <a:off x="1845259" y="3628339"/>
+            <a:ext cx="332842" cy="332842"/>
           </a:xfrm>
           <a:prstGeom prst="rect">
             <a:avLst/>
@@ -5344,30 +6633,30 @@
       </p:pic>
       <p:sp>
         <p:nvSpPr>
-          <p:cNvPr id="10" name="Punto 2"/>
+          <p:cNvPr id="19" name="Azione titolo 2"/>
           <p:cNvSpPr txBox="1"/>
           <p:nvPr/>
         </p:nvSpPr>
         <p:spPr>
           <a:xfrm>
-            <a:off x="1234440" y="4014216"/>
-            <a:ext cx="10271455" cy="457200"/>
-          </a:xfrm>
-          <a:prstGeom prst="rect">
-            <a:avLst/>
-          </a:prstGeom>
-          <a:noFill/>
-          <a:ln/>
-        </p:spPr>
-        <p:txBody>
-          <a:bodyPr wrap="square" lIns="0" tIns="0" rIns="0" bIns="0" rtlCol="0" anchor="ctr"/>
-          <a:lstStyle/>
-          <a:p>
-            <a:pPr indent="0" marL="0">
-              <a:buNone/>
-            </a:pPr>
-            <a:r>
-              <a:rPr lang="en-US" sz="2100" dirty="0">
+            <a:off x="2560320" y="3383280"/>
+            <a:ext cx="8625535" cy="411480"/>
+          </a:xfrm>
+          <a:prstGeom prst="rect">
+            <a:avLst/>
+          </a:prstGeom>
+          <a:noFill/>
+          <a:ln/>
+        </p:spPr>
+        <p:txBody>
+          <a:bodyPr wrap="square" lIns="0" tIns="0" rIns="0" bIns="0" rtlCol="0" anchor="t"/>
+          <a:lstStyle/>
+          <a:p>
+            <a:pPr indent="0" marL="0">
+              <a:buNone/>
+            </a:pPr>
+            <a:r>
+              <a:rPr lang="en-US" sz="2000" b="1" dirty="0">
                 <a:solidFill>
                   <a:schemeClr val="tx1"/>
                 </a:solidFill>
@@ -5375,42 +6664,172 @@
                 <a:ea typeface="Arial" pitchFamily="34" charset="-122"/>
                 <a:cs typeface="Arial" pitchFamily="34" charset="-120"/>
               </a:rPr>
-              <a:t>Accesso minimo, come a un nuovo collaboratore</a:t>
-            </a:r>
-            <a:endParaRPr lang="en-US" sz="2100" dirty="0"/>
-          </a:p>
-        </p:txBody>
-      </p:sp>
-      <p:sp>
-        <p:nvSpPr>
-          <p:cNvPr id="11" name="Se succede"/>
+              <a:t>Imposta le istruzioni personalizzate</a:t>
+            </a:r>
+            <a:endParaRPr lang="en-US" sz="2000" dirty="0"/>
+          </a:p>
+        </p:txBody>
+      </p:sp>
+      <p:sp>
+        <p:nvSpPr>
+          <p:cNvPr id="20" name="Azione testo 2"/>
+          <p:cNvSpPr txBox="1"/>
+          <p:nvPr/>
+        </p:nvSpPr>
+        <p:spPr>
+          <a:xfrm>
+            <a:off x="2560320" y="3822192"/>
+            <a:ext cx="8625535" cy="457200"/>
+          </a:xfrm>
+          <a:prstGeom prst="rect">
+            <a:avLst/>
+          </a:prstGeom>
+          <a:noFill/>
+          <a:ln/>
+        </p:spPr>
+        <p:txBody>
+          <a:bodyPr wrap="square" lIns="0" tIns="0" rIns="0" bIns="0" rtlCol="0" anchor="t"/>
+          <a:lstStyle/>
+          <a:p>
+            <a:pPr indent="0" marL="0">
+              <a:buNone/>
+            </a:pPr>
+            <a:r>
+              <a:rPr lang="en-US" sz="1500" dirty="0">
+                <a:solidFill>
+                  <a:srgbClr val="374151"/>
+                </a:solidFill>
+                <a:latin typeface="Arial" pitchFamily="34" charset="0"/>
+                <a:ea typeface="Arial" pitchFamily="34" charset="-122"/>
+                <a:cs typeface="Arial" pitchFamily="34" charset="-120"/>
+              </a:rPr>
+              <a:t>Chi sei e come vuoi le risposte: brevi, in italiano, con le fonti. Testo pronto da copiare nel capitolo 8.</a:t>
+            </a:r>
+            <a:endParaRPr lang="en-US" sz="1500" dirty="0"/>
+          </a:p>
+        </p:txBody>
+      </p:sp>
+      <p:sp>
+        <p:nvSpPr>
+          <p:cNvPr id="21" name="Azione 3"/>
           <p:cNvSpPr/>
           <p:nvPr/>
         </p:nvSpPr>
         <p:spPr>
           <a:xfrm>
-            <a:off x="685800" y="4892040"/>
-            <a:ext cx="10820095" cy="960120"/>
+            <a:off x="685800" y="4572000"/>
+            <a:ext cx="10820095" cy="1188720"/>
           </a:xfrm>
           <a:prstGeom prst="roundRect">
             <a:avLst>
-              <a:gd name="adj" fmla="val 13333"/>
+              <a:gd name="adj" fmla="val 10769"/>
             </a:avLst>
           </a:prstGeom>
           <a:solidFill>
-            <a:srgbClr val="FFFFFF"/>
+            <a:srgbClr val="F6F8FB"/>
           </a:solidFill>
           <a:ln w="12700">
             <a:solidFill>
-              <a:srgbClr val="FFFFFF"/>
+              <a:srgbClr val="E4E8EE"/>
             </a:solidFill>
             <a:prstDash val="solid"/>
           </a:ln>
         </p:spPr>
       </p:sp>
+      <p:sp>
+        <p:nvSpPr>
+          <p:cNvPr id="22" name="numero 3"/>
+          <p:cNvSpPr/>
+          <p:nvPr/>
+        </p:nvSpPr>
+        <p:spPr>
+          <a:xfrm>
+            <a:off x="960120" y="4910328"/>
+            <a:ext cx="512064" cy="512064"/>
+          </a:xfrm>
+          <a:prstGeom prst="ellipse">
+            <a:avLst/>
+          </a:prstGeom>
+          <a:solidFill>
+            <a:srgbClr val="1B4D89"/>
+          </a:solidFill>
+          <a:ln w="12700">
+            <a:solidFill>
+              <a:srgbClr val="1B4D89"/>
+            </a:solidFill>
+            <a:prstDash val="solid"/>
+          </a:ln>
+        </p:spPr>
+      </p:sp>
+      <p:sp>
+        <p:nvSpPr>
+          <p:cNvPr id="23" name="numero testo 3"/>
+          <p:cNvSpPr txBox="1"/>
+          <p:nvPr/>
+        </p:nvSpPr>
+        <p:spPr>
+          <a:xfrm>
+            <a:off x="960120" y="4910328"/>
+            <a:ext cx="512064" cy="512064"/>
+          </a:xfrm>
+          <a:prstGeom prst="rect">
+            <a:avLst/>
+          </a:prstGeom>
+          <a:noFill/>
+          <a:ln/>
+        </p:spPr>
+        <p:txBody>
+          <a:bodyPr wrap="square" lIns="0" tIns="0" rIns="0" bIns="0" rtlCol="0" anchor="ctr"/>
+          <a:lstStyle/>
+          <a:p>
+            <a:pPr algn="ctr" indent="0" marL="0">
+              <a:buNone/>
+            </a:pPr>
+            <a:r>
+              <a:rPr lang="en-US" sz="1800" b="1" dirty="0">
+                <a:solidFill>
+                  <a:schemeClr val="bg1"/>
+                </a:solidFill>
+                <a:latin typeface="Arial" pitchFamily="34" charset="0"/>
+                <a:ea typeface="Arial" pitchFamily="34" charset="-122"/>
+                <a:cs typeface="Arial" pitchFamily="34" charset="-120"/>
+              </a:rPr>
+              <a:t>3</a:t>
+            </a:r>
+            <a:endParaRPr lang="en-US" sz="1800" dirty="0"/>
+          </a:p>
+        </p:txBody>
+      </p:sp>
+      <p:sp>
+        <p:nvSpPr>
+          <p:cNvPr id="24" name="Icona azione 3 fondo"/>
+          <p:cNvSpPr/>
+          <p:nvPr/>
+        </p:nvSpPr>
+        <p:spPr>
+          <a:xfrm>
+            <a:off x="1691640" y="4846320"/>
+            <a:ext cx="640080" cy="640080"/>
+          </a:xfrm>
+          <a:prstGeom prst="roundRect">
+            <a:avLst>
+              <a:gd name="adj" fmla="val 20000"/>
+            </a:avLst>
+          </a:prstGeom>
+          <a:solidFill>
+            <a:srgbClr val="EAF2FC"/>
+          </a:solidFill>
+          <a:ln w="12700">
+            <a:solidFill>
+              <a:srgbClr val="EAF2FC"/>
+            </a:solidFill>
+            <a:prstDash val="solid"/>
+          </a:ln>
+        </p:spPr>
+      </p:sp>
       <p:pic>
         <p:nvPicPr>
-          <p:cNvPr id="12" name="Telefono" descr="preencoded.png">    </p:cNvPr>
+          <p:cNvPr id="25" name="Icona azione 3" descr="preencoded.png">    </p:cNvPr>
           <p:cNvPicPr>
             <a:picLocks noChangeAspect="1"/>
           </p:cNvPicPr>
@@ -5424,8 +6843,8 @@
         </p:blipFill>
         <p:spPr>
           <a:xfrm>
-            <a:off x="1005840" y="5166360"/>
-            <a:ext cx="411480" cy="411480"/>
+            <a:off x="1845259" y="4999939"/>
+            <a:ext cx="332842" cy="332842"/>
           </a:xfrm>
           <a:prstGeom prst="rect">
             <a:avLst/>
@@ -5434,44 +6853,30 @@
       </p:pic>
       <p:sp>
         <p:nvSpPr>
-          <p:cNvPr id="13" name="Se succede testo"/>
+          <p:cNvPr id="26" name="Azione titolo 3"/>
           <p:cNvSpPr txBox="1"/>
           <p:nvPr/>
         </p:nvSpPr>
         <p:spPr>
           <a:xfrm>
-            <a:off x="1645920" y="4892040"/>
-            <a:ext cx="9585655" cy="960120"/>
-          </a:xfrm>
-          <a:prstGeom prst="rect">
-            <a:avLst/>
-          </a:prstGeom>
-          <a:noFill/>
-          <a:ln/>
-        </p:spPr>
-        <p:txBody>
-          <a:bodyPr wrap="square" lIns="0" tIns="0" rIns="0" bIns="0" rtlCol="0" anchor="ctr"/>
-          <a:lstStyle/>
-          <a:p>
-            <a:pPr indent="0" marL="0">
-              <a:buNone/>
-            </a:pPr>
-            <a:r>
-              <a:rPr lang="en-US" sz="1800" b="1" dirty="0">
-                <a:solidFill>
-                  <a:srgbClr val="B42318"/>
-                </a:solidFill>
-                <a:latin typeface="Arial" pitchFamily="34" charset="0"/>
-                <a:ea typeface="Arial" pitchFamily="34" charset="-122"/>
-                <a:cs typeface="Arial" pitchFamily="34" charset="-120"/>
-              </a:rPr>
-              <a:t>Hai dato a un’AI un dato che non dovevi? </a:t>
-            </a:r>
-            <a:pPr indent="0" marL="0">
-              <a:buNone/>
-            </a:pPr>
-            <a:r>
-              <a:rPr lang="en-US" sz="1800" dirty="0">
+            <a:off x="2560320" y="4754880"/>
+            <a:ext cx="8625535" cy="411480"/>
+          </a:xfrm>
+          <a:prstGeom prst="rect">
+            <a:avLst/>
+          </a:prstGeom>
+          <a:noFill/>
+          <a:ln/>
+        </p:spPr>
+        <p:txBody>
+          <a:bodyPr wrap="square" lIns="0" tIns="0" rIns="0" bIns="0" rtlCol="0" anchor="t"/>
+          <a:lstStyle/>
+          <a:p>
+            <a:pPr indent="0" marL="0">
+              <a:buNone/>
+            </a:pPr>
+            <a:r>
+              <a:rPr lang="en-US" sz="2000" b="1" dirty="0">
                 <a:solidFill>
                   <a:schemeClr val="tx1"/>
                 </a:solidFill>
@@ -5479,9 +6884,48 @@
                 <a:ea typeface="Arial" pitchFamily="34" charset="-122"/>
                 <a:cs typeface="Arial" pitchFamily="34" charset="-120"/>
               </a:rPr>
-              <a:t>Avvisa subito il referente IT della tua azienda. Prima lo fai, meglio è. Senza vergogna.</a:t>
-            </a:r>
-            <a:endParaRPr lang="en-US" sz="1800" dirty="0"/>
+              <a:t>Prova un prompt pronto per il tuo ruolo</a:t>
+            </a:r>
+            <a:endParaRPr lang="en-US" sz="2000" dirty="0"/>
+          </a:p>
+        </p:txBody>
+      </p:sp>
+      <p:sp>
+        <p:nvSpPr>
+          <p:cNvPr id="27" name="Azione testo 3"/>
+          <p:cNvSpPr txBox="1"/>
+          <p:nvPr/>
+        </p:nvSpPr>
+        <p:spPr>
+          <a:xfrm>
+            <a:off x="2560320" y="5193792"/>
+            <a:ext cx="8625535" cy="457200"/>
+          </a:xfrm>
+          <a:prstGeom prst="rect">
+            <a:avLst/>
+          </a:prstGeom>
+          <a:noFill/>
+          <a:ln/>
+        </p:spPr>
+        <p:txBody>
+          <a:bodyPr wrap="square" lIns="0" tIns="0" rIns="0" bIns="0" rtlCol="0" anchor="t"/>
+          <a:lstStyle/>
+          <a:p>
+            <a:pPr indent="0" marL="0">
+              <a:buNone/>
+            </a:pPr>
+            <a:r>
+              <a:rPr lang="en-US" sz="1500" dirty="0">
+                <a:solidFill>
+                  <a:srgbClr val="374151"/>
+                </a:solidFill>
+                <a:latin typeface="Arial" pitchFamily="34" charset="0"/>
+                <a:ea typeface="Arial" pitchFamily="34" charset="-122"/>
+                <a:cs typeface="Arial" pitchFamily="34" charset="-120"/>
+              </a:rPr>
+              <a:t>Capitolo 9: scegli il tuo ruolo, copia un prompt e provalo su un caso vero, senza dati riservati.</a:t>
+            </a:r>
+            <a:endParaRPr lang="en-US" sz="1500" dirty="0"/>
           </a:p>
         </p:txBody>
       </p:sp>
@@ -5593,6 +7037,1443 @@
                 <a:ea typeface="Arial" pitchFamily="34" charset="-122"/>
                 <a:cs typeface="Arial" pitchFamily="34" charset="-120"/>
               </a:rPr>
+              <a:t>DOPO L’INCONTRO</a:t>
+            </a:r>
+            <a:endParaRPr lang="en-US" sz="1200" dirty="0"/>
+          </a:p>
+        </p:txBody>
+      </p:sp>
+      <p:sp>
+        <p:nvSpPr>
+          <p:cNvPr id="3" name="Text 0"/>
+          <p:cNvSpPr/>
+          <p:nvPr>
+            <p:ph idx="101" type="title" hasCustomPrompt="1"/>
+          </p:nvPr>
+        </p:nvSpPr>
+        <p:spPr>
+          <a:xfrm>
+            <a:off x="685800" y="804672"/>
+            <a:ext cx="10820095" cy="822960"/>
+          </a:xfrm>
+          <a:prstGeom prst="rect">
+            <a:avLst/>
+          </a:prstGeom>
+          <a:noFill/>
+          <a:ln/>
+        </p:spPr>
+        <p:txBody>
+          <a:bodyPr wrap="square" lIns="0" tIns="0" rIns="0" bIns="0" rtlCol="0" anchor="t"/>
+          <a:lstStyle/>
+          <a:p>
+            <a:pPr algn="l" indent="0" marL="0">
+              <a:buNone/>
+            </a:pPr>
+            <a:r>
+              <a:rPr lang="en-US" sz="3400" b="1" dirty="0">
+                <a:solidFill>
+                  <a:schemeClr val="tx1"/>
+                </a:solidFill>
+                <a:latin typeface="Georgia" pitchFamily="34" charset="0"/>
+                <a:ea typeface="Georgia" pitchFamily="34" charset="-122"/>
+                <a:cs typeface="Georgia" pitchFamily="34" charset="-120"/>
+              </a:rPr>
+              <a:t>Il resto lo leggi con calma</a:t>
+            </a:r>
+            <a:endParaRPr lang="en-US" sz="3400" dirty="0"/>
+          </a:p>
+        </p:txBody>
+      </p:sp>
+      <p:sp>
+        <p:nvSpPr>
+          <p:cNvPr id="4" name="Come si usa"/>
+          <p:cNvSpPr/>
+          <p:nvPr/>
+        </p:nvSpPr>
+        <p:spPr>
+          <a:xfrm>
+            <a:off x="685800" y="1828800"/>
+            <a:ext cx="4983480" cy="4206240"/>
+          </a:xfrm>
+          <a:prstGeom prst="roundRect">
+            <a:avLst>
+              <a:gd name="adj" fmla="val 3043"/>
+            </a:avLst>
+          </a:prstGeom>
+          <a:solidFill>
+            <a:srgbClr val="F6F8FB"/>
+          </a:solidFill>
+          <a:ln w="12700">
+            <a:solidFill>
+              <a:srgbClr val="E4E8EE"/>
+            </a:solidFill>
+            <a:prstDash val="solid"/>
+          </a:ln>
+        </p:spPr>
+      </p:sp>
+      <p:sp>
+        <p:nvSpPr>
+          <p:cNvPr id="5" name="Come si usa titolo"/>
+          <p:cNvSpPr txBox="1"/>
+          <p:nvPr/>
+        </p:nvSpPr>
+        <p:spPr>
+          <a:xfrm>
+            <a:off x="1005840" y="2103120"/>
+            <a:ext cx="4343400" cy="274320"/>
+          </a:xfrm>
+          <a:prstGeom prst="rect">
+            <a:avLst/>
+          </a:prstGeom>
+          <a:noFill/>
+          <a:ln/>
+        </p:spPr>
+        <p:txBody>
+          <a:bodyPr wrap="square" lIns="0" tIns="0" rIns="0" bIns="0" rtlCol="0" anchor="t"/>
+          <a:lstStyle/>
+          <a:p>
+            <a:pPr indent="0" marL="0">
+              <a:buNone/>
+            </a:pPr>
+            <a:r>
+              <a:rPr lang="en-US" sz="1200" b="1" spc="200" kern="0" dirty="0">
+                <a:solidFill>
+                  <a:schemeClr val="accent1"/>
+                </a:solidFill>
+                <a:latin typeface="Arial" pitchFamily="34" charset="0"/>
+                <a:ea typeface="Arial" pitchFamily="34" charset="-122"/>
+                <a:cs typeface="Arial" pitchFamily="34" charset="-120"/>
+              </a:rPr>
+              <a:t>COME SI USA IL MATERIALE</a:t>
+            </a:r>
+            <a:endParaRPr lang="en-US" sz="1200" dirty="0"/>
+          </a:p>
+        </p:txBody>
+      </p:sp>
+      <p:sp>
+        <p:nvSpPr>
+          <p:cNvPr id="6" name="Uso 0 fondo"/>
+          <p:cNvSpPr/>
+          <p:nvPr/>
+        </p:nvSpPr>
+        <p:spPr>
+          <a:xfrm>
+            <a:off x="1005840" y="2606040"/>
+            <a:ext cx="502920" cy="502920"/>
+          </a:xfrm>
+          <a:prstGeom prst="roundRect">
+            <a:avLst>
+              <a:gd name="adj" fmla="val 22000"/>
+            </a:avLst>
+          </a:prstGeom>
+          <a:solidFill>
+            <a:srgbClr val="FFFFFF"/>
+          </a:solidFill>
+          <a:ln w="12700">
+            <a:solidFill>
+              <a:srgbClr val="FFFFFF"/>
+            </a:solidFill>
+            <a:prstDash val="solid"/>
+          </a:ln>
+        </p:spPr>
+      </p:sp>
+      <p:pic>
+        <p:nvPicPr>
+          <p:cNvPr id="7" name="Uso 0" descr="preencoded.png">    </p:cNvPr>
+          <p:cNvPicPr>
+            <a:picLocks noChangeAspect="1"/>
+          </p:cNvPicPr>
+          <p:nvPr/>
+        </p:nvPicPr>
+        <p:blipFill>
+          <a:blip r:embed="rId1"/>
+          <a:stretch>
+            <a:fillRect/>
+          </a:stretch>
+        </p:blipFill>
+        <p:spPr>
+          <a:xfrm>
+            <a:off x="1126541" y="2726741"/>
+            <a:ext cx="261518" cy="261518"/>
+          </a:xfrm>
+          <a:prstGeom prst="rect">
+            <a:avLst/>
+          </a:prstGeom>
+        </p:spPr>
+      </p:pic>
+      <p:sp>
+        <p:nvSpPr>
+          <p:cNvPr id="8" name="Uso testo 0"/>
+          <p:cNvSpPr txBox="1"/>
+          <p:nvPr/>
+        </p:nvSpPr>
+        <p:spPr>
+          <a:xfrm>
+            <a:off x="1691640" y="2560320"/>
+            <a:ext cx="3657600" cy="594360"/>
+          </a:xfrm>
+          <a:prstGeom prst="rect">
+            <a:avLst/>
+          </a:prstGeom>
+          <a:noFill/>
+          <a:ln/>
+        </p:spPr>
+        <p:txBody>
+          <a:bodyPr wrap="square" lIns="0" tIns="0" rIns="0" bIns="0" rtlCol="0" anchor="ctr"/>
+          <a:lstStyle/>
+          <a:p>
+            <a:pPr indent="0" marL="0">
+              <a:buNone/>
+            </a:pPr>
+            <a:r>
+              <a:rPr lang="en-US" sz="1500" dirty="0">
+                <a:solidFill>
+                  <a:srgbClr val="374151"/>
+                </a:solidFill>
+                <a:latin typeface="Arial" pitchFamily="34" charset="0"/>
+                <a:ea typeface="Arial" pitchFamily="34" charset="-122"/>
+                <a:cs typeface="Arial" pitchFamily="34" charset="-120"/>
+              </a:rPr>
+              <a:t>Apri il link nel browser, anche dal telefono</a:t>
+            </a:r>
+            <a:endParaRPr lang="en-US" sz="1500" dirty="0"/>
+          </a:p>
+        </p:txBody>
+      </p:sp>
+      <p:sp>
+        <p:nvSpPr>
+          <p:cNvPr id="9" name="Uso 1 fondo"/>
+          <p:cNvSpPr/>
+          <p:nvPr/>
+        </p:nvSpPr>
+        <p:spPr>
+          <a:xfrm>
+            <a:off x="1005840" y="3429000"/>
+            <a:ext cx="502920" cy="502920"/>
+          </a:xfrm>
+          <a:prstGeom prst="roundRect">
+            <a:avLst>
+              <a:gd name="adj" fmla="val 22000"/>
+            </a:avLst>
+          </a:prstGeom>
+          <a:solidFill>
+            <a:srgbClr val="FFFFFF"/>
+          </a:solidFill>
+          <a:ln w="12700">
+            <a:solidFill>
+              <a:srgbClr val="FFFFFF"/>
+            </a:solidFill>
+            <a:prstDash val="solid"/>
+          </a:ln>
+        </p:spPr>
+      </p:sp>
+      <p:pic>
+        <p:nvPicPr>
+          <p:cNvPr id="10" name="Uso 1" descr="preencoded.png">    </p:cNvPr>
+          <p:cNvPicPr>
+            <a:picLocks noChangeAspect="1"/>
+          </p:cNvPicPr>
+          <p:nvPr/>
+        </p:nvPicPr>
+        <p:blipFill>
+          <a:blip r:embed="rId2"/>
+          <a:stretch>
+            <a:fillRect/>
+          </a:stretch>
+        </p:blipFill>
+        <p:spPr>
+          <a:xfrm>
+            <a:off x="1126541" y="3549701"/>
+            <a:ext cx="261518" cy="261518"/>
+          </a:xfrm>
+          <a:prstGeom prst="rect">
+            <a:avLst/>
+          </a:prstGeom>
+        </p:spPr>
+      </p:pic>
+      <p:sp>
+        <p:nvSpPr>
+          <p:cNvPr id="11" name="Uso testo 1"/>
+          <p:cNvSpPr txBox="1"/>
+          <p:nvPr/>
+        </p:nvSpPr>
+        <p:spPr>
+          <a:xfrm>
+            <a:off x="1691640" y="3383280"/>
+            <a:ext cx="3657600" cy="594360"/>
+          </a:xfrm>
+          <a:prstGeom prst="rect">
+            <a:avLst/>
+          </a:prstGeom>
+          <a:noFill/>
+          <a:ln/>
+        </p:spPr>
+        <p:txBody>
+          <a:bodyPr wrap="square" lIns="0" tIns="0" rIns="0" bIns="0" rtlCol="0" anchor="ctr"/>
+          <a:lstStyle/>
+          <a:p>
+            <a:pPr indent="0" marL="0">
+              <a:buNone/>
+            </a:pPr>
+            <a:r>
+              <a:rPr lang="en-US" sz="1500" dirty="0">
+                <a:solidFill>
+                  <a:srgbClr val="374151"/>
+                </a:solidFill>
+                <a:latin typeface="Arial" pitchFamily="34" charset="0"/>
+                <a:ea typeface="Arial" pitchFamily="34" charset="-122"/>
+                <a:cs typeface="Arial" pitchFamily="34" charset="-120"/>
+              </a:rPr>
+              <a:t>Italiano o inglese: interruttore in alto a destra</a:t>
+            </a:r>
+            <a:endParaRPr lang="en-US" sz="1500" dirty="0"/>
+          </a:p>
+        </p:txBody>
+      </p:sp>
+      <p:sp>
+        <p:nvSpPr>
+          <p:cNvPr id="12" name="Uso 2 fondo"/>
+          <p:cNvSpPr/>
+          <p:nvPr/>
+        </p:nvSpPr>
+        <p:spPr>
+          <a:xfrm>
+            <a:off x="1005840" y="4251960"/>
+            <a:ext cx="502920" cy="502920"/>
+          </a:xfrm>
+          <a:prstGeom prst="roundRect">
+            <a:avLst>
+              <a:gd name="adj" fmla="val 22000"/>
+            </a:avLst>
+          </a:prstGeom>
+          <a:solidFill>
+            <a:srgbClr val="FFFFFF"/>
+          </a:solidFill>
+          <a:ln w="12700">
+            <a:solidFill>
+              <a:srgbClr val="FFFFFF"/>
+            </a:solidFill>
+            <a:prstDash val="solid"/>
+          </a:ln>
+        </p:spPr>
+      </p:sp>
+      <p:pic>
+        <p:nvPicPr>
+          <p:cNvPr id="13" name="Uso 2" descr="preencoded.png">    </p:cNvPr>
+          <p:cNvPicPr>
+            <a:picLocks noChangeAspect="1"/>
+          </p:cNvPicPr>
+          <p:nvPr/>
+        </p:nvPicPr>
+        <p:blipFill>
+          <a:blip r:embed="rId3"/>
+          <a:stretch>
+            <a:fillRect/>
+          </a:stretch>
+        </p:blipFill>
+        <p:spPr>
+          <a:xfrm>
+            <a:off x="1126541" y="4372661"/>
+            <a:ext cx="261518" cy="261518"/>
+          </a:xfrm>
+          <a:prstGeom prst="rect">
+            <a:avLst/>
+          </a:prstGeom>
+        </p:spPr>
+      </p:pic>
+      <p:sp>
+        <p:nvSpPr>
+          <p:cNvPr id="14" name="Uso testo 2"/>
+          <p:cNvSpPr txBox="1"/>
+          <p:nvPr/>
+        </p:nvSpPr>
+        <p:spPr>
+          <a:xfrm>
+            <a:off x="1691640" y="4206240"/>
+            <a:ext cx="3657600" cy="594360"/>
+          </a:xfrm>
+          <a:prstGeom prst="rect">
+            <a:avLst/>
+          </a:prstGeom>
+          <a:noFill/>
+          <a:ln/>
+        </p:spPr>
+        <p:txBody>
+          <a:bodyPr wrap="square" lIns="0" tIns="0" rIns="0" bIns="0" rtlCol="0" anchor="ctr"/>
+          <a:lstStyle/>
+          <a:p>
+            <a:pPr indent="0" marL="0">
+              <a:buNone/>
+            </a:pPr>
+            <a:r>
+              <a:rPr lang="en-US" sz="1500" dirty="0">
+                <a:solidFill>
+                  <a:srgbClr val="374151"/>
+                </a:solidFill>
+                <a:latin typeface="Arial" pitchFamily="34" charset="0"/>
+                <a:ea typeface="Arial" pitchFamily="34" charset="-122"/>
+                <a:cs typeface="Arial" pitchFamily="34" charset="-120"/>
+              </a:rPr>
+              <a:t>Capitoli nel menu a sinistra, ognuno con il riassunto in cima</a:t>
+            </a:r>
+            <a:endParaRPr lang="en-US" sz="1500" dirty="0"/>
+          </a:p>
+        </p:txBody>
+      </p:sp>
+      <p:sp>
+        <p:nvSpPr>
+          <p:cNvPr id="15" name="Uso 3 fondo"/>
+          <p:cNvSpPr/>
+          <p:nvPr/>
+        </p:nvSpPr>
+        <p:spPr>
+          <a:xfrm>
+            <a:off x="1005840" y="5074920"/>
+            <a:ext cx="502920" cy="502920"/>
+          </a:xfrm>
+          <a:prstGeom prst="roundRect">
+            <a:avLst>
+              <a:gd name="adj" fmla="val 22000"/>
+            </a:avLst>
+          </a:prstGeom>
+          <a:solidFill>
+            <a:srgbClr val="FFFFFF"/>
+          </a:solidFill>
+          <a:ln w="12700">
+            <a:solidFill>
+              <a:srgbClr val="FFFFFF"/>
+            </a:solidFill>
+            <a:prstDash val="solid"/>
+          </a:ln>
+        </p:spPr>
+      </p:sp>
+      <p:pic>
+        <p:nvPicPr>
+          <p:cNvPr id="16" name="Uso 3" descr="preencoded.png">    </p:cNvPr>
+          <p:cNvPicPr>
+            <a:picLocks noChangeAspect="1"/>
+          </p:cNvPicPr>
+          <p:nvPr/>
+        </p:nvPicPr>
+        <p:blipFill>
+          <a:blip r:embed="rId4"/>
+          <a:stretch>
+            <a:fillRect/>
+          </a:stretch>
+        </p:blipFill>
+        <p:spPr>
+          <a:xfrm>
+            <a:off x="1126541" y="5195621"/>
+            <a:ext cx="261518" cy="261518"/>
+          </a:xfrm>
+          <a:prstGeom prst="rect">
+            <a:avLst/>
+          </a:prstGeom>
+        </p:spPr>
+      </p:pic>
+      <p:sp>
+        <p:nvSpPr>
+          <p:cNvPr id="17" name="Uso testo 3"/>
+          <p:cNvSpPr txBox="1"/>
+          <p:nvPr/>
+        </p:nvSpPr>
+        <p:spPr>
+          <a:xfrm>
+            <a:off x="1691640" y="5029200"/>
+            <a:ext cx="3657600" cy="594360"/>
+          </a:xfrm>
+          <a:prstGeom prst="rect">
+            <a:avLst/>
+          </a:prstGeom>
+          <a:noFill/>
+          <a:ln/>
+        </p:spPr>
+        <p:txBody>
+          <a:bodyPr wrap="square" lIns="0" tIns="0" rIns="0" bIns="0" rtlCol="0" anchor="ctr"/>
+          <a:lstStyle/>
+          <a:p>
+            <a:pPr indent="0" marL="0">
+              <a:buNone/>
+            </a:pPr>
+            <a:r>
+              <a:rPr lang="en-US" sz="1500" dirty="0">
+                <a:solidFill>
+                  <a:srgbClr val="374151"/>
+                </a:solidFill>
+                <a:latin typeface="Arial" pitchFamily="34" charset="0"/>
+                <a:ea typeface="Arial" pitchFamily="34" charset="-122"/>
+                <a:cs typeface="Arial" pitchFamily="34" charset="-120"/>
+              </a:rPr>
+              <a:t>La checklist si salva da sola sul tuo dispositivo</a:t>
+            </a:r>
+            <a:endParaRPr lang="en-US" sz="1500" dirty="0"/>
+          </a:p>
+        </p:txBody>
+      </p:sp>
+      <p:sp>
+        <p:nvSpPr>
+          <p:cNvPr id="18" name="Programma titolo"/>
+          <p:cNvSpPr txBox="1"/>
+          <p:nvPr/>
+        </p:nvSpPr>
+        <p:spPr>
+          <a:xfrm>
+            <a:off x="5989320" y="2103120"/>
+            <a:ext cx="5516575" cy="274320"/>
+          </a:xfrm>
+          <a:prstGeom prst="rect">
+            <a:avLst/>
+          </a:prstGeom>
+          <a:noFill/>
+          <a:ln/>
+        </p:spPr>
+        <p:txBody>
+          <a:bodyPr wrap="square" lIns="0" tIns="0" rIns="0" bIns="0" rtlCol="0" anchor="t"/>
+          <a:lstStyle/>
+          <a:p>
+            <a:pPr indent="0" marL="0">
+              <a:buNone/>
+            </a:pPr>
+            <a:r>
+              <a:rPr lang="en-US" sz="1200" b="1" spc="200" kern="0" dirty="0">
+                <a:solidFill>
+                  <a:schemeClr val="accent1"/>
+                </a:solidFill>
+                <a:latin typeface="Arial" pitchFamily="34" charset="0"/>
+                <a:ea typeface="Arial" pitchFamily="34" charset="-122"/>
+                <a:cs typeface="Arial" pitchFamily="34" charset="-120"/>
+              </a:rPr>
+              <a:t>IL TUO PROGRAMMA</a:t>
+            </a:r>
+            <a:endParaRPr lang="en-US" sz="1200" dirty="0"/>
+          </a:p>
+        </p:txBody>
+      </p:sp>
+      <p:sp>
+        <p:nvSpPr>
+          <p:cNvPr id="19" name="Linea programma"/>
+          <p:cNvSpPr/>
+          <p:nvPr/>
+        </p:nvSpPr>
+        <p:spPr>
+          <a:xfrm>
+            <a:off x="6117336" y="2697480"/>
+            <a:ext cx="0" cy="2346960"/>
+          </a:xfrm>
+          <a:prstGeom prst="line">
+            <a:avLst/>
+          </a:prstGeom>
+          <a:noFill/>
+          <a:ln w="25400">
+            <a:solidFill>
+              <a:srgbClr val="E4E8EE"/>
+            </a:solidFill>
+            <a:prstDash val="solid"/>
+          </a:ln>
+        </p:spPr>
+      </p:sp>
+      <p:sp>
+        <p:nvSpPr>
+          <p:cNvPr id="20" name="Punto Entro una settimana"/>
+          <p:cNvSpPr/>
+          <p:nvPr/>
+        </p:nvSpPr>
+        <p:spPr>
+          <a:xfrm>
+            <a:off x="5989320" y="2624328"/>
+            <a:ext cx="256032" cy="256032"/>
+          </a:xfrm>
+          <a:prstGeom prst="ellipse">
+            <a:avLst/>
+          </a:prstGeom>
+          <a:solidFill>
+            <a:srgbClr val="1B4D89"/>
+          </a:solidFill>
+          <a:ln w="25400">
+            <a:solidFill>
+              <a:srgbClr val="FFFFFF"/>
+            </a:solidFill>
+            <a:prstDash val="solid"/>
+          </a:ln>
+        </p:spPr>
+      </p:sp>
+      <p:sp>
+        <p:nvSpPr>
+          <p:cNvPr id="21" name="Quando Entro una settimana"/>
+          <p:cNvSpPr txBox="1"/>
+          <p:nvPr/>
+        </p:nvSpPr>
+        <p:spPr>
+          <a:xfrm>
+            <a:off x="6492240" y="2560320"/>
+            <a:ext cx="5013655" cy="329184"/>
+          </a:xfrm>
+          <a:prstGeom prst="rect">
+            <a:avLst/>
+          </a:prstGeom>
+          <a:noFill/>
+          <a:ln/>
+        </p:spPr>
+        <p:txBody>
+          <a:bodyPr wrap="square" lIns="0" tIns="0" rIns="0" bIns="0" rtlCol="0" anchor="t"/>
+          <a:lstStyle/>
+          <a:p>
+            <a:pPr indent="0" marL="0">
+              <a:buNone/>
+            </a:pPr>
+            <a:r>
+              <a:rPr lang="en-US" sz="1600" b="1" dirty="0">
+                <a:solidFill>
+                  <a:schemeClr val="accent1"/>
+                </a:solidFill>
+                <a:latin typeface="Arial" pitchFamily="34" charset="0"/>
+                <a:ea typeface="Arial" pitchFamily="34" charset="-122"/>
+                <a:cs typeface="Arial" pitchFamily="34" charset="-120"/>
+              </a:rPr>
+              <a:t>Entro una settimana</a:t>
+            </a:r>
+            <a:endParaRPr lang="en-US" sz="1600" dirty="0"/>
+          </a:p>
+        </p:txBody>
+      </p:sp>
+      <p:sp>
+        <p:nvSpPr>
+          <p:cNvPr id="22" name="Cosa Entro una settimana"/>
+          <p:cNvSpPr txBox="1"/>
+          <p:nvPr/>
+        </p:nvSpPr>
+        <p:spPr>
+          <a:xfrm>
+            <a:off x="6492240" y="2907792"/>
+            <a:ext cx="5013655" cy="789432"/>
+          </a:xfrm>
+          <a:prstGeom prst="rect">
+            <a:avLst/>
+          </a:prstGeom>
+          <a:noFill/>
+          <a:ln/>
+        </p:spPr>
+        <p:txBody>
+          <a:bodyPr wrap="square" lIns="0" tIns="0" rIns="0" bIns="0" rtlCol="0" anchor="t"/>
+          <a:lstStyle/>
+          <a:p>
+            <a:pPr indent="0" marL="0">
+              <a:buNone/>
+            </a:pPr>
+            <a:r>
+              <a:rPr lang="en-US" sz="1500" dirty="0">
+                <a:solidFill>
+                  <a:srgbClr val="374151"/>
+                </a:solidFill>
+                <a:latin typeface="Arial" pitchFamily="34" charset="0"/>
+                <a:ea typeface="Arial" pitchFamily="34" charset="-122"/>
+                <a:cs typeface="Arial" pitchFamily="34" charset="-120"/>
+              </a:rPr>
+              <a:t>Leggi tutto il materiale, sezione D compresa. Circa 45 minuti.</a:t>
+            </a:r>
+            <a:endParaRPr lang="en-US" sz="1500" dirty="0"/>
+          </a:p>
+        </p:txBody>
+      </p:sp>
+      <p:sp>
+        <p:nvSpPr>
+          <p:cNvPr id="23" name="Punto Entro due settimane"/>
+          <p:cNvSpPr/>
+          <p:nvPr/>
+        </p:nvSpPr>
+        <p:spPr>
+          <a:xfrm>
+            <a:off x="5989320" y="3797808"/>
+            <a:ext cx="256032" cy="256032"/>
+          </a:xfrm>
+          <a:prstGeom prst="ellipse">
+            <a:avLst/>
+          </a:prstGeom>
+          <a:solidFill>
+            <a:srgbClr val="1B4D89"/>
+          </a:solidFill>
+          <a:ln w="25400">
+            <a:solidFill>
+              <a:srgbClr val="FFFFFF"/>
+            </a:solidFill>
+            <a:prstDash val="solid"/>
+          </a:ln>
+        </p:spPr>
+      </p:sp>
+      <p:sp>
+        <p:nvSpPr>
+          <p:cNvPr id="24" name="Quando Entro due settimane"/>
+          <p:cNvSpPr txBox="1"/>
+          <p:nvPr/>
+        </p:nvSpPr>
+        <p:spPr>
+          <a:xfrm>
+            <a:off x="6492240" y="3733800"/>
+            <a:ext cx="5013655" cy="329184"/>
+          </a:xfrm>
+          <a:prstGeom prst="rect">
+            <a:avLst/>
+          </a:prstGeom>
+          <a:noFill/>
+          <a:ln/>
+        </p:spPr>
+        <p:txBody>
+          <a:bodyPr wrap="square" lIns="0" tIns="0" rIns="0" bIns="0" rtlCol="0" anchor="t"/>
+          <a:lstStyle/>
+          <a:p>
+            <a:pPr indent="0" marL="0">
+              <a:buNone/>
+            </a:pPr>
+            <a:r>
+              <a:rPr lang="en-US" sz="1600" b="1" dirty="0">
+                <a:solidFill>
+                  <a:schemeClr val="accent1"/>
+                </a:solidFill>
+                <a:latin typeface="Arial" pitchFamily="34" charset="0"/>
+                <a:ea typeface="Arial" pitchFamily="34" charset="-122"/>
+                <a:cs typeface="Arial" pitchFamily="34" charset="-120"/>
+              </a:rPr>
+              <a:t>Entro due settimane</a:t>
+            </a:r>
+            <a:endParaRPr lang="en-US" sz="1600" dirty="0"/>
+          </a:p>
+        </p:txBody>
+      </p:sp>
+      <p:sp>
+        <p:nvSpPr>
+          <p:cNvPr id="25" name="Cosa Entro due settimane"/>
+          <p:cNvSpPr txBox="1"/>
+          <p:nvPr/>
+        </p:nvSpPr>
+        <p:spPr>
+          <a:xfrm>
+            <a:off x="6492240" y="4081272"/>
+            <a:ext cx="5013655" cy="789432"/>
+          </a:xfrm>
+          <a:prstGeom prst="rect">
+            <a:avLst/>
+          </a:prstGeom>
+          <a:noFill/>
+          <a:ln/>
+        </p:spPr>
+        <p:txBody>
+          <a:bodyPr wrap="square" lIns="0" tIns="0" rIns="0" bIns="0" rtlCol="0" anchor="t"/>
+          <a:lstStyle/>
+          <a:p>
+            <a:pPr indent="0" marL="0">
+              <a:buNone/>
+            </a:pPr>
+            <a:r>
+              <a:rPr lang="en-US" sz="1500" dirty="0">
+                <a:solidFill>
+                  <a:srgbClr val="374151"/>
+                </a:solidFill>
+                <a:latin typeface="Arial" pitchFamily="34" charset="0"/>
+                <a:ea typeface="Arial" pitchFamily="34" charset="-122"/>
+                <a:cs typeface="Arial" pitchFamily="34" charset="-120"/>
+              </a:rPr>
+              <a:t>Strumenti configurati, checklist da 18 punti e test. Circa 1 ora di pratica.</a:t>
+            </a:r>
+            <a:endParaRPr lang="en-US" sz="1500" dirty="0"/>
+          </a:p>
+        </p:txBody>
+      </p:sp>
+      <p:sp>
+        <p:nvSpPr>
+          <p:cNvPr id="26" name="Punto Poi"/>
+          <p:cNvSpPr/>
+          <p:nvPr/>
+        </p:nvSpPr>
+        <p:spPr>
+          <a:xfrm>
+            <a:off x="5989320" y="4971288"/>
+            <a:ext cx="256032" cy="256032"/>
+          </a:xfrm>
+          <a:prstGeom prst="ellipse">
+            <a:avLst/>
+          </a:prstGeom>
+          <a:solidFill>
+            <a:srgbClr val="1B4D89"/>
+          </a:solidFill>
+          <a:ln w="25400">
+            <a:solidFill>
+              <a:srgbClr val="FFFFFF"/>
+            </a:solidFill>
+            <a:prstDash val="solid"/>
+          </a:ln>
+        </p:spPr>
+      </p:sp>
+      <p:sp>
+        <p:nvSpPr>
+          <p:cNvPr id="27" name="Quando Poi"/>
+          <p:cNvSpPr txBox="1"/>
+          <p:nvPr/>
+        </p:nvSpPr>
+        <p:spPr>
+          <a:xfrm>
+            <a:off x="6492240" y="4907280"/>
+            <a:ext cx="5013655" cy="329184"/>
+          </a:xfrm>
+          <a:prstGeom prst="rect">
+            <a:avLst/>
+          </a:prstGeom>
+          <a:noFill/>
+          <a:ln/>
+        </p:spPr>
+        <p:txBody>
+          <a:bodyPr wrap="square" lIns="0" tIns="0" rIns="0" bIns="0" rtlCol="0" anchor="t"/>
+          <a:lstStyle/>
+          <a:p>
+            <a:pPr indent="0" marL="0">
+              <a:buNone/>
+            </a:pPr>
+            <a:r>
+              <a:rPr lang="en-US" sz="1600" b="1" dirty="0">
+                <a:solidFill>
+                  <a:schemeClr val="accent1"/>
+                </a:solidFill>
+                <a:latin typeface="Arial" pitchFamily="34" charset="0"/>
+                <a:ea typeface="Arial" pitchFamily="34" charset="-122"/>
+                <a:cs typeface="Arial" pitchFamily="34" charset="-120"/>
+              </a:rPr>
+              <a:t>Poi</a:t>
+            </a:r>
+            <a:endParaRPr lang="en-US" sz="1600" dirty="0"/>
+          </a:p>
+        </p:txBody>
+      </p:sp>
+      <p:sp>
+        <p:nvSpPr>
+          <p:cNvPr id="28" name="Cosa Poi"/>
+          <p:cNvSpPr txBox="1"/>
+          <p:nvPr/>
+        </p:nvSpPr>
+        <p:spPr>
+          <a:xfrm>
+            <a:off x="6492240" y="5254752"/>
+            <a:ext cx="5013655" cy="789432"/>
+          </a:xfrm>
+          <a:prstGeom prst="rect">
+            <a:avLst/>
+          </a:prstGeom>
+          <a:noFill/>
+          <a:ln/>
+        </p:spPr>
+        <p:txBody>
+          <a:bodyPr wrap="square" lIns="0" tIns="0" rIns="0" bIns="0" rtlCol="0" anchor="t"/>
+          <a:lstStyle/>
+          <a:p>
+            <a:pPr indent="0" marL="0">
+              <a:buNone/>
+            </a:pPr>
+            <a:r>
+              <a:rPr lang="en-US" sz="1500" dirty="0">
+                <a:solidFill>
+                  <a:srgbClr val="374151"/>
+                </a:solidFill>
+                <a:latin typeface="Arial" pitchFamily="34" charset="0"/>
+                <a:ea typeface="Arial" pitchFamily="34" charset="-122"/>
+                <a:cs typeface="Arial" pitchFamily="34" charset="-120"/>
+              </a:rPr>
+              <a:t>Collega i primi strumenti con la sezione D: connettori e skill, con accessi minimi. Ripasso ogni 6 mesi.</a:t>
+            </a:r>
+            <a:endParaRPr lang="en-US" sz="1500" dirty="0"/>
+          </a:p>
+        </p:txBody>
+      </p:sp>
+      <p:sp>
+        <p:nvSpPr>
+          <p:cNvPr id="25" name="Slide Number Placeholder 0"/>
+          <p:cNvSpPr>
+            <a:spLocks noGrp="1"/>
+          </p:cNvSpPr>
+          <p:nvPr>
+            <p:ph type="sldNum" sz="quarter" idx="4294967295"/>
+          </p:nvPr>
+        </p:nvSpPr>
+        <p:spPr>
+          <a:xfrm>
+            <a:off x="10957255" y="6382512"/>
+            <a:ext cx="548640" cy="228600"/>
+          </a:xfrm>
+          <a:prstGeom prst="rect">
+            <a:avLst/>
+          </a:prstGeom>
+          <a:extLst>
+            <a:ext uri="{C572A759-6A51-4108-AA02-DFA0A04FC94B}">
+              <ma14:wrappingTextBoxFlag xmlns:ma14="http://schemas.microsoft.com/office/mac/drawingml/2011/main" val="0"/>
+            </a:ext>
+          </a:extLst>
+        </p:spPr>
+        <p:txBody>
+          <a:bodyPr/>
+          <a:lstStyle>
+            <a:lvl1pPr>
+              <a:defRPr sz="1000">
+                <a:solidFill>
+                  <a:schemeClr val="accent6"/>
+                </a:solidFill>
+                <a:latin typeface="Arial"/>
+                <a:ea typeface="Arial"/>
+                <a:cs typeface="Arial"/>
+              </a:defRPr>
+            </a:lvl1pPr>
+          </a:lstStyle>
+          <a:p>
+            <a:pPr algn="r"/>
+            <a:fld id="{F7021451-1387-4CA6-816F-3879F97B5CBC}" type="slidenum">
+              <a:rPr b="0" lang="en-US"/>
+              <a:t>13</a:t>
+            </a:fld>
+            <a:endParaRPr lang="en-US"/>
+          </a:p>
+        </p:txBody>
+      </p:sp>
+    </p:spTree>
+  </p:cSld>
+  <p:clrMapOvr>
+    <a:masterClrMapping/>
+  </p:clrMapOvr>
+</p:sld>
+</file>
+
+<file path=ppt/slides/slide14.xml><?xml version="1.0" encoding="utf-8"?>
+<p:sld xmlns:a="http://schemas.openxmlformats.org/drawingml/2006/main" xmlns:r="http://schemas.openxmlformats.org/officeDocument/2006/relationships" xmlns:p="http://schemas.openxmlformats.org/presentationml/2006/main">
+  <p:cSld name="Slide 14">
+    <p:spTree>
+      <p:nvGrpSpPr>
+        <p:cNvPr id="1" name=""/>
+        <p:cNvGrpSpPr/>
+        <p:nvPr/>
+      </p:nvGrpSpPr>
+      <p:grpSpPr>
+        <a:xfrm>
+          <a:off x="0" y="0"/>
+          <a:ext cx="0" cy="0"/>
+          <a:chOff x="0" y="0"/>
+          <a:chExt cx="0" cy="0"/>
+        </a:xfrm>
+      </p:grpSpPr>
+      <p:sp>
+        <p:nvSpPr>
+          <p:cNvPr id="2" name="Text 0"/>
+          <p:cNvSpPr/>
+          <p:nvPr>
+            <p:ph idx="100" type="body" hasCustomPrompt="1"/>
+          </p:nvPr>
+        </p:nvSpPr>
+        <p:spPr>
+          <a:xfrm>
+            <a:off x="685800" y="685800"/>
+            <a:ext cx="10820095" cy="274320"/>
+          </a:xfrm>
+          <a:prstGeom prst="rect">
+            <a:avLst/>
+          </a:prstGeom>
+          <a:noFill/>
+          <a:ln/>
+        </p:spPr>
+        <p:txBody>
+          <a:bodyPr wrap="square" lIns="0" tIns="0" rIns="0" bIns="0" rtlCol="0" anchor="t"/>
+          <a:lstStyle/>
+          <a:p>
+            <a:pPr indent="0" marL="0">
+              <a:buNone/>
+            </a:pPr>
+            <a:r>
+              <a:rPr lang="en-US" sz="1200" b="1" spc="200" kern="0" dirty="0">
+                <a:solidFill>
+                  <a:schemeClr val="accent1"/>
+                </a:solidFill>
+                <a:latin typeface="Arial" pitchFamily="34" charset="0"/>
+                <a:ea typeface="Arial" pitchFamily="34" charset="-122"/>
+                <a:cs typeface="Arial" pitchFamily="34" charset="-120"/>
+              </a:rPr>
+              <a:t>PER CHIUDERE</a:t>
+            </a:r>
+            <a:endParaRPr lang="en-US" sz="1200" dirty="0"/>
+          </a:p>
+        </p:txBody>
+      </p:sp>
+      <p:sp>
+        <p:nvSpPr>
+          <p:cNvPr id="3" name="Domande"/>
+          <p:cNvSpPr txBox="1"/>
+          <p:nvPr/>
+        </p:nvSpPr>
+        <p:spPr>
+          <a:xfrm>
+            <a:off x="685800" y="1051560"/>
+            <a:ext cx="10820095" cy="914400"/>
+          </a:xfrm>
+          <a:prstGeom prst="rect">
+            <a:avLst/>
+          </a:prstGeom>
+          <a:noFill/>
+          <a:ln/>
+        </p:spPr>
+        <p:txBody>
+          <a:bodyPr wrap="square" lIns="0" tIns="0" rIns="0" bIns="0" rtlCol="0" anchor="t"/>
+          <a:lstStyle/>
+          <a:p>
+            <a:pPr indent="0" marL="0">
+              <a:buNone/>
+            </a:pPr>
+            <a:r>
+              <a:rPr lang="en-US" sz="5400" b="1" dirty="0">
+                <a:solidFill>
+                  <a:schemeClr val="accent1"/>
+                </a:solidFill>
+                <a:latin typeface="Georgia" pitchFamily="34" charset="0"/>
+                <a:ea typeface="Georgia" pitchFamily="34" charset="-122"/>
+                <a:cs typeface="Georgia" pitchFamily="34" charset="-120"/>
+              </a:rPr>
+              <a:t>Domande?</a:t>
+            </a:r>
+            <a:endParaRPr lang="en-US" sz="5400" dirty="0"/>
+          </a:p>
+        </p:txBody>
+      </p:sp>
+      <p:sp>
+        <p:nvSpPr>
+          <p:cNvPr id="4" name="Da portare a casa"/>
+          <p:cNvSpPr txBox="1"/>
+          <p:nvPr/>
+        </p:nvSpPr>
+        <p:spPr>
+          <a:xfrm>
+            <a:off x="685800" y="2286000"/>
+            <a:ext cx="10820095" cy="274320"/>
+          </a:xfrm>
+          <a:prstGeom prst="rect">
+            <a:avLst/>
+          </a:prstGeom>
+          <a:noFill/>
+          <a:ln/>
+        </p:spPr>
+        <p:txBody>
+          <a:bodyPr wrap="square" lIns="0" tIns="0" rIns="0" bIns="0" rtlCol="0" anchor="t"/>
+          <a:lstStyle/>
+          <a:p>
+            <a:pPr indent="0" marL="0">
+              <a:buNone/>
+            </a:pPr>
+            <a:r>
+              <a:rPr lang="en-US" sz="1200" b="1" spc="200" kern="0" dirty="0">
+                <a:solidFill>
+                  <a:srgbClr val="374151"/>
+                </a:solidFill>
+                <a:latin typeface="Arial" pitchFamily="34" charset="0"/>
+                <a:ea typeface="Arial" pitchFamily="34" charset="-122"/>
+                <a:cs typeface="Arial" pitchFamily="34" charset="-120"/>
+              </a:rPr>
+              <a:t>DA PORTARE A CASA</a:t>
+            </a:r>
+            <a:endParaRPr lang="en-US" sz="1200" dirty="0"/>
+          </a:p>
+        </p:txBody>
+      </p:sp>
+      <p:pic>
+        <p:nvPicPr>
+          <p:cNvPr id="5" name="Spunta 0" descr="preencoded.png">    </p:cNvPr>
+          <p:cNvPicPr>
+            <a:picLocks noChangeAspect="1"/>
+          </p:cNvPicPr>
+          <p:nvPr/>
+        </p:nvPicPr>
+        <p:blipFill>
+          <a:blip r:embed="rId1"/>
+          <a:stretch>
+            <a:fillRect/>
+          </a:stretch>
+        </p:blipFill>
+        <p:spPr>
+          <a:xfrm>
+            <a:off x="685800" y="2761488"/>
+            <a:ext cx="329184" cy="329184"/>
+          </a:xfrm>
+          <a:prstGeom prst="rect">
+            <a:avLst/>
+          </a:prstGeom>
+        </p:spPr>
+      </p:pic>
+      <p:sp>
+        <p:nvSpPr>
+          <p:cNvPr id="6" name="Punto 0"/>
+          <p:cNvSpPr txBox="1"/>
+          <p:nvPr/>
+        </p:nvSpPr>
+        <p:spPr>
+          <a:xfrm>
+            <a:off x="1234440" y="2697480"/>
+            <a:ext cx="10271455" cy="457200"/>
+          </a:xfrm>
+          <a:prstGeom prst="rect">
+            <a:avLst/>
+          </a:prstGeom>
+          <a:noFill/>
+          <a:ln/>
+        </p:spPr>
+        <p:txBody>
+          <a:bodyPr wrap="square" lIns="0" tIns="0" rIns="0" bIns="0" rtlCol="0" anchor="ctr"/>
+          <a:lstStyle/>
+          <a:p>
+            <a:pPr indent="0" marL="0">
+              <a:buNone/>
+            </a:pPr>
+            <a:r>
+              <a:rPr lang="en-US" sz="2100" dirty="0">
+                <a:solidFill>
+                  <a:schemeClr val="tx1"/>
+                </a:solidFill>
+                <a:latin typeface="Arial" pitchFamily="34" charset="0"/>
+                <a:ea typeface="Arial" pitchFamily="34" charset="-122"/>
+                <a:cs typeface="Arial" pitchFamily="34" charset="-120"/>
+              </a:rPr>
+              <a:t>Dati giusti nello strumento giusto. Segreto mai, in nessuna AI</a:t>
+            </a:r>
+            <a:endParaRPr lang="en-US" sz="2100" dirty="0"/>
+          </a:p>
+        </p:txBody>
+      </p:sp>
+      <p:pic>
+        <p:nvPicPr>
+          <p:cNvPr id="7" name="Spunta 1" descr="preencoded.png">    </p:cNvPr>
+          <p:cNvPicPr>
+            <a:picLocks noChangeAspect="1"/>
+          </p:cNvPicPr>
+          <p:nvPr/>
+        </p:nvPicPr>
+        <p:blipFill>
+          <a:blip r:embed="rId2"/>
+          <a:stretch>
+            <a:fillRect/>
+          </a:stretch>
+        </p:blipFill>
+        <p:spPr>
+          <a:xfrm>
+            <a:off x="685800" y="3419856"/>
+            <a:ext cx="329184" cy="329184"/>
+          </a:xfrm>
+          <a:prstGeom prst="rect">
+            <a:avLst/>
+          </a:prstGeom>
+        </p:spPr>
+      </p:pic>
+      <p:sp>
+        <p:nvSpPr>
+          <p:cNvPr id="8" name="Punto 1"/>
+          <p:cNvSpPr txBox="1"/>
+          <p:nvPr/>
+        </p:nvSpPr>
+        <p:spPr>
+          <a:xfrm>
+            <a:off x="1234440" y="3355848"/>
+            <a:ext cx="10271455" cy="457200"/>
+          </a:xfrm>
+          <a:prstGeom prst="rect">
+            <a:avLst/>
+          </a:prstGeom>
+          <a:noFill/>
+          <a:ln/>
+        </p:spPr>
+        <p:txBody>
+          <a:bodyPr wrap="square" lIns="0" tIns="0" rIns="0" bIns="0" rtlCol="0" anchor="ctr"/>
+          <a:lstStyle/>
+          <a:p>
+            <a:pPr indent="0" marL="0">
+              <a:buNone/>
+            </a:pPr>
+            <a:r>
+              <a:rPr lang="en-US" sz="2100" dirty="0">
+                <a:solidFill>
+                  <a:schemeClr val="tx1"/>
+                </a:solidFill>
+                <a:latin typeface="Arial" pitchFamily="34" charset="0"/>
+                <a:ea typeface="Arial" pitchFamily="34" charset="-122"/>
+                <a:cs typeface="Arial" pitchFamily="34" charset="-120"/>
+              </a:rPr>
+              <a:t>L’AI prevede, non sa: ricontrolla nomi, date e numeri</a:t>
+            </a:r>
+            <a:endParaRPr lang="en-US" sz="2100" dirty="0"/>
+          </a:p>
+        </p:txBody>
+      </p:sp>
+      <p:pic>
+        <p:nvPicPr>
+          <p:cNvPr id="9" name="Spunta 2" descr="preencoded.png">    </p:cNvPr>
+          <p:cNvPicPr>
+            <a:picLocks noChangeAspect="1"/>
+          </p:cNvPicPr>
+          <p:nvPr/>
+        </p:nvPicPr>
+        <p:blipFill>
+          <a:blip r:embed="rId3"/>
+          <a:stretch>
+            <a:fillRect/>
+          </a:stretch>
+        </p:blipFill>
+        <p:spPr>
+          <a:xfrm>
+            <a:off x="685800" y="4078224"/>
+            <a:ext cx="329184" cy="329184"/>
+          </a:xfrm>
+          <a:prstGeom prst="rect">
+            <a:avLst/>
+          </a:prstGeom>
+        </p:spPr>
+      </p:pic>
+      <p:sp>
+        <p:nvSpPr>
+          <p:cNvPr id="10" name="Punto 2"/>
+          <p:cNvSpPr txBox="1"/>
+          <p:nvPr/>
+        </p:nvSpPr>
+        <p:spPr>
+          <a:xfrm>
+            <a:off x="1234440" y="4014216"/>
+            <a:ext cx="10271455" cy="457200"/>
+          </a:xfrm>
+          <a:prstGeom prst="rect">
+            <a:avLst/>
+          </a:prstGeom>
+          <a:noFill/>
+          <a:ln/>
+        </p:spPr>
+        <p:txBody>
+          <a:bodyPr wrap="square" lIns="0" tIns="0" rIns="0" bIns="0" rtlCol="0" anchor="ctr"/>
+          <a:lstStyle/>
+          <a:p>
+            <a:pPr indent="0" marL="0">
+              <a:buNone/>
+            </a:pPr>
+            <a:r>
+              <a:rPr lang="en-US" sz="2100" dirty="0">
+                <a:solidFill>
+                  <a:schemeClr val="tx1"/>
+                </a:solidFill>
+                <a:latin typeface="Arial" pitchFamily="34" charset="0"/>
+                <a:ea typeface="Arial" pitchFamily="34" charset="-122"/>
+                <a:cs typeface="Arial" pitchFamily="34" charset="-120"/>
+              </a:rPr>
+              <a:t>Accesso minimo, come a un nuovo collaboratore</a:t>
+            </a:r>
+            <a:endParaRPr lang="en-US" sz="2100" dirty="0"/>
+          </a:p>
+        </p:txBody>
+      </p:sp>
+      <p:sp>
+        <p:nvSpPr>
+          <p:cNvPr id="11" name="Se succede"/>
+          <p:cNvSpPr/>
+          <p:nvPr/>
+        </p:nvSpPr>
+        <p:spPr>
+          <a:xfrm>
+            <a:off x="685800" y="4892040"/>
+            <a:ext cx="10820095" cy="960120"/>
+          </a:xfrm>
+          <a:prstGeom prst="roundRect">
+            <a:avLst>
+              <a:gd name="adj" fmla="val 13333"/>
+            </a:avLst>
+          </a:prstGeom>
+          <a:solidFill>
+            <a:srgbClr val="FFFFFF"/>
+          </a:solidFill>
+          <a:ln w="12700">
+            <a:solidFill>
+              <a:srgbClr val="FFFFFF"/>
+            </a:solidFill>
+            <a:prstDash val="solid"/>
+          </a:ln>
+        </p:spPr>
+      </p:sp>
+      <p:pic>
+        <p:nvPicPr>
+          <p:cNvPr id="12" name="Telefono" descr="preencoded.png">    </p:cNvPr>
+          <p:cNvPicPr>
+            <a:picLocks noChangeAspect="1"/>
+          </p:cNvPicPr>
+          <p:nvPr/>
+        </p:nvPicPr>
+        <p:blipFill>
+          <a:blip r:embed="rId4"/>
+          <a:stretch>
+            <a:fillRect/>
+          </a:stretch>
+        </p:blipFill>
+        <p:spPr>
+          <a:xfrm>
+            <a:off x="1005840" y="5166360"/>
+            <a:ext cx="411480" cy="411480"/>
+          </a:xfrm>
+          <a:prstGeom prst="rect">
+            <a:avLst/>
+          </a:prstGeom>
+        </p:spPr>
+      </p:pic>
+      <p:sp>
+        <p:nvSpPr>
+          <p:cNvPr id="13" name="Se succede testo"/>
+          <p:cNvSpPr txBox="1"/>
+          <p:nvPr/>
+        </p:nvSpPr>
+        <p:spPr>
+          <a:xfrm>
+            <a:off x="1645920" y="4892040"/>
+            <a:ext cx="9585655" cy="960120"/>
+          </a:xfrm>
+          <a:prstGeom prst="rect">
+            <a:avLst/>
+          </a:prstGeom>
+          <a:noFill/>
+          <a:ln/>
+        </p:spPr>
+        <p:txBody>
+          <a:bodyPr wrap="square" lIns="0" tIns="0" rIns="0" bIns="0" rtlCol="0" anchor="ctr"/>
+          <a:lstStyle/>
+          <a:p>
+            <a:pPr indent="0" marL="0">
+              <a:buNone/>
+            </a:pPr>
+            <a:r>
+              <a:rPr lang="en-US" sz="1800" b="1" dirty="0">
+                <a:solidFill>
+                  <a:srgbClr val="B42318"/>
+                </a:solidFill>
+                <a:latin typeface="Arial" pitchFamily="34" charset="0"/>
+                <a:ea typeface="Arial" pitchFamily="34" charset="-122"/>
+                <a:cs typeface="Arial" pitchFamily="34" charset="-120"/>
+              </a:rPr>
+              <a:t>Hai dato a un’AI un dato che non dovevi? </a:t>
+            </a:r>
+            <a:pPr indent="0" marL="0">
+              <a:buNone/>
+            </a:pPr>
+            <a:r>
+              <a:rPr lang="en-US" sz="1800" dirty="0">
+                <a:solidFill>
+                  <a:schemeClr val="tx1"/>
+                </a:solidFill>
+                <a:latin typeface="Arial" pitchFamily="34" charset="0"/>
+                <a:ea typeface="Arial" pitchFamily="34" charset="-122"/>
+                <a:cs typeface="Arial" pitchFamily="34" charset="-120"/>
+              </a:rPr>
+              <a:t>Avvisa subito il referente IT della tua azienda. Prima lo fai, meglio è. Senza vergogna.</a:t>
+            </a:r>
+            <a:endParaRPr lang="en-US" sz="1800" dirty="0"/>
+          </a:p>
+        </p:txBody>
+      </p:sp>
+      <p:sp>
+        <p:nvSpPr>
+          <p:cNvPr id="25" name="Slide Number Placeholder 0"/>
+          <p:cNvSpPr>
+            <a:spLocks noGrp="1"/>
+          </p:cNvSpPr>
+          <p:nvPr>
+            <p:ph type="sldNum" sz="quarter" idx="4294967295"/>
+          </p:nvPr>
+        </p:nvSpPr>
+        <p:spPr>
+          <a:xfrm>
+            <a:off x="10957255" y="6382512"/>
+            <a:ext cx="548640" cy="228600"/>
+          </a:xfrm>
+          <a:prstGeom prst="rect">
+            <a:avLst/>
+          </a:prstGeom>
+          <a:extLst>
+            <a:ext uri="{C572A759-6A51-4108-AA02-DFA0A04FC94B}">
+              <ma14:wrappingTextBoxFlag xmlns:ma14="http://schemas.microsoft.com/office/mac/drawingml/2011/main" val="0"/>
+            </a:ext>
+          </a:extLst>
+        </p:spPr>
+        <p:txBody>
+          <a:bodyPr/>
+          <a:lstStyle>
+            <a:lvl1pPr>
+              <a:defRPr sz="1000">
+                <a:solidFill>
+                  <a:schemeClr val="accent6"/>
+                </a:solidFill>
+                <a:latin typeface="Arial"/>
+                <a:ea typeface="Arial"/>
+                <a:cs typeface="Arial"/>
+              </a:defRPr>
+            </a:lvl1pPr>
+          </a:lstStyle>
+          <a:p>
+            <a:pPr algn="r"/>
+            <a:fld id="{F7021451-1387-4CA6-816F-3879F97B5CBC}" type="slidenum">
+              <a:rPr b="0" lang="en-US"/>
+              <a:t>14</a:t>
+            </a:fld>
+            <a:endParaRPr lang="en-US"/>
+          </a:p>
+        </p:txBody>
+      </p:sp>
+    </p:spTree>
+  </p:cSld>
+  <p:clrMapOvr>
+    <a:masterClrMapping/>
+  </p:clrMapOvr>
+</p:sld>
+</file>
+
+<file path=ppt/slides/slide15.xml><?xml version="1.0" encoding="utf-8"?>
+<p:sld xmlns:a="http://schemas.openxmlformats.org/drawingml/2006/main" xmlns:r="http://schemas.openxmlformats.org/officeDocument/2006/relationships" xmlns:p="http://schemas.openxmlformats.org/presentationml/2006/main">
+  <p:cSld name="Slide 15">
+    <p:spTree>
+      <p:nvGrpSpPr>
+        <p:cNvPr id="1" name=""/>
+        <p:cNvGrpSpPr/>
+        <p:nvPr/>
+      </p:nvGrpSpPr>
+      <p:grpSpPr>
+        <a:xfrm>
+          <a:off x="0" y="0"/>
+          <a:ext cx="0" cy="0"/>
+          <a:chOff x="0" y="0"/>
+          <a:chExt cx="0" cy="0"/>
+        </a:xfrm>
+      </p:grpSpPr>
+      <p:sp>
+        <p:nvSpPr>
+          <p:cNvPr id="2" name="Text 0"/>
+          <p:cNvSpPr/>
+          <p:nvPr>
+            <p:ph idx="100" type="body" hasCustomPrompt="1"/>
+          </p:nvPr>
+        </p:nvSpPr>
+        <p:spPr>
+          <a:xfrm>
+            <a:off x="685800" y="502920"/>
+            <a:ext cx="10820095" cy="274320"/>
+          </a:xfrm>
+          <a:prstGeom prst="rect">
+            <a:avLst/>
+          </a:prstGeom>
+          <a:noFill/>
+          <a:ln/>
+        </p:spPr>
+        <p:txBody>
+          <a:bodyPr wrap="square" lIns="0" tIns="0" rIns="0" bIns="0" rtlCol="0" anchor="t"/>
+          <a:lstStyle/>
+          <a:p>
+            <a:pPr indent="0" marL="0">
+              <a:buNone/>
+            </a:pPr>
+            <a:r>
+              <a:rPr lang="en-US" sz="1200" b="1" spc="200" kern="0" dirty="0">
+                <a:solidFill>
+                  <a:schemeClr val="accent1"/>
+                </a:solidFill>
+                <a:latin typeface="Arial" pitchFamily="34" charset="0"/>
+                <a:ea typeface="Arial" pitchFamily="34" charset="-122"/>
+                <a:cs typeface="Arial" pitchFamily="34" charset="-120"/>
+              </a:rPr>
               <a:t>FONTI</a:t>
             </a:r>
             <a:endParaRPr lang="en-US" sz="1200" dirty="0"/>
@@ -6160,7 +9041,7 @@
             <a:pPr algn="r"/>
             <a:fld id="{F7021451-1387-4CA6-816F-3879F97B5CBC}" type="slidenum">
               <a:rPr b="0" lang="en-US"/>
-              <a:t>13</a:t>
+              <a:t>15</a:t>
             </a:fld>
             <a:endParaRPr lang="en-US"/>
           </a:p>
@@ -10915,7 +13796,7 @@
                 <a:ea typeface="Arial" pitchFamily="34" charset="-122"/>
                 <a:cs typeface="Arial" pitchFamily="34" charset="-120"/>
               </a:rPr>
-              <a:t>IL MATERIALE</a:t>
+              <a:t>COLLEGARE L’AI</a:t>
             </a:r>
             <a:endParaRPr lang="en-US" sz="1200" dirty="0"/>
           </a:p>
@@ -10956,7 +13837,7 @@
                 <a:ea typeface="Georgia" pitchFamily="34" charset="-122"/>
                 <a:cs typeface="Georgia" pitchFamily="34" charset="-120"/>
               </a:rPr>
-              <a:t>Cosa trovi nel materiale</a:t>
+              <a:t>Connettore, skill, plugin: tre pezzi diversi</a:t>
             </a:r>
             <a:endParaRPr lang="en-US" sz="3400" dirty="0"/>
           </a:p>
@@ -10964,18 +13845,18 @@
       </p:sp>
       <p:sp>
         <p:nvSpPr>
-          <p:cNvPr id="4" name="Sezione Capire"/>
+          <p:cNvPr id="4" name="Scheda Connettore (MCP)"/>
           <p:cNvSpPr/>
           <p:nvPr/>
         </p:nvSpPr>
         <p:spPr>
           <a:xfrm>
             <a:off x="685800" y="1828800"/>
-            <a:ext cx="10820095" cy="714086"/>
+            <a:ext cx="3423818" cy="3063240"/>
           </a:xfrm>
           <a:prstGeom prst="roundRect">
             <a:avLst>
-              <a:gd name="adj" fmla="val 15366"/>
+              <a:gd name="adj" fmla="val 4179"/>
             </a:avLst>
           </a:prstGeom>
           <a:solidFill>
@@ -10991,183 +13872,147 @@
       </p:sp>
       <p:sp>
         <p:nvSpPr>
-          <p:cNvPr id="5" name="Nome Capire"/>
-          <p:cNvSpPr txBox="1"/>
-          <p:nvPr/>
-        </p:nvSpPr>
-        <p:spPr>
-          <a:xfrm>
-            <a:off x="941832" y="1828800"/>
-            <a:ext cx="2788920" cy="714086"/>
-          </a:xfrm>
-          <a:prstGeom prst="rect">
-            <a:avLst/>
-          </a:prstGeom>
-          <a:noFill/>
-          <a:ln/>
-        </p:spPr>
-        <p:txBody>
-          <a:bodyPr wrap="square" lIns="0" tIns="0" rIns="0" bIns="0" rtlCol="0" anchor="ctr"/>
-          <a:lstStyle/>
-          <a:p>
-            <a:pPr indent="0" marL="0">
-              <a:buNone/>
-            </a:pPr>
-            <a:r>
-              <a:rPr lang="en-US" sz="1100" b="1" spc="200" kern="0" dirty="0">
-                <a:solidFill>
-                  <a:srgbClr val="1B4D89"/>
-                </a:solidFill>
-                <a:latin typeface="Arial" pitchFamily="34" charset="0"/>
-                <a:ea typeface="Arial" pitchFamily="34" charset="-122"/>
-                <a:cs typeface="Arial" pitchFamily="34" charset="-120"/>
-              </a:rPr>
-              <a:t>SEZIONE A</a:t>
-            </a:r>
-            <a:endParaRPr lang="en-US" sz="1500" dirty="0"/>
-          </a:p>
-          <a:p>
-            <a:pPr indent="0" marL="0">
-              <a:buNone/>
-            </a:pPr>
-            <a:r>
-              <a:rPr lang="en-US" sz="1600" b="1" dirty="0">
-                <a:solidFill>
-                  <a:schemeClr val="tx1"/>
-                </a:solidFill>
-                <a:latin typeface="Arial" pitchFamily="34" charset="0"/>
-                <a:ea typeface="Arial" pitchFamily="34" charset="-122"/>
-                <a:cs typeface="Arial" pitchFamily="34" charset="-120"/>
-              </a:rPr>
-              <a:t>Capire</a:t>
-            </a:r>
-            <a:endParaRPr lang="en-US" sz="1500" dirty="0"/>
-          </a:p>
-        </p:txBody>
-      </p:sp>
-      <p:sp>
-        <p:nvSpPr>
-          <p:cNvPr id="6" name="Capitoli Capire"/>
-          <p:cNvSpPr txBox="1"/>
-          <p:nvPr/>
-        </p:nvSpPr>
-        <p:spPr>
-          <a:xfrm>
-            <a:off x="3931920" y="1828800"/>
-            <a:ext cx="7299655" cy="714086"/>
-          </a:xfrm>
-          <a:prstGeom prst="rect">
-            <a:avLst/>
-          </a:prstGeom>
-          <a:noFill/>
-          <a:ln/>
-        </p:spPr>
-        <p:txBody>
-          <a:bodyPr wrap="square" lIns="0" tIns="0" rIns="0" bIns="0" rtlCol="0" anchor="ctr"/>
-          <a:lstStyle/>
-          <a:p>
-            <a:pPr indent="0" marL="0">
-              <a:buNone/>
-            </a:pPr>
-            <a:r>
-              <a:rPr lang="en-US" sz="1400" b="1" dirty="0">
-                <a:solidFill>
-                  <a:srgbClr val="1B4D89"/>
-                </a:solidFill>
-                <a:latin typeface="Arial" pitchFamily="34" charset="0"/>
-                <a:ea typeface="Arial" pitchFamily="34" charset="-122"/>
-                <a:cs typeface="Arial" pitchFamily="34" charset="-120"/>
-              </a:rPr>
-              <a:t>1  </a:t>
-            </a:r>
-            <a:pPr indent="0" marL="0">
-              <a:buNone/>
-            </a:pPr>
-            <a:r>
-              <a:rPr lang="en-US" sz="1400" dirty="0">
-                <a:solidFill>
-                  <a:srgbClr val="374151"/>
-                </a:solidFill>
-                <a:latin typeface="Arial" pitchFamily="34" charset="0"/>
-                <a:ea typeface="Arial" pitchFamily="34" charset="-122"/>
-                <a:cs typeface="Arial" pitchFamily="34" charset="-120"/>
-              </a:rPr>
-              <a:t>Cos’è l’AI e cosa non è     </a:t>
-            </a:r>
-            <a:pPr indent="0" marL="0">
-              <a:buNone/>
-            </a:pPr>
-            <a:r>
-              <a:rPr lang="en-US" sz="1400" b="1" dirty="0">
-                <a:solidFill>
-                  <a:srgbClr val="1B4D89"/>
-                </a:solidFill>
-                <a:latin typeface="Arial" pitchFamily="34" charset="0"/>
-                <a:ea typeface="Arial" pitchFamily="34" charset="-122"/>
-                <a:cs typeface="Arial" pitchFamily="34" charset="-120"/>
-              </a:rPr>
-              <a:t>2  </a:t>
-            </a:r>
-            <a:pPr indent="0" marL="0">
-              <a:buNone/>
-            </a:pPr>
-            <a:r>
-              <a:rPr lang="en-US" sz="1400" dirty="0">
-                <a:solidFill>
-                  <a:srgbClr val="374151"/>
-                </a:solidFill>
-                <a:latin typeface="Arial" pitchFamily="34" charset="0"/>
-                <a:ea typeface="Arial" pitchFamily="34" charset="-122"/>
-                <a:cs typeface="Arial" pitchFamily="34" charset="-120"/>
-              </a:rPr>
-              <a:t>Come funziona e perché sbaglia     </a:t>
-            </a:r>
-            <a:pPr indent="0" marL="0">
-              <a:buNone/>
-            </a:pPr>
-            <a:r>
-              <a:rPr lang="en-US" sz="1400" b="1" dirty="0">
-                <a:solidFill>
-                  <a:srgbClr val="1B4D89"/>
-                </a:solidFill>
-                <a:latin typeface="Arial" pitchFamily="34" charset="0"/>
-                <a:ea typeface="Arial" pitchFamily="34" charset="-122"/>
-                <a:cs typeface="Arial" pitchFamily="34" charset="-120"/>
-              </a:rPr>
-              <a:t>3  </a:t>
-            </a:r>
-            <a:pPr indent="0" marL="0">
-              <a:buNone/>
-            </a:pPr>
-            <a:r>
-              <a:rPr lang="en-US" sz="1400" dirty="0">
-                <a:solidFill>
-                  <a:srgbClr val="374151"/>
-                </a:solidFill>
-                <a:latin typeface="Arial" pitchFamily="34" charset="0"/>
-                <a:ea typeface="Arial" pitchFamily="34" charset="-122"/>
-                <a:cs typeface="Arial" pitchFamily="34" charset="-120"/>
-              </a:rPr>
-              <a:t>Gli strumenti</a:t>
-            </a:r>
-            <a:endParaRPr lang="en-US" sz="1400" dirty="0"/>
-          </a:p>
-        </p:txBody>
-      </p:sp>
-      <p:sp>
-        <p:nvSpPr>
-          <p:cNvPr id="7" name="Sezione Usare in sicurezza"/>
+          <p:cNvPr id="5" name="Icona Connettore (MCP) fondo"/>
           <p:cNvSpPr/>
           <p:nvPr/>
         </p:nvSpPr>
         <p:spPr>
           <a:xfrm>
-            <a:off x="685800" y="2670902"/>
-            <a:ext cx="10820095" cy="714086"/>
+            <a:off x="1005840" y="2148840"/>
+            <a:ext cx="685800" cy="685800"/>
           </a:xfrm>
           <a:prstGeom prst="roundRect">
             <a:avLst>
-              <a:gd name="adj" fmla="val 15366"/>
+              <a:gd name="adj" fmla="val 18667"/>
+            </a:avLst>
+          </a:prstGeom>
+          <a:solidFill>
+            <a:srgbClr val="EAF2FC"/>
+          </a:solidFill>
+          <a:ln w="12700">
+            <a:solidFill>
+              <a:srgbClr val="EAF2FC"/>
+            </a:solidFill>
+            <a:prstDash val="solid"/>
+          </a:ln>
+        </p:spPr>
+      </p:sp>
+      <p:pic>
+        <p:nvPicPr>
+          <p:cNvPr id="6" name="Icona Connettore (MCP)" descr="preencoded.png">    </p:cNvPr>
+          <p:cNvPicPr>
+            <a:picLocks noChangeAspect="1"/>
+          </p:cNvPicPr>
+          <p:nvPr/>
+        </p:nvPicPr>
+        <p:blipFill>
+          <a:blip r:embed="rId1"/>
+          <a:stretch>
+            <a:fillRect/>
+          </a:stretch>
+        </p:blipFill>
+        <p:spPr>
+          <a:xfrm>
+            <a:off x="1170432" y="2313432"/>
+            <a:ext cx="356616" cy="356616"/>
+          </a:xfrm>
+          <a:prstGeom prst="rect">
+            <a:avLst/>
+          </a:prstGeom>
+        </p:spPr>
+      </p:pic>
+      <p:sp>
+        <p:nvSpPr>
+          <p:cNvPr id="7" name="Titolo Connettore (MCP)"/>
+          <p:cNvSpPr txBox="1"/>
+          <p:nvPr/>
+        </p:nvSpPr>
+        <p:spPr>
+          <a:xfrm>
+            <a:off x="1005840" y="3017520"/>
+            <a:ext cx="2783738" cy="380238"/>
+          </a:xfrm>
+          <a:prstGeom prst="rect">
+            <a:avLst/>
+          </a:prstGeom>
+          <a:noFill/>
+          <a:ln/>
+        </p:spPr>
+        <p:txBody>
+          <a:bodyPr wrap="square" lIns="0" tIns="0" rIns="0" bIns="0" rtlCol="0" anchor="t"/>
+          <a:lstStyle/>
+          <a:p>
+            <a:pPr indent="0" marL="0">
+              <a:buNone/>
+            </a:pPr>
+            <a:r>
+              <a:rPr lang="en-US" sz="2100" b="1" dirty="0">
+                <a:solidFill>
+                  <a:schemeClr val="tx1"/>
+                </a:solidFill>
+                <a:latin typeface="Arial" pitchFamily="34" charset="0"/>
+                <a:ea typeface="Arial" pitchFamily="34" charset="-122"/>
+                <a:cs typeface="Arial" pitchFamily="34" charset="-120"/>
+              </a:rPr>
+              <a:t>Connettore (MCP)</a:t>
+            </a:r>
+            <a:endParaRPr lang="en-US" sz="2100" dirty="0"/>
+          </a:p>
+        </p:txBody>
+      </p:sp>
+      <p:sp>
+        <p:nvSpPr>
+          <p:cNvPr id="8" name="Testo Connettore (MCP)"/>
+          <p:cNvSpPr txBox="1"/>
+          <p:nvPr/>
+        </p:nvSpPr>
+        <p:spPr>
+          <a:xfrm>
+            <a:off x="1005840" y="3470910"/>
+            <a:ext cx="2783738" cy="1357122"/>
+          </a:xfrm>
+          <a:prstGeom prst="rect">
+            <a:avLst/>
+          </a:prstGeom>
+          <a:noFill/>
+          <a:ln/>
+        </p:spPr>
+        <p:txBody>
+          <a:bodyPr wrap="square" lIns="0" tIns="0" rIns="0" bIns="0" rtlCol="0" anchor="t"/>
+          <a:lstStyle/>
+          <a:p>
+            <a:pPr indent="0" marL="0">
+              <a:buNone/>
+            </a:pPr>
+            <a:r>
+              <a:rPr lang="en-US" sz="1600" dirty="0">
+                <a:solidFill>
+                  <a:srgbClr val="374151"/>
+                </a:solidFill>
+                <a:latin typeface="Arial" pitchFamily="34" charset="0"/>
+                <a:ea typeface="Arial" pitchFamily="34" charset="-122"/>
+                <a:cs typeface="Arial" pitchFamily="34" charset="-120"/>
+              </a:rPr>
+              <a:t>Il cavo verso un programma: Claude legge e scrive in Drive, Gmail, Notion. Es.: “trova l’ultima offerta al cliente A”.</a:t>
+            </a:r>
+            <a:endParaRPr lang="en-US" sz="1600" dirty="0"/>
+          </a:p>
+        </p:txBody>
+      </p:sp>
+      <p:sp>
+        <p:nvSpPr>
+          <p:cNvPr id="9" name="Scheda Skill"/>
+          <p:cNvSpPr/>
+          <p:nvPr/>
+        </p:nvSpPr>
+        <p:spPr>
+          <a:xfrm>
+            <a:off x="4383938" y="1828800"/>
+            <a:ext cx="3423818" cy="3063240"/>
+          </a:xfrm>
+          <a:prstGeom prst="roundRect">
+            <a:avLst>
+              <a:gd name="adj" fmla="val 4179"/>
             </a:avLst>
           </a:prstGeom>
           <a:solidFill>
@@ -11183,183 +14028,18 @@
       </p:sp>
       <p:sp>
         <p:nvSpPr>
-          <p:cNvPr id="8" name="Nome Usare in sicurezza"/>
-          <p:cNvSpPr txBox="1"/>
-          <p:nvPr/>
-        </p:nvSpPr>
-        <p:spPr>
-          <a:xfrm>
-            <a:off x="941832" y="2670902"/>
-            <a:ext cx="2788920" cy="714086"/>
-          </a:xfrm>
-          <a:prstGeom prst="rect">
-            <a:avLst/>
-          </a:prstGeom>
-          <a:noFill/>
-          <a:ln/>
-        </p:spPr>
-        <p:txBody>
-          <a:bodyPr wrap="square" lIns="0" tIns="0" rIns="0" bIns="0" rtlCol="0" anchor="ctr"/>
-          <a:lstStyle/>
-          <a:p>
-            <a:pPr indent="0" marL="0">
-              <a:buNone/>
-            </a:pPr>
-            <a:r>
-              <a:rPr lang="en-US" sz="1100" b="1" spc="200" kern="0" dirty="0">
-                <a:solidFill>
-                  <a:srgbClr val="1B4D89"/>
-                </a:solidFill>
-                <a:latin typeface="Arial" pitchFamily="34" charset="0"/>
-                <a:ea typeface="Arial" pitchFamily="34" charset="-122"/>
-                <a:cs typeface="Arial" pitchFamily="34" charset="-120"/>
-              </a:rPr>
-              <a:t>SEZIONE B</a:t>
-            </a:r>
-            <a:endParaRPr lang="en-US" sz="1500" dirty="0"/>
-          </a:p>
-          <a:p>
-            <a:pPr indent="0" marL="0">
-              <a:buNone/>
-            </a:pPr>
-            <a:r>
-              <a:rPr lang="en-US" sz="1600" b="1" dirty="0">
-                <a:solidFill>
-                  <a:schemeClr val="tx1"/>
-                </a:solidFill>
-                <a:latin typeface="Arial" pitchFamily="34" charset="0"/>
-                <a:ea typeface="Arial" pitchFamily="34" charset="-122"/>
-                <a:cs typeface="Arial" pitchFamily="34" charset="-120"/>
-              </a:rPr>
-              <a:t>Usare in sicurezza</a:t>
-            </a:r>
-            <a:endParaRPr lang="en-US" sz="1500" dirty="0"/>
-          </a:p>
-        </p:txBody>
-      </p:sp>
-      <p:sp>
-        <p:nvSpPr>
-          <p:cNvPr id="9" name="Capitoli Usare in sicurezza"/>
-          <p:cNvSpPr txBox="1"/>
-          <p:nvPr/>
-        </p:nvSpPr>
-        <p:spPr>
-          <a:xfrm>
-            <a:off x="3931920" y="2670902"/>
-            <a:ext cx="7299655" cy="714086"/>
-          </a:xfrm>
-          <a:prstGeom prst="rect">
-            <a:avLst/>
-          </a:prstGeom>
-          <a:noFill/>
-          <a:ln/>
-        </p:spPr>
-        <p:txBody>
-          <a:bodyPr wrap="square" lIns="0" tIns="0" rIns="0" bIns="0" rtlCol="0" anchor="ctr"/>
-          <a:lstStyle/>
-          <a:p>
-            <a:pPr indent="0" marL="0">
-              <a:buNone/>
-            </a:pPr>
-            <a:r>
-              <a:rPr lang="en-US" sz="1400" b="1" dirty="0">
-                <a:solidFill>
-                  <a:srgbClr val="1B4D89"/>
-                </a:solidFill>
-                <a:latin typeface="Arial" pitchFamily="34" charset="0"/>
-                <a:ea typeface="Arial" pitchFamily="34" charset="-122"/>
-                <a:cs typeface="Arial" pitchFamily="34" charset="-120"/>
-              </a:rPr>
-              <a:t>4  </a:t>
-            </a:r>
-            <a:pPr indent="0" marL="0">
-              <a:buNone/>
-            </a:pPr>
-            <a:r>
-              <a:rPr lang="en-US" sz="1400" dirty="0">
-                <a:solidFill>
-                  <a:srgbClr val="374151"/>
-                </a:solidFill>
-                <a:latin typeface="Arial" pitchFamily="34" charset="0"/>
-                <a:ea typeface="Arial" pitchFamily="34" charset="-122"/>
-                <a:cs typeface="Arial" pitchFamily="34" charset="-120"/>
-              </a:rPr>
-              <a:t>Dati e privacy: spegni l’addestramento     </a:t>
-            </a:r>
-            <a:pPr indent="0" marL="0">
-              <a:buNone/>
-            </a:pPr>
-            <a:r>
-              <a:rPr lang="en-US" sz="1400" b="1" dirty="0">
-                <a:solidFill>
-                  <a:srgbClr val="1B4D89"/>
-                </a:solidFill>
-                <a:latin typeface="Arial" pitchFamily="34" charset="0"/>
-                <a:ea typeface="Arial" pitchFamily="34" charset="-122"/>
-                <a:cs typeface="Arial" pitchFamily="34" charset="-120"/>
-              </a:rPr>
-              <a:t>5  </a:t>
-            </a:r>
-            <a:pPr indent="0" marL="0">
-              <a:buNone/>
-            </a:pPr>
-            <a:r>
-              <a:rPr lang="en-US" sz="1400" dirty="0">
-                <a:solidFill>
-                  <a:srgbClr val="374151"/>
-                </a:solidFill>
-                <a:latin typeface="Arial" pitchFamily="34" charset="0"/>
-                <a:ea typeface="Arial" pitchFamily="34" charset="-122"/>
-                <a:cs typeface="Arial" pitchFamily="34" charset="-120"/>
-              </a:rPr>
-              <a:t>Rischi dell’AI e come verificare     </a:t>
-            </a:r>
-            <a:pPr indent="0" marL="0">
-              <a:buNone/>
-            </a:pPr>
-            <a:r>
-              <a:rPr lang="en-US" sz="1400" b="1" dirty="0">
-                <a:solidFill>
-                  <a:srgbClr val="1B4D89"/>
-                </a:solidFill>
-                <a:latin typeface="Arial" pitchFamily="34" charset="0"/>
-                <a:ea typeface="Arial" pitchFamily="34" charset="-122"/>
-                <a:cs typeface="Arial" pitchFamily="34" charset="-120"/>
-              </a:rPr>
-              <a:t>6  </a:t>
-            </a:r>
-            <a:pPr indent="0" marL="0">
-              <a:buNone/>
-            </a:pPr>
-            <a:r>
-              <a:rPr lang="en-US" sz="1400" dirty="0">
-                <a:solidFill>
-                  <a:srgbClr val="374151"/>
-                </a:solidFill>
-                <a:latin typeface="Arial" pitchFamily="34" charset="0"/>
-                <a:ea typeface="Arial" pitchFamily="34" charset="-122"/>
-                <a:cs typeface="Arial" pitchFamily="34" charset="-120"/>
-              </a:rPr>
-              <a:t>Le regole in azienda</a:t>
-            </a:r>
-            <a:endParaRPr lang="en-US" sz="1400" dirty="0"/>
-          </a:p>
-        </p:txBody>
-      </p:sp>
-      <p:sp>
-        <p:nvSpPr>
-          <p:cNvPr id="10" name="Sezione Usare bene"/>
+          <p:cNvPr id="10" name="Icona Skill fondo"/>
           <p:cNvSpPr/>
           <p:nvPr/>
         </p:nvSpPr>
         <p:spPr>
           <a:xfrm>
-            <a:off x="685800" y="3513003"/>
-            <a:ext cx="10820095" cy="912340"/>
+            <a:off x="4703978" y="2148840"/>
+            <a:ext cx="685800" cy="685800"/>
           </a:xfrm>
           <a:prstGeom prst="roundRect">
             <a:avLst>
-              <a:gd name="adj" fmla="val 12027"/>
+              <a:gd name="adj" fmla="val 18667"/>
             </a:avLst>
           </a:prstGeom>
           <a:solidFill>
@@ -11367,55 +14047,62 @@
           </a:solidFill>
           <a:ln w="12700">
             <a:solidFill>
-              <a:srgbClr val="1B4D89"/>
+              <a:srgbClr val="EAF2FC"/>
             </a:solidFill>
             <a:prstDash val="solid"/>
           </a:ln>
         </p:spPr>
       </p:sp>
-      <p:sp>
-        <p:nvSpPr>
-          <p:cNvPr id="11" name="Nome Usare bene"/>
+      <p:pic>
+        <p:nvPicPr>
+          <p:cNvPr id="11" name="Icona Skill" descr="preencoded.png">    </p:cNvPr>
+          <p:cNvPicPr>
+            <a:picLocks noChangeAspect="1"/>
+          </p:cNvPicPr>
+          <p:nvPr/>
+        </p:nvPicPr>
+        <p:blipFill>
+          <a:blip r:embed="rId2"/>
+          <a:stretch>
+            <a:fillRect/>
+          </a:stretch>
+        </p:blipFill>
+        <p:spPr>
+          <a:xfrm>
+            <a:off x="4868570" y="2313432"/>
+            <a:ext cx="356616" cy="356616"/>
+          </a:xfrm>
+          <a:prstGeom prst="rect">
+            <a:avLst/>
+          </a:prstGeom>
+        </p:spPr>
+      </p:pic>
+      <p:sp>
+        <p:nvSpPr>
+          <p:cNvPr id="12" name="Titolo Skill"/>
           <p:cNvSpPr txBox="1"/>
           <p:nvPr/>
         </p:nvSpPr>
         <p:spPr>
           <a:xfrm>
-            <a:off x="941832" y="3513003"/>
-            <a:ext cx="2788920" cy="912340"/>
-          </a:xfrm>
-          <a:prstGeom prst="rect">
-            <a:avLst/>
-          </a:prstGeom>
-          <a:noFill/>
-          <a:ln/>
-        </p:spPr>
-        <p:txBody>
-          <a:bodyPr wrap="square" lIns="0" tIns="0" rIns="0" bIns="0" rtlCol="0" anchor="ctr"/>
-          <a:lstStyle/>
-          <a:p>
-            <a:pPr indent="0" marL="0">
-              <a:buNone/>
-            </a:pPr>
-            <a:r>
-              <a:rPr lang="en-US" sz="1100" b="1" spc="200" kern="0" dirty="0">
-                <a:solidFill>
-                  <a:srgbClr val="1B4D89"/>
-                </a:solidFill>
-                <a:latin typeface="Arial" pitchFamily="34" charset="0"/>
-                <a:ea typeface="Arial" pitchFamily="34" charset="-122"/>
-                <a:cs typeface="Arial" pitchFamily="34" charset="-120"/>
-              </a:rPr>
-              <a:t>SEZIONE C</a:t>
-            </a:r>
-            <a:endParaRPr lang="en-US" sz="1500" dirty="0"/>
-          </a:p>
-          <a:p>
-            <a:pPr indent="0" marL="0">
-              <a:buNone/>
-            </a:pPr>
-            <a:r>
-              <a:rPr lang="en-US" sz="1600" b="1" dirty="0">
+            <a:off x="4703978" y="3017520"/>
+            <a:ext cx="2783738" cy="380238"/>
+          </a:xfrm>
+          <a:prstGeom prst="rect">
+            <a:avLst/>
+          </a:prstGeom>
+          <a:noFill/>
+          <a:ln/>
+        </p:spPr>
+        <p:txBody>
+          <a:bodyPr wrap="square" lIns="0" tIns="0" rIns="0" bIns="0" rtlCol="0" anchor="t"/>
+          <a:lstStyle/>
+          <a:p>
+            <a:pPr indent="0" marL="0">
+              <a:buNone/>
+            </a:pPr>
+            <a:r>
+              <a:rPr lang="en-US" sz="2100" b="1" dirty="0">
                 <a:solidFill>
                   <a:schemeClr val="tx1"/>
                 </a:solidFill>
@@ -11423,52 +14110,38 @@
                 <a:ea typeface="Arial" pitchFamily="34" charset="-122"/>
                 <a:cs typeface="Arial" pitchFamily="34" charset="-120"/>
               </a:rPr>
-              <a:t>Usare bene</a:t>
-            </a:r>
-            <a:endParaRPr lang="en-US" sz="1500" dirty="0"/>
-          </a:p>
-        </p:txBody>
-      </p:sp>
-      <p:sp>
-        <p:nvSpPr>
-          <p:cNvPr id="12" name="Capitoli Usare bene"/>
+              <a:t>Skill</a:t>
+            </a:r>
+            <a:endParaRPr lang="en-US" sz="2100" dirty="0"/>
+          </a:p>
+        </p:txBody>
+      </p:sp>
+      <p:sp>
+        <p:nvSpPr>
+          <p:cNvPr id="13" name="Testo Skill"/>
           <p:cNvSpPr txBox="1"/>
           <p:nvPr/>
         </p:nvSpPr>
         <p:spPr>
           <a:xfrm>
-            <a:off x="3931920" y="3513003"/>
-            <a:ext cx="7299655" cy="912340"/>
-          </a:xfrm>
-          <a:prstGeom prst="rect">
-            <a:avLst/>
-          </a:prstGeom>
-          <a:noFill/>
-          <a:ln/>
-        </p:spPr>
-        <p:txBody>
-          <a:bodyPr wrap="square" lIns="0" tIns="0" rIns="0" bIns="0" rtlCol="0" anchor="ctr"/>
-          <a:lstStyle/>
-          <a:p>
-            <a:pPr indent="0" marL="0">
-              <a:buNone/>
-            </a:pPr>
-            <a:r>
-              <a:rPr lang="en-US" sz="1400" b="1" dirty="0">
-                <a:solidFill>
-                  <a:srgbClr val="1B4D89"/>
-                </a:solidFill>
-                <a:latin typeface="Arial" pitchFamily="34" charset="0"/>
-                <a:ea typeface="Arial" pitchFamily="34" charset="-122"/>
-                <a:cs typeface="Arial" pitchFamily="34" charset="-120"/>
-              </a:rPr>
-              <a:t>7  </a:t>
-            </a:r>
-            <a:pPr indent="0" marL="0">
-              <a:buNone/>
-            </a:pPr>
-            <a:r>
-              <a:rPr lang="en-US" sz="1400" dirty="0">
+            <a:off x="4703978" y="3470910"/>
+            <a:ext cx="2783738" cy="1357122"/>
+          </a:xfrm>
+          <a:prstGeom prst="rect">
+            <a:avLst/>
+          </a:prstGeom>
+          <a:noFill/>
+          <a:ln/>
+        </p:spPr>
+        <p:txBody>
+          <a:bodyPr wrap="square" lIns="0" tIns="0" rIns="0" bIns="0" rtlCol="0" anchor="t"/>
+          <a:lstStyle/>
+          <a:p>
+            <a:pPr indent="0" marL="0">
+              <a:buNone/>
+            </a:pPr>
+            <a:r>
+              <a:rPr lang="en-US" sz="1600" dirty="0">
                 <a:solidFill>
                   <a:srgbClr val="374151"/>
                 </a:solidFill>
@@ -11476,358 +14149,26 @@
                 <a:ea typeface="Arial" pitchFamily="34" charset="-122"/>
                 <a:cs typeface="Arial" pitchFamily="34" charset="-120"/>
               </a:rPr>
-              <a:t>Scrivere un buon prompt     </a:t>
-            </a:r>
-            <a:pPr indent="0" marL="0">
-              <a:buNone/>
-            </a:pPr>
-            <a:r>
-              <a:rPr lang="en-US" sz="1400" b="1" dirty="0">
-                <a:solidFill>
-                  <a:srgbClr val="1B4D89"/>
-                </a:solidFill>
-                <a:latin typeface="Arial" pitchFamily="34" charset="0"/>
-                <a:ea typeface="Arial" pitchFamily="34" charset="-122"/>
-                <a:cs typeface="Arial" pitchFamily="34" charset="-120"/>
-              </a:rPr>
-              <a:t>8  </a:t>
-            </a:r>
-            <a:pPr indent="0" marL="0">
-              <a:buNone/>
-            </a:pPr>
-            <a:r>
-              <a:rPr lang="en-US" sz="1400" dirty="0">
-                <a:solidFill>
-                  <a:srgbClr val="374151"/>
-                </a:solidFill>
-                <a:latin typeface="Arial" pitchFamily="34" charset="0"/>
-                <a:ea typeface="Arial" pitchFamily="34" charset="-122"/>
-                <a:cs typeface="Arial" pitchFamily="34" charset="-120"/>
-              </a:rPr>
-              <a:t>Progetti, memoria, istruzioni e regole     </a:t>
-            </a:r>
-            <a:pPr indent="0" marL="0">
-              <a:buNone/>
-            </a:pPr>
-            <a:r>
-              <a:rPr lang="en-US" sz="1400" b="1" dirty="0">
-                <a:solidFill>
-                  <a:srgbClr val="1B4D89"/>
-                </a:solidFill>
-                <a:latin typeface="Arial" pitchFamily="34" charset="0"/>
-                <a:ea typeface="Arial" pitchFamily="34" charset="-122"/>
-                <a:cs typeface="Arial" pitchFamily="34" charset="-120"/>
-              </a:rPr>
-              <a:t>9  </a:t>
-            </a:r>
-            <a:pPr indent="0" marL="0">
-              <a:buNone/>
-            </a:pPr>
-            <a:r>
-              <a:rPr lang="en-US" sz="1400" dirty="0">
-                <a:solidFill>
-                  <a:srgbClr val="374151"/>
-                </a:solidFill>
-                <a:latin typeface="Arial" pitchFamily="34" charset="0"/>
-                <a:ea typeface="Arial" pitchFamily="34" charset="-122"/>
-                <a:cs typeface="Arial" pitchFamily="34" charset="-120"/>
-              </a:rPr>
-              <a:t>Prompt pronti per ruolo     </a:t>
-            </a:r>
-            <a:pPr indent="0" marL="0">
-              <a:buNone/>
-            </a:pPr>
-            <a:r>
-              <a:rPr lang="en-US" sz="1400" b="1" dirty="0">
-                <a:solidFill>
-                  <a:srgbClr val="1B4D89"/>
-                </a:solidFill>
-                <a:latin typeface="Arial" pitchFamily="34" charset="0"/>
-                <a:ea typeface="Arial" pitchFamily="34" charset="-122"/>
-                <a:cs typeface="Arial" pitchFamily="34" charset="-120"/>
-              </a:rPr>
-              <a:t>10  </a:t>
-            </a:r>
-            <a:pPr indent="0" marL="0">
-              <a:buNone/>
-            </a:pPr>
-            <a:r>
-              <a:rPr lang="en-US" sz="1400" dirty="0">
-                <a:solidFill>
-                  <a:srgbClr val="374151"/>
-                </a:solidFill>
-                <a:latin typeface="Arial" pitchFamily="34" charset="0"/>
-                <a:ea typeface="Arial" pitchFamily="34" charset="-122"/>
-                <a:cs typeface="Arial" pitchFamily="34" charset="-120"/>
-              </a:rPr>
-              <a:t>Documenti, dati e ricerca     </a:t>
-            </a:r>
-            <a:pPr indent="0" marL="0">
-              <a:buNone/>
-            </a:pPr>
-            <a:r>
-              <a:rPr lang="en-US" sz="1400" b="1" dirty="0">
-                <a:solidFill>
-                  <a:srgbClr val="1B4D89"/>
-                </a:solidFill>
-                <a:latin typeface="Arial" pitchFamily="34" charset="0"/>
-                <a:ea typeface="Arial" pitchFamily="34" charset="-122"/>
-                <a:cs typeface="Arial" pitchFamily="34" charset="-120"/>
-              </a:rPr>
-              <a:t>11  </a:t>
-            </a:r>
-            <a:pPr indent="0" marL="0">
-              <a:buNone/>
-            </a:pPr>
-            <a:r>
-              <a:rPr lang="en-US" sz="1400" dirty="0">
-                <a:solidFill>
-                  <a:srgbClr val="374151"/>
-                </a:solidFill>
-                <a:latin typeface="Arial" pitchFamily="34" charset="0"/>
-                <a:ea typeface="Arial" pitchFamily="34" charset="-122"/>
-                <a:cs typeface="Arial" pitchFamily="34" charset="-120"/>
-              </a:rPr>
-              <a:t>L’azienda pronta per l’AI</a:t>
-            </a:r>
-            <a:endParaRPr lang="en-US" sz="1400" dirty="0"/>
-          </a:p>
-        </p:txBody>
-      </p:sp>
-      <p:sp>
-        <p:nvSpPr>
-          <p:cNvPr id="13" name="Sezione Collegare e automatizzare"/>
+              <a:t>La procedura scritta: istruzioni, modelli ed esempi. Claude la apre da sola quando la richiesta corrisponde. Es.: verbale nel formato aziendale.</a:t>
+            </a:r>
+            <a:endParaRPr lang="en-US" sz="1600" dirty="0"/>
+          </a:p>
+        </p:txBody>
+      </p:sp>
+      <p:sp>
+        <p:nvSpPr>
+          <p:cNvPr id="14" name="Scheda Plugin"/>
           <p:cNvSpPr/>
           <p:nvPr/>
         </p:nvSpPr>
         <p:spPr>
           <a:xfrm>
-            <a:off x="685800" y="4553359"/>
-            <a:ext cx="10820095" cy="714086"/>
+            <a:off x="8082077" y="1828800"/>
+            <a:ext cx="3423818" cy="3063240"/>
           </a:xfrm>
           <a:prstGeom prst="roundRect">
             <a:avLst>
-              <a:gd name="adj" fmla="val 15366"/>
-            </a:avLst>
-          </a:prstGeom>
-          <a:solidFill>
-            <a:srgbClr val="EAF2FC"/>
-          </a:solidFill>
-          <a:ln w="12700">
-            <a:solidFill>
-              <a:srgbClr val="1B4D89"/>
-            </a:solidFill>
-            <a:prstDash val="solid"/>
-          </a:ln>
-        </p:spPr>
-      </p:sp>
-      <p:sp>
-        <p:nvSpPr>
-          <p:cNvPr id="14" name="Nome Collegare e automatizzare"/>
-          <p:cNvSpPr txBox="1"/>
-          <p:nvPr/>
-        </p:nvSpPr>
-        <p:spPr>
-          <a:xfrm>
-            <a:off x="941832" y="4553359"/>
-            <a:ext cx="2788920" cy="714086"/>
-          </a:xfrm>
-          <a:prstGeom prst="rect">
-            <a:avLst/>
-          </a:prstGeom>
-          <a:noFill/>
-          <a:ln/>
-        </p:spPr>
-        <p:txBody>
-          <a:bodyPr wrap="square" lIns="0" tIns="0" rIns="0" bIns="0" rtlCol="0" anchor="ctr"/>
-          <a:lstStyle/>
-          <a:p>
-            <a:pPr indent="0" marL="0">
-              <a:buNone/>
-            </a:pPr>
-            <a:r>
-              <a:rPr lang="en-US" sz="1100" b="1" spc="200" kern="0" dirty="0">
-                <a:solidFill>
-                  <a:srgbClr val="1B4D89"/>
-                </a:solidFill>
-                <a:latin typeface="Arial" pitchFamily="34" charset="0"/>
-                <a:ea typeface="Arial" pitchFamily="34" charset="-122"/>
-                <a:cs typeface="Arial" pitchFamily="34" charset="-120"/>
-              </a:rPr>
-              <a:t>SEZIONE D</a:t>
-            </a:r>
-            <a:endParaRPr lang="en-US" sz="1500" dirty="0"/>
-          </a:p>
-          <a:p>
-            <a:pPr indent="0" marL="0">
-              <a:buNone/>
-            </a:pPr>
-            <a:r>
-              <a:rPr lang="en-US" sz="1600" b="1" dirty="0">
-                <a:solidFill>
-                  <a:schemeClr val="tx1"/>
-                </a:solidFill>
-                <a:latin typeface="Arial" pitchFamily="34" charset="0"/>
-                <a:ea typeface="Arial" pitchFamily="34" charset="-122"/>
-                <a:cs typeface="Arial" pitchFamily="34" charset="-120"/>
-              </a:rPr>
-              <a:t>Collegare e automatizzare</a:t>
-            </a:r>
-            <a:endParaRPr lang="en-US" sz="1500" dirty="0"/>
-          </a:p>
-        </p:txBody>
-      </p:sp>
-      <p:sp>
-        <p:nvSpPr>
-          <p:cNvPr id="15" name="Capitoli Collegare e automatizzare"/>
-          <p:cNvSpPr txBox="1"/>
-          <p:nvPr/>
-        </p:nvSpPr>
-        <p:spPr>
-          <a:xfrm>
-            <a:off x="3931920" y="4553359"/>
-            <a:ext cx="7299655" cy="714086"/>
-          </a:xfrm>
-          <a:prstGeom prst="rect">
-            <a:avLst/>
-          </a:prstGeom>
-          <a:noFill/>
-          <a:ln/>
-        </p:spPr>
-        <p:txBody>
-          <a:bodyPr wrap="square" lIns="0" tIns="0" rIns="0" bIns="0" rtlCol="0" anchor="ctr"/>
-          <a:lstStyle/>
-          <a:p>
-            <a:pPr indent="0" marL="0">
-              <a:buNone/>
-            </a:pPr>
-            <a:r>
-              <a:rPr lang="en-US" sz="1400" b="1" dirty="0">
-                <a:solidFill>
-                  <a:srgbClr val="1B4D89"/>
-                </a:solidFill>
-                <a:latin typeface="Arial" pitchFamily="34" charset="0"/>
-                <a:ea typeface="Arial" pitchFamily="34" charset="-122"/>
-                <a:cs typeface="Arial" pitchFamily="34" charset="-120"/>
-              </a:rPr>
-              <a:t>12  </a:t>
-            </a:r>
-            <a:pPr indent="0" marL="0">
-              <a:buNone/>
-            </a:pPr>
-            <a:r>
-              <a:rPr lang="en-US" sz="1400" dirty="0">
-                <a:solidFill>
-                  <a:srgbClr val="374151"/>
-                </a:solidFill>
-                <a:latin typeface="Arial" pitchFamily="34" charset="0"/>
-                <a:ea typeface="Arial" pitchFamily="34" charset="-122"/>
-                <a:cs typeface="Arial" pitchFamily="34" charset="-120"/>
-              </a:rPr>
-              <a:t>Connettori e MCP     </a:t>
-            </a:r>
-            <a:pPr indent="0" marL="0">
-              <a:buNone/>
-            </a:pPr>
-            <a:r>
-              <a:rPr lang="en-US" sz="1400" b="1" dirty="0">
-                <a:solidFill>
-                  <a:srgbClr val="1B4D89"/>
-                </a:solidFill>
-                <a:latin typeface="Arial" pitchFamily="34" charset="0"/>
-                <a:ea typeface="Arial" pitchFamily="34" charset="-122"/>
-                <a:cs typeface="Arial" pitchFamily="34" charset="-120"/>
-              </a:rPr>
-              <a:t>13  </a:t>
-            </a:r>
-            <a:pPr indent="0" marL="0">
-              <a:buNone/>
-            </a:pPr>
-            <a:r>
-              <a:rPr lang="en-US" sz="1400" dirty="0">
-                <a:solidFill>
-                  <a:srgbClr val="374151"/>
-                </a:solidFill>
-                <a:latin typeface="Arial" pitchFamily="34" charset="0"/>
-                <a:ea typeface="Arial" pitchFamily="34" charset="-122"/>
-                <a:cs typeface="Arial" pitchFamily="34" charset="-120"/>
-              </a:rPr>
-              <a:t>Skill     </a:t>
-            </a:r>
-            <a:pPr indent="0" marL="0">
-              <a:buNone/>
-            </a:pPr>
-            <a:r>
-              <a:rPr lang="en-US" sz="1400" b="1" dirty="0">
-                <a:solidFill>
-                  <a:srgbClr val="1B4D89"/>
-                </a:solidFill>
-                <a:latin typeface="Arial" pitchFamily="34" charset="0"/>
-                <a:ea typeface="Arial" pitchFamily="34" charset="-122"/>
-                <a:cs typeface="Arial" pitchFamily="34" charset="-120"/>
-              </a:rPr>
-              <a:t>14  </a:t>
-            </a:r>
-            <a:pPr indent="0" marL="0">
-              <a:buNone/>
-            </a:pPr>
-            <a:r>
-              <a:rPr lang="en-US" sz="1400" dirty="0">
-                <a:solidFill>
-                  <a:srgbClr val="374151"/>
-                </a:solidFill>
-                <a:latin typeface="Arial" pitchFamily="34" charset="0"/>
-                <a:ea typeface="Arial" pitchFamily="34" charset="-122"/>
-                <a:cs typeface="Arial" pitchFamily="34" charset="-120"/>
-              </a:rPr>
-              <a:t>Automazioni e agenti     </a:t>
-            </a:r>
-            <a:pPr indent="0" marL="0">
-              <a:buNone/>
-            </a:pPr>
-            <a:r>
-              <a:rPr lang="en-US" sz="1400" b="1" dirty="0">
-                <a:solidFill>
-                  <a:srgbClr val="1B4D89"/>
-                </a:solidFill>
-                <a:latin typeface="Arial" pitchFamily="34" charset="0"/>
-                <a:ea typeface="Arial" pitchFamily="34" charset="-122"/>
-                <a:cs typeface="Arial" pitchFamily="34" charset="-120"/>
-              </a:rPr>
-              <a:t>15  </a:t>
-            </a:r>
-            <a:pPr indent="0" marL="0">
-              <a:buNone/>
-            </a:pPr>
-            <a:r>
-              <a:rPr lang="en-US" sz="1400" dirty="0">
-                <a:solidFill>
-                  <a:srgbClr val="374151"/>
-                </a:solidFill>
-                <a:latin typeface="Arial" pitchFamily="34" charset="0"/>
-                <a:ea typeface="Arial" pitchFamily="34" charset="-122"/>
-                <a:cs typeface="Arial" pitchFamily="34" charset="-120"/>
-              </a:rPr>
-              <a:t>Vibe coding: basi</a:t>
-            </a:r>
-            <a:endParaRPr lang="en-US" sz="1400" dirty="0"/>
-          </a:p>
-        </p:txBody>
-      </p:sp>
-      <p:sp>
-        <p:nvSpPr>
-          <p:cNvPr id="16" name="Sezione Strumenti e verifica"/>
-          <p:cNvSpPr/>
-          <p:nvPr/>
-        </p:nvSpPr>
-        <p:spPr>
-          <a:xfrm>
-            <a:off x="685800" y="5395461"/>
-            <a:ext cx="10820095" cy="685299"/>
-          </a:xfrm>
-          <a:prstGeom prst="roundRect">
-            <a:avLst>
-              <a:gd name="adj" fmla="val 16012"/>
+              <a:gd name="adj" fmla="val 4179"/>
             </a:avLst>
           </a:prstGeom>
           <a:solidFill>
@@ -11843,14 +14184,194 @@
       </p:sp>
       <p:sp>
         <p:nvSpPr>
-          <p:cNvPr id="17" name="Nome Strumenti e verifica"/>
+          <p:cNvPr id="15" name="Icona Plugin fondo"/>
+          <p:cNvSpPr/>
+          <p:nvPr/>
+        </p:nvSpPr>
+        <p:spPr>
+          <a:xfrm>
+            <a:off x="8402117" y="2148840"/>
+            <a:ext cx="685800" cy="685800"/>
+          </a:xfrm>
+          <a:prstGeom prst="roundRect">
+            <a:avLst>
+              <a:gd name="adj" fmla="val 18667"/>
+            </a:avLst>
+          </a:prstGeom>
+          <a:solidFill>
+            <a:srgbClr val="EAF2FC"/>
+          </a:solidFill>
+          <a:ln w="12700">
+            <a:solidFill>
+              <a:srgbClr val="EAF2FC"/>
+            </a:solidFill>
+            <a:prstDash val="solid"/>
+          </a:ln>
+        </p:spPr>
+      </p:sp>
+      <p:pic>
+        <p:nvPicPr>
+          <p:cNvPr id="16" name="Icona Plugin" descr="preencoded.png">    </p:cNvPr>
+          <p:cNvPicPr>
+            <a:picLocks noChangeAspect="1"/>
+          </p:cNvPicPr>
+          <p:nvPr/>
+        </p:nvPicPr>
+        <p:blipFill>
+          <a:blip r:embed="rId3"/>
+          <a:stretch>
+            <a:fillRect/>
+          </a:stretch>
+        </p:blipFill>
+        <p:spPr>
+          <a:xfrm>
+            <a:off x="8566709" y="2313432"/>
+            <a:ext cx="356616" cy="356616"/>
+          </a:xfrm>
+          <a:prstGeom prst="rect">
+            <a:avLst/>
+          </a:prstGeom>
+        </p:spPr>
+      </p:pic>
+      <p:sp>
+        <p:nvSpPr>
+          <p:cNvPr id="17" name="Titolo Plugin"/>
           <p:cNvSpPr txBox="1"/>
           <p:nvPr/>
         </p:nvSpPr>
         <p:spPr>
           <a:xfrm>
-            <a:off x="941832" y="5395461"/>
-            <a:ext cx="2788920" cy="685299"/>
+            <a:off x="8402117" y="3017520"/>
+            <a:ext cx="2783738" cy="380238"/>
+          </a:xfrm>
+          <a:prstGeom prst="rect">
+            <a:avLst/>
+          </a:prstGeom>
+          <a:noFill/>
+          <a:ln/>
+        </p:spPr>
+        <p:txBody>
+          <a:bodyPr wrap="square" lIns="0" tIns="0" rIns="0" bIns="0" rtlCol="0" anchor="t"/>
+          <a:lstStyle/>
+          <a:p>
+            <a:pPr indent="0" marL="0">
+              <a:buNone/>
+            </a:pPr>
+            <a:r>
+              <a:rPr lang="en-US" sz="2100" b="1" dirty="0">
+                <a:solidFill>
+                  <a:schemeClr val="tx1"/>
+                </a:solidFill>
+                <a:latin typeface="Arial" pitchFamily="34" charset="0"/>
+                <a:ea typeface="Arial" pitchFamily="34" charset="-122"/>
+                <a:cs typeface="Arial" pitchFamily="34" charset="-120"/>
+              </a:rPr>
+              <a:t>Plugin</a:t>
+            </a:r>
+            <a:endParaRPr lang="en-US" sz="2100" dirty="0"/>
+          </a:p>
+        </p:txBody>
+      </p:sp>
+      <p:sp>
+        <p:nvSpPr>
+          <p:cNvPr id="18" name="Testo Plugin"/>
+          <p:cNvSpPr txBox="1"/>
+          <p:nvPr/>
+        </p:nvSpPr>
+        <p:spPr>
+          <a:xfrm>
+            <a:off x="8402117" y="3470910"/>
+            <a:ext cx="2783738" cy="1357122"/>
+          </a:xfrm>
+          <a:prstGeom prst="rect">
+            <a:avLst/>
+          </a:prstGeom>
+          <a:noFill/>
+          <a:ln/>
+        </p:spPr>
+        <p:txBody>
+          <a:bodyPr wrap="square" lIns="0" tIns="0" rIns="0" bIns="0" rtlCol="0" anchor="t"/>
+          <a:lstStyle/>
+          <a:p>
+            <a:pPr indent="0" marL="0">
+              <a:buNone/>
+            </a:pPr>
+            <a:r>
+              <a:rPr lang="en-US" sz="1600" dirty="0">
+                <a:solidFill>
+                  <a:srgbClr val="374151"/>
+                </a:solidFill>
+                <a:latin typeface="Arial" pitchFamily="34" charset="0"/>
+                <a:ea typeface="Arial" pitchFamily="34" charset="-122"/>
+                <a:cs typeface="Arial" pitchFamily="34" charset="-120"/>
+              </a:rPr>
+              <a:t>La cassetta degli attrezzi: più skill, connettori e comandi insieme. Si installa in un clic o da file zip, e tutti lavorano allo stesso modo.</a:t>
+            </a:r>
+            <a:endParaRPr lang="en-US" sz="1600" dirty="0"/>
+          </a:p>
+        </p:txBody>
+      </p:sp>
+      <p:sp>
+        <p:nvSpPr>
+          <p:cNvPr id="19" name="nota Accesso minimo:"/>
+          <p:cNvSpPr/>
+          <p:nvPr/>
+        </p:nvSpPr>
+        <p:spPr>
+          <a:xfrm>
+            <a:off x="685800" y="5212080"/>
+            <a:ext cx="10820095" cy="777240"/>
+          </a:xfrm>
+          <a:prstGeom prst="roundRect">
+            <a:avLst>
+              <a:gd name="adj" fmla="val 16471"/>
+            </a:avLst>
+          </a:prstGeom>
+          <a:solidFill>
+            <a:srgbClr val="EAF2FC"/>
+          </a:solidFill>
+          <a:ln w="12700">
+            <a:solidFill>
+              <a:srgbClr val="EAF2FC"/>
+            </a:solidFill>
+            <a:prstDash val="solid"/>
+          </a:ln>
+        </p:spPr>
+      </p:sp>
+      <p:pic>
+        <p:nvPicPr>
+          <p:cNvPr id="20" name="nota icona" descr="preencoded.png">    </p:cNvPr>
+          <p:cNvPicPr>
+            <a:picLocks noChangeAspect="1"/>
+          </p:cNvPicPr>
+          <p:nvPr/>
+        </p:nvPicPr>
+        <p:blipFill>
+          <a:blip r:embed="rId4"/>
+          <a:stretch>
+            <a:fillRect/>
+          </a:stretch>
+        </p:blipFill>
+        <p:spPr>
+          <a:xfrm>
+            <a:off x="914400" y="5436108"/>
+            <a:ext cx="329184" cy="329184"/>
+          </a:xfrm>
+          <a:prstGeom prst="rect">
+            <a:avLst/>
+          </a:prstGeom>
+        </p:spPr>
+      </p:pic>
+      <p:sp>
+        <p:nvSpPr>
+          <p:cNvPr id="21" name="nota testo"/>
+          <p:cNvSpPr txBox="1"/>
+          <p:nvPr/>
+        </p:nvSpPr>
+        <p:spPr>
+          <a:xfrm>
+            <a:off x="1417320" y="5212080"/>
+            <a:ext cx="9859975" cy="777240"/>
           </a:xfrm>
           <a:prstGeom prst="rect">
             <a:avLst/>
@@ -11866,7 +14387,7 @@
               <a:buNone/>
             </a:pPr>
             <a:r>
-              <a:rPr lang="en-US" sz="1100" b="1" spc="200" kern="0" dirty="0">
+              <a:rPr lang="en-US" sz="1600" b="1" dirty="0">
                 <a:solidFill>
                   <a:srgbClr val="1B4D89"/>
                 </a:solidFill>
@@ -11874,16 +14395,13 @@
                 <a:ea typeface="Arial" pitchFamily="34" charset="-122"/>
                 <a:cs typeface="Arial" pitchFamily="34" charset="-120"/>
               </a:rPr>
-              <a:t>SEZIONE E</a:t>
-            </a:r>
-            <a:endParaRPr lang="en-US" sz="1500" dirty="0"/>
-          </a:p>
-          <a:p>
-            <a:pPr indent="0" marL="0">
-              <a:buNone/>
-            </a:pPr>
-            <a:r>
-              <a:rPr lang="en-US" sz="1600" b="1" dirty="0">
+              <a:t>Accesso minimo: </a:t>
+            </a:r>
+            <a:pPr indent="0" marL="0">
+              <a:buNone/>
+            </a:pPr>
+            <a:r>
+              <a:rPr lang="en-US" sz="1600" dirty="0">
                 <a:solidFill>
                   <a:schemeClr val="tx1"/>
                 </a:solidFill>
@@ -11891,174 +14409,9 @@
                 <a:ea typeface="Arial" pitchFamily="34" charset="-122"/>
                 <a:cs typeface="Arial" pitchFamily="34" charset="-120"/>
               </a:rPr>
-              <a:t>Strumenti e verifica</a:t>
-            </a:r>
-            <a:endParaRPr lang="en-US" sz="1500" dirty="0"/>
-          </a:p>
-        </p:txBody>
-      </p:sp>
-      <p:sp>
-        <p:nvSpPr>
-          <p:cNvPr id="18" name="Capitoli Strumenti e verifica"/>
-          <p:cNvSpPr txBox="1"/>
-          <p:nvPr/>
-        </p:nvSpPr>
-        <p:spPr>
-          <a:xfrm>
-            <a:off x="3931920" y="5395461"/>
-            <a:ext cx="7299655" cy="685299"/>
-          </a:xfrm>
-          <a:prstGeom prst="rect">
-            <a:avLst/>
-          </a:prstGeom>
-          <a:noFill/>
-          <a:ln/>
-        </p:spPr>
-        <p:txBody>
-          <a:bodyPr wrap="square" lIns="0" tIns="0" rIns="0" bIns="0" rtlCol="0" anchor="ctr"/>
-          <a:lstStyle/>
-          <a:p>
-            <a:pPr indent="0" marL="0">
-              <a:buNone/>
-            </a:pPr>
-            <a:r>
-              <a:rPr lang="en-US" sz="1400" b="1" dirty="0">
-                <a:solidFill>
-                  <a:srgbClr val="1B4D89"/>
-                </a:solidFill>
-                <a:latin typeface="Arial" pitchFamily="34" charset="0"/>
-                <a:ea typeface="Arial" pitchFamily="34" charset="-122"/>
-                <a:cs typeface="Arial" pitchFamily="34" charset="-120"/>
-              </a:rPr>
-              <a:t>16  </a:t>
-            </a:r>
-            <a:pPr indent="0" marL="0">
-              <a:buNone/>
-            </a:pPr>
-            <a:r>
-              <a:rPr lang="en-US" sz="1400" dirty="0">
-                <a:solidFill>
-                  <a:srgbClr val="374151"/>
-                </a:solidFill>
-                <a:latin typeface="Arial" pitchFamily="34" charset="0"/>
-                <a:ea typeface="Arial" pitchFamily="34" charset="-122"/>
-                <a:cs typeface="Arial" pitchFamily="34" charset="-120"/>
-              </a:rPr>
-              <a:t>Tech stack AI     </a:t>
-            </a:r>
-            <a:pPr indent="0" marL="0">
-              <a:buNone/>
-            </a:pPr>
-            <a:r>
-              <a:rPr lang="en-US" sz="1400" b="1" dirty="0">
-                <a:solidFill>
-                  <a:srgbClr val="1B4D89"/>
-                </a:solidFill>
-                <a:latin typeface="Arial" pitchFamily="34" charset="0"/>
-                <a:ea typeface="Arial" pitchFamily="34" charset="-122"/>
-                <a:cs typeface="Arial" pitchFamily="34" charset="-120"/>
-              </a:rPr>
-              <a:t>17  </a:t>
-            </a:r>
-            <a:pPr indent="0" marL="0">
-              <a:buNone/>
-            </a:pPr>
-            <a:r>
-              <a:rPr lang="en-US" sz="1400" dirty="0">
-                <a:solidFill>
-                  <a:srgbClr val="374151"/>
-                </a:solidFill>
-                <a:latin typeface="Arial" pitchFamily="34" charset="0"/>
-                <a:ea typeface="Arial" pitchFamily="34" charset="-122"/>
-                <a:cs typeface="Arial" pitchFamily="34" charset="-120"/>
-              </a:rPr>
-              <a:t>Checklist     </a:t>
-            </a:r>
-            <a:pPr indent="0" marL="0">
-              <a:buNone/>
-            </a:pPr>
-            <a:r>
-              <a:rPr lang="en-US" sz="1400" b="1" dirty="0">
-                <a:solidFill>
-                  <a:srgbClr val="1B4D89"/>
-                </a:solidFill>
-                <a:latin typeface="Arial" pitchFamily="34" charset="0"/>
-                <a:ea typeface="Arial" pitchFamily="34" charset="-122"/>
-                <a:cs typeface="Arial" pitchFamily="34" charset="-120"/>
-              </a:rPr>
-              <a:t>18  </a:t>
-            </a:r>
-            <a:pPr indent="0" marL="0">
-              <a:buNone/>
-            </a:pPr>
-            <a:r>
-              <a:rPr lang="en-US" sz="1400" dirty="0">
-                <a:solidFill>
-                  <a:srgbClr val="374151"/>
-                </a:solidFill>
-                <a:latin typeface="Arial" pitchFamily="34" charset="0"/>
-                <a:ea typeface="Arial" pitchFamily="34" charset="-122"/>
-                <a:cs typeface="Arial" pitchFamily="34" charset="-120"/>
-              </a:rPr>
-              <a:t>Test     </a:t>
-            </a:r>
-            <a:pPr indent="0" marL="0">
-              <a:buNone/>
-            </a:pPr>
-            <a:r>
-              <a:rPr lang="en-US" sz="1400" b="1" dirty="0">
-                <a:solidFill>
-                  <a:srgbClr val="1B4D89"/>
-                </a:solidFill>
-                <a:latin typeface="Arial" pitchFamily="34" charset="0"/>
-                <a:ea typeface="Arial" pitchFamily="34" charset="-122"/>
-                <a:cs typeface="Arial" pitchFamily="34" charset="-120"/>
-              </a:rPr>
-              <a:t>19  </a:t>
-            </a:r>
-            <a:pPr indent="0" marL="0">
-              <a:buNone/>
-            </a:pPr>
-            <a:r>
-              <a:rPr lang="en-US" sz="1400" dirty="0">
-                <a:solidFill>
-                  <a:srgbClr val="374151"/>
-                </a:solidFill>
-                <a:latin typeface="Arial" pitchFamily="34" charset="0"/>
-                <a:ea typeface="Arial" pitchFamily="34" charset="-122"/>
-                <a:cs typeface="Arial" pitchFamily="34" charset="-120"/>
-              </a:rPr>
-              <a:t>Glossario     </a:t>
-            </a:r>
-            <a:pPr indent="0" marL="0">
-              <a:buNone/>
-            </a:pPr>
-            <a:r>
-              <a:rPr lang="en-US" sz="1400" b="1" dirty="0">
-                <a:solidFill>
-                  <a:srgbClr val="1B4D89"/>
-                </a:solidFill>
-                <a:latin typeface="Arial" pitchFamily="34" charset="0"/>
-                <a:ea typeface="Arial" pitchFamily="34" charset="-122"/>
-                <a:cs typeface="Arial" pitchFamily="34" charset="-120"/>
-              </a:rPr>
-              <a:t>20  </a:t>
-            </a:r>
-            <a:pPr indent="0" marL="0">
-              <a:buNone/>
-            </a:pPr>
-            <a:r>
-              <a:rPr lang="en-US" sz="1400" dirty="0">
-                <a:solidFill>
-                  <a:srgbClr val="374151"/>
-                </a:solidFill>
-                <a:latin typeface="Arial" pitchFamily="34" charset="0"/>
-                <a:ea typeface="Arial" pitchFamily="34" charset="-122"/>
-                <a:cs typeface="Arial" pitchFamily="34" charset="-120"/>
-              </a:rPr>
-              <a:t>Fonti</a:t>
-            </a:r>
-            <a:endParaRPr lang="en-US" sz="1400" dirty="0"/>
+              <a:t>solo i connettori approvati dalla tua azienda, in sola lettura dove basta. Pagamenti e cancellazioni mai in automatico.</a:t>
+            </a:r>
+            <a:endParaRPr lang="en-US" sz="1600" dirty="0"/>
           </a:p>
         </p:txBody>
       </p:sp>

--- a/AI Parte 1, Presentazione.pptx
+++ b/AI Parte 1, Presentazione.pptx
@@ -20,9 +20,11 @@
     <p:sldId id="268" r:id="rId14"/>
     <p:sldId id="269" r:id="rId15"/>
     <p:sldId id="270" r:id="rId16"/>
+    <p:sldId id="271" r:id="rId17"/>
+    <p:sldId id="272" r:id="rId18"/>
   </p:sldIdLst>
   <p:notesMasterIdLst>
-    <p:notesMasterId r:id="rId17"/>
+    <p:notesMasterId r:id="rId19"/>
   </p:notesMasterIdLst>
   <p:sldSz cx="12192000" cy="6858000"/>
   <p:notesSz cx="6858000" cy="12192000"/>
@@ -121,51 +123,57 @@
   <p:extLst>
     <p:ext uri="{521415D9-36F7-43E2-AB2F-B90AF26B5E84}">
       <p14:sectionLst xmlns:p14="http://schemas.microsoft.com/office/powerpoint/2010/main">
-        <p14:section name="Apertura" id="{94320d4a-86bd-55cc-72b6-5e4a32c76fec}">
+        <p14:section name="Apertura" id="{0a94063c-f417-b3ee-198d-d7acd464d6d0}">
           <p14:sldIdLst>
             <p14:sldId id="256"/>
             <p14:sldId id="257"/>
           </p14:sldIdLst>
         </p14:section>
-        <p14:section name="Perché" id="{bc421386-5e49-f069-7f13-a0cdf1c5f605}">
+        <p14:section name="Perché" id="{3454d679-611f-fbfb-9122-86e40ff42dc0}">
           <p14:sldIdLst>
             <p14:sldId id="258"/>
             <p14:sldId id="259"/>
             <p14:sldId id="260"/>
           </p14:sldIdLst>
         </p14:section>
-        <p14:section name="Capire" id="{f0e7d683-02d5-e6bc-0542-b9457a6ae302}">
+        <p14:section name="Capire" id="{74c3d4da-3a19-729d-2669-d1d433873005}">
           <p14:sldIdLst>
             <p14:sldId id="261"/>
           </p14:sldIdLst>
         </p14:section>
-        <p14:section name="Regole chiave" id="{4b62b8e3-83c6-0e68-d148-dce1106b8d8d}">
+        <p14:section name="Regole chiave" id="{dfa87a58-2e06-bdb0-64fb-8d5c6a7fee68}">
           <p14:sldIdLst>
             <p14:sldId id="262"/>
           </p14:sldIdLst>
         </p14:section>
-        <p14:section name="In azienda" id="{57f8b36a-e9c6-a80c-12a5-20b55263907c}">
+        <p14:section name="In azienda" id="{c124fde9-0e31-7943-cb5d-0e7b9b54455a}">
           <p14:sldIdLst>
             <p14:sldId id="263"/>
             <p14:sldId id="264"/>
             <p14:sldId id="265"/>
           </p14:sldIdLst>
         </p14:section>
-        <p14:section name="Il materiale" id="{07c4cab4-e49a-50da-dcca-a29643d38723}">
+        <p14:section name="Esempio" id="{efb6bbd4-1766-50dc-c04b-05b3ae09577b}">
           <p14:sldIdLst>
             <p14:sldId id="266"/>
+            <p14:sldId id="267"/>
           </p14:sldIdLst>
         </p14:section>
-        <p14:section name="Adesso" id="{49b1b3f1-b04d-b5e7-dba4-b5733265740e}">
+        <p14:section name="Il materiale" id="{8274cab8-6d8e-79ed-c584-b77c145ae093}">
           <p14:sldIdLst>
-            <p14:sldId id="267"/>
             <p14:sldId id="268"/>
           </p14:sldIdLst>
         </p14:section>
-        <p14:section name="Chiusura" id="{b3d6bcaa-80de-b181-4484-d8365d6da4e5}">
+        <p14:section name="Adesso" id="{510cda97-00aa-ec09-bcb5-400532de3048}">
           <p14:sldIdLst>
             <p14:sldId id="269"/>
             <p14:sldId id="270"/>
+          </p14:sldIdLst>
+        </p14:section>
+        <p14:section name="Chiusura" id="{4361bd18-4bd7-e9ad-c48b-de2f0d829a41}">
+          <p14:sldIdLst>
+            <p14:sldId id="271"/>
+            <p14:sldId id="272"/>
           </p14:sldIdLst>
         </p14:section>
       </p14:sectionLst>
@@ -748,7 +756,7 @@
           <a:p>
             <a:r>
               <a:rPr lang="en-US" dirty="0"/>
-              <a:t>Cinque sezioni, tutte per tutti. A, B e C: capire, usare in sicurezza, usare bene, con 27 prompt pronti per amministrazione, comunicazione, vendite, tecnico e cantiere, sviluppo, marketing, design, legale e direzione. La sezione D è la più importante per il lavoro in azienda: connettori e MCP, skill, agenti e basi di vibe coding. La E chiude con strumenti, checklist e test.</a:t>
+              <a:t>Un esempio vero: Real Estate OS, il plugin che uso per le operazioni immobiliari. Le quattordici skill seguono la vita di un’operazione: entra il progetto, si fanno i numeri, si sceglie la struttura e si verificano le regole, si va dagli investitori, si vende. Il punto importante: una skill consegna all’altra. Non si ricopia niente a mano, quindi non si sbagliano i numeri tra un documento e l’altro.</a:t>
             </a:r>
             <a:endParaRPr lang="en-US" dirty="0"/>
           </a:p>
@@ -836,7 +844,7 @@
           <a:p>
             <a:r>
               <a:rPr lang="en-US" dirty="0"/>
-              <a:t>Facciamolo adesso. Primo: spegnere l’addestramento, così le vostre chat non servono a istruire il modello. Secondo: le istruzioni personalizzate, che tolgono all’AI l’abitudine di scrivere troppo. Terzo: un prompt pronto per il vostro lavoro, per vedere subito il risultato.</a:t>
+              <a:t>Quattro demo, una per fase. Notate che non scrivo mai il nome della skill: scrivo la richiesta in italiano e Claude sceglie la skill giusta. Prima demo: una cartella in disordine diventa una cartella standard con la lista di cosa manca. Seconda: una domanda di Lex Koller, e Claude va a verificare le regole sulle fonti ufficiali invece di rispondere a memoria. Terza: un business plan con errori, e li trova con il riferimento di cella. Quarta: dal modello al teaser per investitori. Preparate tutto prima: plugin installato, Drive collegato, solo dati di esempio.</a:t>
             </a:r>
             <a:endParaRPr lang="en-US" dirty="0"/>
           </a:p>
@@ -924,7 +932,7 @@
           <a:p>
             <a:r>
               <a:rPr lang="en-US" dirty="0"/>
-              <a:t>Il materiale si apre da un link nel browser, anche dal telefono, e non serve nessun account. Mostrate dal vivo dove sono l’interruttore della lingua, il menu dei capitoli e la checklist. Il programma è indicativo: decidetelo con il vostro responsabile.</a:t>
+              <a:t>Cinque sezioni, tutte per tutti. A, B e C: capire, usare in sicurezza, usare bene, con 27 prompt pronti per amministrazione, comunicazione, vendite, tecnico e cantiere, sviluppo, marketing, design, legale e direzione. La sezione D è la più importante per il lavoro in azienda: connettori e MCP, skill, agenti e basi di vibe coding. La E chiude con strumenti, checklist e test.</a:t>
             </a:r>
             <a:endParaRPr lang="en-US" dirty="0"/>
           </a:p>
@@ -1012,7 +1020,7 @@
           <a:p>
             <a:r>
               <a:rPr lang="en-US" dirty="0"/>
-              <a:t>Tre frasi da ricordare. L’AI è uno strumento potente: usata con le regole giuste fa risparmiare ore ogni settimana. Se avete dubbi su uno strumento o su un dato, chiedete prima di usarlo.</a:t>
+              <a:t>Facciamolo adesso. Primo: spegnere l’addestramento, così le vostre chat non servono a istruire il modello. Secondo: le istruzioni personalizzate, che tolgono all’AI l’abitudine di scrivere troppo. Terzo: un prompt pronto per il vostro lavoro, per vedere subito il risultato.</a:t>
             </a:r>
             <a:endParaRPr lang="en-US" dirty="0"/>
           </a:p>
@@ -1100,7 +1108,7 @@
           <a:p>
             <a:r>
               <a:rPr lang="en-US" dirty="0"/>
-              <a:t>Le fonti dei numeri e dei casi citati. Tutte verificabili, con data.</a:t>
+              <a:t>Il materiale si apre da un link nel browser, anche dal telefono, e non serve nessun account. Mostrate dal vivo dove sono l’interruttore della lingua, il menu dei capitoli e la checklist. Il programma è indicativo: decidetelo con il vostro responsabile.</a:t>
             </a:r>
             <a:endParaRPr lang="en-US" dirty="0"/>
           </a:p>
@@ -1124,6 +1132,182 @@
             <a:fld id="{F7021451-1387-4CA6-816F-3879F97B5CBC}" type="slidenum">
               <a:rPr lang="en-US"/>
               <a:t>15</a:t>
+            </a:fld>
+            <a:endParaRPr lang="en-US"/>
+          </a:p>
+        </p:txBody>
+      </p:sp>
+    </p:spTree>
+    <p:extLst>
+      <p:ext uri="{BB962C8B-B14F-4D97-AF65-F5344CB8AC3E}">
+        <p14:creationId xmlns:p14="http://schemas.microsoft.com/office/powerpoint/2010/main" val="1024086991"/>
+      </p:ext>
+    </p:extLst>
+  </p:cSld>
+  <p:clrMapOvr>
+    <a:masterClrMapping/>
+  </p:clrMapOvr>
+</p:notes>
+</file>
+
+<file path=ppt/notesSlides/notesSlide16.xml><?xml version="1.0" encoding="utf-8"?>
+<p:notes xmlns:a="http://schemas.openxmlformats.org/drawingml/2006/main" xmlns:r="http://schemas.openxmlformats.org/officeDocument/2006/relationships" xmlns:p="http://schemas.openxmlformats.org/presentationml/2006/main">
+  <p:cSld>
+    <p:spTree>
+      <p:nvGrpSpPr>
+        <p:cNvPr id="1" name=""/>
+        <p:cNvGrpSpPr/>
+        <p:nvPr/>
+      </p:nvGrpSpPr>
+      <p:grpSpPr>
+        <a:xfrm>
+          <a:off x="0" y="0"/>
+          <a:ext cx="0" cy="0"/>
+          <a:chOff x="0" y="0"/>
+          <a:chExt cx="0" cy="0"/>
+        </a:xfrm>
+      </p:grpSpPr>
+      <p:sp>
+        <p:nvSpPr>
+          <p:cNvPr id="2" name="Slide Image Placeholder 1"/>
+          <p:cNvSpPr>
+            <a:spLocks noGrp="1" noRot="1" noChangeAspect="1"/>
+          </p:cNvSpPr>
+          <p:nvPr>
+            <p:ph type="sldImg"/>
+          </p:nvPr>
+        </p:nvSpPr>
+        <p:spPr/>
+      </p:sp>
+      <p:sp>
+        <p:nvSpPr>
+          <p:cNvPr id="3" name="Notes Placeholder 2"/>
+          <p:cNvSpPr>
+            <a:spLocks noGrp="1"/>
+          </p:cNvSpPr>
+          <p:nvPr>
+            <p:ph type="body" idx="1"/>
+          </p:nvPr>
+        </p:nvSpPr>
+        <p:spPr/>
+        <p:txBody>
+          <a:bodyPr/>
+          <a:lstStyle/>
+          <a:p>
+            <a:r>
+              <a:rPr lang="en-US" dirty="0"/>
+              <a:t>Tre frasi da ricordare. L’AI è uno strumento potente: usata con le regole giuste fa risparmiare ore ogni settimana. Se avete dubbi su uno strumento o su un dato, chiedete prima di usarlo.</a:t>
+            </a:r>
+            <a:endParaRPr lang="en-US" dirty="0"/>
+          </a:p>
+        </p:txBody>
+      </p:sp>
+      <p:sp>
+        <p:nvSpPr>
+          <p:cNvPr id="4" name="Slide Number Placeholder 3"/>
+          <p:cNvSpPr>
+            <a:spLocks noGrp="1"/>
+          </p:cNvSpPr>
+          <p:nvPr>
+            <p:ph type="sldNum" sz="quarter" idx="10"/>
+          </p:nvPr>
+        </p:nvSpPr>
+        <p:spPr/>
+        <p:txBody>
+          <a:bodyPr/>
+          <a:lstStyle/>
+          <a:p>
+            <a:fld id="{F7021451-1387-4CA6-816F-3879F97B5CBC}" type="slidenum">
+              <a:rPr lang="en-US"/>
+              <a:t>16</a:t>
+            </a:fld>
+            <a:endParaRPr lang="en-US"/>
+          </a:p>
+        </p:txBody>
+      </p:sp>
+    </p:spTree>
+    <p:extLst>
+      <p:ext uri="{BB962C8B-B14F-4D97-AF65-F5344CB8AC3E}">
+        <p14:creationId xmlns:p14="http://schemas.microsoft.com/office/powerpoint/2010/main" val="1024086991"/>
+      </p:ext>
+    </p:extLst>
+  </p:cSld>
+  <p:clrMapOvr>
+    <a:masterClrMapping/>
+  </p:clrMapOvr>
+</p:notes>
+</file>
+
+<file path=ppt/notesSlides/notesSlide17.xml><?xml version="1.0" encoding="utf-8"?>
+<p:notes xmlns:a="http://schemas.openxmlformats.org/drawingml/2006/main" xmlns:r="http://schemas.openxmlformats.org/officeDocument/2006/relationships" xmlns:p="http://schemas.openxmlformats.org/presentationml/2006/main">
+  <p:cSld>
+    <p:spTree>
+      <p:nvGrpSpPr>
+        <p:cNvPr id="1" name=""/>
+        <p:cNvGrpSpPr/>
+        <p:nvPr/>
+      </p:nvGrpSpPr>
+      <p:grpSpPr>
+        <a:xfrm>
+          <a:off x="0" y="0"/>
+          <a:ext cx="0" cy="0"/>
+          <a:chOff x="0" y="0"/>
+          <a:chExt cx="0" cy="0"/>
+        </a:xfrm>
+      </p:grpSpPr>
+      <p:sp>
+        <p:nvSpPr>
+          <p:cNvPr id="2" name="Slide Image Placeholder 1"/>
+          <p:cNvSpPr>
+            <a:spLocks noGrp="1" noRot="1" noChangeAspect="1"/>
+          </p:cNvSpPr>
+          <p:nvPr>
+            <p:ph type="sldImg"/>
+          </p:nvPr>
+        </p:nvSpPr>
+        <p:spPr/>
+      </p:sp>
+      <p:sp>
+        <p:nvSpPr>
+          <p:cNvPr id="3" name="Notes Placeholder 2"/>
+          <p:cNvSpPr>
+            <a:spLocks noGrp="1"/>
+          </p:cNvSpPr>
+          <p:nvPr>
+            <p:ph type="body" idx="1"/>
+          </p:nvPr>
+        </p:nvSpPr>
+        <p:spPr/>
+        <p:txBody>
+          <a:bodyPr/>
+          <a:lstStyle/>
+          <a:p>
+            <a:r>
+              <a:rPr lang="en-US" dirty="0"/>
+              <a:t>Le fonti dei numeri e dei casi citati. Tutte verificabili, con data.</a:t>
+            </a:r>
+            <a:endParaRPr lang="en-US" dirty="0"/>
+          </a:p>
+        </p:txBody>
+      </p:sp>
+      <p:sp>
+        <p:nvSpPr>
+          <p:cNvPr id="4" name="Slide Number Placeholder 3"/>
+          <p:cNvSpPr>
+            <a:spLocks noGrp="1"/>
+          </p:cNvSpPr>
+          <p:nvPr>
+            <p:ph type="sldNum" sz="quarter" idx="10"/>
+          </p:nvPr>
+        </p:nvSpPr>
+        <p:spPr/>
+        <p:txBody>
+          <a:bodyPr/>
+          <a:lstStyle/>
+          <a:p>
+            <a:fld id="{F7021451-1387-4CA6-816F-3879F97B5CBC}" type="slidenum">
+              <a:rPr lang="en-US"/>
+              <a:t>17</a:t>
             </a:fld>
             <a:endParaRPr lang="en-US"/>
           </a:p>
@@ -4877,7 +5061,7 @@
                 <a:ea typeface="Arial" pitchFamily="34" charset="-122"/>
                 <a:cs typeface="Arial" pitchFamily="34" charset="-120"/>
               </a:rPr>
-              <a:t>IL MATERIALE</a:t>
+              <a:t>ESEMPIO VERO · REAL ESTATE OS</a:t>
             </a:r>
             <a:endParaRPr lang="en-US" sz="1200" dirty="0"/>
           </a:p>
@@ -4918,7 +5102,7 @@
                 <a:ea typeface="Georgia" pitchFamily="34" charset="-122"/>
                 <a:cs typeface="Georgia" pitchFamily="34" charset="-120"/>
               </a:rPr>
-              <a:t>Cosa trovi nel materiale</a:t>
+              <a:t>Un plugin, 14 skill: dal file grezzo all’investitore</a:t>
             </a:r>
             <a:endParaRPr lang="en-US" sz="3400" dirty="0"/>
           </a:p>
@@ -4926,18 +5110,18 @@
       </p:sp>
       <p:sp>
         <p:nvSpPr>
-          <p:cNvPr id="4" name="Sezione Capire"/>
+          <p:cNvPr id="4" name="Fase Progetto"/>
           <p:cNvSpPr/>
           <p:nvPr/>
         </p:nvSpPr>
         <p:spPr>
           <a:xfrm>
             <a:off x="685800" y="1828800"/>
-            <a:ext cx="10820095" cy="714086"/>
+            <a:ext cx="1989408" cy="3429000"/>
           </a:xfrm>
           <a:prstGeom prst="roundRect">
             <a:avLst>
-              <a:gd name="adj" fmla="val 15366"/>
+              <a:gd name="adj" fmla="val 6435"/>
             </a:avLst>
           </a:prstGeom>
           <a:solidFill>
@@ -4953,14 +5137,39 @@
       </p:sp>
       <p:sp>
         <p:nvSpPr>
-          <p:cNvPr id="5" name="Nome Capire"/>
+          <p:cNvPr id="5" name="numero 1"/>
+          <p:cNvSpPr/>
+          <p:nvPr/>
+        </p:nvSpPr>
+        <p:spPr>
+          <a:xfrm>
+            <a:off x="914400" y="2057400"/>
+            <a:ext cx="384048" cy="384048"/>
+          </a:xfrm>
+          <a:prstGeom prst="ellipse">
+            <a:avLst/>
+          </a:prstGeom>
+          <a:solidFill>
+            <a:srgbClr val="1B4D89"/>
+          </a:solidFill>
+          <a:ln w="12700">
+            <a:solidFill>
+              <a:srgbClr val="1B4D89"/>
+            </a:solidFill>
+            <a:prstDash val="solid"/>
+          </a:ln>
+        </p:spPr>
+      </p:sp>
+      <p:sp>
+        <p:nvSpPr>
+          <p:cNvPr id="6" name="numero testo 1"/>
           <p:cNvSpPr txBox="1"/>
           <p:nvPr/>
         </p:nvSpPr>
         <p:spPr>
           <a:xfrm>
-            <a:off x="941832" y="1828800"/>
-            <a:ext cx="2788920" cy="714086"/>
+            <a:off x="914400" y="2057400"/>
+            <a:ext cx="384048" cy="384048"/>
           </a:xfrm>
           <a:prstGeom prst="rect">
             <a:avLst/>
@@ -4972,164 +5181,233 @@
           <a:bodyPr wrap="square" lIns="0" tIns="0" rIns="0" bIns="0" rtlCol="0" anchor="ctr"/>
           <a:lstStyle/>
           <a:p>
-            <a:pPr indent="0" marL="0">
-              <a:buNone/>
-            </a:pPr>
-            <a:r>
-              <a:rPr lang="en-US" sz="1100" b="1" spc="200" kern="0" dirty="0">
-                <a:solidFill>
-                  <a:srgbClr val="1B4D89"/>
-                </a:solidFill>
-                <a:latin typeface="Arial" pitchFamily="34" charset="0"/>
-                <a:ea typeface="Arial" pitchFamily="34" charset="-122"/>
-                <a:cs typeface="Arial" pitchFamily="34" charset="-120"/>
-              </a:rPr>
-              <a:t>SEZIONE A</a:t>
+            <a:pPr algn="ctr" indent="0" marL="0">
+              <a:buNone/>
+            </a:pPr>
+            <a:r>
+              <a:rPr lang="en-US" sz="1300" b="1" dirty="0">
+                <a:solidFill>
+                  <a:schemeClr val="bg1"/>
+                </a:solidFill>
+                <a:latin typeface="Arial" pitchFamily="34" charset="0"/>
+                <a:ea typeface="Arial" pitchFamily="34" charset="-122"/>
+                <a:cs typeface="Arial" pitchFamily="34" charset="-120"/>
+              </a:rPr>
+              <a:t>1</a:t>
+            </a:r>
+            <a:endParaRPr lang="en-US" sz="1300" dirty="0"/>
+          </a:p>
+        </p:txBody>
+      </p:sp>
+      <p:sp>
+        <p:nvSpPr>
+          <p:cNvPr id="7" name="Fase nome 0"/>
+          <p:cNvSpPr txBox="1"/>
+          <p:nvPr/>
+        </p:nvSpPr>
+        <p:spPr>
+          <a:xfrm>
+            <a:off x="1417320" y="2011680"/>
+            <a:ext cx="1120728" cy="502920"/>
+          </a:xfrm>
+          <a:prstGeom prst="rect">
+            <a:avLst/>
+          </a:prstGeom>
+          <a:noFill/>
+          <a:ln/>
+        </p:spPr>
+        <p:txBody>
+          <a:bodyPr wrap="square" lIns="0" tIns="0" rIns="0" bIns="0" rtlCol="0" anchor="ctr"/>
+          <a:lstStyle/>
+          <a:p>
+            <a:pPr indent="0" marL="0">
+              <a:buNone/>
+            </a:pPr>
+            <a:r>
+              <a:rPr lang="en-US" sz="1500" b="1" dirty="0">
+                <a:solidFill>
+                  <a:schemeClr val="tx1"/>
+                </a:solidFill>
+                <a:latin typeface="Arial" pitchFamily="34" charset="0"/>
+                <a:ea typeface="Arial" pitchFamily="34" charset="-122"/>
+                <a:cs typeface="Arial" pitchFamily="34" charset="-120"/>
+              </a:rPr>
+              <a:t>Progetto</a:t>
             </a:r>
             <a:endParaRPr lang="en-US" sz="1500" dirty="0"/>
           </a:p>
-          <a:p>
-            <a:pPr indent="0" marL="0">
-              <a:buNone/>
-            </a:pPr>
-            <a:r>
-              <a:rPr lang="en-US" sz="1600" b="1" dirty="0">
-                <a:solidFill>
-                  <a:schemeClr val="tx1"/>
-                </a:solidFill>
-                <a:latin typeface="Arial" pitchFamily="34" charset="0"/>
-                <a:ea typeface="Arial" pitchFamily="34" charset="-122"/>
-                <a:cs typeface="Arial" pitchFamily="34" charset="-120"/>
-              </a:rPr>
-              <a:t>Capire</a:t>
-            </a:r>
-            <a:endParaRPr lang="en-US" sz="1500" dirty="0"/>
-          </a:p>
-        </p:txBody>
-      </p:sp>
-      <p:sp>
-        <p:nvSpPr>
-          <p:cNvPr id="6" name="Capitoli Capire"/>
-          <p:cNvSpPr txBox="1"/>
-          <p:nvPr/>
-        </p:nvSpPr>
-        <p:spPr>
-          <a:xfrm>
-            <a:off x="3931920" y="1828800"/>
-            <a:ext cx="7299655" cy="714086"/>
-          </a:xfrm>
-          <a:prstGeom prst="rect">
-            <a:avLst/>
-          </a:prstGeom>
-          <a:noFill/>
-          <a:ln/>
-        </p:spPr>
-        <p:txBody>
-          <a:bodyPr wrap="square" lIns="0" tIns="0" rIns="0" bIns="0" rtlCol="0" anchor="ctr"/>
-          <a:lstStyle/>
-          <a:p>
-            <a:pPr indent="0" marL="0">
-              <a:buNone/>
-            </a:pPr>
-            <a:r>
-              <a:rPr lang="en-US" sz="1400" b="1" dirty="0">
-                <a:solidFill>
-                  <a:srgbClr val="1B4D89"/>
-                </a:solidFill>
-                <a:latin typeface="Arial" pitchFamily="34" charset="0"/>
-                <a:ea typeface="Arial" pitchFamily="34" charset="-122"/>
-                <a:cs typeface="Arial" pitchFamily="34" charset="-120"/>
-              </a:rPr>
-              <a:t>1  </a:t>
-            </a:r>
-            <a:pPr indent="0" marL="0">
-              <a:buNone/>
-            </a:pPr>
-            <a:r>
-              <a:rPr lang="en-US" sz="1400" dirty="0">
-                <a:solidFill>
-                  <a:srgbClr val="374151"/>
-                </a:solidFill>
-                <a:latin typeface="Arial" pitchFamily="34" charset="0"/>
-                <a:ea typeface="Arial" pitchFamily="34" charset="-122"/>
-                <a:cs typeface="Arial" pitchFamily="34" charset="-120"/>
-              </a:rPr>
-              <a:t>Cos’è l’AI e cosa non è     </a:t>
-            </a:r>
-            <a:pPr indent="0" marL="0">
-              <a:buNone/>
-            </a:pPr>
-            <a:r>
-              <a:rPr lang="en-US" sz="1400" b="1" dirty="0">
-                <a:solidFill>
-                  <a:srgbClr val="1B4D89"/>
-                </a:solidFill>
-                <a:latin typeface="Arial" pitchFamily="34" charset="0"/>
-                <a:ea typeface="Arial" pitchFamily="34" charset="-122"/>
-                <a:cs typeface="Arial" pitchFamily="34" charset="-120"/>
-              </a:rPr>
-              <a:t>2  </a:t>
-            </a:r>
-            <a:pPr indent="0" marL="0">
-              <a:buNone/>
-            </a:pPr>
-            <a:r>
-              <a:rPr lang="en-US" sz="1400" dirty="0">
-                <a:solidFill>
-                  <a:srgbClr val="374151"/>
-                </a:solidFill>
-                <a:latin typeface="Arial" pitchFamily="34" charset="0"/>
-                <a:ea typeface="Arial" pitchFamily="34" charset="-122"/>
-                <a:cs typeface="Arial" pitchFamily="34" charset="-120"/>
-              </a:rPr>
-              <a:t>Come funziona e perché sbaglia     </a:t>
-            </a:r>
-            <a:pPr indent="0" marL="0">
-              <a:buNone/>
-            </a:pPr>
-            <a:r>
-              <a:rPr lang="en-US" sz="1400" b="1" dirty="0">
-                <a:solidFill>
-                  <a:srgbClr val="1B4D89"/>
-                </a:solidFill>
-                <a:latin typeface="Arial" pitchFamily="34" charset="0"/>
-                <a:ea typeface="Arial" pitchFamily="34" charset="-122"/>
-                <a:cs typeface="Arial" pitchFamily="34" charset="-120"/>
-              </a:rPr>
-              <a:t>3  </a:t>
-            </a:r>
-            <a:pPr indent="0" marL="0">
-              <a:buNone/>
-            </a:pPr>
-            <a:r>
-              <a:rPr lang="en-US" sz="1400" dirty="0">
-                <a:solidFill>
-                  <a:srgbClr val="374151"/>
-                </a:solidFill>
-                <a:latin typeface="Arial" pitchFamily="34" charset="0"/>
-                <a:ea typeface="Arial" pitchFamily="34" charset="-122"/>
-                <a:cs typeface="Arial" pitchFamily="34" charset="-120"/>
-              </a:rPr>
-              <a:t>Gli strumenti</a:t>
-            </a:r>
-            <a:endParaRPr lang="en-US" sz="1400" dirty="0"/>
-          </a:p>
-        </p:txBody>
-      </p:sp>
-      <p:sp>
-        <p:nvSpPr>
-          <p:cNvPr id="7" name="Sezione Usare in sicurezza"/>
+        </p:txBody>
+      </p:sp>
+      <p:sp>
+        <p:nvSpPr>
+          <p:cNvPr id="8" name="Skill project-setup"/>
           <p:cNvSpPr/>
           <p:nvPr/>
         </p:nvSpPr>
         <p:spPr>
           <a:xfrm>
-            <a:off x="685800" y="2670902"/>
-            <a:ext cx="10820095" cy="714086"/>
+            <a:off x="868680" y="2697480"/>
+            <a:ext cx="1623648" cy="329184"/>
           </a:xfrm>
           <a:prstGeom prst="roundRect">
             <a:avLst>
-              <a:gd name="adj" fmla="val 15366"/>
+              <a:gd name="adj" fmla="val 22222"/>
+            </a:avLst>
+          </a:prstGeom>
+          <a:solidFill>
+            <a:srgbClr val="FFFFFF"/>
+          </a:solidFill>
+          <a:ln w="12700">
+            <a:solidFill>
+              <a:srgbClr val="E4E8EE"/>
+            </a:solidFill>
+            <a:prstDash val="solid"/>
+          </a:ln>
+        </p:spPr>
+      </p:sp>
+      <p:sp>
+        <p:nvSpPr>
+          <p:cNvPr id="9" name="Skill testo project-setup"/>
+          <p:cNvSpPr txBox="1"/>
+          <p:nvPr/>
+        </p:nvSpPr>
+        <p:spPr>
+          <a:xfrm>
+            <a:off x="960120" y="2697480"/>
+            <a:ext cx="1532208" cy="329184"/>
+          </a:xfrm>
+          <a:prstGeom prst="rect">
+            <a:avLst/>
+          </a:prstGeom>
+          <a:noFill/>
+          <a:ln/>
+        </p:spPr>
+        <p:txBody>
+          <a:bodyPr wrap="square" lIns="0" tIns="0" rIns="0" bIns="0" rtlCol="0" anchor="ctr"/>
+          <a:lstStyle/>
+          <a:p>
+            <a:pPr indent="0" marL="0">
+              <a:buNone/>
+            </a:pPr>
+            <a:r>
+              <a:rPr lang="en-US" sz="1200" b="1" dirty="0">
+                <a:solidFill>
+                  <a:srgbClr val="1B4D89"/>
+                </a:solidFill>
+                <a:latin typeface="Arial" pitchFamily="34" charset="0"/>
+                <a:ea typeface="Arial" pitchFamily="34" charset="-122"/>
+                <a:cs typeface="Arial" pitchFamily="34" charset="-120"/>
+              </a:rPr>
+              <a:t>project-setup</a:t>
+            </a:r>
+            <a:endParaRPr lang="en-US" sz="1200" dirty="0"/>
+          </a:p>
+        </p:txBody>
+      </p:sp>
+      <p:sp>
+        <p:nvSpPr>
+          <p:cNvPr id="10" name="Skill architect-data-interpreter"/>
+          <p:cNvSpPr/>
+          <p:nvPr/>
+        </p:nvSpPr>
+        <p:spPr>
+          <a:xfrm>
+            <a:off x="868680" y="3081528"/>
+            <a:ext cx="1623648" cy="329184"/>
+          </a:xfrm>
+          <a:prstGeom prst="roundRect">
+            <a:avLst>
+              <a:gd name="adj" fmla="val 22222"/>
+            </a:avLst>
+          </a:prstGeom>
+          <a:solidFill>
+            <a:srgbClr val="FFFFFF"/>
+          </a:solidFill>
+          <a:ln w="12700">
+            <a:solidFill>
+              <a:srgbClr val="E4E8EE"/>
+            </a:solidFill>
+            <a:prstDash val="solid"/>
+          </a:ln>
+        </p:spPr>
+      </p:sp>
+      <p:sp>
+        <p:nvSpPr>
+          <p:cNvPr id="11" name="Skill testo architect-data-interpreter"/>
+          <p:cNvSpPr txBox="1"/>
+          <p:nvPr/>
+        </p:nvSpPr>
+        <p:spPr>
+          <a:xfrm>
+            <a:off x="960120" y="3081528"/>
+            <a:ext cx="1532208" cy="329184"/>
+          </a:xfrm>
+          <a:prstGeom prst="rect">
+            <a:avLst/>
+          </a:prstGeom>
+          <a:noFill/>
+          <a:ln/>
+        </p:spPr>
+        <p:txBody>
+          <a:bodyPr wrap="square" lIns="0" tIns="0" rIns="0" bIns="0" rtlCol="0" anchor="ctr"/>
+          <a:lstStyle/>
+          <a:p>
+            <a:pPr indent="0" marL="0">
+              <a:buNone/>
+            </a:pPr>
+            <a:r>
+              <a:rPr lang="en-US" sz="950" b="1" dirty="0">
+                <a:solidFill>
+                  <a:srgbClr val="1B4D89"/>
+                </a:solidFill>
+                <a:latin typeface="Arial" pitchFamily="34" charset="0"/>
+                <a:ea typeface="Arial" pitchFamily="34" charset="-122"/>
+                <a:cs typeface="Arial" pitchFamily="34" charset="-120"/>
+              </a:rPr>
+              <a:t>architect-data-interpreter</a:t>
+            </a:r>
+            <a:endParaRPr lang="en-US" sz="950" dirty="0"/>
+          </a:p>
+        </p:txBody>
+      </p:sp>
+      <p:pic>
+        <p:nvPicPr>
+          <p:cNvPr id="12" name="Freccia fase" descr="preencoded.png">    </p:cNvPr>
+          <p:cNvPicPr>
+            <a:picLocks noChangeAspect="1"/>
+          </p:cNvPicPr>
+          <p:nvPr/>
+        </p:nvPicPr>
+        <p:blipFill>
+          <a:blip r:embed="rId1"/>
+          <a:stretch>
+            <a:fillRect/>
+          </a:stretch>
+        </p:blipFill>
+        <p:spPr>
+          <a:xfrm>
+            <a:off x="2711784" y="3387852"/>
+            <a:ext cx="310896" cy="310896"/>
+          </a:xfrm>
+          <a:prstGeom prst="rect">
+            <a:avLst/>
+          </a:prstGeom>
+        </p:spPr>
+      </p:pic>
+      <p:sp>
+        <p:nvSpPr>
+          <p:cNvPr id="13" name="Fase Numeri"/>
+          <p:cNvSpPr/>
+          <p:nvPr/>
+        </p:nvSpPr>
+        <p:spPr>
+          <a:xfrm>
+            <a:off x="3059256" y="1828800"/>
+            <a:ext cx="1574948" cy="3429000"/>
+          </a:xfrm>
+          <a:prstGeom prst="roundRect">
+            <a:avLst>
+              <a:gd name="adj" fmla="val 8128"/>
             </a:avLst>
           </a:prstGeom>
           <a:solidFill>
@@ -5145,14 +5423,39 @@
       </p:sp>
       <p:sp>
         <p:nvSpPr>
-          <p:cNvPr id="8" name="Nome Usare in sicurezza"/>
+          <p:cNvPr id="14" name="numero 2"/>
+          <p:cNvSpPr/>
+          <p:nvPr/>
+        </p:nvSpPr>
+        <p:spPr>
+          <a:xfrm>
+            <a:off x="3287856" y="2057400"/>
+            <a:ext cx="384048" cy="384048"/>
+          </a:xfrm>
+          <a:prstGeom prst="ellipse">
+            <a:avLst/>
+          </a:prstGeom>
+          <a:solidFill>
+            <a:srgbClr val="1B4D89"/>
+          </a:solidFill>
+          <a:ln w="12700">
+            <a:solidFill>
+              <a:srgbClr val="1B4D89"/>
+            </a:solidFill>
+            <a:prstDash val="solid"/>
+          </a:ln>
+        </p:spPr>
+      </p:sp>
+      <p:sp>
+        <p:nvSpPr>
+          <p:cNvPr id="15" name="numero testo 2"/>
           <p:cNvSpPr txBox="1"/>
           <p:nvPr/>
         </p:nvSpPr>
         <p:spPr>
           <a:xfrm>
-            <a:off x="941832" y="2670902"/>
-            <a:ext cx="2788920" cy="714086"/>
+            <a:off x="3287856" y="2057400"/>
+            <a:ext cx="384048" cy="384048"/>
           </a:xfrm>
           <a:prstGeom prst="rect">
             <a:avLst/>
@@ -5164,164 +5467,1003 @@
           <a:bodyPr wrap="square" lIns="0" tIns="0" rIns="0" bIns="0" rtlCol="0" anchor="ctr"/>
           <a:lstStyle/>
           <a:p>
-            <a:pPr indent="0" marL="0">
-              <a:buNone/>
-            </a:pPr>
-            <a:r>
-              <a:rPr lang="en-US" sz="1100" b="1" spc="200" kern="0" dirty="0">
-                <a:solidFill>
-                  <a:srgbClr val="1B4D89"/>
-                </a:solidFill>
-                <a:latin typeface="Arial" pitchFamily="34" charset="0"/>
-                <a:ea typeface="Arial" pitchFamily="34" charset="-122"/>
-                <a:cs typeface="Arial" pitchFamily="34" charset="-120"/>
-              </a:rPr>
-              <a:t>SEZIONE B</a:t>
+            <a:pPr algn="ctr" indent="0" marL="0">
+              <a:buNone/>
+            </a:pPr>
+            <a:r>
+              <a:rPr lang="en-US" sz="1300" b="1" dirty="0">
+                <a:solidFill>
+                  <a:schemeClr val="bg1"/>
+                </a:solidFill>
+                <a:latin typeface="Arial" pitchFamily="34" charset="0"/>
+                <a:ea typeface="Arial" pitchFamily="34" charset="-122"/>
+                <a:cs typeface="Arial" pitchFamily="34" charset="-120"/>
+              </a:rPr>
+              <a:t>2</a:t>
+            </a:r>
+            <a:endParaRPr lang="en-US" sz="1300" dirty="0"/>
+          </a:p>
+        </p:txBody>
+      </p:sp>
+      <p:sp>
+        <p:nvSpPr>
+          <p:cNvPr id="16" name="Fase nome 1"/>
+          <p:cNvSpPr txBox="1"/>
+          <p:nvPr/>
+        </p:nvSpPr>
+        <p:spPr>
+          <a:xfrm>
+            <a:off x="3790776" y="2011680"/>
+            <a:ext cx="706268" cy="502920"/>
+          </a:xfrm>
+          <a:prstGeom prst="rect">
+            <a:avLst/>
+          </a:prstGeom>
+          <a:noFill/>
+          <a:ln/>
+        </p:spPr>
+        <p:txBody>
+          <a:bodyPr wrap="square" lIns="0" tIns="0" rIns="0" bIns="0" rtlCol="0" anchor="ctr"/>
+          <a:lstStyle/>
+          <a:p>
+            <a:pPr indent="0" marL="0">
+              <a:buNone/>
+            </a:pPr>
+            <a:r>
+              <a:rPr lang="en-US" sz="1500" b="1" dirty="0">
+                <a:solidFill>
+                  <a:schemeClr val="tx1"/>
+                </a:solidFill>
+                <a:latin typeface="Arial" pitchFamily="34" charset="0"/>
+                <a:ea typeface="Arial" pitchFamily="34" charset="-122"/>
+                <a:cs typeface="Arial" pitchFamily="34" charset="-120"/>
+              </a:rPr>
+              <a:t>Numeri</a:t>
             </a:r>
             <a:endParaRPr lang="en-US" sz="1500" dirty="0"/>
           </a:p>
-          <a:p>
-            <a:pPr indent="0" marL="0">
-              <a:buNone/>
-            </a:pPr>
-            <a:r>
-              <a:rPr lang="en-US" sz="1600" b="1" dirty="0">
-                <a:solidFill>
-                  <a:schemeClr val="tx1"/>
-                </a:solidFill>
-                <a:latin typeface="Arial" pitchFamily="34" charset="0"/>
-                <a:ea typeface="Arial" pitchFamily="34" charset="-122"/>
-                <a:cs typeface="Arial" pitchFamily="34" charset="-120"/>
-              </a:rPr>
-              <a:t>Usare in sicurezza</a:t>
-            </a:r>
-            <a:endParaRPr lang="en-US" sz="1500" dirty="0"/>
-          </a:p>
-        </p:txBody>
-      </p:sp>
-      <p:sp>
-        <p:nvSpPr>
-          <p:cNvPr id="9" name="Capitoli Usare in sicurezza"/>
-          <p:cNvSpPr txBox="1"/>
-          <p:nvPr/>
-        </p:nvSpPr>
-        <p:spPr>
-          <a:xfrm>
-            <a:off x="3931920" y="2670902"/>
-            <a:ext cx="7299655" cy="714086"/>
-          </a:xfrm>
-          <a:prstGeom prst="rect">
-            <a:avLst/>
-          </a:prstGeom>
-          <a:noFill/>
-          <a:ln/>
-        </p:spPr>
-        <p:txBody>
-          <a:bodyPr wrap="square" lIns="0" tIns="0" rIns="0" bIns="0" rtlCol="0" anchor="ctr"/>
-          <a:lstStyle/>
-          <a:p>
-            <a:pPr indent="0" marL="0">
-              <a:buNone/>
-            </a:pPr>
-            <a:r>
-              <a:rPr lang="en-US" sz="1400" b="1" dirty="0">
-                <a:solidFill>
-                  <a:srgbClr val="1B4D89"/>
-                </a:solidFill>
-                <a:latin typeface="Arial" pitchFamily="34" charset="0"/>
-                <a:ea typeface="Arial" pitchFamily="34" charset="-122"/>
-                <a:cs typeface="Arial" pitchFamily="34" charset="-120"/>
-              </a:rPr>
-              <a:t>4  </a:t>
-            </a:r>
-            <a:pPr indent="0" marL="0">
-              <a:buNone/>
-            </a:pPr>
-            <a:r>
-              <a:rPr lang="en-US" sz="1400" dirty="0">
-                <a:solidFill>
-                  <a:srgbClr val="374151"/>
-                </a:solidFill>
-                <a:latin typeface="Arial" pitchFamily="34" charset="0"/>
-                <a:ea typeface="Arial" pitchFamily="34" charset="-122"/>
-                <a:cs typeface="Arial" pitchFamily="34" charset="-120"/>
-              </a:rPr>
-              <a:t>Dati e privacy: spegni l’addestramento     </a:t>
-            </a:r>
-            <a:pPr indent="0" marL="0">
-              <a:buNone/>
-            </a:pPr>
-            <a:r>
-              <a:rPr lang="en-US" sz="1400" b="1" dirty="0">
-                <a:solidFill>
-                  <a:srgbClr val="1B4D89"/>
-                </a:solidFill>
-                <a:latin typeface="Arial" pitchFamily="34" charset="0"/>
-                <a:ea typeface="Arial" pitchFamily="34" charset="-122"/>
-                <a:cs typeface="Arial" pitchFamily="34" charset="-120"/>
-              </a:rPr>
-              <a:t>5  </a:t>
-            </a:r>
-            <a:pPr indent="0" marL="0">
-              <a:buNone/>
-            </a:pPr>
-            <a:r>
-              <a:rPr lang="en-US" sz="1400" dirty="0">
-                <a:solidFill>
-                  <a:srgbClr val="374151"/>
-                </a:solidFill>
-                <a:latin typeface="Arial" pitchFamily="34" charset="0"/>
-                <a:ea typeface="Arial" pitchFamily="34" charset="-122"/>
-                <a:cs typeface="Arial" pitchFamily="34" charset="-120"/>
-              </a:rPr>
-              <a:t>Rischi dell’AI e come verificare     </a:t>
-            </a:r>
-            <a:pPr indent="0" marL="0">
-              <a:buNone/>
-            </a:pPr>
-            <a:r>
-              <a:rPr lang="en-US" sz="1400" b="1" dirty="0">
-                <a:solidFill>
-                  <a:srgbClr val="1B4D89"/>
-                </a:solidFill>
-                <a:latin typeface="Arial" pitchFamily="34" charset="0"/>
-                <a:ea typeface="Arial" pitchFamily="34" charset="-122"/>
-                <a:cs typeface="Arial" pitchFamily="34" charset="-120"/>
-              </a:rPr>
-              <a:t>6  </a:t>
-            </a:r>
-            <a:pPr indent="0" marL="0">
-              <a:buNone/>
-            </a:pPr>
-            <a:r>
-              <a:rPr lang="en-US" sz="1400" dirty="0">
-                <a:solidFill>
-                  <a:srgbClr val="374151"/>
-                </a:solidFill>
-                <a:latin typeface="Arial" pitchFamily="34" charset="0"/>
-                <a:ea typeface="Arial" pitchFamily="34" charset="-122"/>
-                <a:cs typeface="Arial" pitchFamily="34" charset="-120"/>
-              </a:rPr>
-              <a:t>Le regole in azienda</a:t>
-            </a:r>
-            <a:endParaRPr lang="en-US" sz="1400" dirty="0"/>
-          </a:p>
-        </p:txBody>
-      </p:sp>
-      <p:sp>
-        <p:nvSpPr>
-          <p:cNvPr id="10" name="Sezione Usare bene"/>
+        </p:txBody>
+      </p:sp>
+      <p:sp>
+        <p:nvSpPr>
+          <p:cNvPr id="17" name="Skill business-plan"/>
           <p:cNvSpPr/>
           <p:nvPr/>
         </p:nvSpPr>
         <p:spPr>
           <a:xfrm>
-            <a:off x="685800" y="3513003"/>
-            <a:ext cx="10820095" cy="912340"/>
+            <a:off x="3242136" y="2697480"/>
+            <a:ext cx="1209188" cy="329184"/>
           </a:xfrm>
           <a:prstGeom prst="roundRect">
             <a:avLst>
-              <a:gd name="adj" fmla="val 12027"/>
+              <a:gd name="adj" fmla="val 22222"/>
+            </a:avLst>
+          </a:prstGeom>
+          <a:solidFill>
+            <a:srgbClr val="FFFFFF"/>
+          </a:solidFill>
+          <a:ln w="12700">
+            <a:solidFill>
+              <a:srgbClr val="E4E8EE"/>
+            </a:solidFill>
+            <a:prstDash val="solid"/>
+          </a:ln>
+        </p:spPr>
+      </p:sp>
+      <p:sp>
+        <p:nvSpPr>
+          <p:cNvPr id="18" name="Skill testo business-plan"/>
+          <p:cNvSpPr txBox="1"/>
+          <p:nvPr/>
+        </p:nvSpPr>
+        <p:spPr>
+          <a:xfrm>
+            <a:off x="3333576" y="2697480"/>
+            <a:ext cx="1117748" cy="329184"/>
+          </a:xfrm>
+          <a:prstGeom prst="rect">
+            <a:avLst/>
+          </a:prstGeom>
+          <a:noFill/>
+          <a:ln/>
+        </p:spPr>
+        <p:txBody>
+          <a:bodyPr wrap="square" lIns="0" tIns="0" rIns="0" bIns="0" rtlCol="0" anchor="ctr"/>
+          <a:lstStyle/>
+          <a:p>
+            <a:pPr indent="0" marL="0">
+              <a:buNone/>
+            </a:pPr>
+            <a:r>
+              <a:rPr lang="en-US" sz="1200" b="1" dirty="0">
+                <a:solidFill>
+                  <a:srgbClr val="1B4D89"/>
+                </a:solidFill>
+                <a:latin typeface="Arial" pitchFamily="34" charset="0"/>
+                <a:ea typeface="Arial" pitchFamily="34" charset="-122"/>
+                <a:cs typeface="Arial" pitchFamily="34" charset="-120"/>
+              </a:rPr>
+              <a:t>business-plan</a:t>
+            </a:r>
+            <a:endParaRPr lang="en-US" sz="1200" dirty="0"/>
+          </a:p>
+        </p:txBody>
+      </p:sp>
+      <p:sp>
+        <p:nvSpPr>
+          <p:cNvPr id="19" name="Skill market-research"/>
+          <p:cNvSpPr/>
+          <p:nvPr/>
+        </p:nvSpPr>
+        <p:spPr>
+          <a:xfrm>
+            <a:off x="3242136" y="3081528"/>
+            <a:ext cx="1209188" cy="329184"/>
+          </a:xfrm>
+          <a:prstGeom prst="roundRect">
+            <a:avLst>
+              <a:gd name="adj" fmla="val 22222"/>
+            </a:avLst>
+          </a:prstGeom>
+          <a:solidFill>
+            <a:srgbClr val="FFFFFF"/>
+          </a:solidFill>
+          <a:ln w="12700">
+            <a:solidFill>
+              <a:srgbClr val="E4E8EE"/>
+            </a:solidFill>
+            <a:prstDash val="solid"/>
+          </a:ln>
+        </p:spPr>
+      </p:sp>
+      <p:sp>
+        <p:nvSpPr>
+          <p:cNvPr id="20" name="Skill testo market-research"/>
+          <p:cNvSpPr txBox="1"/>
+          <p:nvPr/>
+        </p:nvSpPr>
+        <p:spPr>
+          <a:xfrm>
+            <a:off x="3333576" y="3081528"/>
+            <a:ext cx="1117748" cy="329184"/>
+          </a:xfrm>
+          <a:prstGeom prst="rect">
+            <a:avLst/>
+          </a:prstGeom>
+          <a:noFill/>
+          <a:ln/>
+        </p:spPr>
+        <p:txBody>
+          <a:bodyPr wrap="square" lIns="0" tIns="0" rIns="0" bIns="0" rtlCol="0" anchor="ctr"/>
+          <a:lstStyle/>
+          <a:p>
+            <a:pPr indent="0" marL="0">
+              <a:buNone/>
+            </a:pPr>
+            <a:r>
+              <a:rPr lang="en-US" sz="1050" b="1" dirty="0">
+                <a:solidFill>
+                  <a:srgbClr val="1B4D89"/>
+                </a:solidFill>
+                <a:latin typeface="Arial" pitchFamily="34" charset="0"/>
+                <a:ea typeface="Arial" pitchFamily="34" charset="-122"/>
+                <a:cs typeface="Arial" pitchFamily="34" charset="-120"/>
+              </a:rPr>
+              <a:t>market-research</a:t>
+            </a:r>
+            <a:endParaRPr lang="en-US" sz="1050" dirty="0"/>
+          </a:p>
+        </p:txBody>
+      </p:sp>
+      <p:sp>
+        <p:nvSpPr>
+          <p:cNvPr id="21" name="Skill deal-validator"/>
+          <p:cNvSpPr/>
+          <p:nvPr/>
+        </p:nvSpPr>
+        <p:spPr>
+          <a:xfrm>
+            <a:off x="3242136" y="3465576"/>
+            <a:ext cx="1209188" cy="329184"/>
+          </a:xfrm>
+          <a:prstGeom prst="roundRect">
+            <a:avLst>
+              <a:gd name="adj" fmla="val 22222"/>
+            </a:avLst>
+          </a:prstGeom>
+          <a:solidFill>
+            <a:srgbClr val="FFFFFF"/>
+          </a:solidFill>
+          <a:ln w="12700">
+            <a:solidFill>
+              <a:srgbClr val="E4E8EE"/>
+            </a:solidFill>
+            <a:prstDash val="solid"/>
+          </a:ln>
+        </p:spPr>
+      </p:sp>
+      <p:sp>
+        <p:nvSpPr>
+          <p:cNvPr id="22" name="Skill testo deal-validator"/>
+          <p:cNvSpPr txBox="1"/>
+          <p:nvPr/>
+        </p:nvSpPr>
+        <p:spPr>
+          <a:xfrm>
+            <a:off x="3333576" y="3465576"/>
+            <a:ext cx="1117748" cy="329184"/>
+          </a:xfrm>
+          <a:prstGeom prst="rect">
+            <a:avLst/>
+          </a:prstGeom>
+          <a:noFill/>
+          <a:ln/>
+        </p:spPr>
+        <p:txBody>
+          <a:bodyPr wrap="square" lIns="0" tIns="0" rIns="0" bIns="0" rtlCol="0" anchor="ctr"/>
+          <a:lstStyle/>
+          <a:p>
+            <a:pPr indent="0" marL="0">
+              <a:buNone/>
+            </a:pPr>
+            <a:r>
+              <a:rPr lang="en-US" sz="1200" b="1" dirty="0">
+                <a:solidFill>
+                  <a:srgbClr val="1B4D89"/>
+                </a:solidFill>
+                <a:latin typeface="Arial" pitchFamily="34" charset="0"/>
+                <a:ea typeface="Arial" pitchFamily="34" charset="-122"/>
+                <a:cs typeface="Arial" pitchFamily="34" charset="-120"/>
+              </a:rPr>
+              <a:t>deal-validator</a:t>
+            </a:r>
+            <a:endParaRPr lang="en-US" sz="1200" dirty="0"/>
+          </a:p>
+        </p:txBody>
+      </p:sp>
+      <p:pic>
+        <p:nvPicPr>
+          <p:cNvPr id="23" name="Freccia fase" descr="preencoded.png">    </p:cNvPr>
+          <p:cNvPicPr>
+            <a:picLocks noChangeAspect="1"/>
+          </p:cNvPicPr>
+          <p:nvPr/>
+        </p:nvPicPr>
+        <p:blipFill>
+          <a:blip r:embed="rId2"/>
+          <a:stretch>
+            <a:fillRect/>
+          </a:stretch>
+        </p:blipFill>
+        <p:spPr>
+          <a:xfrm>
+            <a:off x="4670780" y="3387852"/>
+            <a:ext cx="310896" cy="310896"/>
+          </a:xfrm>
+          <a:prstGeom prst="rect">
+            <a:avLst/>
+          </a:prstGeom>
+        </p:spPr>
+      </p:pic>
+      <p:sp>
+        <p:nvSpPr>
+          <p:cNvPr id="24" name="Fase Capitale e regole"/>
+          <p:cNvSpPr/>
+          <p:nvPr/>
+        </p:nvSpPr>
+        <p:spPr>
+          <a:xfrm>
+            <a:off x="5018252" y="1828800"/>
+            <a:ext cx="2569652" cy="3429000"/>
+          </a:xfrm>
+          <a:prstGeom prst="roundRect">
+            <a:avLst>
+              <a:gd name="adj" fmla="val 4982"/>
+            </a:avLst>
+          </a:prstGeom>
+          <a:solidFill>
+            <a:srgbClr val="F6F8FB"/>
+          </a:solidFill>
+          <a:ln w="12700">
+            <a:solidFill>
+              <a:srgbClr val="E4E8EE"/>
+            </a:solidFill>
+            <a:prstDash val="solid"/>
+          </a:ln>
+        </p:spPr>
+      </p:sp>
+      <p:sp>
+        <p:nvSpPr>
+          <p:cNvPr id="25" name="numero 3"/>
+          <p:cNvSpPr/>
+          <p:nvPr/>
+        </p:nvSpPr>
+        <p:spPr>
+          <a:xfrm>
+            <a:off x="5246852" y="2057400"/>
+            <a:ext cx="384048" cy="384048"/>
+          </a:xfrm>
+          <a:prstGeom prst="ellipse">
+            <a:avLst/>
+          </a:prstGeom>
+          <a:solidFill>
+            <a:srgbClr val="1B4D89"/>
+          </a:solidFill>
+          <a:ln w="12700">
+            <a:solidFill>
+              <a:srgbClr val="1B4D89"/>
+            </a:solidFill>
+            <a:prstDash val="solid"/>
+          </a:ln>
+        </p:spPr>
+      </p:sp>
+      <p:sp>
+        <p:nvSpPr>
+          <p:cNvPr id="26" name="numero testo 3"/>
+          <p:cNvSpPr txBox="1"/>
+          <p:nvPr/>
+        </p:nvSpPr>
+        <p:spPr>
+          <a:xfrm>
+            <a:off x="5246852" y="2057400"/>
+            <a:ext cx="384048" cy="384048"/>
+          </a:xfrm>
+          <a:prstGeom prst="rect">
+            <a:avLst/>
+          </a:prstGeom>
+          <a:noFill/>
+          <a:ln/>
+        </p:spPr>
+        <p:txBody>
+          <a:bodyPr wrap="square" lIns="0" tIns="0" rIns="0" bIns="0" rtlCol="0" anchor="ctr"/>
+          <a:lstStyle/>
+          <a:p>
+            <a:pPr algn="ctr" indent="0" marL="0">
+              <a:buNone/>
+            </a:pPr>
+            <a:r>
+              <a:rPr lang="en-US" sz="1300" b="1" dirty="0">
+                <a:solidFill>
+                  <a:schemeClr val="bg1"/>
+                </a:solidFill>
+                <a:latin typeface="Arial" pitchFamily="34" charset="0"/>
+                <a:ea typeface="Arial" pitchFamily="34" charset="-122"/>
+                <a:cs typeface="Arial" pitchFamily="34" charset="-120"/>
+              </a:rPr>
+              <a:t>3</a:t>
+            </a:r>
+            <a:endParaRPr lang="en-US" sz="1300" dirty="0"/>
+          </a:p>
+        </p:txBody>
+      </p:sp>
+      <p:sp>
+        <p:nvSpPr>
+          <p:cNvPr id="27" name="Fase nome 2"/>
+          <p:cNvSpPr txBox="1"/>
+          <p:nvPr/>
+        </p:nvSpPr>
+        <p:spPr>
+          <a:xfrm>
+            <a:off x="5749772" y="2011680"/>
+            <a:ext cx="1700972" cy="502920"/>
+          </a:xfrm>
+          <a:prstGeom prst="rect">
+            <a:avLst/>
+          </a:prstGeom>
+          <a:noFill/>
+          <a:ln/>
+        </p:spPr>
+        <p:txBody>
+          <a:bodyPr wrap="square" lIns="0" tIns="0" rIns="0" bIns="0" rtlCol="0" anchor="ctr"/>
+          <a:lstStyle/>
+          <a:p>
+            <a:pPr indent="0" marL="0">
+              <a:buNone/>
+            </a:pPr>
+            <a:r>
+              <a:rPr lang="en-US" sz="1500" b="1" dirty="0">
+                <a:solidFill>
+                  <a:schemeClr val="tx1"/>
+                </a:solidFill>
+                <a:latin typeface="Arial" pitchFamily="34" charset="0"/>
+                <a:ea typeface="Arial" pitchFamily="34" charset="-122"/>
+                <a:cs typeface="Arial" pitchFamily="34" charset="-120"/>
+              </a:rPr>
+              <a:t>Capitale e regole</a:t>
+            </a:r>
+            <a:endParaRPr lang="en-US" sz="1500" dirty="0"/>
+          </a:p>
+        </p:txBody>
+      </p:sp>
+      <p:sp>
+        <p:nvSpPr>
+          <p:cNvPr id="28" name="Skill capital-structuring"/>
+          <p:cNvSpPr/>
+          <p:nvPr/>
+        </p:nvSpPr>
+        <p:spPr>
+          <a:xfrm>
+            <a:off x="5201132" y="2697480"/>
+            <a:ext cx="2203892" cy="329184"/>
+          </a:xfrm>
+          <a:prstGeom prst="roundRect">
+            <a:avLst>
+              <a:gd name="adj" fmla="val 22222"/>
+            </a:avLst>
+          </a:prstGeom>
+          <a:solidFill>
+            <a:srgbClr val="FFFFFF"/>
+          </a:solidFill>
+          <a:ln w="12700">
+            <a:solidFill>
+              <a:srgbClr val="E4E8EE"/>
+            </a:solidFill>
+            <a:prstDash val="solid"/>
+          </a:ln>
+        </p:spPr>
+      </p:sp>
+      <p:sp>
+        <p:nvSpPr>
+          <p:cNvPr id="29" name="Skill testo capital-structuring"/>
+          <p:cNvSpPr txBox="1"/>
+          <p:nvPr/>
+        </p:nvSpPr>
+        <p:spPr>
+          <a:xfrm>
+            <a:off x="5292572" y="2697480"/>
+            <a:ext cx="2112452" cy="329184"/>
+          </a:xfrm>
+          <a:prstGeom prst="rect">
+            <a:avLst/>
+          </a:prstGeom>
+          <a:noFill/>
+          <a:ln/>
+        </p:spPr>
+        <p:txBody>
+          <a:bodyPr wrap="square" lIns="0" tIns="0" rIns="0" bIns="0" rtlCol="0" anchor="ctr"/>
+          <a:lstStyle/>
+          <a:p>
+            <a:pPr indent="0" marL="0">
+              <a:buNone/>
+            </a:pPr>
+            <a:r>
+              <a:rPr lang="en-US" sz="1050" b="1" dirty="0">
+                <a:solidFill>
+                  <a:srgbClr val="1B4D89"/>
+                </a:solidFill>
+                <a:latin typeface="Arial" pitchFamily="34" charset="0"/>
+                <a:ea typeface="Arial" pitchFamily="34" charset="-122"/>
+                <a:cs typeface="Arial" pitchFamily="34" charset="-120"/>
+              </a:rPr>
+              <a:t>capital-structuring</a:t>
+            </a:r>
+            <a:endParaRPr lang="en-US" sz="1050" dirty="0"/>
+          </a:p>
+        </p:txBody>
+      </p:sp>
+      <p:sp>
+        <p:nvSpPr>
+          <p:cNvPr id="30" name="Skill foreign-investment-compliance"/>
+          <p:cNvSpPr/>
+          <p:nvPr/>
+        </p:nvSpPr>
+        <p:spPr>
+          <a:xfrm>
+            <a:off x="5201132" y="3081528"/>
+            <a:ext cx="2203892" cy="329184"/>
+          </a:xfrm>
+          <a:prstGeom prst="roundRect">
+            <a:avLst>
+              <a:gd name="adj" fmla="val 22222"/>
+            </a:avLst>
+          </a:prstGeom>
+          <a:solidFill>
+            <a:srgbClr val="FFFFFF"/>
+          </a:solidFill>
+          <a:ln w="12700">
+            <a:solidFill>
+              <a:srgbClr val="E4E8EE"/>
+            </a:solidFill>
+            <a:prstDash val="solid"/>
+          </a:ln>
+        </p:spPr>
+      </p:sp>
+      <p:sp>
+        <p:nvSpPr>
+          <p:cNvPr id="31" name="Skill testo foreign-investment-compliance"/>
+          <p:cNvSpPr txBox="1"/>
+          <p:nvPr/>
+        </p:nvSpPr>
+        <p:spPr>
+          <a:xfrm>
+            <a:off x="5292572" y="3081528"/>
+            <a:ext cx="2112452" cy="329184"/>
+          </a:xfrm>
+          <a:prstGeom prst="rect">
+            <a:avLst/>
+          </a:prstGeom>
+          <a:noFill/>
+          <a:ln/>
+        </p:spPr>
+        <p:txBody>
+          <a:bodyPr wrap="square" lIns="0" tIns="0" rIns="0" bIns="0" rtlCol="0" anchor="ctr"/>
+          <a:lstStyle/>
+          <a:p>
+            <a:pPr indent="0" marL="0">
+              <a:buNone/>
+            </a:pPr>
+            <a:r>
+              <a:rPr lang="en-US" sz="950" b="1" dirty="0">
+                <a:solidFill>
+                  <a:srgbClr val="1B4D89"/>
+                </a:solidFill>
+                <a:latin typeface="Arial" pitchFamily="34" charset="0"/>
+                <a:ea typeface="Arial" pitchFamily="34" charset="-122"/>
+                <a:cs typeface="Arial" pitchFamily="34" charset="-120"/>
+              </a:rPr>
+              <a:t>foreign-investment-compliance</a:t>
+            </a:r>
+            <a:endParaRPr lang="en-US" sz="950" dirty="0"/>
+          </a:p>
+        </p:txBody>
+      </p:sp>
+      <p:sp>
+        <p:nvSpPr>
+          <p:cNvPr id="32" name="Skill tokenization-setup"/>
+          <p:cNvSpPr/>
+          <p:nvPr/>
+        </p:nvSpPr>
+        <p:spPr>
+          <a:xfrm>
+            <a:off x="5201132" y="3465576"/>
+            <a:ext cx="2203892" cy="329184"/>
+          </a:xfrm>
+          <a:prstGeom prst="roundRect">
+            <a:avLst>
+              <a:gd name="adj" fmla="val 22222"/>
+            </a:avLst>
+          </a:prstGeom>
+          <a:solidFill>
+            <a:srgbClr val="FFFFFF"/>
+          </a:solidFill>
+          <a:ln w="12700">
+            <a:solidFill>
+              <a:srgbClr val="E4E8EE"/>
+            </a:solidFill>
+            <a:prstDash val="solid"/>
+          </a:ln>
+        </p:spPr>
+      </p:sp>
+      <p:sp>
+        <p:nvSpPr>
+          <p:cNvPr id="33" name="Skill testo tokenization-setup"/>
+          <p:cNvSpPr txBox="1"/>
+          <p:nvPr/>
+        </p:nvSpPr>
+        <p:spPr>
+          <a:xfrm>
+            <a:off x="5292572" y="3465576"/>
+            <a:ext cx="2112452" cy="329184"/>
+          </a:xfrm>
+          <a:prstGeom prst="rect">
+            <a:avLst/>
+          </a:prstGeom>
+          <a:noFill/>
+          <a:ln/>
+        </p:spPr>
+        <p:txBody>
+          <a:bodyPr wrap="square" lIns="0" tIns="0" rIns="0" bIns="0" rtlCol="0" anchor="ctr"/>
+          <a:lstStyle/>
+          <a:p>
+            <a:pPr indent="0" marL="0">
+              <a:buNone/>
+            </a:pPr>
+            <a:r>
+              <a:rPr lang="en-US" sz="1050" b="1" dirty="0">
+                <a:solidFill>
+                  <a:srgbClr val="1B4D89"/>
+                </a:solidFill>
+                <a:latin typeface="Arial" pitchFamily="34" charset="0"/>
+                <a:ea typeface="Arial" pitchFamily="34" charset="-122"/>
+                <a:cs typeface="Arial" pitchFamily="34" charset="-120"/>
+              </a:rPr>
+              <a:t>tokenization-setup</a:t>
+            </a:r>
+            <a:endParaRPr lang="en-US" sz="1050" dirty="0"/>
+          </a:p>
+        </p:txBody>
+      </p:sp>
+      <p:pic>
+        <p:nvPicPr>
+          <p:cNvPr id="34" name="Freccia fase" descr="preencoded.png">    </p:cNvPr>
+          <p:cNvPicPr>
+            <a:picLocks noChangeAspect="1"/>
+          </p:cNvPicPr>
+          <p:nvPr/>
+        </p:nvPicPr>
+        <p:blipFill>
+          <a:blip r:embed="rId3"/>
+          <a:stretch>
+            <a:fillRect/>
+          </a:stretch>
+        </p:blipFill>
+        <p:spPr>
+          <a:xfrm>
+            <a:off x="7624479" y="3387852"/>
+            <a:ext cx="310896" cy="310896"/>
+          </a:xfrm>
+          <a:prstGeom prst="rect">
+            <a:avLst/>
+          </a:prstGeom>
+        </p:spPr>
+      </p:pic>
+      <p:sp>
+        <p:nvSpPr>
+          <p:cNvPr id="35" name="Fase Fondi"/>
+          <p:cNvSpPr/>
+          <p:nvPr/>
+        </p:nvSpPr>
+        <p:spPr>
+          <a:xfrm>
+            <a:off x="7971951" y="1828800"/>
+            <a:ext cx="1574948" cy="3429000"/>
+          </a:xfrm>
+          <a:prstGeom prst="roundRect">
+            <a:avLst>
+              <a:gd name="adj" fmla="val 8128"/>
+            </a:avLst>
+          </a:prstGeom>
+          <a:solidFill>
+            <a:srgbClr val="F6F8FB"/>
+          </a:solidFill>
+          <a:ln w="12700">
+            <a:solidFill>
+              <a:srgbClr val="E4E8EE"/>
+            </a:solidFill>
+            <a:prstDash val="solid"/>
+          </a:ln>
+        </p:spPr>
+      </p:sp>
+      <p:sp>
+        <p:nvSpPr>
+          <p:cNvPr id="36" name="numero 4"/>
+          <p:cNvSpPr/>
+          <p:nvPr/>
+        </p:nvSpPr>
+        <p:spPr>
+          <a:xfrm>
+            <a:off x="8200551" y="2057400"/>
+            <a:ext cx="384048" cy="384048"/>
+          </a:xfrm>
+          <a:prstGeom prst="ellipse">
+            <a:avLst/>
+          </a:prstGeom>
+          <a:solidFill>
+            <a:srgbClr val="1B4D89"/>
+          </a:solidFill>
+          <a:ln w="12700">
+            <a:solidFill>
+              <a:srgbClr val="1B4D89"/>
+            </a:solidFill>
+            <a:prstDash val="solid"/>
+          </a:ln>
+        </p:spPr>
+      </p:sp>
+      <p:sp>
+        <p:nvSpPr>
+          <p:cNvPr id="37" name="numero testo 4"/>
+          <p:cNvSpPr txBox="1"/>
+          <p:nvPr/>
+        </p:nvSpPr>
+        <p:spPr>
+          <a:xfrm>
+            <a:off x="8200551" y="2057400"/>
+            <a:ext cx="384048" cy="384048"/>
+          </a:xfrm>
+          <a:prstGeom prst="rect">
+            <a:avLst/>
+          </a:prstGeom>
+          <a:noFill/>
+          <a:ln/>
+        </p:spPr>
+        <p:txBody>
+          <a:bodyPr wrap="square" lIns="0" tIns="0" rIns="0" bIns="0" rtlCol="0" anchor="ctr"/>
+          <a:lstStyle/>
+          <a:p>
+            <a:pPr algn="ctr" indent="0" marL="0">
+              <a:buNone/>
+            </a:pPr>
+            <a:r>
+              <a:rPr lang="en-US" sz="1300" b="1" dirty="0">
+                <a:solidFill>
+                  <a:schemeClr val="bg1"/>
+                </a:solidFill>
+                <a:latin typeface="Arial" pitchFamily="34" charset="0"/>
+                <a:ea typeface="Arial" pitchFamily="34" charset="-122"/>
+                <a:cs typeface="Arial" pitchFamily="34" charset="-120"/>
+              </a:rPr>
+              <a:t>4</a:t>
+            </a:r>
+            <a:endParaRPr lang="en-US" sz="1300" dirty="0"/>
+          </a:p>
+        </p:txBody>
+      </p:sp>
+      <p:sp>
+        <p:nvSpPr>
+          <p:cNvPr id="38" name="Fase nome 3"/>
+          <p:cNvSpPr txBox="1"/>
+          <p:nvPr/>
+        </p:nvSpPr>
+        <p:spPr>
+          <a:xfrm>
+            <a:off x="8703471" y="2011680"/>
+            <a:ext cx="706268" cy="502920"/>
+          </a:xfrm>
+          <a:prstGeom prst="rect">
+            <a:avLst/>
+          </a:prstGeom>
+          <a:noFill/>
+          <a:ln/>
+        </p:spPr>
+        <p:txBody>
+          <a:bodyPr wrap="square" lIns="0" tIns="0" rIns="0" bIns="0" rtlCol="0" anchor="ctr"/>
+          <a:lstStyle/>
+          <a:p>
+            <a:pPr indent="0" marL="0">
+              <a:buNone/>
+            </a:pPr>
+            <a:r>
+              <a:rPr lang="en-US" sz="1500" b="1" dirty="0">
+                <a:solidFill>
+                  <a:schemeClr val="tx1"/>
+                </a:solidFill>
+                <a:latin typeface="Arial" pitchFamily="34" charset="0"/>
+                <a:ea typeface="Arial" pitchFamily="34" charset="-122"/>
+                <a:cs typeface="Arial" pitchFamily="34" charset="-120"/>
+              </a:rPr>
+              <a:t>Fondi</a:t>
+            </a:r>
+            <a:endParaRPr lang="en-US" sz="1500" dirty="0"/>
+          </a:p>
+        </p:txBody>
+      </p:sp>
+      <p:sp>
+        <p:nvSpPr>
+          <p:cNvPr id="39" name="Skill dd-dataroom"/>
+          <p:cNvSpPr/>
+          <p:nvPr/>
+        </p:nvSpPr>
+        <p:spPr>
+          <a:xfrm>
+            <a:off x="8154831" y="2697480"/>
+            <a:ext cx="1209188" cy="329184"/>
+          </a:xfrm>
+          <a:prstGeom prst="roundRect">
+            <a:avLst>
+              <a:gd name="adj" fmla="val 22222"/>
+            </a:avLst>
+          </a:prstGeom>
+          <a:solidFill>
+            <a:srgbClr val="FFFFFF"/>
+          </a:solidFill>
+          <a:ln w="12700">
+            <a:solidFill>
+              <a:srgbClr val="E4E8EE"/>
+            </a:solidFill>
+            <a:prstDash val="solid"/>
+          </a:ln>
+        </p:spPr>
+      </p:sp>
+      <p:sp>
+        <p:nvSpPr>
+          <p:cNvPr id="40" name="Skill testo dd-dataroom"/>
+          <p:cNvSpPr txBox="1"/>
+          <p:nvPr/>
+        </p:nvSpPr>
+        <p:spPr>
+          <a:xfrm>
+            <a:off x="8246271" y="2697480"/>
+            <a:ext cx="1117748" cy="329184"/>
+          </a:xfrm>
+          <a:prstGeom prst="rect">
+            <a:avLst/>
+          </a:prstGeom>
+          <a:noFill/>
+          <a:ln/>
+        </p:spPr>
+        <p:txBody>
+          <a:bodyPr wrap="square" lIns="0" tIns="0" rIns="0" bIns="0" rtlCol="0" anchor="ctr"/>
+          <a:lstStyle/>
+          <a:p>
+            <a:pPr indent="0" marL="0">
+              <a:buNone/>
+            </a:pPr>
+            <a:r>
+              <a:rPr lang="en-US" sz="1200" b="1" dirty="0">
+                <a:solidFill>
+                  <a:srgbClr val="1B4D89"/>
+                </a:solidFill>
+                <a:latin typeface="Arial" pitchFamily="34" charset="0"/>
+                <a:ea typeface="Arial" pitchFamily="34" charset="-122"/>
+                <a:cs typeface="Arial" pitchFamily="34" charset="-120"/>
+              </a:rPr>
+              <a:t>dd-dataroom</a:t>
+            </a:r>
+            <a:endParaRPr lang="en-US" sz="1200" dirty="0"/>
+          </a:p>
+        </p:txBody>
+      </p:sp>
+      <p:sp>
+        <p:nvSpPr>
+          <p:cNvPr id="41" name="Skill investor-teaser"/>
+          <p:cNvSpPr/>
+          <p:nvPr/>
+        </p:nvSpPr>
+        <p:spPr>
+          <a:xfrm>
+            <a:off x="8154831" y="3081528"/>
+            <a:ext cx="1209188" cy="329184"/>
+          </a:xfrm>
+          <a:prstGeom prst="roundRect">
+            <a:avLst>
+              <a:gd name="adj" fmla="val 22222"/>
+            </a:avLst>
+          </a:prstGeom>
+          <a:solidFill>
+            <a:srgbClr val="FFFFFF"/>
+          </a:solidFill>
+          <a:ln w="12700">
+            <a:solidFill>
+              <a:srgbClr val="E4E8EE"/>
+            </a:solidFill>
+            <a:prstDash val="solid"/>
+          </a:ln>
+        </p:spPr>
+      </p:sp>
+      <p:sp>
+        <p:nvSpPr>
+          <p:cNvPr id="42" name="Skill testo investor-teaser"/>
+          <p:cNvSpPr txBox="1"/>
+          <p:nvPr/>
+        </p:nvSpPr>
+        <p:spPr>
+          <a:xfrm>
+            <a:off x="8246271" y="3081528"/>
+            <a:ext cx="1117748" cy="329184"/>
+          </a:xfrm>
+          <a:prstGeom prst="rect">
+            <a:avLst/>
+          </a:prstGeom>
+          <a:noFill/>
+          <a:ln/>
+        </p:spPr>
+        <p:txBody>
+          <a:bodyPr wrap="square" lIns="0" tIns="0" rIns="0" bIns="0" rtlCol="0" anchor="ctr"/>
+          <a:lstStyle/>
+          <a:p>
+            <a:pPr indent="0" marL="0">
+              <a:buNone/>
+            </a:pPr>
+            <a:r>
+              <a:rPr lang="en-US" sz="1050" b="1" dirty="0">
+                <a:solidFill>
+                  <a:srgbClr val="1B4D89"/>
+                </a:solidFill>
+                <a:latin typeface="Arial" pitchFamily="34" charset="0"/>
+                <a:ea typeface="Arial" pitchFamily="34" charset="-122"/>
+                <a:cs typeface="Arial" pitchFamily="34" charset="-120"/>
+              </a:rPr>
+              <a:t>investor-teaser</a:t>
+            </a:r>
+            <a:endParaRPr lang="en-US" sz="1050" dirty="0"/>
+          </a:p>
+        </p:txBody>
+      </p:sp>
+      <p:sp>
+        <p:nvSpPr>
+          <p:cNvPr id="43" name="Skill portfolio-ops"/>
+          <p:cNvSpPr/>
+          <p:nvPr/>
+        </p:nvSpPr>
+        <p:spPr>
+          <a:xfrm>
+            <a:off x="8154831" y="3465576"/>
+            <a:ext cx="1209188" cy="329184"/>
+          </a:xfrm>
+          <a:prstGeom prst="roundRect">
+            <a:avLst>
+              <a:gd name="adj" fmla="val 22222"/>
+            </a:avLst>
+          </a:prstGeom>
+          <a:solidFill>
+            <a:srgbClr val="FFFFFF"/>
+          </a:solidFill>
+          <a:ln w="12700">
+            <a:solidFill>
+              <a:srgbClr val="E4E8EE"/>
+            </a:solidFill>
+            <a:prstDash val="solid"/>
+          </a:ln>
+        </p:spPr>
+      </p:sp>
+      <p:sp>
+        <p:nvSpPr>
+          <p:cNvPr id="44" name="Skill testo portfolio-ops"/>
+          <p:cNvSpPr txBox="1"/>
+          <p:nvPr/>
+        </p:nvSpPr>
+        <p:spPr>
+          <a:xfrm>
+            <a:off x="8246271" y="3465576"/>
+            <a:ext cx="1117748" cy="329184"/>
+          </a:xfrm>
+          <a:prstGeom prst="rect">
+            <a:avLst/>
+          </a:prstGeom>
+          <a:noFill/>
+          <a:ln/>
+        </p:spPr>
+        <p:txBody>
+          <a:bodyPr wrap="square" lIns="0" tIns="0" rIns="0" bIns="0" rtlCol="0" anchor="ctr"/>
+          <a:lstStyle/>
+          <a:p>
+            <a:pPr indent="0" marL="0">
+              <a:buNone/>
+            </a:pPr>
+            <a:r>
+              <a:rPr lang="en-US" sz="1200" b="1" dirty="0">
+                <a:solidFill>
+                  <a:srgbClr val="1B4D89"/>
+                </a:solidFill>
+                <a:latin typeface="Arial" pitchFamily="34" charset="0"/>
+                <a:ea typeface="Arial" pitchFamily="34" charset="-122"/>
+                <a:cs typeface="Arial" pitchFamily="34" charset="-120"/>
+              </a:rPr>
+              <a:t>portfolio-ops</a:t>
+            </a:r>
+            <a:endParaRPr lang="en-US" sz="1200" dirty="0"/>
+          </a:p>
+        </p:txBody>
+      </p:sp>
+      <p:pic>
+        <p:nvPicPr>
+          <p:cNvPr id="45" name="Freccia fase" descr="preencoded.png">    </p:cNvPr>
+          <p:cNvPicPr>
+            <a:picLocks noChangeAspect="1"/>
+          </p:cNvPicPr>
+          <p:nvPr/>
+        </p:nvPicPr>
+        <p:blipFill>
+          <a:blip r:embed="rId4"/>
+          <a:stretch>
+            <a:fillRect/>
+          </a:stretch>
+        </p:blipFill>
+        <p:spPr>
+          <a:xfrm>
+            <a:off x="9583475" y="3387852"/>
+            <a:ext cx="310896" cy="310896"/>
+          </a:xfrm>
+          <a:prstGeom prst="rect">
+            <a:avLst/>
+          </a:prstGeom>
+        </p:spPr>
+      </p:pic>
+      <p:sp>
+        <p:nvSpPr>
+          <p:cNvPr id="46" name="Fase Vendita"/>
+          <p:cNvSpPr/>
+          <p:nvPr/>
+        </p:nvSpPr>
+        <p:spPr>
+          <a:xfrm>
+            <a:off x="9930947" y="1828800"/>
+            <a:ext cx="1574948" cy="3429000"/>
+          </a:xfrm>
+          <a:prstGeom prst="roundRect">
+            <a:avLst>
+              <a:gd name="adj" fmla="val 8128"/>
             </a:avLst>
           </a:prstGeom>
           <a:solidFill>
@@ -5337,243 +6479,20 @@
       </p:sp>
       <p:sp>
         <p:nvSpPr>
-          <p:cNvPr id="11" name="Nome Usare bene"/>
-          <p:cNvSpPr txBox="1"/>
-          <p:nvPr/>
-        </p:nvSpPr>
-        <p:spPr>
-          <a:xfrm>
-            <a:off x="941832" y="3513003"/>
-            <a:ext cx="2788920" cy="912340"/>
-          </a:xfrm>
-          <a:prstGeom prst="rect">
-            <a:avLst/>
-          </a:prstGeom>
-          <a:noFill/>
-          <a:ln/>
-        </p:spPr>
-        <p:txBody>
-          <a:bodyPr wrap="square" lIns="0" tIns="0" rIns="0" bIns="0" rtlCol="0" anchor="ctr"/>
-          <a:lstStyle/>
-          <a:p>
-            <a:pPr indent="0" marL="0">
-              <a:buNone/>
-            </a:pPr>
-            <a:r>
-              <a:rPr lang="en-US" sz="1100" b="1" spc="200" kern="0" dirty="0">
-                <a:solidFill>
-                  <a:srgbClr val="1B4D89"/>
-                </a:solidFill>
-                <a:latin typeface="Arial" pitchFamily="34" charset="0"/>
-                <a:ea typeface="Arial" pitchFamily="34" charset="-122"/>
-                <a:cs typeface="Arial" pitchFamily="34" charset="-120"/>
-              </a:rPr>
-              <a:t>SEZIONE C</a:t>
-            </a:r>
-            <a:endParaRPr lang="en-US" sz="1500" dirty="0"/>
-          </a:p>
-          <a:p>
-            <a:pPr indent="0" marL="0">
-              <a:buNone/>
-            </a:pPr>
-            <a:r>
-              <a:rPr lang="en-US" sz="1600" b="1" dirty="0">
-                <a:solidFill>
-                  <a:schemeClr val="tx1"/>
-                </a:solidFill>
-                <a:latin typeface="Arial" pitchFamily="34" charset="0"/>
-                <a:ea typeface="Arial" pitchFamily="34" charset="-122"/>
-                <a:cs typeface="Arial" pitchFamily="34" charset="-120"/>
-              </a:rPr>
-              <a:t>Usare bene</a:t>
-            </a:r>
-            <a:endParaRPr lang="en-US" sz="1500" dirty="0"/>
-          </a:p>
-        </p:txBody>
-      </p:sp>
-      <p:sp>
-        <p:nvSpPr>
-          <p:cNvPr id="12" name="Capitoli Usare bene"/>
-          <p:cNvSpPr txBox="1"/>
-          <p:nvPr/>
-        </p:nvSpPr>
-        <p:spPr>
-          <a:xfrm>
-            <a:off x="3931920" y="3513003"/>
-            <a:ext cx="7299655" cy="912340"/>
-          </a:xfrm>
-          <a:prstGeom prst="rect">
-            <a:avLst/>
-          </a:prstGeom>
-          <a:noFill/>
-          <a:ln/>
-        </p:spPr>
-        <p:txBody>
-          <a:bodyPr wrap="square" lIns="0" tIns="0" rIns="0" bIns="0" rtlCol="0" anchor="ctr"/>
-          <a:lstStyle/>
-          <a:p>
-            <a:pPr indent="0" marL="0">
-              <a:buNone/>
-            </a:pPr>
-            <a:r>
-              <a:rPr lang="en-US" sz="1400" b="1" dirty="0">
-                <a:solidFill>
-                  <a:srgbClr val="1B4D89"/>
-                </a:solidFill>
-                <a:latin typeface="Arial" pitchFamily="34" charset="0"/>
-                <a:ea typeface="Arial" pitchFamily="34" charset="-122"/>
-                <a:cs typeface="Arial" pitchFamily="34" charset="-120"/>
-              </a:rPr>
-              <a:t>7  </a:t>
-            </a:r>
-            <a:pPr indent="0" marL="0">
-              <a:buNone/>
-            </a:pPr>
-            <a:r>
-              <a:rPr lang="en-US" sz="1400" dirty="0">
-                <a:solidFill>
-                  <a:srgbClr val="374151"/>
-                </a:solidFill>
-                <a:latin typeface="Arial" pitchFamily="34" charset="0"/>
-                <a:ea typeface="Arial" pitchFamily="34" charset="-122"/>
-                <a:cs typeface="Arial" pitchFamily="34" charset="-120"/>
-              </a:rPr>
-              <a:t>Scrivere un buon prompt     </a:t>
-            </a:r>
-            <a:pPr indent="0" marL="0">
-              <a:buNone/>
-            </a:pPr>
-            <a:r>
-              <a:rPr lang="en-US" sz="1400" b="1" dirty="0">
-                <a:solidFill>
-                  <a:srgbClr val="1B4D89"/>
-                </a:solidFill>
-                <a:latin typeface="Arial" pitchFamily="34" charset="0"/>
-                <a:ea typeface="Arial" pitchFamily="34" charset="-122"/>
-                <a:cs typeface="Arial" pitchFamily="34" charset="-120"/>
-              </a:rPr>
-              <a:t>8  </a:t>
-            </a:r>
-            <a:pPr indent="0" marL="0">
-              <a:buNone/>
-            </a:pPr>
-            <a:r>
-              <a:rPr lang="en-US" sz="1400" dirty="0">
-                <a:solidFill>
-                  <a:srgbClr val="374151"/>
-                </a:solidFill>
-                <a:latin typeface="Arial" pitchFamily="34" charset="0"/>
-                <a:ea typeface="Arial" pitchFamily="34" charset="-122"/>
-                <a:cs typeface="Arial" pitchFamily="34" charset="-120"/>
-              </a:rPr>
-              <a:t>Progetti, memoria, istruzioni e regole     </a:t>
-            </a:r>
-            <a:pPr indent="0" marL="0">
-              <a:buNone/>
-            </a:pPr>
-            <a:r>
-              <a:rPr lang="en-US" sz="1400" b="1" dirty="0">
-                <a:solidFill>
-                  <a:srgbClr val="1B4D89"/>
-                </a:solidFill>
-                <a:latin typeface="Arial" pitchFamily="34" charset="0"/>
-                <a:ea typeface="Arial" pitchFamily="34" charset="-122"/>
-                <a:cs typeface="Arial" pitchFamily="34" charset="-120"/>
-              </a:rPr>
-              <a:t>9  </a:t>
-            </a:r>
-            <a:pPr indent="0" marL="0">
-              <a:buNone/>
-            </a:pPr>
-            <a:r>
-              <a:rPr lang="en-US" sz="1400" dirty="0">
-                <a:solidFill>
-                  <a:srgbClr val="374151"/>
-                </a:solidFill>
-                <a:latin typeface="Arial" pitchFamily="34" charset="0"/>
-                <a:ea typeface="Arial" pitchFamily="34" charset="-122"/>
-                <a:cs typeface="Arial" pitchFamily="34" charset="-120"/>
-              </a:rPr>
-              <a:t>Prompt pronti per ruolo     </a:t>
-            </a:r>
-            <a:pPr indent="0" marL="0">
-              <a:buNone/>
-            </a:pPr>
-            <a:r>
-              <a:rPr lang="en-US" sz="1400" b="1" dirty="0">
-                <a:solidFill>
-                  <a:srgbClr val="1B4D89"/>
-                </a:solidFill>
-                <a:latin typeface="Arial" pitchFamily="34" charset="0"/>
-                <a:ea typeface="Arial" pitchFamily="34" charset="-122"/>
-                <a:cs typeface="Arial" pitchFamily="34" charset="-120"/>
-              </a:rPr>
-              <a:t>10  </a:t>
-            </a:r>
-            <a:pPr indent="0" marL="0">
-              <a:buNone/>
-            </a:pPr>
-            <a:r>
-              <a:rPr lang="en-US" sz="1400" dirty="0">
-                <a:solidFill>
-                  <a:srgbClr val="374151"/>
-                </a:solidFill>
-                <a:latin typeface="Arial" pitchFamily="34" charset="0"/>
-                <a:ea typeface="Arial" pitchFamily="34" charset="-122"/>
-                <a:cs typeface="Arial" pitchFamily="34" charset="-120"/>
-              </a:rPr>
-              <a:t>Documenti, dati e ricerca     </a:t>
-            </a:r>
-            <a:pPr indent="0" marL="0">
-              <a:buNone/>
-            </a:pPr>
-            <a:r>
-              <a:rPr lang="en-US" sz="1400" b="1" dirty="0">
-                <a:solidFill>
-                  <a:srgbClr val="1B4D89"/>
-                </a:solidFill>
-                <a:latin typeface="Arial" pitchFamily="34" charset="0"/>
-                <a:ea typeface="Arial" pitchFamily="34" charset="-122"/>
-                <a:cs typeface="Arial" pitchFamily="34" charset="-120"/>
-              </a:rPr>
-              <a:t>11  </a:t>
-            </a:r>
-            <a:pPr indent="0" marL="0">
-              <a:buNone/>
-            </a:pPr>
-            <a:r>
-              <a:rPr lang="en-US" sz="1400" dirty="0">
-                <a:solidFill>
-                  <a:srgbClr val="374151"/>
-                </a:solidFill>
-                <a:latin typeface="Arial" pitchFamily="34" charset="0"/>
-                <a:ea typeface="Arial" pitchFamily="34" charset="-122"/>
-                <a:cs typeface="Arial" pitchFamily="34" charset="-120"/>
-              </a:rPr>
-              <a:t>L’azienda pronta per l’AI</a:t>
-            </a:r>
-            <a:endParaRPr lang="en-US" sz="1400" dirty="0"/>
-          </a:p>
-        </p:txBody>
-      </p:sp>
-      <p:sp>
-        <p:nvSpPr>
-          <p:cNvPr id="13" name="Sezione Collegare e automatizzare"/>
+          <p:cNvPr id="47" name="numero 5"/>
           <p:cNvSpPr/>
           <p:nvPr/>
         </p:nvSpPr>
         <p:spPr>
           <a:xfrm>
-            <a:off x="685800" y="4553359"/>
-            <a:ext cx="10820095" cy="714086"/>
-          </a:xfrm>
-          <a:prstGeom prst="roundRect">
-            <a:avLst>
-              <a:gd name="adj" fmla="val 15366"/>
-            </a:avLst>
+            <a:off x="10159547" y="2057400"/>
+            <a:ext cx="384048" cy="384048"/>
+          </a:xfrm>
+          <a:prstGeom prst="ellipse">
+            <a:avLst/>
           </a:prstGeom>
           <a:solidFill>
-            <a:srgbClr val="EAF2FC"/>
+            <a:srgbClr val="1B4D89"/>
           </a:solidFill>
           <a:ln w="12700">
             <a:solidFill>
@@ -5585,14 +6504,14 @@
       </p:sp>
       <p:sp>
         <p:nvSpPr>
-          <p:cNvPr id="14" name="Nome Collegare e automatizzare"/>
+          <p:cNvPr id="48" name="numero testo 5"/>
           <p:cNvSpPr txBox="1"/>
           <p:nvPr/>
         </p:nvSpPr>
         <p:spPr>
           <a:xfrm>
-            <a:off x="941832" y="4553359"/>
-            <a:ext cx="2788920" cy="714086"/>
+            <a:off x="10159547" y="2057400"/>
+            <a:ext cx="384048" cy="384048"/>
           </a:xfrm>
           <a:prstGeom prst="rect">
             <a:avLst/>
@@ -5604,196 +6523,81 @@
           <a:bodyPr wrap="square" lIns="0" tIns="0" rIns="0" bIns="0" rtlCol="0" anchor="ctr"/>
           <a:lstStyle/>
           <a:p>
-            <a:pPr indent="0" marL="0">
-              <a:buNone/>
-            </a:pPr>
-            <a:r>
-              <a:rPr lang="en-US" sz="1100" b="1" spc="200" kern="0" dirty="0">
-                <a:solidFill>
-                  <a:srgbClr val="1B4D89"/>
-                </a:solidFill>
-                <a:latin typeface="Arial" pitchFamily="34" charset="0"/>
-                <a:ea typeface="Arial" pitchFamily="34" charset="-122"/>
-                <a:cs typeface="Arial" pitchFamily="34" charset="-120"/>
-              </a:rPr>
-              <a:t>SEZIONE D</a:t>
+            <a:pPr algn="ctr" indent="0" marL="0">
+              <a:buNone/>
+            </a:pPr>
+            <a:r>
+              <a:rPr lang="en-US" sz="1300" b="1" dirty="0">
+                <a:solidFill>
+                  <a:schemeClr val="bg1"/>
+                </a:solidFill>
+                <a:latin typeface="Arial" pitchFamily="34" charset="0"/>
+                <a:ea typeface="Arial" pitchFamily="34" charset="-122"/>
+                <a:cs typeface="Arial" pitchFamily="34" charset="-120"/>
+              </a:rPr>
+              <a:t>5</a:t>
+            </a:r>
+            <a:endParaRPr lang="en-US" sz="1300" dirty="0"/>
+          </a:p>
+        </p:txBody>
+      </p:sp>
+      <p:sp>
+        <p:nvSpPr>
+          <p:cNvPr id="49" name="Fase nome 4"/>
+          <p:cNvSpPr txBox="1"/>
+          <p:nvPr/>
+        </p:nvSpPr>
+        <p:spPr>
+          <a:xfrm>
+            <a:off x="10662467" y="2011680"/>
+            <a:ext cx="706268" cy="502920"/>
+          </a:xfrm>
+          <a:prstGeom prst="rect">
+            <a:avLst/>
+          </a:prstGeom>
+          <a:noFill/>
+          <a:ln/>
+        </p:spPr>
+        <p:txBody>
+          <a:bodyPr wrap="square" lIns="0" tIns="0" rIns="0" bIns="0" rtlCol="0" anchor="ctr"/>
+          <a:lstStyle/>
+          <a:p>
+            <a:pPr indent="0" marL="0">
+              <a:buNone/>
+            </a:pPr>
+            <a:r>
+              <a:rPr lang="en-US" sz="1500" b="1" dirty="0">
+                <a:solidFill>
+                  <a:schemeClr val="tx1"/>
+                </a:solidFill>
+                <a:latin typeface="Arial" pitchFamily="34" charset="0"/>
+                <a:ea typeface="Arial" pitchFamily="34" charset="-122"/>
+                <a:cs typeface="Arial" pitchFamily="34" charset="-120"/>
+              </a:rPr>
+              <a:t>Vendita</a:t>
             </a:r>
             <a:endParaRPr lang="en-US" sz="1500" dirty="0"/>
           </a:p>
-          <a:p>
-            <a:pPr indent="0" marL="0">
-              <a:buNone/>
-            </a:pPr>
-            <a:r>
-              <a:rPr lang="en-US" sz="1600" b="1" dirty="0">
-                <a:solidFill>
-                  <a:schemeClr val="tx1"/>
-                </a:solidFill>
-                <a:latin typeface="Arial" pitchFamily="34" charset="0"/>
-                <a:ea typeface="Arial" pitchFamily="34" charset="-122"/>
-                <a:cs typeface="Arial" pitchFamily="34" charset="-120"/>
-              </a:rPr>
-              <a:t>Collegare e automatizzare</a:t>
-            </a:r>
-            <a:endParaRPr lang="en-US" sz="1500" dirty="0"/>
-          </a:p>
-        </p:txBody>
-      </p:sp>
-      <p:sp>
-        <p:nvSpPr>
-          <p:cNvPr id="15" name="Capitoli Collegare e automatizzare"/>
-          <p:cNvSpPr txBox="1"/>
-          <p:nvPr/>
-        </p:nvSpPr>
-        <p:spPr>
-          <a:xfrm>
-            <a:off x="3931920" y="4553359"/>
-            <a:ext cx="7299655" cy="714086"/>
-          </a:xfrm>
-          <a:prstGeom prst="rect">
-            <a:avLst/>
-          </a:prstGeom>
-          <a:noFill/>
-          <a:ln/>
-        </p:spPr>
-        <p:txBody>
-          <a:bodyPr wrap="square" lIns="0" tIns="0" rIns="0" bIns="0" rtlCol="0" anchor="ctr"/>
-          <a:lstStyle/>
-          <a:p>
-            <a:pPr indent="0" marL="0">
-              <a:buNone/>
-            </a:pPr>
-            <a:r>
-              <a:rPr lang="en-US" sz="1400" b="1" dirty="0">
-                <a:solidFill>
-                  <a:srgbClr val="1B4D89"/>
-                </a:solidFill>
-                <a:latin typeface="Arial" pitchFamily="34" charset="0"/>
-                <a:ea typeface="Arial" pitchFamily="34" charset="-122"/>
-                <a:cs typeface="Arial" pitchFamily="34" charset="-120"/>
-              </a:rPr>
-              <a:t>12  </a:t>
-            </a:r>
-            <a:pPr indent="0" marL="0">
-              <a:buNone/>
-            </a:pPr>
-            <a:r>
-              <a:rPr lang="en-US" sz="1400" dirty="0">
-                <a:solidFill>
-                  <a:srgbClr val="374151"/>
-                </a:solidFill>
-                <a:latin typeface="Arial" pitchFamily="34" charset="0"/>
-                <a:ea typeface="Arial" pitchFamily="34" charset="-122"/>
-                <a:cs typeface="Arial" pitchFamily="34" charset="-120"/>
-              </a:rPr>
-              <a:t>Connettori e MCP     </a:t>
-            </a:r>
-            <a:pPr indent="0" marL="0">
-              <a:buNone/>
-            </a:pPr>
-            <a:r>
-              <a:rPr lang="en-US" sz="1400" b="1" dirty="0">
-                <a:solidFill>
-                  <a:srgbClr val="1B4D89"/>
-                </a:solidFill>
-                <a:latin typeface="Arial" pitchFamily="34" charset="0"/>
-                <a:ea typeface="Arial" pitchFamily="34" charset="-122"/>
-                <a:cs typeface="Arial" pitchFamily="34" charset="-120"/>
-              </a:rPr>
-              <a:t>13  </a:t>
-            </a:r>
-            <a:pPr indent="0" marL="0">
-              <a:buNone/>
-            </a:pPr>
-            <a:r>
-              <a:rPr lang="en-US" sz="1400" dirty="0">
-                <a:solidFill>
-                  <a:srgbClr val="374151"/>
-                </a:solidFill>
-                <a:latin typeface="Arial" pitchFamily="34" charset="0"/>
-                <a:ea typeface="Arial" pitchFamily="34" charset="-122"/>
-                <a:cs typeface="Arial" pitchFamily="34" charset="-120"/>
-              </a:rPr>
-              <a:t>Skill     </a:t>
-            </a:r>
-            <a:pPr indent="0" marL="0">
-              <a:buNone/>
-            </a:pPr>
-            <a:r>
-              <a:rPr lang="en-US" sz="1400" b="1" dirty="0">
-                <a:solidFill>
-                  <a:srgbClr val="1B4D89"/>
-                </a:solidFill>
-                <a:latin typeface="Arial" pitchFamily="34" charset="0"/>
-                <a:ea typeface="Arial" pitchFamily="34" charset="-122"/>
-                <a:cs typeface="Arial" pitchFamily="34" charset="-120"/>
-              </a:rPr>
-              <a:t>14  </a:t>
-            </a:r>
-            <a:pPr indent="0" marL="0">
-              <a:buNone/>
-            </a:pPr>
-            <a:r>
-              <a:rPr lang="en-US" sz="1400" dirty="0">
-                <a:solidFill>
-                  <a:srgbClr val="374151"/>
-                </a:solidFill>
-                <a:latin typeface="Arial" pitchFamily="34" charset="0"/>
-                <a:ea typeface="Arial" pitchFamily="34" charset="-122"/>
-                <a:cs typeface="Arial" pitchFamily="34" charset="-120"/>
-              </a:rPr>
-              <a:t>Automazioni e agenti     </a:t>
-            </a:r>
-            <a:pPr indent="0" marL="0">
-              <a:buNone/>
-            </a:pPr>
-            <a:r>
-              <a:rPr lang="en-US" sz="1400" b="1" dirty="0">
-                <a:solidFill>
-                  <a:srgbClr val="1B4D89"/>
-                </a:solidFill>
-                <a:latin typeface="Arial" pitchFamily="34" charset="0"/>
-                <a:ea typeface="Arial" pitchFamily="34" charset="-122"/>
-                <a:cs typeface="Arial" pitchFamily="34" charset="-120"/>
-              </a:rPr>
-              <a:t>15  </a:t>
-            </a:r>
-            <a:pPr indent="0" marL="0">
-              <a:buNone/>
-            </a:pPr>
-            <a:r>
-              <a:rPr lang="en-US" sz="1400" dirty="0">
-                <a:solidFill>
-                  <a:srgbClr val="374151"/>
-                </a:solidFill>
-                <a:latin typeface="Arial" pitchFamily="34" charset="0"/>
-                <a:ea typeface="Arial" pitchFamily="34" charset="-122"/>
-                <a:cs typeface="Arial" pitchFamily="34" charset="-120"/>
-              </a:rPr>
-              <a:t>Vibe coding: basi</a:t>
-            </a:r>
-            <a:endParaRPr lang="en-US" sz="1400" dirty="0"/>
-          </a:p>
-        </p:txBody>
-      </p:sp>
-      <p:sp>
-        <p:nvSpPr>
-          <p:cNvPr id="16" name="Sezione Strumenti e verifica"/>
+        </p:txBody>
+      </p:sp>
+      <p:sp>
+        <p:nvSpPr>
+          <p:cNvPr id="50" name="Skill property-content"/>
           <p:cNvSpPr/>
           <p:nvPr/>
         </p:nvSpPr>
         <p:spPr>
           <a:xfrm>
-            <a:off x="685800" y="5395461"/>
-            <a:ext cx="10820095" cy="685299"/>
+            <a:off x="10113827" y="2697480"/>
+            <a:ext cx="1209188" cy="329184"/>
           </a:xfrm>
           <a:prstGeom prst="roundRect">
             <a:avLst>
-              <a:gd name="adj" fmla="val 16012"/>
+              <a:gd name="adj" fmla="val 22222"/>
             </a:avLst>
           </a:prstGeom>
           <a:solidFill>
-            <a:srgbClr val="F6F8FB"/>
+            <a:srgbClr val="FFFFFF"/>
           </a:solidFill>
           <a:ln w="12700">
             <a:solidFill>
@@ -5805,14 +6609,14 @@
       </p:sp>
       <p:sp>
         <p:nvSpPr>
-          <p:cNvPr id="17" name="Nome Strumenti e verifica"/>
+          <p:cNvPr id="51" name="Skill testo property-content"/>
           <p:cNvSpPr txBox="1"/>
           <p:nvPr/>
         </p:nvSpPr>
         <p:spPr>
           <a:xfrm>
-            <a:off x="941832" y="5395461"/>
-            <a:ext cx="2788920" cy="685299"/>
+            <a:off x="10205267" y="2697480"/>
+            <a:ext cx="1117748" cy="329184"/>
           </a:xfrm>
           <a:prstGeom prst="rect">
             <a:avLst/>
@@ -5828,7 +6632,7 @@
               <a:buNone/>
             </a:pPr>
             <a:r>
-              <a:rPr lang="en-US" sz="1100" b="1" spc="200" kern="0" dirty="0">
+              <a:rPr lang="en-US" sz="1050" b="1" dirty="0">
                 <a:solidFill>
                   <a:srgbClr val="1B4D89"/>
                 </a:solidFill>
@@ -5836,10 +6640,215 @@
                 <a:ea typeface="Arial" pitchFamily="34" charset="-122"/>
                 <a:cs typeface="Arial" pitchFamily="34" charset="-120"/>
               </a:rPr>
-              <a:t>SEZIONE E</a:t>
-            </a:r>
-            <a:endParaRPr lang="en-US" sz="1500" dirty="0"/>
-          </a:p>
+              <a:t>property-content</a:t>
+            </a:r>
+            <a:endParaRPr lang="en-US" sz="1050" dirty="0"/>
+          </a:p>
+        </p:txBody>
+      </p:sp>
+      <p:sp>
+        <p:nvSpPr>
+          <p:cNvPr id="52" name="Skill sales-brochure"/>
+          <p:cNvSpPr/>
+          <p:nvPr/>
+        </p:nvSpPr>
+        <p:spPr>
+          <a:xfrm>
+            <a:off x="10113827" y="3081528"/>
+            <a:ext cx="1209188" cy="329184"/>
+          </a:xfrm>
+          <a:prstGeom prst="roundRect">
+            <a:avLst>
+              <a:gd name="adj" fmla="val 22222"/>
+            </a:avLst>
+          </a:prstGeom>
+          <a:solidFill>
+            <a:srgbClr val="FFFFFF"/>
+          </a:solidFill>
+          <a:ln w="12700">
+            <a:solidFill>
+              <a:srgbClr val="E4E8EE"/>
+            </a:solidFill>
+            <a:prstDash val="solid"/>
+          </a:ln>
+        </p:spPr>
+      </p:sp>
+      <p:sp>
+        <p:nvSpPr>
+          <p:cNvPr id="53" name="Skill testo sales-brochure"/>
+          <p:cNvSpPr txBox="1"/>
+          <p:nvPr/>
+        </p:nvSpPr>
+        <p:spPr>
+          <a:xfrm>
+            <a:off x="10205267" y="3081528"/>
+            <a:ext cx="1117748" cy="329184"/>
+          </a:xfrm>
+          <a:prstGeom prst="rect">
+            <a:avLst/>
+          </a:prstGeom>
+          <a:noFill/>
+          <a:ln/>
+        </p:spPr>
+        <p:txBody>
+          <a:bodyPr wrap="square" lIns="0" tIns="0" rIns="0" bIns="0" rtlCol="0" anchor="ctr"/>
+          <a:lstStyle/>
+          <a:p>
+            <a:pPr indent="0" marL="0">
+              <a:buNone/>
+            </a:pPr>
+            <a:r>
+              <a:rPr lang="en-US" sz="1200" b="1" dirty="0">
+                <a:solidFill>
+                  <a:srgbClr val="1B4D89"/>
+                </a:solidFill>
+                <a:latin typeface="Arial" pitchFamily="34" charset="0"/>
+                <a:ea typeface="Arial" pitchFamily="34" charset="-122"/>
+                <a:cs typeface="Arial" pitchFamily="34" charset="-120"/>
+              </a:rPr>
+              <a:t>sales-brochure</a:t>
+            </a:r>
+            <a:endParaRPr lang="en-US" sz="1200" dirty="0"/>
+          </a:p>
+        </p:txBody>
+      </p:sp>
+      <p:sp>
+        <p:nvSpPr>
+          <p:cNvPr id="54" name="Skill brand-comms"/>
+          <p:cNvSpPr/>
+          <p:nvPr/>
+        </p:nvSpPr>
+        <p:spPr>
+          <a:xfrm>
+            <a:off x="10113827" y="3465576"/>
+            <a:ext cx="1209188" cy="329184"/>
+          </a:xfrm>
+          <a:prstGeom prst="roundRect">
+            <a:avLst>
+              <a:gd name="adj" fmla="val 22222"/>
+            </a:avLst>
+          </a:prstGeom>
+          <a:solidFill>
+            <a:srgbClr val="FFFFFF"/>
+          </a:solidFill>
+          <a:ln w="12700">
+            <a:solidFill>
+              <a:srgbClr val="E4E8EE"/>
+            </a:solidFill>
+            <a:prstDash val="solid"/>
+          </a:ln>
+        </p:spPr>
+      </p:sp>
+      <p:sp>
+        <p:nvSpPr>
+          <p:cNvPr id="55" name="Skill testo brand-comms"/>
+          <p:cNvSpPr txBox="1"/>
+          <p:nvPr/>
+        </p:nvSpPr>
+        <p:spPr>
+          <a:xfrm>
+            <a:off x="10205267" y="3465576"/>
+            <a:ext cx="1117748" cy="329184"/>
+          </a:xfrm>
+          <a:prstGeom prst="rect">
+            <a:avLst/>
+          </a:prstGeom>
+          <a:noFill/>
+          <a:ln/>
+        </p:spPr>
+        <p:txBody>
+          <a:bodyPr wrap="square" lIns="0" tIns="0" rIns="0" bIns="0" rtlCol="0" anchor="ctr"/>
+          <a:lstStyle/>
+          <a:p>
+            <a:pPr indent="0" marL="0">
+              <a:buNone/>
+            </a:pPr>
+            <a:r>
+              <a:rPr lang="en-US" sz="1200" b="1" dirty="0">
+                <a:solidFill>
+                  <a:srgbClr val="1B4D89"/>
+                </a:solidFill>
+                <a:latin typeface="Arial" pitchFamily="34" charset="0"/>
+                <a:ea typeface="Arial" pitchFamily="34" charset="-122"/>
+                <a:cs typeface="Arial" pitchFamily="34" charset="-120"/>
+              </a:rPr>
+              <a:t>brand-comms</a:t>
+            </a:r>
+            <a:endParaRPr lang="en-US" sz="1200" dirty="0"/>
+          </a:p>
+        </p:txBody>
+      </p:sp>
+      <p:sp>
+        <p:nvSpPr>
+          <p:cNvPr id="56" name="nota Una skill passa all’altra:"/>
+          <p:cNvSpPr/>
+          <p:nvPr/>
+        </p:nvSpPr>
+        <p:spPr>
+          <a:xfrm>
+            <a:off x="685800" y="5486400"/>
+            <a:ext cx="10820095" cy="603504"/>
+          </a:xfrm>
+          <a:prstGeom prst="roundRect">
+            <a:avLst>
+              <a:gd name="adj" fmla="val 21212"/>
+            </a:avLst>
+          </a:prstGeom>
+          <a:solidFill>
+            <a:srgbClr val="EAF2FC"/>
+          </a:solidFill>
+          <a:ln w="12700">
+            <a:solidFill>
+              <a:srgbClr val="EAF2FC"/>
+            </a:solidFill>
+            <a:prstDash val="solid"/>
+          </a:ln>
+        </p:spPr>
+      </p:sp>
+      <p:pic>
+        <p:nvPicPr>
+          <p:cNvPr id="57" name="nota icona" descr="preencoded.png">    </p:cNvPr>
+          <p:cNvPicPr>
+            <a:picLocks noChangeAspect="1"/>
+          </p:cNvPicPr>
+          <p:nvPr/>
+        </p:nvPicPr>
+        <p:blipFill>
+          <a:blip r:embed="rId5"/>
+          <a:stretch>
+            <a:fillRect/>
+          </a:stretch>
+        </p:blipFill>
+        <p:spPr>
+          <a:xfrm>
+            <a:off x="914400" y="5623560"/>
+            <a:ext cx="329184" cy="329184"/>
+          </a:xfrm>
+          <a:prstGeom prst="rect">
+            <a:avLst/>
+          </a:prstGeom>
+        </p:spPr>
+      </p:pic>
+      <p:sp>
+        <p:nvSpPr>
+          <p:cNvPr id="58" name="nota testo"/>
+          <p:cNvSpPr txBox="1"/>
+          <p:nvPr/>
+        </p:nvSpPr>
+        <p:spPr>
+          <a:xfrm>
+            <a:off x="1417320" y="5486400"/>
+            <a:ext cx="9859975" cy="603504"/>
+          </a:xfrm>
+          <a:prstGeom prst="rect">
+            <a:avLst/>
+          </a:prstGeom>
+          <a:noFill/>
+          <a:ln/>
+        </p:spPr>
+        <p:txBody>
+          <a:bodyPr wrap="square" lIns="0" tIns="0" rIns="0" bIns="0" rtlCol="0" anchor="ctr"/>
+          <a:lstStyle/>
           <a:p>
             <a:pPr indent="0" marL="0">
               <a:buNone/>
@@ -5847,180 +6856,29 @@
             <a:r>
               <a:rPr lang="en-US" sz="1600" b="1" dirty="0">
                 <a:solidFill>
+                  <a:srgbClr val="1B4D89"/>
+                </a:solidFill>
+                <a:latin typeface="Arial" pitchFamily="34" charset="0"/>
+                <a:ea typeface="Arial" pitchFamily="34" charset="-122"/>
+                <a:cs typeface="Arial" pitchFamily="34" charset="-120"/>
+              </a:rPr>
+              <a:t>Una skill passa all’altra: </a:t>
+            </a:r>
+            <a:pPr indent="0" marL="0">
+              <a:buNone/>
+            </a:pPr>
+            <a:r>
+              <a:rPr lang="en-US" sz="1600" dirty="0">
+                <a:solidFill>
                   <a:schemeClr val="tx1"/>
                 </a:solidFill>
                 <a:latin typeface="Arial" pitchFamily="34" charset="0"/>
                 <a:ea typeface="Arial" pitchFamily="34" charset="-122"/>
                 <a:cs typeface="Arial" pitchFamily="34" charset="-120"/>
               </a:rPr>
-              <a:t>Strumenti e verifica</a:t>
-            </a:r>
-            <a:endParaRPr lang="en-US" sz="1500" dirty="0"/>
-          </a:p>
-        </p:txBody>
-      </p:sp>
-      <p:sp>
-        <p:nvSpPr>
-          <p:cNvPr id="18" name="Capitoli Strumenti e verifica"/>
-          <p:cNvSpPr txBox="1"/>
-          <p:nvPr/>
-        </p:nvSpPr>
-        <p:spPr>
-          <a:xfrm>
-            <a:off x="3931920" y="5395461"/>
-            <a:ext cx="7299655" cy="685299"/>
-          </a:xfrm>
-          <a:prstGeom prst="rect">
-            <a:avLst/>
-          </a:prstGeom>
-          <a:noFill/>
-          <a:ln/>
-        </p:spPr>
-        <p:txBody>
-          <a:bodyPr wrap="square" lIns="0" tIns="0" rIns="0" bIns="0" rtlCol="0" anchor="ctr"/>
-          <a:lstStyle/>
-          <a:p>
-            <a:pPr indent="0" marL="0">
-              <a:buNone/>
-            </a:pPr>
-            <a:r>
-              <a:rPr lang="en-US" sz="1400" b="1" dirty="0">
-                <a:solidFill>
-                  <a:srgbClr val="1B4D89"/>
-                </a:solidFill>
-                <a:latin typeface="Arial" pitchFamily="34" charset="0"/>
-                <a:ea typeface="Arial" pitchFamily="34" charset="-122"/>
-                <a:cs typeface="Arial" pitchFamily="34" charset="-120"/>
-              </a:rPr>
-              <a:t>16  </a:t>
-            </a:r>
-            <a:pPr indent="0" marL="0">
-              <a:buNone/>
-            </a:pPr>
-            <a:r>
-              <a:rPr lang="en-US" sz="1400" dirty="0">
-                <a:solidFill>
-                  <a:srgbClr val="374151"/>
-                </a:solidFill>
-                <a:latin typeface="Arial" pitchFamily="34" charset="0"/>
-                <a:ea typeface="Arial" pitchFamily="34" charset="-122"/>
-                <a:cs typeface="Arial" pitchFamily="34" charset="-120"/>
-              </a:rPr>
-              <a:t>Tech stack AI     </a:t>
-            </a:r>
-            <a:pPr indent="0" marL="0">
-              <a:buNone/>
-            </a:pPr>
-            <a:r>
-              <a:rPr lang="en-US" sz="1400" b="1" dirty="0">
-                <a:solidFill>
-                  <a:srgbClr val="1B4D89"/>
-                </a:solidFill>
-                <a:latin typeface="Arial" pitchFamily="34" charset="0"/>
-                <a:ea typeface="Arial" pitchFamily="34" charset="-122"/>
-                <a:cs typeface="Arial" pitchFamily="34" charset="-120"/>
-              </a:rPr>
-              <a:t>17  </a:t>
-            </a:r>
-            <a:pPr indent="0" marL="0">
-              <a:buNone/>
-            </a:pPr>
-            <a:r>
-              <a:rPr lang="en-US" sz="1400" dirty="0">
-                <a:solidFill>
-                  <a:srgbClr val="374151"/>
-                </a:solidFill>
-                <a:latin typeface="Arial" pitchFamily="34" charset="0"/>
-                <a:ea typeface="Arial" pitchFamily="34" charset="-122"/>
-                <a:cs typeface="Arial" pitchFamily="34" charset="-120"/>
-              </a:rPr>
-              <a:t>Checklist     </a:t>
-            </a:r>
-            <a:pPr indent="0" marL="0">
-              <a:buNone/>
-            </a:pPr>
-            <a:r>
-              <a:rPr lang="en-US" sz="1400" b="1" dirty="0">
-                <a:solidFill>
-                  <a:srgbClr val="1B4D89"/>
-                </a:solidFill>
-                <a:latin typeface="Arial" pitchFamily="34" charset="0"/>
-                <a:ea typeface="Arial" pitchFamily="34" charset="-122"/>
-                <a:cs typeface="Arial" pitchFamily="34" charset="-120"/>
-              </a:rPr>
-              <a:t>18  </a:t>
-            </a:r>
-            <a:pPr indent="0" marL="0">
-              <a:buNone/>
-            </a:pPr>
-            <a:r>
-              <a:rPr lang="en-US" sz="1400" dirty="0">
-                <a:solidFill>
-                  <a:srgbClr val="374151"/>
-                </a:solidFill>
-                <a:latin typeface="Arial" pitchFamily="34" charset="0"/>
-                <a:ea typeface="Arial" pitchFamily="34" charset="-122"/>
-                <a:cs typeface="Arial" pitchFamily="34" charset="-120"/>
-              </a:rPr>
-              <a:t>Test     </a:t>
-            </a:r>
-            <a:pPr indent="0" marL="0">
-              <a:buNone/>
-            </a:pPr>
-            <a:r>
-              <a:rPr lang="en-US" sz="1400" b="1" dirty="0">
-                <a:solidFill>
-                  <a:srgbClr val="1B4D89"/>
-                </a:solidFill>
-                <a:latin typeface="Arial" pitchFamily="34" charset="0"/>
-                <a:ea typeface="Arial" pitchFamily="34" charset="-122"/>
-                <a:cs typeface="Arial" pitchFamily="34" charset="-120"/>
-              </a:rPr>
-              <a:t>19  </a:t>
-            </a:r>
-            <a:pPr indent="0" marL="0">
-              <a:buNone/>
-            </a:pPr>
-            <a:r>
-              <a:rPr lang="en-US" sz="1400" dirty="0">
-                <a:solidFill>
-                  <a:srgbClr val="374151"/>
-                </a:solidFill>
-                <a:latin typeface="Arial" pitchFamily="34" charset="0"/>
-                <a:ea typeface="Arial" pitchFamily="34" charset="-122"/>
-                <a:cs typeface="Arial" pitchFamily="34" charset="-120"/>
-              </a:rPr>
-              <a:t>Glossario     </a:t>
-            </a:r>
-            <a:pPr indent="0" marL="0">
-              <a:buNone/>
-            </a:pPr>
-            <a:r>
-              <a:rPr lang="en-US" sz="1400" b="1" dirty="0">
-                <a:solidFill>
-                  <a:srgbClr val="1B4D89"/>
-                </a:solidFill>
-                <a:latin typeface="Arial" pitchFamily="34" charset="0"/>
-                <a:ea typeface="Arial" pitchFamily="34" charset="-122"/>
-                <a:cs typeface="Arial" pitchFamily="34" charset="-120"/>
-              </a:rPr>
-              <a:t>20  </a:t>
-            </a:r>
-            <a:pPr indent="0" marL="0">
-              <a:buNone/>
-            </a:pPr>
-            <a:r>
-              <a:rPr lang="en-US" sz="1400" dirty="0">
-                <a:solidFill>
-                  <a:srgbClr val="374151"/>
-                </a:solidFill>
-                <a:latin typeface="Arial" pitchFamily="34" charset="0"/>
-                <a:ea typeface="Arial" pitchFamily="34" charset="-122"/>
-                <a:cs typeface="Arial" pitchFamily="34" charset="-120"/>
-              </a:rPr>
-              <a:t>Fonti</a:t>
-            </a:r>
-            <a:endParaRPr lang="en-US" sz="1400" dirty="0"/>
+              <a:t>la scheda dati di project-setup la legge business-plan, il modello validato lo legge investor-teaser.</a:t>
+            </a:r>
+            <a:endParaRPr lang="en-US" sz="1600" dirty="0"/>
           </a:p>
         </p:txBody>
       </p:sp>
@@ -6132,7 +6990,7 @@
                 <a:ea typeface="Arial" pitchFamily="34" charset="-122"/>
                 <a:cs typeface="Arial" pitchFamily="34" charset="-120"/>
               </a:rPr>
-              <a:t>ADESSO, INSIEME</a:t>
+              <a:t>ESEMPIO VERO · REAL ESTATE OS</a:t>
             </a:r>
             <a:endParaRPr lang="en-US" sz="1200" dirty="0"/>
           </a:p>
@@ -6173,7 +7031,7 @@
                 <a:ea typeface="Georgia" pitchFamily="34" charset="-122"/>
                 <a:cs typeface="Georgia" pitchFamily="34" charset="-120"/>
               </a:rPr>
-              <a:t>Tre cose da fare in 10 minuti</a:t>
+              <a:t>Cosa scrivi, cosa ottieni</a:t>
             </a:r>
             <a:endParaRPr lang="en-US" sz="3400" dirty="0"/>
           </a:p>
@@ -6181,108 +7039,174 @@
       </p:sp>
       <p:sp>
         <p:nvSpPr>
-          <p:cNvPr id="4" name="Tempo"/>
+          <p:cNvPr id="4" name="Intestazione SKILL"/>
+          <p:cNvSpPr txBox="1"/>
+          <p:nvPr/>
+        </p:nvSpPr>
+        <p:spPr>
+          <a:xfrm>
+            <a:off x="822960" y="1783080"/>
+            <a:ext cx="2514600" cy="256032"/>
+          </a:xfrm>
+          <a:prstGeom prst="rect">
+            <a:avLst/>
+          </a:prstGeom>
+          <a:noFill/>
+          <a:ln/>
+        </p:spPr>
+        <p:txBody>
+          <a:bodyPr wrap="square" lIns="0" tIns="0" rIns="0" bIns="0" rtlCol="0" anchor="t"/>
+          <a:lstStyle/>
+          <a:p>
+            <a:pPr indent="0" marL="0">
+              <a:buNone/>
+            </a:pPr>
+            <a:r>
+              <a:rPr lang="en-US" sz="1100" b="1" spc="200" kern="0" dirty="0">
+                <a:solidFill>
+                  <a:schemeClr val="accent6"/>
+                </a:solidFill>
+                <a:latin typeface="Arial" pitchFamily="34" charset="0"/>
+                <a:ea typeface="Arial" pitchFamily="34" charset="-122"/>
+                <a:cs typeface="Arial" pitchFamily="34" charset="-120"/>
+              </a:rPr>
+              <a:t>SKILL</a:t>
+            </a:r>
+            <a:endParaRPr lang="en-US" sz="1100" dirty="0"/>
+          </a:p>
+        </p:txBody>
+      </p:sp>
+      <p:sp>
+        <p:nvSpPr>
+          <p:cNvPr id="5" name="Intestazione CHIEDI"/>
+          <p:cNvSpPr txBox="1"/>
+          <p:nvPr/>
+        </p:nvSpPr>
+        <p:spPr>
+          <a:xfrm>
+            <a:off x="3337560" y="1783080"/>
+            <a:ext cx="2240280" cy="256032"/>
+          </a:xfrm>
+          <a:prstGeom prst="rect">
+            <a:avLst/>
+          </a:prstGeom>
+          <a:noFill/>
+          <a:ln/>
+        </p:spPr>
+        <p:txBody>
+          <a:bodyPr wrap="square" lIns="0" tIns="0" rIns="0" bIns="0" rtlCol="0" anchor="t"/>
+          <a:lstStyle/>
+          <a:p>
+            <a:pPr indent="0" marL="0">
+              <a:buNone/>
+            </a:pPr>
+            <a:r>
+              <a:rPr lang="en-US" sz="1100" b="1" spc="200" kern="0" dirty="0">
+                <a:solidFill>
+                  <a:schemeClr val="accent6"/>
+                </a:solidFill>
+                <a:latin typeface="Arial" pitchFamily="34" charset="0"/>
+                <a:ea typeface="Arial" pitchFamily="34" charset="-122"/>
+                <a:cs typeface="Arial" pitchFamily="34" charset="-120"/>
+              </a:rPr>
+              <a:t>CHIEDI</a:t>
+            </a:r>
+            <a:endParaRPr lang="en-US" sz="1100" dirty="0"/>
+          </a:p>
+        </p:txBody>
+      </p:sp>
+      <p:sp>
+        <p:nvSpPr>
+          <p:cNvPr id="6" name="Intestazione LE SERVE"/>
+          <p:cNvSpPr txBox="1"/>
+          <p:nvPr/>
+        </p:nvSpPr>
+        <p:spPr>
+          <a:xfrm>
+            <a:off x="5577840" y="1783080"/>
+            <a:ext cx="2331720" cy="256032"/>
+          </a:xfrm>
+          <a:prstGeom prst="rect">
+            <a:avLst/>
+          </a:prstGeom>
+          <a:noFill/>
+          <a:ln/>
+        </p:spPr>
+        <p:txBody>
+          <a:bodyPr wrap="square" lIns="0" tIns="0" rIns="0" bIns="0" rtlCol="0" anchor="t"/>
+          <a:lstStyle/>
+          <a:p>
+            <a:pPr indent="0" marL="0">
+              <a:buNone/>
+            </a:pPr>
+            <a:r>
+              <a:rPr lang="en-US" sz="1100" b="1" spc="200" kern="0" dirty="0">
+                <a:solidFill>
+                  <a:schemeClr val="accent6"/>
+                </a:solidFill>
+                <a:latin typeface="Arial" pitchFamily="34" charset="0"/>
+                <a:ea typeface="Arial" pitchFamily="34" charset="-122"/>
+                <a:cs typeface="Arial" pitchFamily="34" charset="-120"/>
+              </a:rPr>
+              <a:t>LE SERVE</a:t>
+            </a:r>
+            <a:endParaRPr lang="en-US" sz="1100" dirty="0"/>
+          </a:p>
+        </p:txBody>
+      </p:sp>
+      <p:sp>
+        <p:nvSpPr>
+          <p:cNvPr id="7" name="Intestazione OTTIENI"/>
+          <p:cNvSpPr txBox="1"/>
+          <p:nvPr/>
+        </p:nvSpPr>
+        <p:spPr>
+          <a:xfrm>
+            <a:off x="8229600" y="1783080"/>
+            <a:ext cx="3410712" cy="256032"/>
+          </a:xfrm>
+          <a:prstGeom prst="rect">
+            <a:avLst/>
+          </a:prstGeom>
+          <a:noFill/>
+          <a:ln/>
+        </p:spPr>
+        <p:txBody>
+          <a:bodyPr wrap="square" lIns="0" tIns="0" rIns="0" bIns="0" rtlCol="0" anchor="t"/>
+          <a:lstStyle/>
+          <a:p>
+            <a:pPr indent="0" marL="0">
+              <a:buNone/>
+            </a:pPr>
+            <a:r>
+              <a:rPr lang="en-US" sz="1100" b="1" spc="200" kern="0" dirty="0">
+                <a:solidFill>
+                  <a:schemeClr val="accent6"/>
+                </a:solidFill>
+                <a:latin typeface="Arial" pitchFamily="34" charset="0"/>
+                <a:ea typeface="Arial" pitchFamily="34" charset="-122"/>
+                <a:cs typeface="Arial" pitchFamily="34" charset="-120"/>
+              </a:rPr>
+              <a:t>OTTIENI</a:t>
+            </a:r>
+            <a:endParaRPr lang="en-US" sz="1100" dirty="0"/>
+          </a:p>
+        </p:txBody>
+      </p:sp>
+      <p:sp>
+        <p:nvSpPr>
+          <p:cNvPr id="8" name="Riga project-setup"/>
           <p:cNvSpPr/>
           <p:nvPr/>
         </p:nvSpPr>
         <p:spPr>
           <a:xfrm>
-            <a:off x="9905695" y="868680"/>
-            <a:ext cx="1600200" cy="457200"/>
+            <a:off x="685800" y="2103120"/>
+            <a:ext cx="10820095" cy="711811"/>
           </a:xfrm>
           <a:prstGeom prst="roundRect">
             <a:avLst>
-              <a:gd name="adj" fmla="val 50000"/>
-            </a:avLst>
-          </a:prstGeom>
-          <a:solidFill>
-            <a:srgbClr val="ECFDF3"/>
-          </a:solidFill>
-          <a:ln w="12700">
-            <a:solidFill>
-              <a:srgbClr val="ECFDF3"/>
-            </a:solidFill>
-            <a:prstDash val="solid"/>
-          </a:ln>
-        </p:spPr>
-      </p:sp>
-      <p:pic>
-        <p:nvPicPr>
-          <p:cNvPr id="5" name="Tempo icona" descr="preencoded.png">    </p:cNvPr>
-          <p:cNvPicPr>
-            <a:picLocks noChangeAspect="1"/>
-          </p:cNvPicPr>
-          <p:nvPr/>
-        </p:nvPicPr>
-        <p:blipFill>
-          <a:blip r:embed="rId1"/>
-          <a:stretch>
-            <a:fillRect/>
-          </a:stretch>
-        </p:blipFill>
-        <p:spPr>
-          <a:xfrm>
-            <a:off x="10088575" y="978408"/>
-            <a:ext cx="237744" cy="237744"/>
-          </a:xfrm>
-          <a:prstGeom prst="rect">
-            <a:avLst/>
-          </a:prstGeom>
-        </p:spPr>
-      </p:pic>
-      <p:sp>
-        <p:nvSpPr>
-          <p:cNvPr id="6" name="Tempo testo"/>
-          <p:cNvSpPr txBox="1"/>
-          <p:nvPr/>
-        </p:nvSpPr>
-        <p:spPr>
-          <a:xfrm>
-            <a:off x="10362895" y="868680"/>
-            <a:ext cx="1051560" cy="457200"/>
-          </a:xfrm>
-          <a:prstGeom prst="rect">
-            <a:avLst/>
-          </a:prstGeom>
-          <a:noFill/>
-          <a:ln/>
-        </p:spPr>
-        <p:txBody>
-          <a:bodyPr wrap="square" lIns="0" tIns="0" rIns="0" bIns="0" rtlCol="0" anchor="ctr"/>
-          <a:lstStyle/>
-          <a:p>
-            <a:pPr indent="0" marL="0">
-              <a:buNone/>
-            </a:pPr>
-            <a:r>
-              <a:rPr lang="en-US" sz="1400" b="1" dirty="0">
-                <a:solidFill>
-                  <a:schemeClr val="accent3"/>
-                </a:solidFill>
-                <a:latin typeface="Arial" pitchFamily="34" charset="0"/>
-                <a:ea typeface="Arial" pitchFamily="34" charset="-122"/>
-                <a:cs typeface="Arial" pitchFamily="34" charset="-120"/>
-              </a:rPr>
-              <a:t>10 minuti</a:t>
-            </a:r>
-            <a:endParaRPr lang="en-US" sz="1400" dirty="0"/>
-          </a:p>
-        </p:txBody>
-      </p:sp>
-      <p:sp>
-        <p:nvSpPr>
-          <p:cNvPr id="7" name="Azione 1"/>
-          <p:cNvSpPr/>
-          <p:nvPr/>
-        </p:nvSpPr>
-        <p:spPr>
-          <a:xfrm>
-            <a:off x="685800" y="1828800"/>
-            <a:ext cx="10820095" cy="1188720"/>
-          </a:xfrm>
-          <a:prstGeom prst="roundRect">
-            <a:avLst>
-              <a:gd name="adj" fmla="val 10769"/>
+              <a:gd name="adj" fmla="val 12846"/>
             </a:avLst>
           </a:prstGeom>
           <a:solidFill>
@@ -6298,82 +7222,18 @@
       </p:sp>
       <p:sp>
         <p:nvSpPr>
-          <p:cNvPr id="8" name="numero 1"/>
+          <p:cNvPr id="9" name="Nome project-setup"/>
           <p:cNvSpPr/>
           <p:nvPr/>
         </p:nvSpPr>
         <p:spPr>
           <a:xfrm>
-            <a:off x="960120" y="2167128"/>
-            <a:ext cx="512064" cy="512064"/>
-          </a:xfrm>
-          <a:prstGeom prst="ellipse">
-            <a:avLst/>
-          </a:prstGeom>
-          <a:solidFill>
-            <a:srgbClr val="1B4D89"/>
-          </a:solidFill>
-          <a:ln w="12700">
-            <a:solidFill>
-              <a:srgbClr val="1B4D89"/>
-            </a:solidFill>
-            <a:prstDash val="solid"/>
-          </a:ln>
-        </p:spPr>
-      </p:sp>
-      <p:sp>
-        <p:nvSpPr>
-          <p:cNvPr id="9" name="numero testo 1"/>
-          <p:cNvSpPr txBox="1"/>
-          <p:nvPr/>
-        </p:nvSpPr>
-        <p:spPr>
-          <a:xfrm>
-            <a:off x="960120" y="2167128"/>
-            <a:ext cx="512064" cy="512064"/>
-          </a:xfrm>
-          <a:prstGeom prst="rect">
-            <a:avLst/>
-          </a:prstGeom>
-          <a:noFill/>
-          <a:ln/>
-        </p:spPr>
-        <p:txBody>
-          <a:bodyPr wrap="square" lIns="0" tIns="0" rIns="0" bIns="0" rtlCol="0" anchor="ctr"/>
-          <a:lstStyle/>
-          <a:p>
-            <a:pPr algn="ctr" indent="0" marL="0">
-              <a:buNone/>
-            </a:pPr>
-            <a:r>
-              <a:rPr lang="en-US" sz="1800" b="1" dirty="0">
-                <a:solidFill>
-                  <a:schemeClr val="bg1"/>
-                </a:solidFill>
-                <a:latin typeface="Arial" pitchFamily="34" charset="0"/>
-                <a:ea typeface="Arial" pitchFamily="34" charset="-122"/>
-                <a:cs typeface="Arial" pitchFamily="34" charset="-120"/>
-              </a:rPr>
-              <a:t>1</a:t>
-            </a:r>
-            <a:endParaRPr lang="en-US" sz="1800" dirty="0"/>
-          </a:p>
-        </p:txBody>
-      </p:sp>
-      <p:sp>
-        <p:nvSpPr>
-          <p:cNvPr id="10" name="Icona azione 1 fondo"/>
-          <p:cNvSpPr/>
-          <p:nvPr/>
-        </p:nvSpPr>
-        <p:spPr>
-          <a:xfrm>
-            <a:off x="1691640" y="2103120"/>
-            <a:ext cx="640080" cy="640080"/>
+            <a:off x="795528" y="2257857"/>
+            <a:ext cx="2295144" cy="402336"/>
           </a:xfrm>
           <a:prstGeom prst="roundRect">
             <a:avLst>
-              <a:gd name="adj" fmla="val 20000"/>
+              <a:gd name="adj" fmla="val 18182"/>
             </a:avLst>
           </a:prstGeom>
           <a:solidFill>
@@ -6387,24 +7247,141 @@
           </a:ln>
         </p:spPr>
       </p:sp>
+      <p:sp>
+        <p:nvSpPr>
+          <p:cNvPr id="10" name="Nome testo project-setup"/>
+          <p:cNvSpPr txBox="1"/>
+          <p:nvPr/>
+        </p:nvSpPr>
+        <p:spPr>
+          <a:xfrm>
+            <a:off x="868680" y="2257857"/>
+            <a:ext cx="2148840" cy="402336"/>
+          </a:xfrm>
+          <a:prstGeom prst="rect">
+            <a:avLst/>
+          </a:prstGeom>
+          <a:noFill/>
+          <a:ln/>
+        </p:spPr>
+        <p:txBody>
+          <a:bodyPr wrap="square" lIns="0" tIns="0" rIns="0" bIns="0" rtlCol="0" anchor="ctr"/>
+          <a:lstStyle/>
+          <a:p>
+            <a:pPr indent="0" marL="0">
+              <a:buNone/>
+            </a:pPr>
+            <a:r>
+              <a:rPr lang="en-US" sz="1250" b="1" dirty="0">
+                <a:solidFill>
+                  <a:srgbClr val="1B4D89"/>
+                </a:solidFill>
+                <a:latin typeface="Arial" pitchFamily="34" charset="0"/>
+                <a:ea typeface="Arial" pitchFamily="34" charset="-122"/>
+                <a:cs typeface="Arial" pitchFamily="34" charset="-120"/>
+              </a:rPr>
+              <a:t>project-setup</a:t>
+            </a:r>
+            <a:endParaRPr lang="en-US" sz="1250" dirty="0"/>
+          </a:p>
+        </p:txBody>
+      </p:sp>
+      <p:sp>
+        <p:nvSpPr>
+          <p:cNvPr id="11" name="Chiedi project-setup"/>
+          <p:cNvSpPr txBox="1"/>
+          <p:nvPr/>
+        </p:nvSpPr>
+        <p:spPr>
+          <a:xfrm>
+            <a:off x="3337560" y="2103120"/>
+            <a:ext cx="1965960" cy="711811"/>
+          </a:xfrm>
+          <a:prstGeom prst="rect">
+            <a:avLst/>
+          </a:prstGeom>
+          <a:noFill/>
+          <a:ln/>
+        </p:spPr>
+        <p:txBody>
+          <a:bodyPr wrap="square" lIns="0" tIns="0" rIns="0" bIns="0" rtlCol="0" anchor="ctr"/>
+          <a:lstStyle/>
+          <a:p>
+            <a:pPr indent="0" marL="0">
+              <a:buNone/>
+            </a:pPr>
+            <a:r>
+              <a:rPr lang="en-US" sz="1400" i="1" dirty="0">
+                <a:solidFill>
+                  <a:schemeClr val="tx1"/>
+                </a:solidFill>
+                <a:latin typeface="Arial" pitchFamily="34" charset="0"/>
+                <a:ea typeface="Arial" pitchFamily="34" charset="-122"/>
+                <a:cs typeface="Arial" pitchFamily="34" charset="-120"/>
+              </a:rPr>
+              <a:t>“Metti in ordine i file del Progetto Demo e dimmi cosa manca”</a:t>
+            </a:r>
+            <a:endParaRPr lang="en-US" sz="1400" dirty="0"/>
+          </a:p>
+        </p:txBody>
+      </p:sp>
+      <p:sp>
+        <p:nvSpPr>
+          <p:cNvPr id="12" name="Serve project-setup"/>
+          <p:cNvSpPr txBox="1"/>
+          <p:nvPr/>
+        </p:nvSpPr>
+        <p:spPr>
+          <a:xfrm>
+            <a:off x="5577840" y="2103120"/>
+            <a:ext cx="2057400" cy="711811"/>
+          </a:xfrm>
+          <a:prstGeom prst="rect">
+            <a:avLst/>
+          </a:prstGeom>
+          <a:noFill/>
+          <a:ln/>
+        </p:spPr>
+        <p:txBody>
+          <a:bodyPr wrap="square" lIns="0" tIns="0" rIns="0" bIns="0" rtlCol="0" anchor="ctr"/>
+          <a:lstStyle/>
+          <a:p>
+            <a:pPr indent="0" marL="0">
+              <a:buNone/>
+            </a:pPr>
+            <a:r>
+              <a:rPr lang="en-US" sz="1400" dirty="0">
+                <a:solidFill>
+                  <a:srgbClr val="374151"/>
+                </a:solidFill>
+                <a:latin typeface="Arial" pitchFamily="34" charset="0"/>
+                <a:ea typeface="Arial" pitchFamily="34" charset="-122"/>
+                <a:cs typeface="Arial" pitchFamily="34" charset="-120"/>
+              </a:rPr>
+              <a:t>Render, piante, listino e una email, tutti di esempio</a:t>
+            </a:r>
+            <a:endParaRPr lang="en-US" sz="1400" dirty="0"/>
+          </a:p>
+        </p:txBody>
+      </p:sp>
       <p:pic>
         <p:nvPicPr>
-          <p:cNvPr id="11" name="Icona azione 1" descr="preencoded.png">    </p:cNvPr>
+          <p:cNvPr id="13" name="Freccia project-setup" descr="preencoded.png">    </p:cNvPr>
           <p:cNvPicPr>
             <a:picLocks noChangeAspect="1"/>
           </p:cNvPicPr>
           <p:nvPr/>
         </p:nvPicPr>
         <p:blipFill>
-          <a:blip r:embed="rId2"/>
+          <a:blip r:embed="rId1"/>
           <a:stretch>
             <a:fillRect/>
           </a:stretch>
         </p:blipFill>
         <p:spPr>
           <a:xfrm>
-            <a:off x="1845259" y="2256739"/>
-            <a:ext cx="332842" cy="332842"/>
+            <a:off x="7808976" y="2331009"/>
+            <a:ext cx="256032" cy="256032"/>
           </a:xfrm>
           <a:prstGeom prst="rect">
             <a:avLst/>
@@ -6413,30 +7390,30 @@
       </p:pic>
       <p:sp>
         <p:nvSpPr>
-          <p:cNvPr id="12" name="Azione titolo 1"/>
+          <p:cNvPr id="14" name="Ottieni project-setup"/>
           <p:cNvSpPr txBox="1"/>
           <p:nvPr/>
         </p:nvSpPr>
         <p:spPr>
           <a:xfrm>
-            <a:off x="2560320" y="2011680"/>
-            <a:ext cx="8625535" cy="411480"/>
-          </a:xfrm>
-          <a:prstGeom prst="rect">
-            <a:avLst/>
-          </a:prstGeom>
-          <a:noFill/>
-          <a:ln/>
-        </p:spPr>
-        <p:txBody>
-          <a:bodyPr wrap="square" lIns="0" tIns="0" rIns="0" bIns="0" rtlCol="0" anchor="t"/>
-          <a:lstStyle/>
-          <a:p>
-            <a:pPr indent="0" marL="0">
-              <a:buNone/>
-            </a:pPr>
-            <a:r>
-              <a:rPr lang="en-US" sz="2000" b="1" dirty="0">
+            <a:off x="8229600" y="2103120"/>
+            <a:ext cx="3136392" cy="711811"/>
+          </a:xfrm>
+          <a:prstGeom prst="rect">
+            <a:avLst/>
+          </a:prstGeom>
+          <a:noFill/>
+          <a:ln/>
+        </p:spPr>
+        <p:txBody>
+          <a:bodyPr wrap="square" lIns="0" tIns="0" rIns="0" bIns="0" rtlCol="0" anchor="ctr"/>
+          <a:lstStyle/>
+          <a:p>
+            <a:pPr indent="0" marL="0">
+              <a:buNone/>
+            </a:pPr>
+            <a:r>
+              <a:rPr lang="en-US" sz="1400" dirty="0">
                 <a:solidFill>
                   <a:schemeClr val="tx1"/>
                 </a:solidFill>
@@ -6444,65 +7421,26 @@
                 <a:ea typeface="Arial" pitchFamily="34" charset="-122"/>
                 <a:cs typeface="Arial" pitchFamily="34" charset="-120"/>
               </a:rPr>
-              <a:t>Spegni l’addestramento sulle tue chat</a:t>
-            </a:r>
-            <a:endParaRPr lang="en-US" sz="2000" dirty="0"/>
-          </a:p>
-        </p:txBody>
-      </p:sp>
-      <p:sp>
-        <p:nvSpPr>
-          <p:cNvPr id="13" name="Azione testo 1"/>
-          <p:cNvSpPr txBox="1"/>
-          <p:nvPr/>
-        </p:nvSpPr>
-        <p:spPr>
-          <a:xfrm>
-            <a:off x="2560320" y="2450592"/>
-            <a:ext cx="8625535" cy="457200"/>
-          </a:xfrm>
-          <a:prstGeom prst="rect">
-            <a:avLst/>
-          </a:prstGeom>
-          <a:noFill/>
-          <a:ln/>
-        </p:spPr>
-        <p:txBody>
-          <a:bodyPr wrap="square" lIns="0" tIns="0" rIns="0" bIns="0" rtlCol="0" anchor="t"/>
-          <a:lstStyle/>
-          <a:p>
-            <a:pPr indent="0" marL="0">
-              <a:buNone/>
-            </a:pPr>
-            <a:r>
-              <a:rPr lang="en-US" sz="1500" dirty="0">
-                <a:solidFill>
-                  <a:srgbClr val="374151"/>
-                </a:solidFill>
-                <a:latin typeface="Arial" pitchFamily="34" charset="0"/>
-                <a:ea typeface="Arial" pitchFamily="34" charset="-122"/>
-                <a:cs typeface="Arial" pitchFamily="34" charset="-120"/>
-              </a:rPr>
-              <a:t>Nelle impostazioni privacy dello strumento che usi. I percorsi per 5 strumenti sono nel capitolo 4.</a:t>
-            </a:r>
-            <a:endParaRPr lang="en-US" sz="1500" dirty="0"/>
-          </a:p>
-        </p:txBody>
-      </p:sp>
-      <p:sp>
-        <p:nvSpPr>
-          <p:cNvPr id="14" name="Azione 2"/>
+              <a:t>Cartella standard, file rinominati, scheda dati e lista di cosa manca</a:t>
+            </a:r>
+            <a:endParaRPr lang="en-US" sz="1400" dirty="0"/>
+          </a:p>
+        </p:txBody>
+      </p:sp>
+      <p:sp>
+        <p:nvSpPr>
+          <p:cNvPr id="15" name="Riga foreign-investment-compliance"/>
           <p:cNvSpPr/>
           <p:nvPr/>
         </p:nvSpPr>
         <p:spPr>
           <a:xfrm>
-            <a:off x="685800" y="3200400"/>
-            <a:ext cx="10820095" cy="1188720"/>
+            <a:off x="685800" y="2906371"/>
+            <a:ext cx="10820095" cy="882087"/>
           </a:xfrm>
           <a:prstGeom prst="roundRect">
             <a:avLst>
-              <a:gd name="adj" fmla="val 10769"/>
+              <a:gd name="adj" fmla="val 10366"/>
             </a:avLst>
           </a:prstGeom>
           <a:solidFill>
@@ -6518,82 +7456,18 @@
       </p:sp>
       <p:sp>
         <p:nvSpPr>
-          <p:cNvPr id="15" name="numero 2"/>
+          <p:cNvPr id="16" name="Nome foreign-investment-compliance"/>
           <p:cNvSpPr/>
           <p:nvPr/>
         </p:nvSpPr>
         <p:spPr>
           <a:xfrm>
-            <a:off x="960120" y="3538728"/>
-            <a:ext cx="512064" cy="512064"/>
-          </a:xfrm>
-          <a:prstGeom prst="ellipse">
-            <a:avLst/>
-          </a:prstGeom>
-          <a:solidFill>
-            <a:srgbClr val="1B4D89"/>
-          </a:solidFill>
-          <a:ln w="12700">
-            <a:solidFill>
-              <a:srgbClr val="1B4D89"/>
-            </a:solidFill>
-            <a:prstDash val="solid"/>
-          </a:ln>
-        </p:spPr>
-      </p:sp>
-      <p:sp>
-        <p:nvSpPr>
-          <p:cNvPr id="16" name="numero testo 2"/>
-          <p:cNvSpPr txBox="1"/>
-          <p:nvPr/>
-        </p:nvSpPr>
-        <p:spPr>
-          <a:xfrm>
-            <a:off x="960120" y="3538728"/>
-            <a:ext cx="512064" cy="512064"/>
-          </a:xfrm>
-          <a:prstGeom prst="rect">
-            <a:avLst/>
-          </a:prstGeom>
-          <a:noFill/>
-          <a:ln/>
-        </p:spPr>
-        <p:txBody>
-          <a:bodyPr wrap="square" lIns="0" tIns="0" rIns="0" bIns="0" rtlCol="0" anchor="ctr"/>
-          <a:lstStyle/>
-          <a:p>
-            <a:pPr algn="ctr" indent="0" marL="0">
-              <a:buNone/>
-            </a:pPr>
-            <a:r>
-              <a:rPr lang="en-US" sz="1800" b="1" dirty="0">
-                <a:solidFill>
-                  <a:schemeClr val="bg1"/>
-                </a:solidFill>
-                <a:latin typeface="Arial" pitchFamily="34" charset="0"/>
-                <a:ea typeface="Arial" pitchFamily="34" charset="-122"/>
-                <a:cs typeface="Arial" pitchFamily="34" charset="-120"/>
-              </a:rPr>
-              <a:t>2</a:t>
-            </a:r>
-            <a:endParaRPr lang="en-US" sz="1800" dirty="0"/>
-          </a:p>
-        </p:txBody>
-      </p:sp>
-      <p:sp>
-        <p:nvSpPr>
-          <p:cNvPr id="17" name="Icona azione 2 fondo"/>
-          <p:cNvSpPr/>
-          <p:nvPr/>
-        </p:nvSpPr>
-        <p:spPr>
-          <a:xfrm>
-            <a:off x="1691640" y="3474720"/>
-            <a:ext cx="640080" cy="640080"/>
+            <a:off x="795528" y="3146247"/>
+            <a:ext cx="2295144" cy="402336"/>
           </a:xfrm>
           <a:prstGeom prst="roundRect">
             <a:avLst>
-              <a:gd name="adj" fmla="val 20000"/>
+              <a:gd name="adj" fmla="val 18182"/>
             </a:avLst>
           </a:prstGeom>
           <a:solidFill>
@@ -6607,24 +7481,141 @@
           </a:ln>
         </p:spPr>
       </p:sp>
+      <p:sp>
+        <p:nvSpPr>
+          <p:cNvPr id="17" name="Nome testo foreign-investment-compliance"/>
+          <p:cNvSpPr txBox="1"/>
+          <p:nvPr/>
+        </p:nvSpPr>
+        <p:spPr>
+          <a:xfrm>
+            <a:off x="868680" y="3146247"/>
+            <a:ext cx="2148840" cy="402336"/>
+          </a:xfrm>
+          <a:prstGeom prst="rect">
+            <a:avLst/>
+          </a:prstGeom>
+          <a:noFill/>
+          <a:ln/>
+        </p:spPr>
+        <p:txBody>
+          <a:bodyPr wrap="square" lIns="0" tIns="0" rIns="0" bIns="0" rtlCol="0" anchor="ctr"/>
+          <a:lstStyle/>
+          <a:p>
+            <a:pPr indent="0" marL="0">
+              <a:buNone/>
+            </a:pPr>
+            <a:r>
+              <a:rPr lang="en-US" sz="1250" b="1" dirty="0">
+                <a:solidFill>
+                  <a:srgbClr val="1B4D89"/>
+                </a:solidFill>
+                <a:latin typeface="Arial" pitchFamily="34" charset="0"/>
+                <a:ea typeface="Arial" pitchFamily="34" charset="-122"/>
+                <a:cs typeface="Arial" pitchFamily="34" charset="-120"/>
+              </a:rPr>
+              <a:t>foreign-investment-compliance</a:t>
+            </a:r>
+            <a:endParaRPr lang="en-US" sz="1250" dirty="0"/>
+          </a:p>
+        </p:txBody>
+      </p:sp>
+      <p:sp>
+        <p:nvSpPr>
+          <p:cNvPr id="18" name="Chiedi foreign-investment-compliance"/>
+          <p:cNvSpPr txBox="1"/>
+          <p:nvPr/>
+        </p:nvSpPr>
+        <p:spPr>
+          <a:xfrm>
+            <a:off x="3337560" y="2906371"/>
+            <a:ext cx="1965960" cy="882087"/>
+          </a:xfrm>
+          <a:prstGeom prst="rect">
+            <a:avLst/>
+          </a:prstGeom>
+          <a:noFill/>
+          <a:ln/>
+        </p:spPr>
+        <p:txBody>
+          <a:bodyPr wrap="square" lIns="0" tIns="0" rIns="0" bIns="0" rtlCol="0" anchor="ctr"/>
+          <a:lstStyle/>
+          <a:p>
+            <a:pPr indent="0" marL="0">
+              <a:buNone/>
+            </a:pPr>
+            <a:r>
+              <a:rPr lang="en-US" sz="1400" i="1" dirty="0">
+                <a:solidFill>
+                  <a:schemeClr val="tx1"/>
+                </a:solidFill>
+                <a:latin typeface="Arial" pitchFamily="34" charset="0"/>
+                <a:ea typeface="Arial" pitchFamily="34" charset="-122"/>
+                <a:cs typeface="Arial" pitchFamily="34" charset="-120"/>
+              </a:rPr>
+              <a:t>“Un investitore con sede a Singapore può entrare in questa società immobiliare?”</a:t>
+            </a:r>
+            <a:endParaRPr lang="en-US" sz="1400" dirty="0"/>
+          </a:p>
+        </p:txBody>
+      </p:sp>
+      <p:sp>
+        <p:nvSpPr>
+          <p:cNvPr id="19" name="Serve foreign-investment-compliance"/>
+          <p:cNvSpPr txBox="1"/>
+          <p:nvPr/>
+        </p:nvSpPr>
+        <p:spPr>
+          <a:xfrm>
+            <a:off x="5577840" y="2906371"/>
+            <a:ext cx="2057400" cy="882087"/>
+          </a:xfrm>
+          <a:prstGeom prst="rect">
+            <a:avLst/>
+          </a:prstGeom>
+          <a:noFill/>
+          <a:ln/>
+        </p:spPr>
+        <p:txBody>
+          <a:bodyPr wrap="square" lIns="0" tIns="0" rIns="0" bIns="0" rtlCol="0" anchor="ctr"/>
+          <a:lstStyle/>
+          <a:p>
+            <a:pPr indent="0" marL="0">
+              <a:buNone/>
+            </a:pPr>
+            <a:r>
+              <a:rPr lang="en-US" sz="1400" dirty="0">
+                <a:solidFill>
+                  <a:srgbClr val="374151"/>
+                </a:solidFill>
+                <a:latin typeface="Arial" pitchFamily="34" charset="0"/>
+                <a:ea typeface="Arial" pitchFamily="34" charset="-122"/>
+                <a:cs typeface="Arial" pitchFamily="34" charset="-120"/>
+              </a:rPr>
+              <a:t>Solo la domanda: le regole le verifica sulle fonti ufficiali</a:t>
+            </a:r>
+            <a:endParaRPr lang="en-US" sz="1400" dirty="0"/>
+          </a:p>
+        </p:txBody>
+      </p:sp>
       <p:pic>
         <p:nvPicPr>
-          <p:cNvPr id="18" name="Icona azione 2" descr="preencoded.png">    </p:cNvPr>
+          <p:cNvPr id="20" name="Freccia foreign-investment-compliance" descr="preencoded.png">    </p:cNvPr>
           <p:cNvPicPr>
             <a:picLocks noChangeAspect="1"/>
           </p:cNvPicPr>
           <p:nvPr/>
         </p:nvPicPr>
         <p:blipFill>
-          <a:blip r:embed="rId3"/>
+          <a:blip r:embed="rId2"/>
           <a:stretch>
             <a:fillRect/>
           </a:stretch>
         </p:blipFill>
         <p:spPr>
           <a:xfrm>
-            <a:off x="1845259" y="3628339"/>
-            <a:ext cx="332842" cy="332842"/>
+            <a:off x="7808976" y="3219399"/>
+            <a:ext cx="256032" cy="256032"/>
           </a:xfrm>
           <a:prstGeom prst="rect">
             <a:avLst/>
@@ -6633,30 +7624,30 @@
       </p:pic>
       <p:sp>
         <p:nvSpPr>
-          <p:cNvPr id="19" name="Azione titolo 2"/>
+          <p:cNvPr id="21" name="Ottieni foreign-investment-compliance"/>
           <p:cNvSpPr txBox="1"/>
           <p:nvPr/>
         </p:nvSpPr>
         <p:spPr>
           <a:xfrm>
-            <a:off x="2560320" y="3383280"/>
-            <a:ext cx="8625535" cy="411480"/>
-          </a:xfrm>
-          <a:prstGeom prst="rect">
-            <a:avLst/>
-          </a:prstGeom>
-          <a:noFill/>
-          <a:ln/>
-        </p:spPr>
-        <p:txBody>
-          <a:bodyPr wrap="square" lIns="0" tIns="0" rIns="0" bIns="0" rtlCol="0" anchor="t"/>
-          <a:lstStyle/>
-          <a:p>
-            <a:pPr indent="0" marL="0">
-              <a:buNone/>
-            </a:pPr>
-            <a:r>
-              <a:rPr lang="en-US" sz="2000" b="1" dirty="0">
+            <a:off x="8229600" y="2906371"/>
+            <a:ext cx="3136392" cy="882087"/>
+          </a:xfrm>
+          <a:prstGeom prst="rect">
+            <a:avLst/>
+          </a:prstGeom>
+          <a:noFill/>
+          <a:ln/>
+        </p:spPr>
+        <p:txBody>
+          <a:bodyPr wrap="square" lIns="0" tIns="0" rIns="0" bIns="0" rtlCol="0" anchor="ctr"/>
+          <a:lstStyle/>
+          <a:p>
+            <a:pPr indent="0" marL="0">
+              <a:buNone/>
+            </a:pPr>
+            <a:r>
+              <a:rPr lang="en-US" sz="1400" dirty="0">
                 <a:solidFill>
                   <a:schemeClr val="tx1"/>
                 </a:solidFill>
@@ -6664,65 +7655,26 @@
                 <a:ea typeface="Arial" pitchFamily="34" charset="-122"/>
                 <a:cs typeface="Arial" pitchFamily="34" charset="-120"/>
               </a:rPr>
-              <a:t>Imposta le istruzioni personalizzate</a:t>
-            </a:r>
-            <a:endParaRPr lang="en-US" sz="2000" dirty="0"/>
-          </a:p>
-        </p:txBody>
-      </p:sp>
-      <p:sp>
-        <p:nvSpPr>
-          <p:cNvPr id="20" name="Azione testo 2"/>
-          <p:cNvSpPr txBox="1"/>
-          <p:nvPr/>
-        </p:nvSpPr>
-        <p:spPr>
-          <a:xfrm>
-            <a:off x="2560320" y="3822192"/>
-            <a:ext cx="8625535" cy="457200"/>
-          </a:xfrm>
-          <a:prstGeom prst="rect">
-            <a:avLst/>
-          </a:prstGeom>
-          <a:noFill/>
-          <a:ln/>
-        </p:spPr>
-        <p:txBody>
-          <a:bodyPr wrap="square" lIns="0" tIns="0" rIns="0" bIns="0" rtlCol="0" anchor="t"/>
-          <a:lstStyle/>
-          <a:p>
-            <a:pPr indent="0" marL="0">
-              <a:buNone/>
-            </a:pPr>
-            <a:r>
-              <a:rPr lang="en-US" sz="1500" dirty="0">
-                <a:solidFill>
-                  <a:srgbClr val="374151"/>
-                </a:solidFill>
-                <a:latin typeface="Arial" pitchFamily="34" charset="0"/>
-                <a:ea typeface="Arial" pitchFamily="34" charset="-122"/>
-                <a:cs typeface="Arial" pitchFamily="34" charset="-120"/>
-              </a:rPr>
-              <a:t>Chi sei e come vuoi le risposte: brevi, in italiano, con le fonti. Testo pronto da copiare nel capitolo 8.</a:t>
-            </a:r>
-            <a:endParaRPr lang="en-US" sz="1500" dirty="0"/>
-          </a:p>
-        </p:txBody>
-      </p:sp>
-      <p:sp>
-        <p:nvSpPr>
-          <p:cNvPr id="21" name="Azione 3"/>
+              <a:t>Verdetto Lex Koller, limiti, struttura possibile, con le fonti</a:t>
+            </a:r>
+            <a:endParaRPr lang="en-US" sz="1400" dirty="0"/>
+          </a:p>
+        </p:txBody>
+      </p:sp>
+      <p:sp>
+        <p:nvSpPr>
+          <p:cNvPr id="22" name="Riga deal-validator"/>
           <p:cNvSpPr/>
           <p:nvPr/>
         </p:nvSpPr>
         <p:spPr>
           <a:xfrm>
-            <a:off x="685800" y="4572000"/>
-            <a:ext cx="10820095" cy="1188720"/>
+            <a:off x="685800" y="3879898"/>
+            <a:ext cx="10820095" cy="711811"/>
           </a:xfrm>
           <a:prstGeom prst="roundRect">
             <a:avLst>
-              <a:gd name="adj" fmla="val 10769"/>
+              <a:gd name="adj" fmla="val 12846"/>
             </a:avLst>
           </a:prstGeom>
           <a:solidFill>
@@ -6738,82 +7690,18 @@
       </p:sp>
       <p:sp>
         <p:nvSpPr>
-          <p:cNvPr id="22" name="numero 3"/>
+          <p:cNvPr id="23" name="Nome deal-validator"/>
           <p:cNvSpPr/>
           <p:nvPr/>
         </p:nvSpPr>
         <p:spPr>
           <a:xfrm>
-            <a:off x="960120" y="4910328"/>
-            <a:ext cx="512064" cy="512064"/>
-          </a:xfrm>
-          <a:prstGeom prst="ellipse">
-            <a:avLst/>
-          </a:prstGeom>
-          <a:solidFill>
-            <a:srgbClr val="1B4D89"/>
-          </a:solidFill>
-          <a:ln w="12700">
-            <a:solidFill>
-              <a:srgbClr val="1B4D89"/>
-            </a:solidFill>
-            <a:prstDash val="solid"/>
-          </a:ln>
-        </p:spPr>
-      </p:sp>
-      <p:sp>
-        <p:nvSpPr>
-          <p:cNvPr id="23" name="numero testo 3"/>
-          <p:cNvSpPr txBox="1"/>
-          <p:nvPr/>
-        </p:nvSpPr>
-        <p:spPr>
-          <a:xfrm>
-            <a:off x="960120" y="4910328"/>
-            <a:ext cx="512064" cy="512064"/>
-          </a:xfrm>
-          <a:prstGeom prst="rect">
-            <a:avLst/>
-          </a:prstGeom>
-          <a:noFill/>
-          <a:ln/>
-        </p:spPr>
-        <p:txBody>
-          <a:bodyPr wrap="square" lIns="0" tIns="0" rIns="0" bIns="0" rtlCol="0" anchor="ctr"/>
-          <a:lstStyle/>
-          <a:p>
-            <a:pPr algn="ctr" indent="0" marL="0">
-              <a:buNone/>
-            </a:pPr>
-            <a:r>
-              <a:rPr lang="en-US" sz="1800" b="1" dirty="0">
-                <a:solidFill>
-                  <a:schemeClr val="bg1"/>
-                </a:solidFill>
-                <a:latin typeface="Arial" pitchFamily="34" charset="0"/>
-                <a:ea typeface="Arial" pitchFamily="34" charset="-122"/>
-                <a:cs typeface="Arial" pitchFamily="34" charset="-120"/>
-              </a:rPr>
-              <a:t>3</a:t>
-            </a:r>
-            <a:endParaRPr lang="en-US" sz="1800" dirty="0"/>
-          </a:p>
-        </p:txBody>
-      </p:sp>
-      <p:sp>
-        <p:nvSpPr>
-          <p:cNvPr id="24" name="Icona azione 3 fondo"/>
-          <p:cNvSpPr/>
-          <p:nvPr/>
-        </p:nvSpPr>
-        <p:spPr>
-          <a:xfrm>
-            <a:off x="1691640" y="4846320"/>
-            <a:ext cx="640080" cy="640080"/>
+            <a:off x="795528" y="4034636"/>
+            <a:ext cx="2295144" cy="402336"/>
           </a:xfrm>
           <a:prstGeom prst="roundRect">
             <a:avLst>
-              <a:gd name="adj" fmla="val 20000"/>
+              <a:gd name="adj" fmla="val 18182"/>
             </a:avLst>
           </a:prstGeom>
           <a:solidFill>
@@ -6827,9 +7715,360 @@
           </a:ln>
         </p:spPr>
       </p:sp>
+      <p:sp>
+        <p:nvSpPr>
+          <p:cNvPr id="24" name="Nome testo deal-validator"/>
+          <p:cNvSpPr txBox="1"/>
+          <p:nvPr/>
+        </p:nvSpPr>
+        <p:spPr>
+          <a:xfrm>
+            <a:off x="868680" y="4034636"/>
+            <a:ext cx="2148840" cy="402336"/>
+          </a:xfrm>
+          <a:prstGeom prst="rect">
+            <a:avLst/>
+          </a:prstGeom>
+          <a:noFill/>
+          <a:ln/>
+        </p:spPr>
+        <p:txBody>
+          <a:bodyPr wrap="square" lIns="0" tIns="0" rIns="0" bIns="0" rtlCol="0" anchor="ctr"/>
+          <a:lstStyle/>
+          <a:p>
+            <a:pPr indent="0" marL="0">
+              <a:buNone/>
+            </a:pPr>
+            <a:r>
+              <a:rPr lang="en-US" sz="1250" b="1" dirty="0">
+                <a:solidFill>
+                  <a:srgbClr val="1B4D89"/>
+                </a:solidFill>
+                <a:latin typeface="Arial" pitchFamily="34" charset="0"/>
+                <a:ea typeface="Arial" pitchFamily="34" charset="-122"/>
+                <a:cs typeface="Arial" pitchFamily="34" charset="-120"/>
+              </a:rPr>
+              <a:t>deal-validator</a:t>
+            </a:r>
+            <a:endParaRPr lang="en-US" sz="1250" dirty="0"/>
+          </a:p>
+        </p:txBody>
+      </p:sp>
+      <p:sp>
+        <p:nvSpPr>
+          <p:cNvPr id="25" name="Chiedi deal-validator"/>
+          <p:cNvSpPr txBox="1"/>
+          <p:nvPr/>
+        </p:nvSpPr>
+        <p:spPr>
+          <a:xfrm>
+            <a:off x="3337560" y="3879898"/>
+            <a:ext cx="1965960" cy="711811"/>
+          </a:xfrm>
+          <a:prstGeom prst="rect">
+            <a:avLst/>
+          </a:prstGeom>
+          <a:noFill/>
+          <a:ln/>
+        </p:spPr>
+        <p:txBody>
+          <a:bodyPr wrap="square" lIns="0" tIns="0" rIns="0" bIns="0" rtlCol="0" anchor="ctr"/>
+          <a:lstStyle/>
+          <a:p>
+            <a:pPr indent="0" marL="0">
+              <a:buNone/>
+            </a:pPr>
+            <a:r>
+              <a:rPr lang="en-US" sz="1400" i="1" dirty="0">
+                <a:solidFill>
+                  <a:schemeClr val="tx1"/>
+                </a:solidFill>
+                <a:latin typeface="Arial" pitchFamily="34" charset="0"/>
+                <a:ea typeface="Arial" pitchFamily="34" charset="-122"/>
+                <a:cs typeface="Arial" pitchFamily="34" charset="-120"/>
+              </a:rPr>
+              <a:t>“Controlla questo business plan prima che lo mandiamo”</a:t>
+            </a:r>
+            <a:endParaRPr lang="en-US" sz="1400" dirty="0"/>
+          </a:p>
+        </p:txBody>
+      </p:sp>
+      <p:sp>
+        <p:nvSpPr>
+          <p:cNvPr id="26" name="Serve deal-validator"/>
+          <p:cNvSpPr txBox="1"/>
+          <p:nvPr/>
+        </p:nvSpPr>
+        <p:spPr>
+          <a:xfrm>
+            <a:off x="5577840" y="3879898"/>
+            <a:ext cx="2057400" cy="711811"/>
+          </a:xfrm>
+          <a:prstGeom prst="rect">
+            <a:avLst/>
+          </a:prstGeom>
+          <a:noFill/>
+          <a:ln/>
+        </p:spPr>
+        <p:txBody>
+          <a:bodyPr wrap="square" lIns="0" tIns="0" rIns="0" bIns="0" rtlCol="0" anchor="ctr"/>
+          <a:lstStyle/>
+          <a:p>
+            <a:pPr indent="0" marL="0">
+              <a:buNone/>
+            </a:pPr>
+            <a:r>
+              <a:rPr lang="en-US" sz="1400" dirty="0">
+                <a:solidFill>
+                  <a:srgbClr val="374151"/>
+                </a:solidFill>
+                <a:latin typeface="Arial" pitchFamily="34" charset="0"/>
+                <a:ea typeface="Arial" pitchFamily="34" charset="-122"/>
+                <a:cs typeface="Arial" pitchFamily="34" charset="-120"/>
+              </a:rPr>
+              <a:t>Un Excel di esempio</a:t>
+            </a:r>
+            <a:endParaRPr lang="en-US" sz="1400" dirty="0"/>
+          </a:p>
+        </p:txBody>
+      </p:sp>
       <p:pic>
         <p:nvPicPr>
-          <p:cNvPr id="25" name="Icona azione 3" descr="preencoded.png">    </p:cNvPr>
+          <p:cNvPr id="27" name="Freccia deal-validator" descr="preencoded.png">    </p:cNvPr>
+          <p:cNvPicPr>
+            <a:picLocks noChangeAspect="1"/>
+          </p:cNvPicPr>
+          <p:nvPr/>
+        </p:nvPicPr>
+        <p:blipFill>
+          <a:blip r:embed="rId3"/>
+          <a:stretch>
+            <a:fillRect/>
+          </a:stretch>
+        </p:blipFill>
+        <p:spPr>
+          <a:xfrm>
+            <a:off x="7808976" y="4107788"/>
+            <a:ext cx="256032" cy="256032"/>
+          </a:xfrm>
+          <a:prstGeom prst="rect">
+            <a:avLst/>
+          </a:prstGeom>
+        </p:spPr>
+      </p:pic>
+      <p:sp>
+        <p:nvSpPr>
+          <p:cNvPr id="28" name="Ottieni deal-validator"/>
+          <p:cNvSpPr txBox="1"/>
+          <p:nvPr/>
+        </p:nvSpPr>
+        <p:spPr>
+          <a:xfrm>
+            <a:off x="8229600" y="3879898"/>
+            <a:ext cx="3136392" cy="711811"/>
+          </a:xfrm>
+          <a:prstGeom prst="rect">
+            <a:avLst/>
+          </a:prstGeom>
+          <a:noFill/>
+          <a:ln/>
+        </p:spPr>
+        <p:txBody>
+          <a:bodyPr wrap="square" lIns="0" tIns="0" rIns="0" bIns="0" rtlCol="0" anchor="ctr"/>
+          <a:lstStyle/>
+          <a:p>
+            <a:pPr indent="0" marL="0">
+              <a:buNone/>
+            </a:pPr>
+            <a:r>
+              <a:rPr lang="en-US" sz="1400" dirty="0">
+                <a:solidFill>
+                  <a:schemeClr val="tx1"/>
+                </a:solidFill>
+                <a:latin typeface="Arial" pitchFamily="34" charset="0"/>
+                <a:ea typeface="Arial" pitchFamily="34" charset="-122"/>
+                <a:cs typeface="Arial" pitchFamily="34" charset="-120"/>
+              </a:rPr>
+              <a:t>Errori con riferimento di cella, scenari e un voto</a:t>
+            </a:r>
+            <a:endParaRPr lang="en-US" sz="1400" dirty="0"/>
+          </a:p>
+        </p:txBody>
+      </p:sp>
+      <p:sp>
+        <p:nvSpPr>
+          <p:cNvPr id="29" name="Riga investor-teaser"/>
+          <p:cNvSpPr/>
+          <p:nvPr/>
+        </p:nvSpPr>
+        <p:spPr>
+          <a:xfrm>
+            <a:off x="685800" y="4683149"/>
+            <a:ext cx="10820095" cy="711811"/>
+          </a:xfrm>
+          <a:prstGeom prst="roundRect">
+            <a:avLst>
+              <a:gd name="adj" fmla="val 12846"/>
+            </a:avLst>
+          </a:prstGeom>
+          <a:solidFill>
+            <a:srgbClr val="F6F8FB"/>
+          </a:solidFill>
+          <a:ln w="12700">
+            <a:solidFill>
+              <a:srgbClr val="E4E8EE"/>
+            </a:solidFill>
+            <a:prstDash val="solid"/>
+          </a:ln>
+        </p:spPr>
+      </p:sp>
+      <p:sp>
+        <p:nvSpPr>
+          <p:cNvPr id="30" name="Nome investor-teaser"/>
+          <p:cNvSpPr/>
+          <p:nvPr/>
+        </p:nvSpPr>
+        <p:spPr>
+          <a:xfrm>
+            <a:off x="795528" y="4837887"/>
+            <a:ext cx="2295144" cy="402336"/>
+          </a:xfrm>
+          <a:prstGeom prst="roundRect">
+            <a:avLst>
+              <a:gd name="adj" fmla="val 18182"/>
+            </a:avLst>
+          </a:prstGeom>
+          <a:solidFill>
+            <a:srgbClr val="EAF2FC"/>
+          </a:solidFill>
+          <a:ln w="12700">
+            <a:solidFill>
+              <a:srgbClr val="EAF2FC"/>
+            </a:solidFill>
+            <a:prstDash val="solid"/>
+          </a:ln>
+        </p:spPr>
+      </p:sp>
+      <p:sp>
+        <p:nvSpPr>
+          <p:cNvPr id="31" name="Nome testo investor-teaser"/>
+          <p:cNvSpPr txBox="1"/>
+          <p:nvPr/>
+        </p:nvSpPr>
+        <p:spPr>
+          <a:xfrm>
+            <a:off x="868680" y="4837887"/>
+            <a:ext cx="2148840" cy="402336"/>
+          </a:xfrm>
+          <a:prstGeom prst="rect">
+            <a:avLst/>
+          </a:prstGeom>
+          <a:noFill/>
+          <a:ln/>
+        </p:spPr>
+        <p:txBody>
+          <a:bodyPr wrap="square" lIns="0" tIns="0" rIns="0" bIns="0" rtlCol="0" anchor="ctr"/>
+          <a:lstStyle/>
+          <a:p>
+            <a:pPr indent="0" marL="0">
+              <a:buNone/>
+            </a:pPr>
+            <a:r>
+              <a:rPr lang="en-US" sz="1250" b="1" dirty="0">
+                <a:solidFill>
+                  <a:srgbClr val="1B4D89"/>
+                </a:solidFill>
+                <a:latin typeface="Arial" pitchFamily="34" charset="0"/>
+                <a:ea typeface="Arial" pitchFamily="34" charset="-122"/>
+                <a:cs typeface="Arial" pitchFamily="34" charset="-120"/>
+              </a:rPr>
+              <a:t>investor-teaser</a:t>
+            </a:r>
+            <a:endParaRPr lang="en-US" sz="1250" dirty="0"/>
+          </a:p>
+        </p:txBody>
+      </p:sp>
+      <p:sp>
+        <p:nvSpPr>
+          <p:cNvPr id="32" name="Chiedi investor-teaser"/>
+          <p:cNvSpPr txBox="1"/>
+          <p:nvPr/>
+        </p:nvSpPr>
+        <p:spPr>
+          <a:xfrm>
+            <a:off x="3337560" y="4683149"/>
+            <a:ext cx="1965960" cy="711811"/>
+          </a:xfrm>
+          <a:prstGeom prst="rect">
+            <a:avLst/>
+          </a:prstGeom>
+          <a:noFill/>
+          <a:ln/>
+        </p:spPr>
+        <p:txBody>
+          <a:bodyPr wrap="square" lIns="0" tIns="0" rIns="0" bIns="0" rtlCol="0" anchor="ctr"/>
+          <a:lstStyle/>
+          <a:p>
+            <a:pPr indent="0" marL="0">
+              <a:buNone/>
+            </a:pPr>
+            <a:r>
+              <a:rPr lang="en-US" sz="1400" i="1" dirty="0">
+                <a:solidFill>
+                  <a:schemeClr val="tx1"/>
+                </a:solidFill>
+                <a:latin typeface="Arial" pitchFamily="34" charset="0"/>
+                <a:ea typeface="Arial" pitchFamily="34" charset="-122"/>
+                <a:cs typeface="Arial" pitchFamily="34" charset="-120"/>
+              </a:rPr>
+              <a:t>“Fai il teaser per investitori da questo modello”</a:t>
+            </a:r>
+            <a:endParaRPr lang="en-US" sz="1400" dirty="0"/>
+          </a:p>
+        </p:txBody>
+      </p:sp>
+      <p:sp>
+        <p:nvSpPr>
+          <p:cNvPr id="33" name="Serve investor-teaser"/>
+          <p:cNvSpPr txBox="1"/>
+          <p:nvPr/>
+        </p:nvSpPr>
+        <p:spPr>
+          <a:xfrm>
+            <a:off x="5577840" y="4683149"/>
+            <a:ext cx="2057400" cy="711811"/>
+          </a:xfrm>
+          <a:prstGeom prst="rect">
+            <a:avLst/>
+          </a:prstGeom>
+          <a:noFill/>
+          <a:ln/>
+        </p:spPr>
+        <p:txBody>
+          <a:bodyPr wrap="square" lIns="0" tIns="0" rIns="0" bIns="0" rtlCol="0" anchor="ctr"/>
+          <a:lstStyle/>
+          <a:p>
+            <a:pPr indent="0" marL="0">
+              <a:buNone/>
+            </a:pPr>
+            <a:r>
+              <a:rPr lang="en-US" sz="1400" dirty="0">
+                <a:solidFill>
+                  <a:srgbClr val="374151"/>
+                </a:solidFill>
+                <a:latin typeface="Arial" pitchFamily="34" charset="0"/>
+                <a:ea typeface="Arial" pitchFamily="34" charset="-122"/>
+                <a:cs typeface="Arial" pitchFamily="34" charset="-120"/>
+              </a:rPr>
+              <a:t>Il modello controllato</a:t>
+            </a:r>
+            <a:endParaRPr lang="en-US" sz="1400" dirty="0"/>
+          </a:p>
+        </p:txBody>
+      </p:sp>
+      <p:pic>
+        <p:nvPicPr>
+          <p:cNvPr id="34" name="Freccia investor-teaser" descr="preencoded.png">    </p:cNvPr>
           <p:cNvPicPr>
             <a:picLocks noChangeAspect="1"/>
           </p:cNvPicPr>
@@ -6843,8 +8082,8 @@
         </p:blipFill>
         <p:spPr>
           <a:xfrm>
-            <a:off x="1845259" y="4999939"/>
-            <a:ext cx="332842" cy="332842"/>
+            <a:off x="7808976" y="4911039"/>
+            <a:ext cx="256032" cy="256032"/>
           </a:xfrm>
           <a:prstGeom prst="rect">
             <a:avLst/>
@@ -6853,30 +8092,30 @@
       </p:pic>
       <p:sp>
         <p:nvSpPr>
-          <p:cNvPr id="26" name="Azione titolo 3"/>
+          <p:cNvPr id="35" name="Ottieni investor-teaser"/>
           <p:cNvSpPr txBox="1"/>
           <p:nvPr/>
         </p:nvSpPr>
         <p:spPr>
           <a:xfrm>
-            <a:off x="2560320" y="4754880"/>
-            <a:ext cx="8625535" cy="411480"/>
-          </a:xfrm>
-          <a:prstGeom prst="rect">
-            <a:avLst/>
-          </a:prstGeom>
-          <a:noFill/>
-          <a:ln/>
-        </p:spPr>
-        <p:txBody>
-          <a:bodyPr wrap="square" lIns="0" tIns="0" rIns="0" bIns="0" rtlCol="0" anchor="t"/>
-          <a:lstStyle/>
-          <a:p>
-            <a:pPr indent="0" marL="0">
-              <a:buNone/>
-            </a:pPr>
-            <a:r>
-              <a:rPr lang="en-US" sz="2000" b="1" dirty="0">
+            <a:off x="8229600" y="4683149"/>
+            <a:ext cx="3136392" cy="711811"/>
+          </a:xfrm>
+          <a:prstGeom prst="rect">
+            <a:avLst/>
+          </a:prstGeom>
+          <a:noFill/>
+          <a:ln/>
+        </p:spPr>
+        <p:txBody>
+          <a:bodyPr wrap="square" lIns="0" tIns="0" rIns="0" bIns="0" rtlCol="0" anchor="ctr"/>
+          <a:lstStyle/>
+          <a:p>
+            <a:pPr indent="0" marL="0">
+              <a:buNone/>
+            </a:pPr>
+            <a:r>
+              <a:rPr lang="en-US" sz="1400" dirty="0">
                 <a:solidFill>
                   <a:schemeClr val="tx1"/>
                 </a:solidFill>
@@ -6884,48 +8123,113 @@
                 <a:ea typeface="Arial" pitchFamily="34" charset="-122"/>
                 <a:cs typeface="Arial" pitchFamily="34" charset="-120"/>
               </a:rPr>
-              <a:t>Prova un prompt pronto per il tuo ruolo</a:t>
-            </a:r>
-            <a:endParaRPr lang="en-US" sz="2000" dirty="0"/>
-          </a:p>
-        </p:txBody>
-      </p:sp>
-      <p:sp>
-        <p:nvSpPr>
-          <p:cNvPr id="27" name="Azione testo 3"/>
+              <a:t>Pagina HTML o PDF con numeri, grafici e limiti dichiarati</a:t>
+            </a:r>
+            <a:endParaRPr lang="en-US" sz="1400" dirty="0"/>
+          </a:p>
+        </p:txBody>
+      </p:sp>
+      <p:sp>
+        <p:nvSpPr>
+          <p:cNvPr id="36" name="nota Per una demo dal vivo:"/>
+          <p:cNvSpPr/>
+          <p:nvPr/>
+        </p:nvSpPr>
+        <p:spPr>
+          <a:xfrm>
+            <a:off x="685800" y="5577840"/>
+            <a:ext cx="10820095" cy="603504"/>
+          </a:xfrm>
+          <a:prstGeom prst="roundRect">
+            <a:avLst>
+              <a:gd name="adj" fmla="val 21212"/>
+            </a:avLst>
+          </a:prstGeom>
+          <a:solidFill>
+            <a:srgbClr val="FFF8E6"/>
+          </a:solidFill>
+          <a:ln w="12700">
+            <a:solidFill>
+              <a:srgbClr val="FFF8E6"/>
+            </a:solidFill>
+            <a:prstDash val="solid"/>
+          </a:ln>
+        </p:spPr>
+      </p:sp>
+      <p:pic>
+        <p:nvPicPr>
+          <p:cNvPr id="37" name="nota icona" descr="preencoded.png">    </p:cNvPr>
+          <p:cNvPicPr>
+            <a:picLocks noChangeAspect="1"/>
+          </p:cNvPicPr>
+          <p:nvPr/>
+        </p:nvPicPr>
+        <p:blipFill>
+          <a:blip r:embed="rId5"/>
+          <a:stretch>
+            <a:fillRect/>
+          </a:stretch>
+        </p:blipFill>
+        <p:spPr>
+          <a:xfrm>
+            <a:off x="914400" y="5715000"/>
+            <a:ext cx="329184" cy="329184"/>
+          </a:xfrm>
+          <a:prstGeom prst="rect">
+            <a:avLst/>
+          </a:prstGeom>
+        </p:spPr>
+      </p:pic>
+      <p:sp>
+        <p:nvSpPr>
+          <p:cNvPr id="38" name="nota testo"/>
           <p:cNvSpPr txBox="1"/>
           <p:nvPr/>
         </p:nvSpPr>
         <p:spPr>
           <a:xfrm>
-            <a:off x="2560320" y="5193792"/>
-            <a:ext cx="8625535" cy="457200"/>
-          </a:xfrm>
-          <a:prstGeom prst="rect">
-            <a:avLst/>
-          </a:prstGeom>
-          <a:noFill/>
-          <a:ln/>
-        </p:spPr>
-        <p:txBody>
-          <a:bodyPr wrap="square" lIns="0" tIns="0" rIns="0" bIns="0" rtlCol="0" anchor="t"/>
-          <a:lstStyle/>
-          <a:p>
-            <a:pPr indent="0" marL="0">
-              <a:buNone/>
-            </a:pPr>
-            <a:r>
-              <a:rPr lang="en-US" sz="1500" dirty="0">
-                <a:solidFill>
-                  <a:srgbClr val="374151"/>
-                </a:solidFill>
-                <a:latin typeface="Arial" pitchFamily="34" charset="0"/>
-                <a:ea typeface="Arial" pitchFamily="34" charset="-122"/>
-                <a:cs typeface="Arial" pitchFamily="34" charset="-120"/>
-              </a:rPr>
-              <a:t>Capitolo 9: scegli il tuo ruolo, copia un prompt e provalo su un caso vero, senza dati riservati.</a:t>
-            </a:r>
-            <a:endParaRPr lang="en-US" sz="1500" dirty="0"/>
+            <a:off x="1417320" y="5577840"/>
+            <a:ext cx="9859975" cy="603504"/>
+          </a:xfrm>
+          <a:prstGeom prst="rect">
+            <a:avLst/>
+          </a:prstGeom>
+          <a:noFill/>
+          <a:ln/>
+        </p:spPr>
+        <p:txBody>
+          <a:bodyPr wrap="square" lIns="0" tIns="0" rIns="0" bIns="0" rtlCol="0" anchor="ctr"/>
+          <a:lstStyle/>
+          <a:p>
+            <a:pPr indent="0" marL="0">
+              <a:buNone/>
+            </a:pPr>
+            <a:r>
+              <a:rPr lang="en-US" sz="1600" b="1" dirty="0">
+                <a:solidFill>
+                  <a:srgbClr val="A15C07"/>
+                </a:solidFill>
+                <a:latin typeface="Arial" pitchFamily="34" charset="0"/>
+                <a:ea typeface="Arial" pitchFamily="34" charset="-122"/>
+                <a:cs typeface="Arial" pitchFamily="34" charset="-120"/>
+              </a:rPr>
+              <a:t>Per una demo dal vivo: </a:t>
+            </a:r>
+            <a:pPr indent="0" marL="0">
+              <a:buNone/>
+            </a:pPr>
+            <a:r>
+              <a:rPr lang="en-US" sz="1600" dirty="0">
+                <a:solidFill>
+                  <a:schemeClr val="tx1"/>
+                </a:solidFill>
+                <a:latin typeface="Arial" pitchFamily="34" charset="0"/>
+                <a:ea typeface="Arial" pitchFamily="34" charset="-122"/>
+                <a:cs typeface="Arial" pitchFamily="34" charset="-120"/>
+              </a:rPr>
+              <a:t>plugin installato, Drive collegato, una cartella con soli dati di esempio. Mai dati veri di clienti o investitori.</a:t>
+            </a:r>
+            <a:endParaRPr lang="en-US" sz="1600" dirty="0"/>
           </a:p>
         </p:txBody>
       </p:sp>
@@ -7037,7 +8341,7 @@
                 <a:ea typeface="Arial" pitchFamily="34" charset="-122"/>
                 <a:cs typeface="Arial" pitchFamily="34" charset="-120"/>
               </a:rPr>
-              <a:t>DOPO L’INCONTRO</a:t>
+              <a:t>IL MATERIALE</a:t>
             </a:r>
             <a:endParaRPr lang="en-US" sz="1200" dirty="0"/>
           </a:p>
@@ -7078,7 +8382,7 @@
                 <a:ea typeface="Georgia" pitchFamily="34" charset="-122"/>
                 <a:cs typeface="Georgia" pitchFamily="34" charset="-120"/>
               </a:rPr>
-              <a:t>Il resto lo leggi con calma</a:t>
+              <a:t>Cosa trovi nel materiale</a:t>
             </a:r>
             <a:endParaRPr lang="en-US" sz="3400" dirty="0"/>
           </a:p>
@@ -7086,18 +8390,18 @@
       </p:sp>
       <p:sp>
         <p:nvSpPr>
-          <p:cNvPr id="4" name="Come si usa"/>
+          <p:cNvPr id="4" name="Sezione Capire"/>
           <p:cNvSpPr/>
           <p:nvPr/>
         </p:nvSpPr>
         <p:spPr>
           <a:xfrm>
             <a:off x="685800" y="1828800"/>
-            <a:ext cx="4983480" cy="4206240"/>
+            <a:ext cx="10820095" cy="714086"/>
           </a:xfrm>
           <a:prstGeom prst="roundRect">
             <a:avLst>
-              <a:gd name="adj" fmla="val 3043"/>
+              <a:gd name="adj" fmla="val 15366"/>
             </a:avLst>
           </a:prstGeom>
           <a:solidFill>
@@ -7113,458 +8417,189 @@
       </p:sp>
       <p:sp>
         <p:nvSpPr>
-          <p:cNvPr id="5" name="Come si usa titolo"/>
+          <p:cNvPr id="5" name="Nome Capire"/>
           <p:cNvSpPr txBox="1"/>
           <p:nvPr/>
         </p:nvSpPr>
         <p:spPr>
           <a:xfrm>
-            <a:off x="1005840" y="2103120"/>
-            <a:ext cx="4343400" cy="274320"/>
-          </a:xfrm>
-          <a:prstGeom prst="rect">
-            <a:avLst/>
-          </a:prstGeom>
-          <a:noFill/>
-          <a:ln/>
-        </p:spPr>
-        <p:txBody>
-          <a:bodyPr wrap="square" lIns="0" tIns="0" rIns="0" bIns="0" rtlCol="0" anchor="t"/>
-          <a:lstStyle/>
-          <a:p>
-            <a:pPr indent="0" marL="0">
-              <a:buNone/>
-            </a:pPr>
-            <a:r>
-              <a:rPr lang="en-US" sz="1200" b="1" spc="200" kern="0" dirty="0">
-                <a:solidFill>
-                  <a:schemeClr val="accent1"/>
-                </a:solidFill>
-                <a:latin typeface="Arial" pitchFamily="34" charset="0"/>
-                <a:ea typeface="Arial" pitchFamily="34" charset="-122"/>
-                <a:cs typeface="Arial" pitchFamily="34" charset="-120"/>
-              </a:rPr>
-              <a:t>COME SI USA IL MATERIALE</a:t>
-            </a:r>
-            <a:endParaRPr lang="en-US" sz="1200" dirty="0"/>
-          </a:p>
-        </p:txBody>
-      </p:sp>
-      <p:sp>
-        <p:nvSpPr>
-          <p:cNvPr id="6" name="Uso 0 fondo"/>
+            <a:off x="941832" y="1828800"/>
+            <a:ext cx="2788920" cy="714086"/>
+          </a:xfrm>
+          <a:prstGeom prst="rect">
+            <a:avLst/>
+          </a:prstGeom>
+          <a:noFill/>
+          <a:ln/>
+        </p:spPr>
+        <p:txBody>
+          <a:bodyPr wrap="square" lIns="0" tIns="0" rIns="0" bIns="0" rtlCol="0" anchor="ctr"/>
+          <a:lstStyle/>
+          <a:p>
+            <a:pPr indent="0" marL="0">
+              <a:buNone/>
+            </a:pPr>
+            <a:r>
+              <a:rPr lang="en-US" sz="1100" b="1" spc="200" kern="0" dirty="0">
+                <a:solidFill>
+                  <a:srgbClr val="1B4D89"/>
+                </a:solidFill>
+                <a:latin typeface="Arial" pitchFamily="34" charset="0"/>
+                <a:ea typeface="Arial" pitchFamily="34" charset="-122"/>
+                <a:cs typeface="Arial" pitchFamily="34" charset="-120"/>
+              </a:rPr>
+              <a:t>SEZIONE A</a:t>
+            </a:r>
+            <a:endParaRPr lang="en-US" sz="1500" dirty="0"/>
+          </a:p>
+          <a:p>
+            <a:pPr indent="0" marL="0">
+              <a:buNone/>
+            </a:pPr>
+            <a:r>
+              <a:rPr lang="en-US" sz="1600" b="1" dirty="0">
+                <a:solidFill>
+                  <a:schemeClr val="tx1"/>
+                </a:solidFill>
+                <a:latin typeface="Arial" pitchFamily="34" charset="0"/>
+                <a:ea typeface="Arial" pitchFamily="34" charset="-122"/>
+                <a:cs typeface="Arial" pitchFamily="34" charset="-120"/>
+              </a:rPr>
+              <a:t>Capire</a:t>
+            </a:r>
+            <a:endParaRPr lang="en-US" sz="1500" dirty="0"/>
+          </a:p>
+        </p:txBody>
+      </p:sp>
+      <p:sp>
+        <p:nvSpPr>
+          <p:cNvPr id="6" name="Capitoli Capire"/>
+          <p:cNvSpPr txBox="1"/>
+          <p:nvPr/>
+        </p:nvSpPr>
+        <p:spPr>
+          <a:xfrm>
+            <a:off x="3931920" y="1828800"/>
+            <a:ext cx="7299655" cy="714086"/>
+          </a:xfrm>
+          <a:prstGeom prst="rect">
+            <a:avLst/>
+          </a:prstGeom>
+          <a:noFill/>
+          <a:ln/>
+        </p:spPr>
+        <p:txBody>
+          <a:bodyPr wrap="square" lIns="0" tIns="0" rIns="0" bIns="0" rtlCol="0" anchor="ctr"/>
+          <a:lstStyle/>
+          <a:p>
+            <a:pPr indent="0" marL="0">
+              <a:buNone/>
+            </a:pPr>
+            <a:r>
+              <a:rPr lang="en-US" sz="1400" b="1" dirty="0">
+                <a:solidFill>
+                  <a:srgbClr val="1B4D89"/>
+                </a:solidFill>
+                <a:latin typeface="Arial" pitchFamily="34" charset="0"/>
+                <a:ea typeface="Arial" pitchFamily="34" charset="-122"/>
+                <a:cs typeface="Arial" pitchFamily="34" charset="-120"/>
+              </a:rPr>
+              <a:t>1  </a:t>
+            </a:r>
+            <a:pPr indent="0" marL="0">
+              <a:buNone/>
+            </a:pPr>
+            <a:r>
+              <a:rPr lang="en-US" sz="1400" dirty="0">
+                <a:solidFill>
+                  <a:srgbClr val="374151"/>
+                </a:solidFill>
+                <a:latin typeface="Arial" pitchFamily="34" charset="0"/>
+                <a:ea typeface="Arial" pitchFamily="34" charset="-122"/>
+                <a:cs typeface="Arial" pitchFamily="34" charset="-120"/>
+              </a:rPr>
+              <a:t>Cos’è l’AI e cosa non è     </a:t>
+            </a:r>
+            <a:pPr indent="0" marL="0">
+              <a:buNone/>
+            </a:pPr>
+            <a:r>
+              <a:rPr lang="en-US" sz="1400" b="1" dirty="0">
+                <a:solidFill>
+                  <a:srgbClr val="1B4D89"/>
+                </a:solidFill>
+                <a:latin typeface="Arial" pitchFamily="34" charset="0"/>
+                <a:ea typeface="Arial" pitchFamily="34" charset="-122"/>
+                <a:cs typeface="Arial" pitchFamily="34" charset="-120"/>
+              </a:rPr>
+              <a:t>2  </a:t>
+            </a:r>
+            <a:pPr indent="0" marL="0">
+              <a:buNone/>
+            </a:pPr>
+            <a:r>
+              <a:rPr lang="en-US" sz="1400" dirty="0">
+                <a:solidFill>
+                  <a:srgbClr val="374151"/>
+                </a:solidFill>
+                <a:latin typeface="Arial" pitchFamily="34" charset="0"/>
+                <a:ea typeface="Arial" pitchFamily="34" charset="-122"/>
+                <a:cs typeface="Arial" pitchFamily="34" charset="-120"/>
+              </a:rPr>
+              <a:t>Come funziona e perché sbaglia     </a:t>
+            </a:r>
+            <a:pPr indent="0" marL="0">
+              <a:buNone/>
+            </a:pPr>
+            <a:r>
+              <a:rPr lang="en-US" sz="1400" b="1" dirty="0">
+                <a:solidFill>
+                  <a:srgbClr val="1B4D89"/>
+                </a:solidFill>
+                <a:latin typeface="Arial" pitchFamily="34" charset="0"/>
+                <a:ea typeface="Arial" pitchFamily="34" charset="-122"/>
+                <a:cs typeface="Arial" pitchFamily="34" charset="-120"/>
+              </a:rPr>
+              <a:t>3  </a:t>
+            </a:r>
+            <a:pPr indent="0" marL="0">
+              <a:buNone/>
+            </a:pPr>
+            <a:r>
+              <a:rPr lang="en-US" sz="1400" dirty="0">
+                <a:solidFill>
+                  <a:srgbClr val="374151"/>
+                </a:solidFill>
+                <a:latin typeface="Arial" pitchFamily="34" charset="0"/>
+                <a:ea typeface="Arial" pitchFamily="34" charset="-122"/>
+                <a:cs typeface="Arial" pitchFamily="34" charset="-120"/>
+              </a:rPr>
+              <a:t>Gli strumenti</a:t>
+            </a:r>
+            <a:endParaRPr lang="en-US" sz="1400" dirty="0"/>
+          </a:p>
+        </p:txBody>
+      </p:sp>
+      <p:sp>
+        <p:nvSpPr>
+          <p:cNvPr id="7" name="Sezione Usare in sicurezza"/>
           <p:cNvSpPr/>
           <p:nvPr/>
         </p:nvSpPr>
         <p:spPr>
           <a:xfrm>
-            <a:off x="1005840" y="2606040"/>
-            <a:ext cx="502920" cy="502920"/>
+            <a:off x="685800" y="2670902"/>
+            <a:ext cx="10820095" cy="714086"/>
           </a:xfrm>
           <a:prstGeom prst="roundRect">
             <a:avLst>
-              <a:gd name="adj" fmla="val 22000"/>
+              <a:gd name="adj" fmla="val 15366"/>
             </a:avLst>
           </a:prstGeom>
           <a:solidFill>
-            <a:srgbClr val="FFFFFF"/>
+            <a:srgbClr val="F6F8FB"/>
           </a:solidFill>
           <a:ln w="12700">
-            <a:solidFill>
-              <a:srgbClr val="FFFFFF"/>
-            </a:solidFill>
-            <a:prstDash val="solid"/>
-          </a:ln>
-        </p:spPr>
-      </p:sp>
-      <p:pic>
-        <p:nvPicPr>
-          <p:cNvPr id="7" name="Uso 0" descr="preencoded.png">    </p:cNvPr>
-          <p:cNvPicPr>
-            <a:picLocks noChangeAspect="1"/>
-          </p:cNvPicPr>
-          <p:nvPr/>
-        </p:nvPicPr>
-        <p:blipFill>
-          <a:blip r:embed="rId1"/>
-          <a:stretch>
-            <a:fillRect/>
-          </a:stretch>
-        </p:blipFill>
-        <p:spPr>
-          <a:xfrm>
-            <a:off x="1126541" y="2726741"/>
-            <a:ext cx="261518" cy="261518"/>
-          </a:xfrm>
-          <a:prstGeom prst="rect">
-            <a:avLst/>
-          </a:prstGeom>
-        </p:spPr>
-      </p:pic>
-      <p:sp>
-        <p:nvSpPr>
-          <p:cNvPr id="8" name="Uso testo 0"/>
-          <p:cNvSpPr txBox="1"/>
-          <p:nvPr/>
-        </p:nvSpPr>
-        <p:spPr>
-          <a:xfrm>
-            <a:off x="1691640" y="2560320"/>
-            <a:ext cx="3657600" cy="594360"/>
-          </a:xfrm>
-          <a:prstGeom prst="rect">
-            <a:avLst/>
-          </a:prstGeom>
-          <a:noFill/>
-          <a:ln/>
-        </p:spPr>
-        <p:txBody>
-          <a:bodyPr wrap="square" lIns="0" tIns="0" rIns="0" bIns="0" rtlCol="0" anchor="ctr"/>
-          <a:lstStyle/>
-          <a:p>
-            <a:pPr indent="0" marL="0">
-              <a:buNone/>
-            </a:pPr>
-            <a:r>
-              <a:rPr lang="en-US" sz="1500" dirty="0">
-                <a:solidFill>
-                  <a:srgbClr val="374151"/>
-                </a:solidFill>
-                <a:latin typeface="Arial" pitchFamily="34" charset="0"/>
-                <a:ea typeface="Arial" pitchFamily="34" charset="-122"/>
-                <a:cs typeface="Arial" pitchFamily="34" charset="-120"/>
-              </a:rPr>
-              <a:t>Apri il link nel browser, anche dal telefono</a:t>
-            </a:r>
-            <a:endParaRPr lang="en-US" sz="1500" dirty="0"/>
-          </a:p>
-        </p:txBody>
-      </p:sp>
-      <p:sp>
-        <p:nvSpPr>
-          <p:cNvPr id="9" name="Uso 1 fondo"/>
-          <p:cNvSpPr/>
-          <p:nvPr/>
-        </p:nvSpPr>
-        <p:spPr>
-          <a:xfrm>
-            <a:off x="1005840" y="3429000"/>
-            <a:ext cx="502920" cy="502920"/>
-          </a:xfrm>
-          <a:prstGeom prst="roundRect">
-            <a:avLst>
-              <a:gd name="adj" fmla="val 22000"/>
-            </a:avLst>
-          </a:prstGeom>
-          <a:solidFill>
-            <a:srgbClr val="FFFFFF"/>
-          </a:solidFill>
-          <a:ln w="12700">
-            <a:solidFill>
-              <a:srgbClr val="FFFFFF"/>
-            </a:solidFill>
-            <a:prstDash val="solid"/>
-          </a:ln>
-        </p:spPr>
-      </p:sp>
-      <p:pic>
-        <p:nvPicPr>
-          <p:cNvPr id="10" name="Uso 1" descr="preencoded.png">    </p:cNvPr>
-          <p:cNvPicPr>
-            <a:picLocks noChangeAspect="1"/>
-          </p:cNvPicPr>
-          <p:nvPr/>
-        </p:nvPicPr>
-        <p:blipFill>
-          <a:blip r:embed="rId2"/>
-          <a:stretch>
-            <a:fillRect/>
-          </a:stretch>
-        </p:blipFill>
-        <p:spPr>
-          <a:xfrm>
-            <a:off x="1126541" y="3549701"/>
-            <a:ext cx="261518" cy="261518"/>
-          </a:xfrm>
-          <a:prstGeom prst="rect">
-            <a:avLst/>
-          </a:prstGeom>
-        </p:spPr>
-      </p:pic>
-      <p:sp>
-        <p:nvSpPr>
-          <p:cNvPr id="11" name="Uso testo 1"/>
-          <p:cNvSpPr txBox="1"/>
-          <p:nvPr/>
-        </p:nvSpPr>
-        <p:spPr>
-          <a:xfrm>
-            <a:off x="1691640" y="3383280"/>
-            <a:ext cx="3657600" cy="594360"/>
-          </a:xfrm>
-          <a:prstGeom prst="rect">
-            <a:avLst/>
-          </a:prstGeom>
-          <a:noFill/>
-          <a:ln/>
-        </p:spPr>
-        <p:txBody>
-          <a:bodyPr wrap="square" lIns="0" tIns="0" rIns="0" bIns="0" rtlCol="0" anchor="ctr"/>
-          <a:lstStyle/>
-          <a:p>
-            <a:pPr indent="0" marL="0">
-              <a:buNone/>
-            </a:pPr>
-            <a:r>
-              <a:rPr lang="en-US" sz="1500" dirty="0">
-                <a:solidFill>
-                  <a:srgbClr val="374151"/>
-                </a:solidFill>
-                <a:latin typeface="Arial" pitchFamily="34" charset="0"/>
-                <a:ea typeface="Arial" pitchFamily="34" charset="-122"/>
-                <a:cs typeface="Arial" pitchFamily="34" charset="-120"/>
-              </a:rPr>
-              <a:t>Italiano o inglese: interruttore in alto a destra</a:t>
-            </a:r>
-            <a:endParaRPr lang="en-US" sz="1500" dirty="0"/>
-          </a:p>
-        </p:txBody>
-      </p:sp>
-      <p:sp>
-        <p:nvSpPr>
-          <p:cNvPr id="12" name="Uso 2 fondo"/>
-          <p:cNvSpPr/>
-          <p:nvPr/>
-        </p:nvSpPr>
-        <p:spPr>
-          <a:xfrm>
-            <a:off x="1005840" y="4251960"/>
-            <a:ext cx="502920" cy="502920"/>
-          </a:xfrm>
-          <a:prstGeom prst="roundRect">
-            <a:avLst>
-              <a:gd name="adj" fmla="val 22000"/>
-            </a:avLst>
-          </a:prstGeom>
-          <a:solidFill>
-            <a:srgbClr val="FFFFFF"/>
-          </a:solidFill>
-          <a:ln w="12700">
-            <a:solidFill>
-              <a:srgbClr val="FFFFFF"/>
-            </a:solidFill>
-            <a:prstDash val="solid"/>
-          </a:ln>
-        </p:spPr>
-      </p:sp>
-      <p:pic>
-        <p:nvPicPr>
-          <p:cNvPr id="13" name="Uso 2" descr="preencoded.png">    </p:cNvPr>
-          <p:cNvPicPr>
-            <a:picLocks noChangeAspect="1"/>
-          </p:cNvPicPr>
-          <p:nvPr/>
-        </p:nvPicPr>
-        <p:blipFill>
-          <a:blip r:embed="rId3"/>
-          <a:stretch>
-            <a:fillRect/>
-          </a:stretch>
-        </p:blipFill>
-        <p:spPr>
-          <a:xfrm>
-            <a:off x="1126541" y="4372661"/>
-            <a:ext cx="261518" cy="261518"/>
-          </a:xfrm>
-          <a:prstGeom prst="rect">
-            <a:avLst/>
-          </a:prstGeom>
-        </p:spPr>
-      </p:pic>
-      <p:sp>
-        <p:nvSpPr>
-          <p:cNvPr id="14" name="Uso testo 2"/>
-          <p:cNvSpPr txBox="1"/>
-          <p:nvPr/>
-        </p:nvSpPr>
-        <p:spPr>
-          <a:xfrm>
-            <a:off x="1691640" y="4206240"/>
-            <a:ext cx="3657600" cy="594360"/>
-          </a:xfrm>
-          <a:prstGeom prst="rect">
-            <a:avLst/>
-          </a:prstGeom>
-          <a:noFill/>
-          <a:ln/>
-        </p:spPr>
-        <p:txBody>
-          <a:bodyPr wrap="square" lIns="0" tIns="0" rIns="0" bIns="0" rtlCol="0" anchor="ctr"/>
-          <a:lstStyle/>
-          <a:p>
-            <a:pPr indent="0" marL="0">
-              <a:buNone/>
-            </a:pPr>
-            <a:r>
-              <a:rPr lang="en-US" sz="1500" dirty="0">
-                <a:solidFill>
-                  <a:srgbClr val="374151"/>
-                </a:solidFill>
-                <a:latin typeface="Arial" pitchFamily="34" charset="0"/>
-                <a:ea typeface="Arial" pitchFamily="34" charset="-122"/>
-                <a:cs typeface="Arial" pitchFamily="34" charset="-120"/>
-              </a:rPr>
-              <a:t>Capitoli nel menu a sinistra, ognuno con il riassunto in cima</a:t>
-            </a:r>
-            <a:endParaRPr lang="en-US" sz="1500" dirty="0"/>
-          </a:p>
-        </p:txBody>
-      </p:sp>
-      <p:sp>
-        <p:nvSpPr>
-          <p:cNvPr id="15" name="Uso 3 fondo"/>
-          <p:cNvSpPr/>
-          <p:nvPr/>
-        </p:nvSpPr>
-        <p:spPr>
-          <a:xfrm>
-            <a:off x="1005840" y="5074920"/>
-            <a:ext cx="502920" cy="502920"/>
-          </a:xfrm>
-          <a:prstGeom prst="roundRect">
-            <a:avLst>
-              <a:gd name="adj" fmla="val 22000"/>
-            </a:avLst>
-          </a:prstGeom>
-          <a:solidFill>
-            <a:srgbClr val="FFFFFF"/>
-          </a:solidFill>
-          <a:ln w="12700">
-            <a:solidFill>
-              <a:srgbClr val="FFFFFF"/>
-            </a:solidFill>
-            <a:prstDash val="solid"/>
-          </a:ln>
-        </p:spPr>
-      </p:sp>
-      <p:pic>
-        <p:nvPicPr>
-          <p:cNvPr id="16" name="Uso 3" descr="preencoded.png">    </p:cNvPr>
-          <p:cNvPicPr>
-            <a:picLocks noChangeAspect="1"/>
-          </p:cNvPicPr>
-          <p:nvPr/>
-        </p:nvPicPr>
-        <p:blipFill>
-          <a:blip r:embed="rId4"/>
-          <a:stretch>
-            <a:fillRect/>
-          </a:stretch>
-        </p:blipFill>
-        <p:spPr>
-          <a:xfrm>
-            <a:off x="1126541" y="5195621"/>
-            <a:ext cx="261518" cy="261518"/>
-          </a:xfrm>
-          <a:prstGeom prst="rect">
-            <a:avLst/>
-          </a:prstGeom>
-        </p:spPr>
-      </p:pic>
-      <p:sp>
-        <p:nvSpPr>
-          <p:cNvPr id="17" name="Uso testo 3"/>
-          <p:cNvSpPr txBox="1"/>
-          <p:nvPr/>
-        </p:nvSpPr>
-        <p:spPr>
-          <a:xfrm>
-            <a:off x="1691640" y="5029200"/>
-            <a:ext cx="3657600" cy="594360"/>
-          </a:xfrm>
-          <a:prstGeom prst="rect">
-            <a:avLst/>
-          </a:prstGeom>
-          <a:noFill/>
-          <a:ln/>
-        </p:spPr>
-        <p:txBody>
-          <a:bodyPr wrap="square" lIns="0" tIns="0" rIns="0" bIns="0" rtlCol="0" anchor="ctr"/>
-          <a:lstStyle/>
-          <a:p>
-            <a:pPr indent="0" marL="0">
-              <a:buNone/>
-            </a:pPr>
-            <a:r>
-              <a:rPr lang="en-US" sz="1500" dirty="0">
-                <a:solidFill>
-                  <a:srgbClr val="374151"/>
-                </a:solidFill>
-                <a:latin typeface="Arial" pitchFamily="34" charset="0"/>
-                <a:ea typeface="Arial" pitchFamily="34" charset="-122"/>
-                <a:cs typeface="Arial" pitchFamily="34" charset="-120"/>
-              </a:rPr>
-              <a:t>La checklist si salva da sola sul tuo dispositivo</a:t>
-            </a:r>
-            <a:endParaRPr lang="en-US" sz="1500" dirty="0"/>
-          </a:p>
-        </p:txBody>
-      </p:sp>
-      <p:sp>
-        <p:nvSpPr>
-          <p:cNvPr id="18" name="Programma titolo"/>
-          <p:cNvSpPr txBox="1"/>
-          <p:nvPr/>
-        </p:nvSpPr>
-        <p:spPr>
-          <a:xfrm>
-            <a:off x="5989320" y="2103120"/>
-            <a:ext cx="5516575" cy="274320"/>
-          </a:xfrm>
-          <a:prstGeom prst="rect">
-            <a:avLst/>
-          </a:prstGeom>
-          <a:noFill/>
-          <a:ln/>
-        </p:spPr>
-        <p:txBody>
-          <a:bodyPr wrap="square" lIns="0" tIns="0" rIns="0" bIns="0" rtlCol="0" anchor="t"/>
-          <a:lstStyle/>
-          <a:p>
-            <a:pPr indent="0" marL="0">
-              <a:buNone/>
-            </a:pPr>
-            <a:r>
-              <a:rPr lang="en-US" sz="1200" b="1" spc="200" kern="0" dirty="0">
-                <a:solidFill>
-                  <a:schemeClr val="accent1"/>
-                </a:solidFill>
-                <a:latin typeface="Arial" pitchFamily="34" charset="0"/>
-                <a:ea typeface="Arial" pitchFamily="34" charset="-122"/>
-                <a:cs typeface="Arial" pitchFamily="34" charset="-120"/>
-              </a:rPr>
-              <a:t>IL TUO PROGRAMMA</a:t>
-            </a:r>
-            <a:endParaRPr lang="en-US" sz="1200" dirty="0"/>
-          </a:p>
-        </p:txBody>
-      </p:sp>
-      <p:sp>
-        <p:nvSpPr>
-          <p:cNvPr id="19" name="Linea programma"/>
-          <p:cNvSpPr/>
-          <p:nvPr/>
-        </p:nvSpPr>
-        <p:spPr>
-          <a:xfrm>
-            <a:off x="6117336" y="2697480"/>
-            <a:ext cx="0" cy="2346960"/>
-          </a:xfrm>
-          <a:prstGeom prst="line">
-            <a:avLst/>
-          </a:prstGeom>
-          <a:noFill/>
-          <a:ln w="25400">
             <a:solidFill>
               <a:srgbClr val="E4E8EE"/>
             </a:solidFill>
@@ -7574,24 +8609,191 @@
       </p:sp>
       <p:sp>
         <p:nvSpPr>
-          <p:cNvPr id="20" name="Punto Entro una settimana"/>
+          <p:cNvPr id="8" name="Nome Usare in sicurezza"/>
+          <p:cNvSpPr txBox="1"/>
+          <p:nvPr/>
+        </p:nvSpPr>
+        <p:spPr>
+          <a:xfrm>
+            <a:off x="941832" y="2670902"/>
+            <a:ext cx="2788920" cy="714086"/>
+          </a:xfrm>
+          <a:prstGeom prst="rect">
+            <a:avLst/>
+          </a:prstGeom>
+          <a:noFill/>
+          <a:ln/>
+        </p:spPr>
+        <p:txBody>
+          <a:bodyPr wrap="square" lIns="0" tIns="0" rIns="0" bIns="0" rtlCol="0" anchor="ctr"/>
+          <a:lstStyle/>
+          <a:p>
+            <a:pPr indent="0" marL="0">
+              <a:buNone/>
+            </a:pPr>
+            <a:r>
+              <a:rPr lang="en-US" sz="1100" b="1" spc="200" kern="0" dirty="0">
+                <a:solidFill>
+                  <a:srgbClr val="1B4D89"/>
+                </a:solidFill>
+                <a:latin typeface="Arial" pitchFamily="34" charset="0"/>
+                <a:ea typeface="Arial" pitchFamily="34" charset="-122"/>
+                <a:cs typeface="Arial" pitchFamily="34" charset="-120"/>
+              </a:rPr>
+              <a:t>SEZIONE B</a:t>
+            </a:r>
+            <a:endParaRPr lang="en-US" sz="1500" dirty="0"/>
+          </a:p>
+          <a:p>
+            <a:pPr indent="0" marL="0">
+              <a:buNone/>
+            </a:pPr>
+            <a:r>
+              <a:rPr lang="en-US" sz="1600" b="1" dirty="0">
+                <a:solidFill>
+                  <a:schemeClr val="tx1"/>
+                </a:solidFill>
+                <a:latin typeface="Arial" pitchFamily="34" charset="0"/>
+                <a:ea typeface="Arial" pitchFamily="34" charset="-122"/>
+                <a:cs typeface="Arial" pitchFamily="34" charset="-120"/>
+              </a:rPr>
+              <a:t>Usare in sicurezza</a:t>
+            </a:r>
+            <a:endParaRPr lang="en-US" sz="1500" dirty="0"/>
+          </a:p>
+        </p:txBody>
+      </p:sp>
+      <p:sp>
+        <p:nvSpPr>
+          <p:cNvPr id="9" name="Capitoli Usare in sicurezza"/>
+          <p:cNvSpPr txBox="1"/>
+          <p:nvPr/>
+        </p:nvSpPr>
+        <p:spPr>
+          <a:xfrm>
+            <a:off x="3931920" y="2670902"/>
+            <a:ext cx="7299655" cy="714086"/>
+          </a:xfrm>
+          <a:prstGeom prst="rect">
+            <a:avLst/>
+          </a:prstGeom>
+          <a:noFill/>
+          <a:ln/>
+        </p:spPr>
+        <p:txBody>
+          <a:bodyPr wrap="square" lIns="0" tIns="0" rIns="0" bIns="0" rtlCol="0" anchor="ctr"/>
+          <a:lstStyle/>
+          <a:p>
+            <a:pPr indent="0" marL="0">
+              <a:buNone/>
+            </a:pPr>
+            <a:r>
+              <a:rPr lang="en-US" sz="1400" b="1" dirty="0">
+                <a:solidFill>
+                  <a:srgbClr val="1B4D89"/>
+                </a:solidFill>
+                <a:latin typeface="Arial" pitchFamily="34" charset="0"/>
+                <a:ea typeface="Arial" pitchFamily="34" charset="-122"/>
+                <a:cs typeface="Arial" pitchFamily="34" charset="-120"/>
+              </a:rPr>
+              <a:t>4  </a:t>
+            </a:r>
+            <a:pPr indent="0" marL="0">
+              <a:buNone/>
+            </a:pPr>
+            <a:r>
+              <a:rPr lang="en-US" sz="1400" dirty="0">
+                <a:solidFill>
+                  <a:srgbClr val="374151"/>
+                </a:solidFill>
+                <a:latin typeface="Arial" pitchFamily="34" charset="0"/>
+                <a:ea typeface="Arial" pitchFamily="34" charset="-122"/>
+                <a:cs typeface="Arial" pitchFamily="34" charset="-120"/>
+              </a:rPr>
+              <a:t>Dati e privacy: spegni l’addestramento     </a:t>
+            </a:r>
+            <a:pPr indent="0" marL="0">
+              <a:buNone/>
+            </a:pPr>
+            <a:r>
+              <a:rPr lang="en-US" sz="1400" b="1" dirty="0">
+                <a:solidFill>
+                  <a:srgbClr val="1B4D89"/>
+                </a:solidFill>
+                <a:latin typeface="Arial" pitchFamily="34" charset="0"/>
+                <a:ea typeface="Arial" pitchFamily="34" charset="-122"/>
+                <a:cs typeface="Arial" pitchFamily="34" charset="-120"/>
+              </a:rPr>
+              <a:t>5  </a:t>
+            </a:r>
+            <a:pPr indent="0" marL="0">
+              <a:buNone/>
+            </a:pPr>
+            <a:r>
+              <a:rPr lang="en-US" sz="1400" dirty="0">
+                <a:solidFill>
+                  <a:srgbClr val="374151"/>
+                </a:solidFill>
+                <a:latin typeface="Arial" pitchFamily="34" charset="0"/>
+                <a:ea typeface="Arial" pitchFamily="34" charset="-122"/>
+                <a:cs typeface="Arial" pitchFamily="34" charset="-120"/>
+              </a:rPr>
+              <a:t>Rischi dell’AI e come verificare     </a:t>
+            </a:r>
+            <a:pPr indent="0" marL="0">
+              <a:buNone/>
+            </a:pPr>
+            <a:r>
+              <a:rPr lang="en-US" sz="1400" b="1" dirty="0">
+                <a:solidFill>
+                  <a:srgbClr val="1B4D89"/>
+                </a:solidFill>
+                <a:latin typeface="Arial" pitchFamily="34" charset="0"/>
+                <a:ea typeface="Arial" pitchFamily="34" charset="-122"/>
+                <a:cs typeface="Arial" pitchFamily="34" charset="-120"/>
+              </a:rPr>
+              <a:t>6  </a:t>
+            </a:r>
+            <a:pPr indent="0" marL="0">
+              <a:buNone/>
+            </a:pPr>
+            <a:r>
+              <a:rPr lang="en-US" sz="1400" dirty="0">
+                <a:solidFill>
+                  <a:srgbClr val="374151"/>
+                </a:solidFill>
+                <a:latin typeface="Arial" pitchFamily="34" charset="0"/>
+                <a:ea typeface="Arial" pitchFamily="34" charset="-122"/>
+                <a:cs typeface="Arial" pitchFamily="34" charset="-120"/>
+              </a:rPr>
+              <a:t>Le regole in azienda</a:t>
+            </a:r>
+            <a:endParaRPr lang="en-US" sz="1400" dirty="0"/>
+          </a:p>
+        </p:txBody>
+      </p:sp>
+      <p:sp>
+        <p:nvSpPr>
+          <p:cNvPr id="10" name="Sezione Usare bene"/>
           <p:cNvSpPr/>
           <p:nvPr/>
         </p:nvSpPr>
         <p:spPr>
           <a:xfrm>
-            <a:off x="5989320" y="2624328"/>
-            <a:ext cx="256032" cy="256032"/>
-          </a:xfrm>
-          <a:prstGeom prst="ellipse">
-            <a:avLst/>
+            <a:off x="685800" y="3513003"/>
+            <a:ext cx="10820095" cy="912340"/>
+          </a:xfrm>
+          <a:prstGeom prst="roundRect">
+            <a:avLst>
+              <a:gd name="adj" fmla="val 12027"/>
+            </a:avLst>
           </a:prstGeom>
           <a:solidFill>
-            <a:srgbClr val="1B4D89"/>
+            <a:srgbClr val="EAF2FC"/>
           </a:solidFill>
-          <a:ln w="25400">
+          <a:ln w="12700">
             <a:solidFill>
-              <a:srgbClr val="FFFFFF"/>
+              <a:srgbClr val="1B4D89"/>
             </a:solidFill>
             <a:prstDash val="solid"/>
           </a:ln>
@@ -7599,24 +8801,41 @@
       </p:sp>
       <p:sp>
         <p:nvSpPr>
-          <p:cNvPr id="21" name="Quando Entro una settimana"/>
+          <p:cNvPr id="11" name="Nome Usare bene"/>
           <p:cNvSpPr txBox="1"/>
           <p:nvPr/>
         </p:nvSpPr>
         <p:spPr>
           <a:xfrm>
-            <a:off x="6492240" y="2560320"/>
-            <a:ext cx="5013655" cy="329184"/>
-          </a:xfrm>
-          <a:prstGeom prst="rect">
-            <a:avLst/>
-          </a:prstGeom>
-          <a:noFill/>
-          <a:ln/>
-        </p:spPr>
-        <p:txBody>
-          <a:bodyPr wrap="square" lIns="0" tIns="0" rIns="0" bIns="0" rtlCol="0" anchor="t"/>
-          <a:lstStyle/>
+            <a:off x="941832" y="3513003"/>
+            <a:ext cx="2788920" cy="912340"/>
+          </a:xfrm>
+          <a:prstGeom prst="rect">
+            <a:avLst/>
+          </a:prstGeom>
+          <a:noFill/>
+          <a:ln/>
+        </p:spPr>
+        <p:txBody>
+          <a:bodyPr wrap="square" lIns="0" tIns="0" rIns="0" bIns="0" rtlCol="0" anchor="ctr"/>
+          <a:lstStyle/>
+          <a:p>
+            <a:pPr indent="0" marL="0">
+              <a:buNone/>
+            </a:pPr>
+            <a:r>
+              <a:rPr lang="en-US" sz="1100" b="1" spc="200" kern="0" dirty="0">
+                <a:solidFill>
+                  <a:srgbClr val="1B4D89"/>
+                </a:solidFill>
+                <a:latin typeface="Arial" pitchFamily="34" charset="0"/>
+                <a:ea typeface="Arial" pitchFamily="34" charset="-122"/>
+                <a:cs typeface="Arial" pitchFamily="34" charset="-120"/>
+              </a:rPr>
+              <a:t>SEZIONE C</a:t>
+            </a:r>
+            <a:endParaRPr lang="en-US" sz="1500" dirty="0"/>
+          </a:p>
           <a:p>
             <a:pPr indent="0" marL="0">
               <a:buNone/>
@@ -7624,44 +8843,58 @@
             <a:r>
               <a:rPr lang="en-US" sz="1600" b="1" dirty="0">
                 <a:solidFill>
-                  <a:schemeClr val="accent1"/>
-                </a:solidFill>
-                <a:latin typeface="Arial" pitchFamily="34" charset="0"/>
-                <a:ea typeface="Arial" pitchFamily="34" charset="-122"/>
-                <a:cs typeface="Arial" pitchFamily="34" charset="-120"/>
-              </a:rPr>
-              <a:t>Entro una settimana</a:t>
-            </a:r>
-            <a:endParaRPr lang="en-US" sz="1600" dirty="0"/>
-          </a:p>
-        </p:txBody>
-      </p:sp>
-      <p:sp>
-        <p:nvSpPr>
-          <p:cNvPr id="22" name="Cosa Entro una settimana"/>
+                  <a:schemeClr val="tx1"/>
+                </a:solidFill>
+                <a:latin typeface="Arial" pitchFamily="34" charset="0"/>
+                <a:ea typeface="Arial" pitchFamily="34" charset="-122"/>
+                <a:cs typeface="Arial" pitchFamily="34" charset="-120"/>
+              </a:rPr>
+              <a:t>Usare bene</a:t>
+            </a:r>
+            <a:endParaRPr lang="en-US" sz="1500" dirty="0"/>
+          </a:p>
+        </p:txBody>
+      </p:sp>
+      <p:sp>
+        <p:nvSpPr>
+          <p:cNvPr id="12" name="Capitoli Usare bene"/>
           <p:cNvSpPr txBox="1"/>
           <p:nvPr/>
         </p:nvSpPr>
         <p:spPr>
           <a:xfrm>
-            <a:off x="6492240" y="2907792"/>
-            <a:ext cx="5013655" cy="789432"/>
-          </a:xfrm>
-          <a:prstGeom prst="rect">
-            <a:avLst/>
-          </a:prstGeom>
-          <a:noFill/>
-          <a:ln/>
-        </p:spPr>
-        <p:txBody>
-          <a:bodyPr wrap="square" lIns="0" tIns="0" rIns="0" bIns="0" rtlCol="0" anchor="t"/>
-          <a:lstStyle/>
-          <a:p>
-            <a:pPr indent="0" marL="0">
-              <a:buNone/>
-            </a:pPr>
-            <a:r>
-              <a:rPr lang="en-US" sz="1500" dirty="0">
+            <a:off x="3931920" y="3513003"/>
+            <a:ext cx="7299655" cy="912340"/>
+          </a:xfrm>
+          <a:prstGeom prst="rect">
+            <a:avLst/>
+          </a:prstGeom>
+          <a:noFill/>
+          <a:ln/>
+        </p:spPr>
+        <p:txBody>
+          <a:bodyPr wrap="square" lIns="0" tIns="0" rIns="0" bIns="0" rtlCol="0" anchor="ctr"/>
+          <a:lstStyle/>
+          <a:p>
+            <a:pPr indent="0" marL="0">
+              <a:buNone/>
+            </a:pPr>
+            <a:r>
+              <a:rPr lang="en-US" sz="1400" b="1" dirty="0">
+                <a:solidFill>
+                  <a:srgbClr val="1B4D89"/>
+                </a:solidFill>
+                <a:latin typeface="Arial" pitchFamily="34" charset="0"/>
+                <a:ea typeface="Arial" pitchFamily="34" charset="-122"/>
+                <a:cs typeface="Arial" pitchFamily="34" charset="-120"/>
+              </a:rPr>
+              <a:t>7  </a:t>
+            </a:r>
+            <a:pPr indent="0" marL="0">
+              <a:buNone/>
+            </a:pPr>
+            <a:r>
+              <a:rPr lang="en-US" sz="1400" dirty="0">
                 <a:solidFill>
                   <a:srgbClr val="374151"/>
                 </a:solidFill>
@@ -7669,32 +8902,146 @@
                 <a:ea typeface="Arial" pitchFamily="34" charset="-122"/>
                 <a:cs typeface="Arial" pitchFamily="34" charset="-120"/>
               </a:rPr>
-              <a:t>Leggi tutto il materiale, sezione D compresa. Circa 45 minuti.</a:t>
-            </a:r>
-            <a:endParaRPr lang="en-US" sz="1500" dirty="0"/>
-          </a:p>
-        </p:txBody>
-      </p:sp>
-      <p:sp>
-        <p:nvSpPr>
-          <p:cNvPr id="23" name="Punto Entro due settimane"/>
+              <a:t>Scrivere un buon prompt     </a:t>
+            </a:r>
+            <a:pPr indent="0" marL="0">
+              <a:buNone/>
+            </a:pPr>
+            <a:r>
+              <a:rPr lang="en-US" sz="1400" b="1" dirty="0">
+                <a:solidFill>
+                  <a:srgbClr val="1B4D89"/>
+                </a:solidFill>
+                <a:latin typeface="Arial" pitchFamily="34" charset="0"/>
+                <a:ea typeface="Arial" pitchFamily="34" charset="-122"/>
+                <a:cs typeface="Arial" pitchFamily="34" charset="-120"/>
+              </a:rPr>
+              <a:t>8  </a:t>
+            </a:r>
+            <a:pPr indent="0" marL="0">
+              <a:buNone/>
+            </a:pPr>
+            <a:r>
+              <a:rPr lang="en-US" sz="1400" dirty="0">
+                <a:solidFill>
+                  <a:srgbClr val="374151"/>
+                </a:solidFill>
+                <a:latin typeface="Arial" pitchFamily="34" charset="0"/>
+                <a:ea typeface="Arial" pitchFamily="34" charset="-122"/>
+                <a:cs typeface="Arial" pitchFamily="34" charset="-120"/>
+              </a:rPr>
+              <a:t>Progetti, memoria, istruzioni e regole     </a:t>
+            </a:r>
+            <a:pPr indent="0" marL="0">
+              <a:buNone/>
+            </a:pPr>
+            <a:r>
+              <a:rPr lang="en-US" sz="1400" b="1" dirty="0">
+                <a:solidFill>
+                  <a:srgbClr val="1B4D89"/>
+                </a:solidFill>
+                <a:latin typeface="Arial" pitchFamily="34" charset="0"/>
+                <a:ea typeface="Arial" pitchFamily="34" charset="-122"/>
+                <a:cs typeface="Arial" pitchFamily="34" charset="-120"/>
+              </a:rPr>
+              <a:t>9  </a:t>
+            </a:r>
+            <a:pPr indent="0" marL="0">
+              <a:buNone/>
+            </a:pPr>
+            <a:r>
+              <a:rPr lang="en-US" sz="1400" dirty="0">
+                <a:solidFill>
+                  <a:srgbClr val="374151"/>
+                </a:solidFill>
+                <a:latin typeface="Arial" pitchFamily="34" charset="0"/>
+                <a:ea typeface="Arial" pitchFamily="34" charset="-122"/>
+                <a:cs typeface="Arial" pitchFamily="34" charset="-120"/>
+              </a:rPr>
+              <a:t>Prompt pronti per ruolo     </a:t>
+            </a:r>
+            <a:pPr indent="0" marL="0">
+              <a:buNone/>
+            </a:pPr>
+            <a:r>
+              <a:rPr lang="en-US" sz="1400" b="1" dirty="0">
+                <a:solidFill>
+                  <a:srgbClr val="1B4D89"/>
+                </a:solidFill>
+                <a:latin typeface="Arial" pitchFamily="34" charset="0"/>
+                <a:ea typeface="Arial" pitchFamily="34" charset="-122"/>
+                <a:cs typeface="Arial" pitchFamily="34" charset="-120"/>
+              </a:rPr>
+              <a:t>10  </a:t>
+            </a:r>
+            <a:pPr indent="0" marL="0">
+              <a:buNone/>
+            </a:pPr>
+            <a:r>
+              <a:rPr lang="en-US" sz="1400" dirty="0">
+                <a:solidFill>
+                  <a:srgbClr val="374151"/>
+                </a:solidFill>
+                <a:latin typeface="Arial" pitchFamily="34" charset="0"/>
+                <a:ea typeface="Arial" pitchFamily="34" charset="-122"/>
+                <a:cs typeface="Arial" pitchFamily="34" charset="-120"/>
+              </a:rPr>
+              <a:t>Documenti, dati e ricerca     </a:t>
+            </a:r>
+            <a:pPr indent="0" marL="0">
+              <a:buNone/>
+            </a:pPr>
+            <a:r>
+              <a:rPr lang="en-US" sz="1400" b="1" dirty="0">
+                <a:solidFill>
+                  <a:srgbClr val="1B4D89"/>
+                </a:solidFill>
+                <a:latin typeface="Arial" pitchFamily="34" charset="0"/>
+                <a:ea typeface="Arial" pitchFamily="34" charset="-122"/>
+                <a:cs typeface="Arial" pitchFamily="34" charset="-120"/>
+              </a:rPr>
+              <a:t>11  </a:t>
+            </a:r>
+            <a:pPr indent="0" marL="0">
+              <a:buNone/>
+            </a:pPr>
+            <a:r>
+              <a:rPr lang="en-US" sz="1400" dirty="0">
+                <a:solidFill>
+                  <a:srgbClr val="374151"/>
+                </a:solidFill>
+                <a:latin typeface="Arial" pitchFamily="34" charset="0"/>
+                <a:ea typeface="Arial" pitchFamily="34" charset="-122"/>
+                <a:cs typeface="Arial" pitchFamily="34" charset="-120"/>
+              </a:rPr>
+              <a:t>L’azienda pronta per l’AI</a:t>
+            </a:r>
+            <a:endParaRPr lang="en-US" sz="1400" dirty="0"/>
+          </a:p>
+        </p:txBody>
+      </p:sp>
+      <p:sp>
+        <p:nvSpPr>
+          <p:cNvPr id="13" name="Sezione Collegare e automatizzare"/>
           <p:cNvSpPr/>
           <p:nvPr/>
         </p:nvSpPr>
         <p:spPr>
           <a:xfrm>
-            <a:off x="5989320" y="3797808"/>
-            <a:ext cx="256032" cy="256032"/>
-          </a:xfrm>
-          <a:prstGeom prst="ellipse">
-            <a:avLst/>
+            <a:off x="685800" y="4553359"/>
+            <a:ext cx="10820095" cy="714086"/>
+          </a:xfrm>
+          <a:prstGeom prst="roundRect">
+            <a:avLst>
+              <a:gd name="adj" fmla="val 15366"/>
+            </a:avLst>
           </a:prstGeom>
           <a:solidFill>
-            <a:srgbClr val="1B4D89"/>
+            <a:srgbClr val="EAF2FC"/>
           </a:solidFill>
-          <a:ln w="25400">
+          <a:ln w="12700">
             <a:solidFill>
-              <a:srgbClr val="FFFFFF"/>
+              <a:srgbClr val="1B4D89"/>
             </a:solidFill>
             <a:prstDash val="solid"/>
           </a:ln>
@@ -7702,24 +9049,41 @@
       </p:sp>
       <p:sp>
         <p:nvSpPr>
-          <p:cNvPr id="24" name="Quando Entro due settimane"/>
+          <p:cNvPr id="14" name="Nome Collegare e automatizzare"/>
           <p:cNvSpPr txBox="1"/>
           <p:nvPr/>
         </p:nvSpPr>
         <p:spPr>
           <a:xfrm>
-            <a:off x="6492240" y="3733800"/>
-            <a:ext cx="5013655" cy="329184"/>
-          </a:xfrm>
-          <a:prstGeom prst="rect">
-            <a:avLst/>
-          </a:prstGeom>
-          <a:noFill/>
-          <a:ln/>
-        </p:spPr>
-        <p:txBody>
-          <a:bodyPr wrap="square" lIns="0" tIns="0" rIns="0" bIns="0" rtlCol="0" anchor="t"/>
-          <a:lstStyle/>
+            <a:off x="941832" y="4553359"/>
+            <a:ext cx="2788920" cy="714086"/>
+          </a:xfrm>
+          <a:prstGeom prst="rect">
+            <a:avLst/>
+          </a:prstGeom>
+          <a:noFill/>
+          <a:ln/>
+        </p:spPr>
+        <p:txBody>
+          <a:bodyPr wrap="square" lIns="0" tIns="0" rIns="0" bIns="0" rtlCol="0" anchor="ctr"/>
+          <a:lstStyle/>
+          <a:p>
+            <a:pPr indent="0" marL="0">
+              <a:buNone/>
+            </a:pPr>
+            <a:r>
+              <a:rPr lang="en-US" sz="1100" b="1" spc="200" kern="0" dirty="0">
+                <a:solidFill>
+                  <a:srgbClr val="1B4D89"/>
+                </a:solidFill>
+                <a:latin typeface="Arial" pitchFamily="34" charset="0"/>
+                <a:ea typeface="Arial" pitchFamily="34" charset="-122"/>
+                <a:cs typeface="Arial" pitchFamily="34" charset="-120"/>
+              </a:rPr>
+              <a:t>SEZIONE D</a:t>
+            </a:r>
+            <a:endParaRPr lang="en-US" sz="1500" dirty="0"/>
+          </a:p>
           <a:p>
             <a:pPr indent="0" marL="0">
               <a:buNone/>
@@ -7727,44 +9091,58 @@
             <a:r>
               <a:rPr lang="en-US" sz="1600" b="1" dirty="0">
                 <a:solidFill>
-                  <a:schemeClr val="accent1"/>
-                </a:solidFill>
-                <a:latin typeface="Arial" pitchFamily="34" charset="0"/>
-                <a:ea typeface="Arial" pitchFamily="34" charset="-122"/>
-                <a:cs typeface="Arial" pitchFamily="34" charset="-120"/>
-              </a:rPr>
-              <a:t>Entro due settimane</a:t>
-            </a:r>
-            <a:endParaRPr lang="en-US" sz="1600" dirty="0"/>
-          </a:p>
-        </p:txBody>
-      </p:sp>
-      <p:sp>
-        <p:nvSpPr>
-          <p:cNvPr id="25" name="Cosa Entro due settimane"/>
+                  <a:schemeClr val="tx1"/>
+                </a:solidFill>
+                <a:latin typeface="Arial" pitchFamily="34" charset="0"/>
+                <a:ea typeface="Arial" pitchFamily="34" charset="-122"/>
+                <a:cs typeface="Arial" pitchFamily="34" charset="-120"/>
+              </a:rPr>
+              <a:t>Collegare e automatizzare</a:t>
+            </a:r>
+            <a:endParaRPr lang="en-US" sz="1500" dirty="0"/>
+          </a:p>
+        </p:txBody>
+      </p:sp>
+      <p:sp>
+        <p:nvSpPr>
+          <p:cNvPr id="15" name="Capitoli Collegare e automatizzare"/>
           <p:cNvSpPr txBox="1"/>
           <p:nvPr/>
         </p:nvSpPr>
         <p:spPr>
           <a:xfrm>
-            <a:off x="6492240" y="4081272"/>
-            <a:ext cx="5013655" cy="789432"/>
-          </a:xfrm>
-          <a:prstGeom prst="rect">
-            <a:avLst/>
-          </a:prstGeom>
-          <a:noFill/>
-          <a:ln/>
-        </p:spPr>
-        <p:txBody>
-          <a:bodyPr wrap="square" lIns="0" tIns="0" rIns="0" bIns="0" rtlCol="0" anchor="t"/>
-          <a:lstStyle/>
-          <a:p>
-            <a:pPr indent="0" marL="0">
-              <a:buNone/>
-            </a:pPr>
-            <a:r>
-              <a:rPr lang="en-US" sz="1500" dirty="0">
+            <a:off x="3931920" y="4553359"/>
+            <a:ext cx="7299655" cy="714086"/>
+          </a:xfrm>
+          <a:prstGeom prst="rect">
+            <a:avLst/>
+          </a:prstGeom>
+          <a:noFill/>
+          <a:ln/>
+        </p:spPr>
+        <p:txBody>
+          <a:bodyPr wrap="square" lIns="0" tIns="0" rIns="0" bIns="0" rtlCol="0" anchor="ctr"/>
+          <a:lstStyle/>
+          <a:p>
+            <a:pPr indent="0" marL="0">
+              <a:buNone/>
+            </a:pPr>
+            <a:r>
+              <a:rPr lang="en-US" sz="1400" b="1" dirty="0">
+                <a:solidFill>
+                  <a:srgbClr val="1B4D89"/>
+                </a:solidFill>
+                <a:latin typeface="Arial" pitchFamily="34" charset="0"/>
+                <a:ea typeface="Arial" pitchFamily="34" charset="-122"/>
+                <a:cs typeface="Arial" pitchFamily="34" charset="-120"/>
+              </a:rPr>
+              <a:t>12  </a:t>
+            </a:r>
+            <a:pPr indent="0" marL="0">
+              <a:buNone/>
+            </a:pPr>
+            <a:r>
+              <a:rPr lang="en-US" sz="1400" dirty="0">
                 <a:solidFill>
                   <a:srgbClr val="374151"/>
                 </a:solidFill>
@@ -7772,32 +9150,118 @@
                 <a:ea typeface="Arial" pitchFamily="34" charset="-122"/>
                 <a:cs typeface="Arial" pitchFamily="34" charset="-120"/>
               </a:rPr>
-              <a:t>Strumenti configurati, checklist da 18 punti e test. Circa 1 ora di pratica.</a:t>
-            </a:r>
-            <a:endParaRPr lang="en-US" sz="1500" dirty="0"/>
-          </a:p>
-        </p:txBody>
-      </p:sp>
-      <p:sp>
-        <p:nvSpPr>
-          <p:cNvPr id="26" name="Punto Poi"/>
+              <a:t>Connettori e MCP     </a:t>
+            </a:r>
+            <a:pPr indent="0" marL="0">
+              <a:buNone/>
+            </a:pPr>
+            <a:r>
+              <a:rPr lang="en-US" sz="1400" b="1" dirty="0">
+                <a:solidFill>
+                  <a:srgbClr val="1B4D89"/>
+                </a:solidFill>
+                <a:latin typeface="Arial" pitchFamily="34" charset="0"/>
+                <a:ea typeface="Arial" pitchFamily="34" charset="-122"/>
+                <a:cs typeface="Arial" pitchFamily="34" charset="-120"/>
+              </a:rPr>
+              <a:t>13  </a:t>
+            </a:r>
+            <a:pPr indent="0" marL="0">
+              <a:buNone/>
+            </a:pPr>
+            <a:r>
+              <a:rPr lang="en-US" sz="1400" dirty="0">
+                <a:solidFill>
+                  <a:srgbClr val="374151"/>
+                </a:solidFill>
+                <a:latin typeface="Arial" pitchFamily="34" charset="0"/>
+                <a:ea typeface="Arial" pitchFamily="34" charset="-122"/>
+                <a:cs typeface="Arial" pitchFamily="34" charset="-120"/>
+              </a:rPr>
+              <a:t>Skill     </a:t>
+            </a:r>
+            <a:pPr indent="0" marL="0">
+              <a:buNone/>
+            </a:pPr>
+            <a:r>
+              <a:rPr lang="en-US" sz="1400" b="1" dirty="0">
+                <a:solidFill>
+                  <a:srgbClr val="1B4D89"/>
+                </a:solidFill>
+                <a:latin typeface="Arial" pitchFamily="34" charset="0"/>
+                <a:ea typeface="Arial" pitchFamily="34" charset="-122"/>
+                <a:cs typeface="Arial" pitchFamily="34" charset="-120"/>
+              </a:rPr>
+              <a:t>14  </a:t>
+            </a:r>
+            <a:pPr indent="0" marL="0">
+              <a:buNone/>
+            </a:pPr>
+            <a:r>
+              <a:rPr lang="en-US" sz="1400" dirty="0">
+                <a:solidFill>
+                  <a:srgbClr val="374151"/>
+                </a:solidFill>
+                <a:latin typeface="Arial" pitchFamily="34" charset="0"/>
+                <a:ea typeface="Arial" pitchFamily="34" charset="-122"/>
+                <a:cs typeface="Arial" pitchFamily="34" charset="-120"/>
+              </a:rPr>
+              <a:t>Automazioni e agenti     </a:t>
+            </a:r>
+            <a:pPr indent="0" marL="0">
+              <a:buNone/>
+            </a:pPr>
+            <a:r>
+              <a:rPr lang="en-US" sz="1400" b="1" dirty="0">
+                <a:solidFill>
+                  <a:srgbClr val="1B4D89"/>
+                </a:solidFill>
+                <a:latin typeface="Arial" pitchFamily="34" charset="0"/>
+                <a:ea typeface="Arial" pitchFamily="34" charset="-122"/>
+                <a:cs typeface="Arial" pitchFamily="34" charset="-120"/>
+              </a:rPr>
+              <a:t>15  </a:t>
+            </a:r>
+            <a:pPr indent="0" marL="0">
+              <a:buNone/>
+            </a:pPr>
+            <a:r>
+              <a:rPr lang="en-US" sz="1400" dirty="0">
+                <a:solidFill>
+                  <a:srgbClr val="374151"/>
+                </a:solidFill>
+                <a:latin typeface="Arial" pitchFamily="34" charset="0"/>
+                <a:ea typeface="Arial" pitchFamily="34" charset="-122"/>
+                <a:cs typeface="Arial" pitchFamily="34" charset="-120"/>
+              </a:rPr>
+              <a:t>Vibe coding: basi</a:t>
+            </a:r>
+            <a:endParaRPr lang="en-US" sz="1400" dirty="0"/>
+          </a:p>
+        </p:txBody>
+      </p:sp>
+      <p:sp>
+        <p:nvSpPr>
+          <p:cNvPr id="16" name="Sezione Strumenti e verifica"/>
           <p:cNvSpPr/>
           <p:nvPr/>
         </p:nvSpPr>
         <p:spPr>
           <a:xfrm>
-            <a:off x="5989320" y="4971288"/>
-            <a:ext cx="256032" cy="256032"/>
-          </a:xfrm>
-          <a:prstGeom prst="ellipse">
-            <a:avLst/>
+            <a:off x="685800" y="5395461"/>
+            <a:ext cx="10820095" cy="685299"/>
+          </a:xfrm>
+          <a:prstGeom prst="roundRect">
+            <a:avLst>
+              <a:gd name="adj" fmla="val 16012"/>
+            </a:avLst>
           </a:prstGeom>
           <a:solidFill>
-            <a:srgbClr val="1B4D89"/>
+            <a:srgbClr val="F6F8FB"/>
           </a:solidFill>
-          <a:ln w="25400">
+          <a:ln w="12700">
             <a:solidFill>
-              <a:srgbClr val="FFFFFF"/>
+              <a:srgbClr val="E4E8EE"/>
             </a:solidFill>
             <a:prstDash val="solid"/>
           </a:ln>
@@ -7805,24 +9269,41 @@
       </p:sp>
       <p:sp>
         <p:nvSpPr>
-          <p:cNvPr id="27" name="Quando Poi"/>
+          <p:cNvPr id="17" name="Nome Strumenti e verifica"/>
           <p:cNvSpPr txBox="1"/>
           <p:nvPr/>
         </p:nvSpPr>
         <p:spPr>
           <a:xfrm>
-            <a:off x="6492240" y="4907280"/>
-            <a:ext cx="5013655" cy="329184"/>
-          </a:xfrm>
-          <a:prstGeom prst="rect">
-            <a:avLst/>
-          </a:prstGeom>
-          <a:noFill/>
-          <a:ln/>
-        </p:spPr>
-        <p:txBody>
-          <a:bodyPr wrap="square" lIns="0" tIns="0" rIns="0" bIns="0" rtlCol="0" anchor="t"/>
-          <a:lstStyle/>
+            <a:off x="941832" y="5395461"/>
+            <a:ext cx="2788920" cy="685299"/>
+          </a:xfrm>
+          <a:prstGeom prst="rect">
+            <a:avLst/>
+          </a:prstGeom>
+          <a:noFill/>
+          <a:ln/>
+        </p:spPr>
+        <p:txBody>
+          <a:bodyPr wrap="square" lIns="0" tIns="0" rIns="0" bIns="0" rtlCol="0" anchor="ctr"/>
+          <a:lstStyle/>
+          <a:p>
+            <a:pPr indent="0" marL="0">
+              <a:buNone/>
+            </a:pPr>
+            <a:r>
+              <a:rPr lang="en-US" sz="1100" b="1" spc="200" kern="0" dirty="0">
+                <a:solidFill>
+                  <a:srgbClr val="1B4D89"/>
+                </a:solidFill>
+                <a:latin typeface="Arial" pitchFamily="34" charset="0"/>
+                <a:ea typeface="Arial" pitchFamily="34" charset="-122"/>
+                <a:cs typeface="Arial" pitchFamily="34" charset="-120"/>
+              </a:rPr>
+              <a:t>SEZIONE E</a:t>
+            </a:r>
+            <a:endParaRPr lang="en-US" sz="1500" dirty="0"/>
+          </a:p>
           <a:p>
             <a:pPr indent="0" marL="0">
               <a:buNone/>
@@ -7830,44 +9311,58 @@
             <a:r>
               <a:rPr lang="en-US" sz="1600" b="1" dirty="0">
                 <a:solidFill>
-                  <a:schemeClr val="accent1"/>
-                </a:solidFill>
-                <a:latin typeface="Arial" pitchFamily="34" charset="0"/>
-                <a:ea typeface="Arial" pitchFamily="34" charset="-122"/>
-                <a:cs typeface="Arial" pitchFamily="34" charset="-120"/>
-              </a:rPr>
-              <a:t>Poi</a:t>
-            </a:r>
-            <a:endParaRPr lang="en-US" sz="1600" dirty="0"/>
-          </a:p>
-        </p:txBody>
-      </p:sp>
-      <p:sp>
-        <p:nvSpPr>
-          <p:cNvPr id="28" name="Cosa Poi"/>
+                  <a:schemeClr val="tx1"/>
+                </a:solidFill>
+                <a:latin typeface="Arial" pitchFamily="34" charset="0"/>
+                <a:ea typeface="Arial" pitchFamily="34" charset="-122"/>
+                <a:cs typeface="Arial" pitchFamily="34" charset="-120"/>
+              </a:rPr>
+              <a:t>Strumenti e verifica</a:t>
+            </a:r>
+            <a:endParaRPr lang="en-US" sz="1500" dirty="0"/>
+          </a:p>
+        </p:txBody>
+      </p:sp>
+      <p:sp>
+        <p:nvSpPr>
+          <p:cNvPr id="18" name="Capitoli Strumenti e verifica"/>
           <p:cNvSpPr txBox="1"/>
           <p:nvPr/>
         </p:nvSpPr>
         <p:spPr>
           <a:xfrm>
-            <a:off x="6492240" y="5254752"/>
-            <a:ext cx="5013655" cy="789432"/>
-          </a:xfrm>
-          <a:prstGeom prst="rect">
-            <a:avLst/>
-          </a:prstGeom>
-          <a:noFill/>
-          <a:ln/>
-        </p:spPr>
-        <p:txBody>
-          <a:bodyPr wrap="square" lIns="0" tIns="0" rIns="0" bIns="0" rtlCol="0" anchor="t"/>
-          <a:lstStyle/>
-          <a:p>
-            <a:pPr indent="0" marL="0">
-              <a:buNone/>
-            </a:pPr>
-            <a:r>
-              <a:rPr lang="en-US" sz="1500" dirty="0">
+            <a:off x="3931920" y="5395461"/>
+            <a:ext cx="7299655" cy="685299"/>
+          </a:xfrm>
+          <a:prstGeom prst="rect">
+            <a:avLst/>
+          </a:prstGeom>
+          <a:noFill/>
+          <a:ln/>
+        </p:spPr>
+        <p:txBody>
+          <a:bodyPr wrap="square" lIns="0" tIns="0" rIns="0" bIns="0" rtlCol="0" anchor="ctr"/>
+          <a:lstStyle/>
+          <a:p>
+            <a:pPr indent="0" marL="0">
+              <a:buNone/>
+            </a:pPr>
+            <a:r>
+              <a:rPr lang="en-US" sz="1400" b="1" dirty="0">
+                <a:solidFill>
+                  <a:srgbClr val="1B4D89"/>
+                </a:solidFill>
+                <a:latin typeface="Arial" pitchFamily="34" charset="0"/>
+                <a:ea typeface="Arial" pitchFamily="34" charset="-122"/>
+                <a:cs typeface="Arial" pitchFamily="34" charset="-120"/>
+              </a:rPr>
+              <a:t>16  </a:t>
+            </a:r>
+            <a:pPr indent="0" marL="0">
+              <a:buNone/>
+            </a:pPr>
+            <a:r>
+              <a:rPr lang="en-US" sz="1400" dirty="0">
                 <a:solidFill>
                   <a:srgbClr val="374151"/>
                 </a:solidFill>
@@ -7875,9 +9370,121 @@
                 <a:ea typeface="Arial" pitchFamily="34" charset="-122"/>
                 <a:cs typeface="Arial" pitchFamily="34" charset="-120"/>
               </a:rPr>
-              <a:t>Collega i primi strumenti con la sezione D: connettori e skill, con accessi minimi. Ripasso ogni 6 mesi.</a:t>
-            </a:r>
-            <a:endParaRPr lang="en-US" sz="1500" dirty="0"/>
+              <a:t>Tech stack AI     </a:t>
+            </a:r>
+            <a:pPr indent="0" marL="0">
+              <a:buNone/>
+            </a:pPr>
+            <a:r>
+              <a:rPr lang="en-US" sz="1400" b="1" dirty="0">
+                <a:solidFill>
+                  <a:srgbClr val="1B4D89"/>
+                </a:solidFill>
+                <a:latin typeface="Arial" pitchFamily="34" charset="0"/>
+                <a:ea typeface="Arial" pitchFamily="34" charset="-122"/>
+                <a:cs typeface="Arial" pitchFamily="34" charset="-120"/>
+              </a:rPr>
+              <a:t>17  </a:t>
+            </a:r>
+            <a:pPr indent="0" marL="0">
+              <a:buNone/>
+            </a:pPr>
+            <a:r>
+              <a:rPr lang="en-US" sz="1400" dirty="0">
+                <a:solidFill>
+                  <a:srgbClr val="374151"/>
+                </a:solidFill>
+                <a:latin typeface="Arial" pitchFamily="34" charset="0"/>
+                <a:ea typeface="Arial" pitchFamily="34" charset="-122"/>
+                <a:cs typeface="Arial" pitchFamily="34" charset="-120"/>
+              </a:rPr>
+              <a:t>Checklist     </a:t>
+            </a:r>
+            <a:pPr indent="0" marL="0">
+              <a:buNone/>
+            </a:pPr>
+            <a:r>
+              <a:rPr lang="en-US" sz="1400" b="1" dirty="0">
+                <a:solidFill>
+                  <a:srgbClr val="1B4D89"/>
+                </a:solidFill>
+                <a:latin typeface="Arial" pitchFamily="34" charset="0"/>
+                <a:ea typeface="Arial" pitchFamily="34" charset="-122"/>
+                <a:cs typeface="Arial" pitchFamily="34" charset="-120"/>
+              </a:rPr>
+              <a:t>18  </a:t>
+            </a:r>
+            <a:pPr indent="0" marL="0">
+              <a:buNone/>
+            </a:pPr>
+            <a:r>
+              <a:rPr lang="en-US" sz="1400" dirty="0">
+                <a:solidFill>
+                  <a:srgbClr val="374151"/>
+                </a:solidFill>
+                <a:latin typeface="Arial" pitchFamily="34" charset="0"/>
+                <a:ea typeface="Arial" pitchFamily="34" charset="-122"/>
+                <a:cs typeface="Arial" pitchFamily="34" charset="-120"/>
+              </a:rPr>
+              <a:t>Test     </a:t>
+            </a:r>
+            <a:pPr indent="0" marL="0">
+              <a:buNone/>
+            </a:pPr>
+            <a:r>
+              <a:rPr lang="en-US" sz="1400" b="1" dirty="0">
+                <a:solidFill>
+                  <a:srgbClr val="1B4D89"/>
+                </a:solidFill>
+                <a:latin typeface="Arial" pitchFamily="34" charset="0"/>
+                <a:ea typeface="Arial" pitchFamily="34" charset="-122"/>
+                <a:cs typeface="Arial" pitchFamily="34" charset="-120"/>
+              </a:rPr>
+              <a:t>19  </a:t>
+            </a:r>
+            <a:pPr indent="0" marL="0">
+              <a:buNone/>
+            </a:pPr>
+            <a:r>
+              <a:rPr lang="en-US" sz="1400" dirty="0">
+                <a:solidFill>
+                  <a:srgbClr val="374151"/>
+                </a:solidFill>
+                <a:latin typeface="Arial" pitchFamily="34" charset="0"/>
+                <a:ea typeface="Arial" pitchFamily="34" charset="-122"/>
+                <a:cs typeface="Arial" pitchFamily="34" charset="-120"/>
+              </a:rPr>
+              <a:t>Glossario     </a:t>
+            </a:r>
+            <a:pPr indent="0" marL="0">
+              <a:buNone/>
+            </a:pPr>
+            <a:r>
+              <a:rPr lang="en-US" sz="1400" b="1" dirty="0">
+                <a:solidFill>
+                  <a:srgbClr val="1B4D89"/>
+                </a:solidFill>
+                <a:latin typeface="Arial" pitchFamily="34" charset="0"/>
+                <a:ea typeface="Arial" pitchFamily="34" charset="-122"/>
+                <a:cs typeface="Arial" pitchFamily="34" charset="-120"/>
+              </a:rPr>
+              <a:t>20  </a:t>
+            </a:r>
+            <a:pPr indent="0" marL="0">
+              <a:buNone/>
+            </a:pPr>
+            <a:r>
+              <a:rPr lang="en-US" sz="1400" dirty="0">
+                <a:solidFill>
+                  <a:srgbClr val="374151"/>
+                </a:solidFill>
+                <a:latin typeface="Arial" pitchFamily="34" charset="0"/>
+                <a:ea typeface="Arial" pitchFamily="34" charset="-122"/>
+                <a:cs typeface="Arial" pitchFamily="34" charset="-120"/>
+              </a:rPr>
+              <a:t>Fonti</a:t>
+            </a:r>
+            <a:endParaRPr lang="en-US" sz="1400" dirty="0"/>
           </a:p>
         </p:txBody>
       </p:sp>
@@ -7964,7 +9571,7 @@
         </p:nvSpPr>
         <p:spPr>
           <a:xfrm>
-            <a:off x="685800" y="685800"/>
+            <a:off x="685800" y="502920"/>
             <a:ext cx="10820095" cy="274320"/>
           </a:xfrm>
           <a:prstGeom prst="rect">
@@ -7989,7 +9596,7 @@
                 <a:ea typeface="Arial" pitchFamily="34" charset="-122"/>
                 <a:cs typeface="Arial" pitchFamily="34" charset="-120"/>
               </a:rPr>
-              <a:t>PER CHIUDERE</a:t>
+              <a:t>ADESSO, INSIEME</a:t>
             </a:r>
             <a:endParaRPr lang="en-US" sz="1200" dirty="0"/>
           </a:p>
@@ -7997,14 +9604,16 @@
       </p:sp>
       <p:sp>
         <p:nvSpPr>
-          <p:cNvPr id="3" name="Domande"/>
-          <p:cNvSpPr txBox="1"/>
-          <p:nvPr/>
-        </p:nvSpPr>
-        <p:spPr>
-          <a:xfrm>
-            <a:off x="685800" y="1051560"/>
-            <a:ext cx="10820095" cy="914400"/>
+          <p:cNvPr id="3" name="Text 0"/>
+          <p:cNvSpPr/>
+          <p:nvPr>
+            <p:ph idx="101" type="title" hasCustomPrompt="1"/>
+          </p:nvPr>
+        </p:nvSpPr>
+        <p:spPr>
+          <a:xfrm>
+            <a:off x="685800" y="804672"/>
+            <a:ext cx="10820095" cy="822960"/>
           </a:xfrm>
           <a:prstGeom prst="rect">
             <a:avLst/>
@@ -8016,66 +9625,54 @@
           <a:bodyPr wrap="square" lIns="0" tIns="0" rIns="0" bIns="0" rtlCol="0" anchor="t"/>
           <a:lstStyle/>
           <a:p>
-            <a:pPr indent="0" marL="0">
-              <a:buNone/>
-            </a:pPr>
-            <a:r>
-              <a:rPr lang="en-US" sz="5400" b="1" dirty="0">
-                <a:solidFill>
-                  <a:schemeClr val="accent1"/>
+            <a:pPr algn="l" indent="0" marL="0">
+              <a:buNone/>
+            </a:pPr>
+            <a:r>
+              <a:rPr lang="en-US" sz="3400" b="1" dirty="0">
+                <a:solidFill>
+                  <a:schemeClr val="tx1"/>
                 </a:solidFill>
                 <a:latin typeface="Georgia" pitchFamily="34" charset="0"/>
                 <a:ea typeface="Georgia" pitchFamily="34" charset="-122"/>
                 <a:cs typeface="Georgia" pitchFamily="34" charset="-120"/>
               </a:rPr>
-              <a:t>Domande?</a:t>
-            </a:r>
-            <a:endParaRPr lang="en-US" sz="5400" dirty="0"/>
-          </a:p>
-        </p:txBody>
-      </p:sp>
-      <p:sp>
-        <p:nvSpPr>
-          <p:cNvPr id="4" name="Da portare a casa"/>
-          <p:cNvSpPr txBox="1"/>
-          <p:nvPr/>
-        </p:nvSpPr>
-        <p:spPr>
-          <a:xfrm>
-            <a:off x="685800" y="2286000"/>
-            <a:ext cx="10820095" cy="274320"/>
-          </a:xfrm>
-          <a:prstGeom prst="rect">
-            <a:avLst/>
-          </a:prstGeom>
-          <a:noFill/>
-          <a:ln/>
-        </p:spPr>
-        <p:txBody>
-          <a:bodyPr wrap="square" lIns="0" tIns="0" rIns="0" bIns="0" rtlCol="0" anchor="t"/>
-          <a:lstStyle/>
-          <a:p>
-            <a:pPr indent="0" marL="0">
-              <a:buNone/>
-            </a:pPr>
-            <a:r>
-              <a:rPr lang="en-US" sz="1200" b="1" spc="200" kern="0" dirty="0">
-                <a:solidFill>
-                  <a:srgbClr val="374151"/>
-                </a:solidFill>
-                <a:latin typeface="Arial" pitchFamily="34" charset="0"/>
-                <a:ea typeface="Arial" pitchFamily="34" charset="-122"/>
-                <a:cs typeface="Arial" pitchFamily="34" charset="-120"/>
-              </a:rPr>
-              <a:t>DA PORTARE A CASA</a:t>
-            </a:r>
-            <a:endParaRPr lang="en-US" sz="1200" dirty="0"/>
-          </a:p>
-        </p:txBody>
+              <a:t>Tre cose da fare in 10 minuti</a:t>
+            </a:r>
+            <a:endParaRPr lang="en-US" sz="3400" dirty="0"/>
+          </a:p>
+        </p:txBody>
+      </p:sp>
+      <p:sp>
+        <p:nvSpPr>
+          <p:cNvPr id="4" name="Tempo"/>
+          <p:cNvSpPr/>
+          <p:nvPr/>
+        </p:nvSpPr>
+        <p:spPr>
+          <a:xfrm>
+            <a:off x="9905695" y="868680"/>
+            <a:ext cx="1600200" cy="457200"/>
+          </a:xfrm>
+          <a:prstGeom prst="roundRect">
+            <a:avLst>
+              <a:gd name="adj" fmla="val 50000"/>
+            </a:avLst>
+          </a:prstGeom>
+          <a:solidFill>
+            <a:srgbClr val="ECFDF3"/>
+          </a:solidFill>
+          <a:ln w="12700">
+            <a:solidFill>
+              <a:srgbClr val="ECFDF3"/>
+            </a:solidFill>
+            <a:prstDash val="solid"/>
+          </a:ln>
+        </p:spPr>
       </p:sp>
       <p:pic>
         <p:nvPicPr>
-          <p:cNvPr id="5" name="Spunta 0" descr="preencoded.png">    </p:cNvPr>
+          <p:cNvPr id="5" name="Tempo icona" descr="preencoded.png">    </p:cNvPr>
           <p:cNvPicPr>
             <a:picLocks noChangeAspect="1"/>
           </p:cNvPicPr>
@@ -8089,8 +9686,8 @@
         </p:blipFill>
         <p:spPr>
           <a:xfrm>
-            <a:off x="685800" y="2761488"/>
-            <a:ext cx="329184" cy="329184"/>
+            <a:off x="10088575" y="978408"/>
+            <a:ext cx="237744" cy="237744"/>
           </a:xfrm>
           <a:prstGeom prst="rect">
             <a:avLst/>
@@ -8099,14 +9696,14 @@
       </p:pic>
       <p:sp>
         <p:nvSpPr>
-          <p:cNvPr id="6" name="Punto 0"/>
+          <p:cNvPr id="6" name="Tempo testo"/>
           <p:cNvSpPr txBox="1"/>
           <p:nvPr/>
         </p:nvSpPr>
         <p:spPr>
           <a:xfrm>
-            <a:off x="1234440" y="2697480"/>
-            <a:ext cx="10271455" cy="457200"/>
+            <a:off x="10362895" y="868680"/>
+            <a:ext cx="1051560" cy="457200"/>
           </a:xfrm>
           <a:prstGeom prst="rect">
             <a:avLst/>
@@ -8122,23 +9719,141 @@
               <a:buNone/>
             </a:pPr>
             <a:r>
-              <a:rPr lang="en-US" sz="2100" dirty="0">
-                <a:solidFill>
-                  <a:schemeClr val="tx1"/>
-                </a:solidFill>
-                <a:latin typeface="Arial" pitchFamily="34" charset="0"/>
-                <a:ea typeface="Arial" pitchFamily="34" charset="-122"/>
-                <a:cs typeface="Arial" pitchFamily="34" charset="-120"/>
-              </a:rPr>
-              <a:t>Dati giusti nello strumento giusto. Segreto mai, in nessuna AI</a:t>
-            </a:r>
-            <a:endParaRPr lang="en-US" sz="2100" dirty="0"/>
-          </a:p>
-        </p:txBody>
+              <a:rPr lang="en-US" sz="1400" b="1" dirty="0">
+                <a:solidFill>
+                  <a:schemeClr val="accent3"/>
+                </a:solidFill>
+                <a:latin typeface="Arial" pitchFamily="34" charset="0"/>
+                <a:ea typeface="Arial" pitchFamily="34" charset="-122"/>
+                <a:cs typeface="Arial" pitchFamily="34" charset="-120"/>
+              </a:rPr>
+              <a:t>10 minuti</a:t>
+            </a:r>
+            <a:endParaRPr lang="en-US" sz="1400" dirty="0"/>
+          </a:p>
+        </p:txBody>
+      </p:sp>
+      <p:sp>
+        <p:nvSpPr>
+          <p:cNvPr id="7" name="Azione 1"/>
+          <p:cNvSpPr/>
+          <p:nvPr/>
+        </p:nvSpPr>
+        <p:spPr>
+          <a:xfrm>
+            <a:off x="685800" y="1828800"/>
+            <a:ext cx="10820095" cy="1188720"/>
+          </a:xfrm>
+          <a:prstGeom prst="roundRect">
+            <a:avLst>
+              <a:gd name="adj" fmla="val 10769"/>
+            </a:avLst>
+          </a:prstGeom>
+          <a:solidFill>
+            <a:srgbClr val="F6F8FB"/>
+          </a:solidFill>
+          <a:ln w="12700">
+            <a:solidFill>
+              <a:srgbClr val="E4E8EE"/>
+            </a:solidFill>
+            <a:prstDash val="solid"/>
+          </a:ln>
+        </p:spPr>
+      </p:sp>
+      <p:sp>
+        <p:nvSpPr>
+          <p:cNvPr id="8" name="numero 1"/>
+          <p:cNvSpPr/>
+          <p:nvPr/>
+        </p:nvSpPr>
+        <p:spPr>
+          <a:xfrm>
+            <a:off x="960120" y="2167128"/>
+            <a:ext cx="512064" cy="512064"/>
+          </a:xfrm>
+          <a:prstGeom prst="ellipse">
+            <a:avLst/>
+          </a:prstGeom>
+          <a:solidFill>
+            <a:srgbClr val="1B4D89"/>
+          </a:solidFill>
+          <a:ln w="12700">
+            <a:solidFill>
+              <a:srgbClr val="1B4D89"/>
+            </a:solidFill>
+            <a:prstDash val="solid"/>
+          </a:ln>
+        </p:spPr>
+      </p:sp>
+      <p:sp>
+        <p:nvSpPr>
+          <p:cNvPr id="9" name="numero testo 1"/>
+          <p:cNvSpPr txBox="1"/>
+          <p:nvPr/>
+        </p:nvSpPr>
+        <p:spPr>
+          <a:xfrm>
+            <a:off x="960120" y="2167128"/>
+            <a:ext cx="512064" cy="512064"/>
+          </a:xfrm>
+          <a:prstGeom prst="rect">
+            <a:avLst/>
+          </a:prstGeom>
+          <a:noFill/>
+          <a:ln/>
+        </p:spPr>
+        <p:txBody>
+          <a:bodyPr wrap="square" lIns="0" tIns="0" rIns="0" bIns="0" rtlCol="0" anchor="ctr"/>
+          <a:lstStyle/>
+          <a:p>
+            <a:pPr algn="ctr" indent="0" marL="0">
+              <a:buNone/>
+            </a:pPr>
+            <a:r>
+              <a:rPr lang="en-US" sz="1800" b="1" dirty="0">
+                <a:solidFill>
+                  <a:schemeClr val="bg1"/>
+                </a:solidFill>
+                <a:latin typeface="Arial" pitchFamily="34" charset="0"/>
+                <a:ea typeface="Arial" pitchFamily="34" charset="-122"/>
+                <a:cs typeface="Arial" pitchFamily="34" charset="-120"/>
+              </a:rPr>
+              <a:t>1</a:t>
+            </a:r>
+            <a:endParaRPr lang="en-US" sz="1800" dirty="0"/>
+          </a:p>
+        </p:txBody>
+      </p:sp>
+      <p:sp>
+        <p:nvSpPr>
+          <p:cNvPr id="10" name="Icona azione 1 fondo"/>
+          <p:cNvSpPr/>
+          <p:nvPr/>
+        </p:nvSpPr>
+        <p:spPr>
+          <a:xfrm>
+            <a:off x="1691640" y="2103120"/>
+            <a:ext cx="640080" cy="640080"/>
+          </a:xfrm>
+          <a:prstGeom prst="roundRect">
+            <a:avLst>
+              <a:gd name="adj" fmla="val 20000"/>
+            </a:avLst>
+          </a:prstGeom>
+          <a:solidFill>
+            <a:srgbClr val="EAF2FC"/>
+          </a:solidFill>
+          <a:ln w="12700">
+            <a:solidFill>
+              <a:srgbClr val="EAF2FC"/>
+            </a:solidFill>
+            <a:prstDash val="solid"/>
+          </a:ln>
+        </p:spPr>
       </p:sp>
       <p:pic>
         <p:nvPicPr>
-          <p:cNvPr id="7" name="Spunta 1" descr="preencoded.png">    </p:cNvPr>
+          <p:cNvPr id="11" name="Icona azione 1" descr="preencoded.png">    </p:cNvPr>
           <p:cNvPicPr>
             <a:picLocks noChangeAspect="1"/>
           </p:cNvPicPr>
@@ -8152,8 +9867,8 @@
         </p:blipFill>
         <p:spPr>
           <a:xfrm>
-            <a:off x="685800" y="3419856"/>
-            <a:ext cx="329184" cy="329184"/>
+            <a:off x="1845259" y="2256739"/>
+            <a:ext cx="332842" cy="332842"/>
           </a:xfrm>
           <a:prstGeom prst="rect">
             <a:avLst/>
@@ -8162,14 +9877,144 @@
       </p:pic>
       <p:sp>
         <p:nvSpPr>
-          <p:cNvPr id="8" name="Punto 1"/>
+          <p:cNvPr id="12" name="Azione titolo 1"/>
           <p:cNvSpPr txBox="1"/>
           <p:nvPr/>
         </p:nvSpPr>
         <p:spPr>
           <a:xfrm>
-            <a:off x="1234440" y="3355848"/>
-            <a:ext cx="10271455" cy="457200"/>
+            <a:off x="2560320" y="2011680"/>
+            <a:ext cx="8625535" cy="411480"/>
+          </a:xfrm>
+          <a:prstGeom prst="rect">
+            <a:avLst/>
+          </a:prstGeom>
+          <a:noFill/>
+          <a:ln/>
+        </p:spPr>
+        <p:txBody>
+          <a:bodyPr wrap="square" lIns="0" tIns="0" rIns="0" bIns="0" rtlCol="0" anchor="t"/>
+          <a:lstStyle/>
+          <a:p>
+            <a:pPr indent="0" marL="0">
+              <a:buNone/>
+            </a:pPr>
+            <a:r>
+              <a:rPr lang="en-US" sz="2000" b="1" dirty="0">
+                <a:solidFill>
+                  <a:schemeClr val="tx1"/>
+                </a:solidFill>
+                <a:latin typeface="Arial" pitchFamily="34" charset="0"/>
+                <a:ea typeface="Arial" pitchFamily="34" charset="-122"/>
+                <a:cs typeface="Arial" pitchFamily="34" charset="-120"/>
+              </a:rPr>
+              <a:t>Spegni l’addestramento sulle tue chat</a:t>
+            </a:r>
+            <a:endParaRPr lang="en-US" sz="2000" dirty="0"/>
+          </a:p>
+        </p:txBody>
+      </p:sp>
+      <p:sp>
+        <p:nvSpPr>
+          <p:cNvPr id="13" name="Azione testo 1"/>
+          <p:cNvSpPr txBox="1"/>
+          <p:nvPr/>
+        </p:nvSpPr>
+        <p:spPr>
+          <a:xfrm>
+            <a:off x="2560320" y="2450592"/>
+            <a:ext cx="8625535" cy="457200"/>
+          </a:xfrm>
+          <a:prstGeom prst="rect">
+            <a:avLst/>
+          </a:prstGeom>
+          <a:noFill/>
+          <a:ln/>
+        </p:spPr>
+        <p:txBody>
+          <a:bodyPr wrap="square" lIns="0" tIns="0" rIns="0" bIns="0" rtlCol="0" anchor="t"/>
+          <a:lstStyle/>
+          <a:p>
+            <a:pPr indent="0" marL="0">
+              <a:buNone/>
+            </a:pPr>
+            <a:r>
+              <a:rPr lang="en-US" sz="1500" dirty="0">
+                <a:solidFill>
+                  <a:srgbClr val="374151"/>
+                </a:solidFill>
+                <a:latin typeface="Arial" pitchFamily="34" charset="0"/>
+                <a:ea typeface="Arial" pitchFamily="34" charset="-122"/>
+                <a:cs typeface="Arial" pitchFamily="34" charset="-120"/>
+              </a:rPr>
+              <a:t>Nelle impostazioni privacy dello strumento che usi. I percorsi per 5 strumenti sono nel capitolo 4.</a:t>
+            </a:r>
+            <a:endParaRPr lang="en-US" sz="1500" dirty="0"/>
+          </a:p>
+        </p:txBody>
+      </p:sp>
+      <p:sp>
+        <p:nvSpPr>
+          <p:cNvPr id="14" name="Azione 2"/>
+          <p:cNvSpPr/>
+          <p:nvPr/>
+        </p:nvSpPr>
+        <p:spPr>
+          <a:xfrm>
+            <a:off x="685800" y="3200400"/>
+            <a:ext cx="10820095" cy="1188720"/>
+          </a:xfrm>
+          <a:prstGeom prst="roundRect">
+            <a:avLst>
+              <a:gd name="adj" fmla="val 10769"/>
+            </a:avLst>
+          </a:prstGeom>
+          <a:solidFill>
+            <a:srgbClr val="F6F8FB"/>
+          </a:solidFill>
+          <a:ln w="12700">
+            <a:solidFill>
+              <a:srgbClr val="E4E8EE"/>
+            </a:solidFill>
+            <a:prstDash val="solid"/>
+          </a:ln>
+        </p:spPr>
+      </p:sp>
+      <p:sp>
+        <p:nvSpPr>
+          <p:cNvPr id="15" name="numero 2"/>
+          <p:cNvSpPr/>
+          <p:nvPr/>
+        </p:nvSpPr>
+        <p:spPr>
+          <a:xfrm>
+            <a:off x="960120" y="3538728"/>
+            <a:ext cx="512064" cy="512064"/>
+          </a:xfrm>
+          <a:prstGeom prst="ellipse">
+            <a:avLst/>
+          </a:prstGeom>
+          <a:solidFill>
+            <a:srgbClr val="1B4D89"/>
+          </a:solidFill>
+          <a:ln w="12700">
+            <a:solidFill>
+              <a:srgbClr val="1B4D89"/>
+            </a:solidFill>
+            <a:prstDash val="solid"/>
+          </a:ln>
+        </p:spPr>
+      </p:sp>
+      <p:sp>
+        <p:nvSpPr>
+          <p:cNvPr id="16" name="numero testo 2"/>
+          <p:cNvSpPr txBox="1"/>
+          <p:nvPr/>
+        </p:nvSpPr>
+        <p:spPr>
+          <a:xfrm>
+            <a:off x="960120" y="3538728"/>
+            <a:ext cx="512064" cy="512064"/>
           </a:xfrm>
           <a:prstGeom prst="rect">
             <a:avLst/>
@@ -8181,27 +10026,54 @@
           <a:bodyPr wrap="square" lIns="0" tIns="0" rIns="0" bIns="0" rtlCol="0" anchor="ctr"/>
           <a:lstStyle/>
           <a:p>
-            <a:pPr indent="0" marL="0">
-              <a:buNone/>
-            </a:pPr>
-            <a:r>
-              <a:rPr lang="en-US" sz="2100" dirty="0">
-                <a:solidFill>
-                  <a:schemeClr val="tx1"/>
-                </a:solidFill>
-                <a:latin typeface="Arial" pitchFamily="34" charset="0"/>
-                <a:ea typeface="Arial" pitchFamily="34" charset="-122"/>
-                <a:cs typeface="Arial" pitchFamily="34" charset="-120"/>
-              </a:rPr>
-              <a:t>L’AI prevede, non sa: ricontrolla nomi, date e numeri</a:t>
-            </a:r>
-            <a:endParaRPr lang="en-US" sz="2100" dirty="0"/>
-          </a:p>
-        </p:txBody>
+            <a:pPr algn="ctr" indent="0" marL="0">
+              <a:buNone/>
+            </a:pPr>
+            <a:r>
+              <a:rPr lang="en-US" sz="1800" b="1" dirty="0">
+                <a:solidFill>
+                  <a:schemeClr val="bg1"/>
+                </a:solidFill>
+                <a:latin typeface="Arial" pitchFamily="34" charset="0"/>
+                <a:ea typeface="Arial" pitchFamily="34" charset="-122"/>
+                <a:cs typeface="Arial" pitchFamily="34" charset="-120"/>
+              </a:rPr>
+              <a:t>2</a:t>
+            </a:r>
+            <a:endParaRPr lang="en-US" sz="1800" dirty="0"/>
+          </a:p>
+        </p:txBody>
+      </p:sp>
+      <p:sp>
+        <p:nvSpPr>
+          <p:cNvPr id="17" name="Icona azione 2 fondo"/>
+          <p:cNvSpPr/>
+          <p:nvPr/>
+        </p:nvSpPr>
+        <p:spPr>
+          <a:xfrm>
+            <a:off x="1691640" y="3474720"/>
+            <a:ext cx="640080" cy="640080"/>
+          </a:xfrm>
+          <a:prstGeom prst="roundRect">
+            <a:avLst>
+              <a:gd name="adj" fmla="val 20000"/>
+            </a:avLst>
+          </a:prstGeom>
+          <a:solidFill>
+            <a:srgbClr val="EAF2FC"/>
+          </a:solidFill>
+          <a:ln w="12700">
+            <a:solidFill>
+              <a:srgbClr val="EAF2FC"/>
+            </a:solidFill>
+            <a:prstDash val="solid"/>
+          </a:ln>
+        </p:spPr>
       </p:sp>
       <p:pic>
         <p:nvPicPr>
-          <p:cNvPr id="9" name="Spunta 2" descr="preencoded.png">    </p:cNvPr>
+          <p:cNvPr id="18" name="Icona azione 2" descr="preencoded.png">    </p:cNvPr>
           <p:cNvPicPr>
             <a:picLocks noChangeAspect="1"/>
           </p:cNvPicPr>
@@ -8215,8 +10087,8 @@
         </p:blipFill>
         <p:spPr>
           <a:xfrm>
-            <a:off x="685800" y="4078224"/>
-            <a:ext cx="329184" cy="329184"/>
+            <a:off x="1845259" y="3628339"/>
+            <a:ext cx="332842" cy="332842"/>
           </a:xfrm>
           <a:prstGeom prst="rect">
             <a:avLst/>
@@ -8225,30 +10097,30 @@
       </p:pic>
       <p:sp>
         <p:nvSpPr>
-          <p:cNvPr id="10" name="Punto 2"/>
+          <p:cNvPr id="19" name="Azione titolo 2"/>
           <p:cNvSpPr txBox="1"/>
           <p:nvPr/>
         </p:nvSpPr>
         <p:spPr>
           <a:xfrm>
-            <a:off x="1234440" y="4014216"/>
-            <a:ext cx="10271455" cy="457200"/>
-          </a:xfrm>
-          <a:prstGeom prst="rect">
-            <a:avLst/>
-          </a:prstGeom>
-          <a:noFill/>
-          <a:ln/>
-        </p:spPr>
-        <p:txBody>
-          <a:bodyPr wrap="square" lIns="0" tIns="0" rIns="0" bIns="0" rtlCol="0" anchor="ctr"/>
-          <a:lstStyle/>
-          <a:p>
-            <a:pPr indent="0" marL="0">
-              <a:buNone/>
-            </a:pPr>
-            <a:r>
-              <a:rPr lang="en-US" sz="2100" dirty="0">
+            <a:off x="2560320" y="3383280"/>
+            <a:ext cx="8625535" cy="411480"/>
+          </a:xfrm>
+          <a:prstGeom prst="rect">
+            <a:avLst/>
+          </a:prstGeom>
+          <a:noFill/>
+          <a:ln/>
+        </p:spPr>
+        <p:txBody>
+          <a:bodyPr wrap="square" lIns="0" tIns="0" rIns="0" bIns="0" rtlCol="0" anchor="t"/>
+          <a:lstStyle/>
+          <a:p>
+            <a:pPr indent="0" marL="0">
+              <a:buNone/>
+            </a:pPr>
+            <a:r>
+              <a:rPr lang="en-US" sz="2000" b="1" dirty="0">
                 <a:solidFill>
                   <a:schemeClr val="tx1"/>
                 </a:solidFill>
@@ -8256,42 +10128,172 @@
                 <a:ea typeface="Arial" pitchFamily="34" charset="-122"/>
                 <a:cs typeface="Arial" pitchFamily="34" charset="-120"/>
               </a:rPr>
-              <a:t>Accesso minimo, come a un nuovo collaboratore</a:t>
-            </a:r>
-            <a:endParaRPr lang="en-US" sz="2100" dirty="0"/>
-          </a:p>
-        </p:txBody>
-      </p:sp>
-      <p:sp>
-        <p:nvSpPr>
-          <p:cNvPr id="11" name="Se succede"/>
+              <a:t>Imposta le istruzioni personalizzate</a:t>
+            </a:r>
+            <a:endParaRPr lang="en-US" sz="2000" dirty="0"/>
+          </a:p>
+        </p:txBody>
+      </p:sp>
+      <p:sp>
+        <p:nvSpPr>
+          <p:cNvPr id="20" name="Azione testo 2"/>
+          <p:cNvSpPr txBox="1"/>
+          <p:nvPr/>
+        </p:nvSpPr>
+        <p:spPr>
+          <a:xfrm>
+            <a:off x="2560320" y="3822192"/>
+            <a:ext cx="8625535" cy="457200"/>
+          </a:xfrm>
+          <a:prstGeom prst="rect">
+            <a:avLst/>
+          </a:prstGeom>
+          <a:noFill/>
+          <a:ln/>
+        </p:spPr>
+        <p:txBody>
+          <a:bodyPr wrap="square" lIns="0" tIns="0" rIns="0" bIns="0" rtlCol="0" anchor="t"/>
+          <a:lstStyle/>
+          <a:p>
+            <a:pPr indent="0" marL="0">
+              <a:buNone/>
+            </a:pPr>
+            <a:r>
+              <a:rPr lang="en-US" sz="1500" dirty="0">
+                <a:solidFill>
+                  <a:srgbClr val="374151"/>
+                </a:solidFill>
+                <a:latin typeface="Arial" pitchFamily="34" charset="0"/>
+                <a:ea typeface="Arial" pitchFamily="34" charset="-122"/>
+                <a:cs typeface="Arial" pitchFamily="34" charset="-120"/>
+              </a:rPr>
+              <a:t>Chi sei e come vuoi le risposte: brevi, in italiano, con le fonti. Testo pronto da copiare nel capitolo 8.</a:t>
+            </a:r>
+            <a:endParaRPr lang="en-US" sz="1500" dirty="0"/>
+          </a:p>
+        </p:txBody>
+      </p:sp>
+      <p:sp>
+        <p:nvSpPr>
+          <p:cNvPr id="21" name="Azione 3"/>
           <p:cNvSpPr/>
           <p:nvPr/>
         </p:nvSpPr>
         <p:spPr>
           <a:xfrm>
-            <a:off x="685800" y="4892040"/>
-            <a:ext cx="10820095" cy="960120"/>
+            <a:off x="685800" y="4572000"/>
+            <a:ext cx="10820095" cy="1188720"/>
           </a:xfrm>
           <a:prstGeom prst="roundRect">
             <a:avLst>
-              <a:gd name="adj" fmla="val 13333"/>
+              <a:gd name="adj" fmla="val 10769"/>
             </a:avLst>
           </a:prstGeom>
           <a:solidFill>
-            <a:srgbClr val="FFFFFF"/>
+            <a:srgbClr val="F6F8FB"/>
           </a:solidFill>
           <a:ln w="12700">
             <a:solidFill>
-              <a:srgbClr val="FFFFFF"/>
+              <a:srgbClr val="E4E8EE"/>
             </a:solidFill>
             <a:prstDash val="solid"/>
           </a:ln>
         </p:spPr>
       </p:sp>
+      <p:sp>
+        <p:nvSpPr>
+          <p:cNvPr id="22" name="numero 3"/>
+          <p:cNvSpPr/>
+          <p:nvPr/>
+        </p:nvSpPr>
+        <p:spPr>
+          <a:xfrm>
+            <a:off x="960120" y="4910328"/>
+            <a:ext cx="512064" cy="512064"/>
+          </a:xfrm>
+          <a:prstGeom prst="ellipse">
+            <a:avLst/>
+          </a:prstGeom>
+          <a:solidFill>
+            <a:srgbClr val="1B4D89"/>
+          </a:solidFill>
+          <a:ln w="12700">
+            <a:solidFill>
+              <a:srgbClr val="1B4D89"/>
+            </a:solidFill>
+            <a:prstDash val="solid"/>
+          </a:ln>
+        </p:spPr>
+      </p:sp>
+      <p:sp>
+        <p:nvSpPr>
+          <p:cNvPr id="23" name="numero testo 3"/>
+          <p:cNvSpPr txBox="1"/>
+          <p:nvPr/>
+        </p:nvSpPr>
+        <p:spPr>
+          <a:xfrm>
+            <a:off x="960120" y="4910328"/>
+            <a:ext cx="512064" cy="512064"/>
+          </a:xfrm>
+          <a:prstGeom prst="rect">
+            <a:avLst/>
+          </a:prstGeom>
+          <a:noFill/>
+          <a:ln/>
+        </p:spPr>
+        <p:txBody>
+          <a:bodyPr wrap="square" lIns="0" tIns="0" rIns="0" bIns="0" rtlCol="0" anchor="ctr"/>
+          <a:lstStyle/>
+          <a:p>
+            <a:pPr algn="ctr" indent="0" marL="0">
+              <a:buNone/>
+            </a:pPr>
+            <a:r>
+              <a:rPr lang="en-US" sz="1800" b="1" dirty="0">
+                <a:solidFill>
+                  <a:schemeClr val="bg1"/>
+                </a:solidFill>
+                <a:latin typeface="Arial" pitchFamily="34" charset="0"/>
+                <a:ea typeface="Arial" pitchFamily="34" charset="-122"/>
+                <a:cs typeface="Arial" pitchFamily="34" charset="-120"/>
+              </a:rPr>
+              <a:t>3</a:t>
+            </a:r>
+            <a:endParaRPr lang="en-US" sz="1800" dirty="0"/>
+          </a:p>
+        </p:txBody>
+      </p:sp>
+      <p:sp>
+        <p:nvSpPr>
+          <p:cNvPr id="24" name="Icona azione 3 fondo"/>
+          <p:cNvSpPr/>
+          <p:nvPr/>
+        </p:nvSpPr>
+        <p:spPr>
+          <a:xfrm>
+            <a:off x="1691640" y="4846320"/>
+            <a:ext cx="640080" cy="640080"/>
+          </a:xfrm>
+          <a:prstGeom prst="roundRect">
+            <a:avLst>
+              <a:gd name="adj" fmla="val 20000"/>
+            </a:avLst>
+          </a:prstGeom>
+          <a:solidFill>
+            <a:srgbClr val="EAF2FC"/>
+          </a:solidFill>
+          <a:ln w="12700">
+            <a:solidFill>
+              <a:srgbClr val="EAF2FC"/>
+            </a:solidFill>
+            <a:prstDash val="solid"/>
+          </a:ln>
+        </p:spPr>
+      </p:sp>
       <p:pic>
         <p:nvPicPr>
-          <p:cNvPr id="12" name="Telefono" descr="preencoded.png">    </p:cNvPr>
+          <p:cNvPr id="25" name="Icona azione 3" descr="preencoded.png">    </p:cNvPr>
           <p:cNvPicPr>
             <a:picLocks noChangeAspect="1"/>
           </p:cNvPicPr>
@@ -8305,8 +10307,8 @@
         </p:blipFill>
         <p:spPr>
           <a:xfrm>
-            <a:off x="1005840" y="5166360"/>
-            <a:ext cx="411480" cy="411480"/>
+            <a:off x="1845259" y="4999939"/>
+            <a:ext cx="332842" cy="332842"/>
           </a:xfrm>
           <a:prstGeom prst="rect">
             <a:avLst/>
@@ -8315,44 +10317,30 @@
       </p:pic>
       <p:sp>
         <p:nvSpPr>
-          <p:cNvPr id="13" name="Se succede testo"/>
+          <p:cNvPr id="26" name="Azione titolo 3"/>
           <p:cNvSpPr txBox="1"/>
           <p:nvPr/>
         </p:nvSpPr>
         <p:spPr>
           <a:xfrm>
-            <a:off x="1645920" y="4892040"/>
-            <a:ext cx="9585655" cy="960120"/>
-          </a:xfrm>
-          <a:prstGeom prst="rect">
-            <a:avLst/>
-          </a:prstGeom>
-          <a:noFill/>
-          <a:ln/>
-        </p:spPr>
-        <p:txBody>
-          <a:bodyPr wrap="square" lIns="0" tIns="0" rIns="0" bIns="0" rtlCol="0" anchor="ctr"/>
-          <a:lstStyle/>
-          <a:p>
-            <a:pPr indent="0" marL="0">
-              <a:buNone/>
-            </a:pPr>
-            <a:r>
-              <a:rPr lang="en-US" sz="1800" b="1" dirty="0">
-                <a:solidFill>
-                  <a:srgbClr val="B42318"/>
-                </a:solidFill>
-                <a:latin typeface="Arial" pitchFamily="34" charset="0"/>
-                <a:ea typeface="Arial" pitchFamily="34" charset="-122"/>
-                <a:cs typeface="Arial" pitchFamily="34" charset="-120"/>
-              </a:rPr>
-              <a:t>Hai dato a un’AI un dato che non dovevi? </a:t>
-            </a:r>
-            <a:pPr indent="0" marL="0">
-              <a:buNone/>
-            </a:pPr>
-            <a:r>
-              <a:rPr lang="en-US" sz="1800" dirty="0">
+            <a:off x="2560320" y="4754880"/>
+            <a:ext cx="8625535" cy="411480"/>
+          </a:xfrm>
+          <a:prstGeom prst="rect">
+            <a:avLst/>
+          </a:prstGeom>
+          <a:noFill/>
+          <a:ln/>
+        </p:spPr>
+        <p:txBody>
+          <a:bodyPr wrap="square" lIns="0" tIns="0" rIns="0" bIns="0" rtlCol="0" anchor="t"/>
+          <a:lstStyle/>
+          <a:p>
+            <a:pPr indent="0" marL="0">
+              <a:buNone/>
+            </a:pPr>
+            <a:r>
+              <a:rPr lang="en-US" sz="2000" b="1" dirty="0">
                 <a:solidFill>
                   <a:schemeClr val="tx1"/>
                 </a:solidFill>
@@ -8360,9 +10348,48 @@
                 <a:ea typeface="Arial" pitchFamily="34" charset="-122"/>
                 <a:cs typeface="Arial" pitchFamily="34" charset="-120"/>
               </a:rPr>
-              <a:t>Avvisa subito il referente IT della tua azienda. Prima lo fai, meglio è. Senza vergogna.</a:t>
-            </a:r>
-            <a:endParaRPr lang="en-US" sz="1800" dirty="0"/>
+              <a:t>Prova un prompt pronto per il tuo ruolo</a:t>
+            </a:r>
+            <a:endParaRPr lang="en-US" sz="2000" dirty="0"/>
+          </a:p>
+        </p:txBody>
+      </p:sp>
+      <p:sp>
+        <p:nvSpPr>
+          <p:cNvPr id="27" name="Azione testo 3"/>
+          <p:cNvSpPr txBox="1"/>
+          <p:nvPr/>
+        </p:nvSpPr>
+        <p:spPr>
+          <a:xfrm>
+            <a:off x="2560320" y="5193792"/>
+            <a:ext cx="8625535" cy="457200"/>
+          </a:xfrm>
+          <a:prstGeom prst="rect">
+            <a:avLst/>
+          </a:prstGeom>
+          <a:noFill/>
+          <a:ln/>
+        </p:spPr>
+        <p:txBody>
+          <a:bodyPr wrap="square" lIns="0" tIns="0" rIns="0" bIns="0" rtlCol="0" anchor="t"/>
+          <a:lstStyle/>
+          <a:p>
+            <a:pPr indent="0" marL="0">
+              <a:buNone/>
+            </a:pPr>
+            <a:r>
+              <a:rPr lang="en-US" sz="1500" dirty="0">
+                <a:solidFill>
+                  <a:srgbClr val="374151"/>
+                </a:solidFill>
+                <a:latin typeface="Arial" pitchFamily="34" charset="0"/>
+                <a:ea typeface="Arial" pitchFamily="34" charset="-122"/>
+                <a:cs typeface="Arial" pitchFamily="34" charset="-120"/>
+              </a:rPr>
+              <a:t>Capitolo 9: scegli il tuo ruolo, copia un prompt e provalo su un caso vero, senza dati riservati.</a:t>
+            </a:r>
+            <a:endParaRPr lang="en-US" sz="1500" dirty="0"/>
           </a:p>
         </p:txBody>
       </p:sp>
@@ -8474,6 +10501,1443 @@
                 <a:ea typeface="Arial" pitchFamily="34" charset="-122"/>
                 <a:cs typeface="Arial" pitchFamily="34" charset="-120"/>
               </a:rPr>
+              <a:t>DOPO L’INCONTRO</a:t>
+            </a:r>
+            <a:endParaRPr lang="en-US" sz="1200" dirty="0"/>
+          </a:p>
+        </p:txBody>
+      </p:sp>
+      <p:sp>
+        <p:nvSpPr>
+          <p:cNvPr id="3" name="Text 0"/>
+          <p:cNvSpPr/>
+          <p:nvPr>
+            <p:ph idx="101" type="title" hasCustomPrompt="1"/>
+          </p:nvPr>
+        </p:nvSpPr>
+        <p:spPr>
+          <a:xfrm>
+            <a:off x="685800" y="804672"/>
+            <a:ext cx="10820095" cy="822960"/>
+          </a:xfrm>
+          <a:prstGeom prst="rect">
+            <a:avLst/>
+          </a:prstGeom>
+          <a:noFill/>
+          <a:ln/>
+        </p:spPr>
+        <p:txBody>
+          <a:bodyPr wrap="square" lIns="0" tIns="0" rIns="0" bIns="0" rtlCol="0" anchor="t"/>
+          <a:lstStyle/>
+          <a:p>
+            <a:pPr algn="l" indent="0" marL="0">
+              <a:buNone/>
+            </a:pPr>
+            <a:r>
+              <a:rPr lang="en-US" sz="3400" b="1" dirty="0">
+                <a:solidFill>
+                  <a:schemeClr val="tx1"/>
+                </a:solidFill>
+                <a:latin typeface="Georgia" pitchFamily="34" charset="0"/>
+                <a:ea typeface="Georgia" pitchFamily="34" charset="-122"/>
+                <a:cs typeface="Georgia" pitchFamily="34" charset="-120"/>
+              </a:rPr>
+              <a:t>Il resto lo leggi con calma</a:t>
+            </a:r>
+            <a:endParaRPr lang="en-US" sz="3400" dirty="0"/>
+          </a:p>
+        </p:txBody>
+      </p:sp>
+      <p:sp>
+        <p:nvSpPr>
+          <p:cNvPr id="4" name="Come si usa"/>
+          <p:cNvSpPr/>
+          <p:nvPr/>
+        </p:nvSpPr>
+        <p:spPr>
+          <a:xfrm>
+            <a:off x="685800" y="1828800"/>
+            <a:ext cx="4983480" cy="4206240"/>
+          </a:xfrm>
+          <a:prstGeom prst="roundRect">
+            <a:avLst>
+              <a:gd name="adj" fmla="val 3043"/>
+            </a:avLst>
+          </a:prstGeom>
+          <a:solidFill>
+            <a:srgbClr val="F6F8FB"/>
+          </a:solidFill>
+          <a:ln w="12700">
+            <a:solidFill>
+              <a:srgbClr val="E4E8EE"/>
+            </a:solidFill>
+            <a:prstDash val="solid"/>
+          </a:ln>
+        </p:spPr>
+      </p:sp>
+      <p:sp>
+        <p:nvSpPr>
+          <p:cNvPr id="5" name="Come si usa titolo"/>
+          <p:cNvSpPr txBox="1"/>
+          <p:nvPr/>
+        </p:nvSpPr>
+        <p:spPr>
+          <a:xfrm>
+            <a:off x="1005840" y="2103120"/>
+            <a:ext cx="4343400" cy="274320"/>
+          </a:xfrm>
+          <a:prstGeom prst="rect">
+            <a:avLst/>
+          </a:prstGeom>
+          <a:noFill/>
+          <a:ln/>
+        </p:spPr>
+        <p:txBody>
+          <a:bodyPr wrap="square" lIns="0" tIns="0" rIns="0" bIns="0" rtlCol="0" anchor="t"/>
+          <a:lstStyle/>
+          <a:p>
+            <a:pPr indent="0" marL="0">
+              <a:buNone/>
+            </a:pPr>
+            <a:r>
+              <a:rPr lang="en-US" sz="1200" b="1" spc="200" kern="0" dirty="0">
+                <a:solidFill>
+                  <a:schemeClr val="accent1"/>
+                </a:solidFill>
+                <a:latin typeface="Arial" pitchFamily="34" charset="0"/>
+                <a:ea typeface="Arial" pitchFamily="34" charset="-122"/>
+                <a:cs typeface="Arial" pitchFamily="34" charset="-120"/>
+              </a:rPr>
+              <a:t>COME SI USA IL MATERIALE</a:t>
+            </a:r>
+            <a:endParaRPr lang="en-US" sz="1200" dirty="0"/>
+          </a:p>
+        </p:txBody>
+      </p:sp>
+      <p:sp>
+        <p:nvSpPr>
+          <p:cNvPr id="6" name="Uso 0 fondo"/>
+          <p:cNvSpPr/>
+          <p:nvPr/>
+        </p:nvSpPr>
+        <p:spPr>
+          <a:xfrm>
+            <a:off x="1005840" y="2606040"/>
+            <a:ext cx="502920" cy="502920"/>
+          </a:xfrm>
+          <a:prstGeom prst="roundRect">
+            <a:avLst>
+              <a:gd name="adj" fmla="val 22000"/>
+            </a:avLst>
+          </a:prstGeom>
+          <a:solidFill>
+            <a:srgbClr val="FFFFFF"/>
+          </a:solidFill>
+          <a:ln w="12700">
+            <a:solidFill>
+              <a:srgbClr val="FFFFFF"/>
+            </a:solidFill>
+            <a:prstDash val="solid"/>
+          </a:ln>
+        </p:spPr>
+      </p:sp>
+      <p:pic>
+        <p:nvPicPr>
+          <p:cNvPr id="7" name="Uso 0" descr="preencoded.png">    </p:cNvPr>
+          <p:cNvPicPr>
+            <a:picLocks noChangeAspect="1"/>
+          </p:cNvPicPr>
+          <p:nvPr/>
+        </p:nvPicPr>
+        <p:blipFill>
+          <a:blip r:embed="rId1"/>
+          <a:stretch>
+            <a:fillRect/>
+          </a:stretch>
+        </p:blipFill>
+        <p:spPr>
+          <a:xfrm>
+            <a:off x="1126541" y="2726741"/>
+            <a:ext cx="261518" cy="261518"/>
+          </a:xfrm>
+          <a:prstGeom prst="rect">
+            <a:avLst/>
+          </a:prstGeom>
+        </p:spPr>
+      </p:pic>
+      <p:sp>
+        <p:nvSpPr>
+          <p:cNvPr id="8" name="Uso testo 0"/>
+          <p:cNvSpPr txBox="1"/>
+          <p:nvPr/>
+        </p:nvSpPr>
+        <p:spPr>
+          <a:xfrm>
+            <a:off x="1691640" y="2560320"/>
+            <a:ext cx="3657600" cy="594360"/>
+          </a:xfrm>
+          <a:prstGeom prst="rect">
+            <a:avLst/>
+          </a:prstGeom>
+          <a:noFill/>
+          <a:ln/>
+        </p:spPr>
+        <p:txBody>
+          <a:bodyPr wrap="square" lIns="0" tIns="0" rIns="0" bIns="0" rtlCol="0" anchor="ctr"/>
+          <a:lstStyle/>
+          <a:p>
+            <a:pPr indent="0" marL="0">
+              <a:buNone/>
+            </a:pPr>
+            <a:r>
+              <a:rPr lang="en-US" sz="1500" dirty="0">
+                <a:solidFill>
+                  <a:srgbClr val="374151"/>
+                </a:solidFill>
+                <a:latin typeface="Arial" pitchFamily="34" charset="0"/>
+                <a:ea typeface="Arial" pitchFamily="34" charset="-122"/>
+                <a:cs typeface="Arial" pitchFamily="34" charset="-120"/>
+              </a:rPr>
+              <a:t>Apri il link nel browser, anche dal telefono</a:t>
+            </a:r>
+            <a:endParaRPr lang="en-US" sz="1500" dirty="0"/>
+          </a:p>
+        </p:txBody>
+      </p:sp>
+      <p:sp>
+        <p:nvSpPr>
+          <p:cNvPr id="9" name="Uso 1 fondo"/>
+          <p:cNvSpPr/>
+          <p:nvPr/>
+        </p:nvSpPr>
+        <p:spPr>
+          <a:xfrm>
+            <a:off x="1005840" y="3429000"/>
+            <a:ext cx="502920" cy="502920"/>
+          </a:xfrm>
+          <a:prstGeom prst="roundRect">
+            <a:avLst>
+              <a:gd name="adj" fmla="val 22000"/>
+            </a:avLst>
+          </a:prstGeom>
+          <a:solidFill>
+            <a:srgbClr val="FFFFFF"/>
+          </a:solidFill>
+          <a:ln w="12700">
+            <a:solidFill>
+              <a:srgbClr val="FFFFFF"/>
+            </a:solidFill>
+            <a:prstDash val="solid"/>
+          </a:ln>
+        </p:spPr>
+      </p:sp>
+      <p:pic>
+        <p:nvPicPr>
+          <p:cNvPr id="10" name="Uso 1" descr="preencoded.png">    </p:cNvPr>
+          <p:cNvPicPr>
+            <a:picLocks noChangeAspect="1"/>
+          </p:cNvPicPr>
+          <p:nvPr/>
+        </p:nvPicPr>
+        <p:blipFill>
+          <a:blip r:embed="rId2"/>
+          <a:stretch>
+            <a:fillRect/>
+          </a:stretch>
+        </p:blipFill>
+        <p:spPr>
+          <a:xfrm>
+            <a:off x="1126541" y="3549701"/>
+            <a:ext cx="261518" cy="261518"/>
+          </a:xfrm>
+          <a:prstGeom prst="rect">
+            <a:avLst/>
+          </a:prstGeom>
+        </p:spPr>
+      </p:pic>
+      <p:sp>
+        <p:nvSpPr>
+          <p:cNvPr id="11" name="Uso testo 1"/>
+          <p:cNvSpPr txBox="1"/>
+          <p:nvPr/>
+        </p:nvSpPr>
+        <p:spPr>
+          <a:xfrm>
+            <a:off x="1691640" y="3383280"/>
+            <a:ext cx="3657600" cy="594360"/>
+          </a:xfrm>
+          <a:prstGeom prst="rect">
+            <a:avLst/>
+          </a:prstGeom>
+          <a:noFill/>
+          <a:ln/>
+        </p:spPr>
+        <p:txBody>
+          <a:bodyPr wrap="square" lIns="0" tIns="0" rIns="0" bIns="0" rtlCol="0" anchor="ctr"/>
+          <a:lstStyle/>
+          <a:p>
+            <a:pPr indent="0" marL="0">
+              <a:buNone/>
+            </a:pPr>
+            <a:r>
+              <a:rPr lang="en-US" sz="1500" dirty="0">
+                <a:solidFill>
+                  <a:srgbClr val="374151"/>
+                </a:solidFill>
+                <a:latin typeface="Arial" pitchFamily="34" charset="0"/>
+                <a:ea typeface="Arial" pitchFamily="34" charset="-122"/>
+                <a:cs typeface="Arial" pitchFamily="34" charset="-120"/>
+              </a:rPr>
+              <a:t>Italiano o inglese: interruttore in alto a destra</a:t>
+            </a:r>
+            <a:endParaRPr lang="en-US" sz="1500" dirty="0"/>
+          </a:p>
+        </p:txBody>
+      </p:sp>
+      <p:sp>
+        <p:nvSpPr>
+          <p:cNvPr id="12" name="Uso 2 fondo"/>
+          <p:cNvSpPr/>
+          <p:nvPr/>
+        </p:nvSpPr>
+        <p:spPr>
+          <a:xfrm>
+            <a:off x="1005840" y="4251960"/>
+            <a:ext cx="502920" cy="502920"/>
+          </a:xfrm>
+          <a:prstGeom prst="roundRect">
+            <a:avLst>
+              <a:gd name="adj" fmla="val 22000"/>
+            </a:avLst>
+          </a:prstGeom>
+          <a:solidFill>
+            <a:srgbClr val="FFFFFF"/>
+          </a:solidFill>
+          <a:ln w="12700">
+            <a:solidFill>
+              <a:srgbClr val="FFFFFF"/>
+            </a:solidFill>
+            <a:prstDash val="solid"/>
+          </a:ln>
+        </p:spPr>
+      </p:sp>
+      <p:pic>
+        <p:nvPicPr>
+          <p:cNvPr id="13" name="Uso 2" descr="preencoded.png">    </p:cNvPr>
+          <p:cNvPicPr>
+            <a:picLocks noChangeAspect="1"/>
+          </p:cNvPicPr>
+          <p:nvPr/>
+        </p:nvPicPr>
+        <p:blipFill>
+          <a:blip r:embed="rId3"/>
+          <a:stretch>
+            <a:fillRect/>
+          </a:stretch>
+        </p:blipFill>
+        <p:spPr>
+          <a:xfrm>
+            <a:off x="1126541" y="4372661"/>
+            <a:ext cx="261518" cy="261518"/>
+          </a:xfrm>
+          <a:prstGeom prst="rect">
+            <a:avLst/>
+          </a:prstGeom>
+        </p:spPr>
+      </p:pic>
+      <p:sp>
+        <p:nvSpPr>
+          <p:cNvPr id="14" name="Uso testo 2"/>
+          <p:cNvSpPr txBox="1"/>
+          <p:nvPr/>
+        </p:nvSpPr>
+        <p:spPr>
+          <a:xfrm>
+            <a:off x="1691640" y="4206240"/>
+            <a:ext cx="3657600" cy="594360"/>
+          </a:xfrm>
+          <a:prstGeom prst="rect">
+            <a:avLst/>
+          </a:prstGeom>
+          <a:noFill/>
+          <a:ln/>
+        </p:spPr>
+        <p:txBody>
+          <a:bodyPr wrap="square" lIns="0" tIns="0" rIns="0" bIns="0" rtlCol="0" anchor="ctr"/>
+          <a:lstStyle/>
+          <a:p>
+            <a:pPr indent="0" marL="0">
+              <a:buNone/>
+            </a:pPr>
+            <a:r>
+              <a:rPr lang="en-US" sz="1500" dirty="0">
+                <a:solidFill>
+                  <a:srgbClr val="374151"/>
+                </a:solidFill>
+                <a:latin typeface="Arial" pitchFamily="34" charset="0"/>
+                <a:ea typeface="Arial" pitchFamily="34" charset="-122"/>
+                <a:cs typeface="Arial" pitchFamily="34" charset="-120"/>
+              </a:rPr>
+              <a:t>Capitoli nel menu a sinistra, ognuno con il riassunto in cima</a:t>
+            </a:r>
+            <a:endParaRPr lang="en-US" sz="1500" dirty="0"/>
+          </a:p>
+        </p:txBody>
+      </p:sp>
+      <p:sp>
+        <p:nvSpPr>
+          <p:cNvPr id="15" name="Uso 3 fondo"/>
+          <p:cNvSpPr/>
+          <p:nvPr/>
+        </p:nvSpPr>
+        <p:spPr>
+          <a:xfrm>
+            <a:off x="1005840" y="5074920"/>
+            <a:ext cx="502920" cy="502920"/>
+          </a:xfrm>
+          <a:prstGeom prst="roundRect">
+            <a:avLst>
+              <a:gd name="adj" fmla="val 22000"/>
+            </a:avLst>
+          </a:prstGeom>
+          <a:solidFill>
+            <a:srgbClr val="FFFFFF"/>
+          </a:solidFill>
+          <a:ln w="12700">
+            <a:solidFill>
+              <a:srgbClr val="FFFFFF"/>
+            </a:solidFill>
+            <a:prstDash val="solid"/>
+          </a:ln>
+        </p:spPr>
+      </p:sp>
+      <p:pic>
+        <p:nvPicPr>
+          <p:cNvPr id="16" name="Uso 3" descr="preencoded.png">    </p:cNvPr>
+          <p:cNvPicPr>
+            <a:picLocks noChangeAspect="1"/>
+          </p:cNvPicPr>
+          <p:nvPr/>
+        </p:nvPicPr>
+        <p:blipFill>
+          <a:blip r:embed="rId4"/>
+          <a:stretch>
+            <a:fillRect/>
+          </a:stretch>
+        </p:blipFill>
+        <p:spPr>
+          <a:xfrm>
+            <a:off x="1126541" y="5195621"/>
+            <a:ext cx="261518" cy="261518"/>
+          </a:xfrm>
+          <a:prstGeom prst="rect">
+            <a:avLst/>
+          </a:prstGeom>
+        </p:spPr>
+      </p:pic>
+      <p:sp>
+        <p:nvSpPr>
+          <p:cNvPr id="17" name="Uso testo 3"/>
+          <p:cNvSpPr txBox="1"/>
+          <p:nvPr/>
+        </p:nvSpPr>
+        <p:spPr>
+          <a:xfrm>
+            <a:off x="1691640" y="5029200"/>
+            <a:ext cx="3657600" cy="594360"/>
+          </a:xfrm>
+          <a:prstGeom prst="rect">
+            <a:avLst/>
+          </a:prstGeom>
+          <a:noFill/>
+          <a:ln/>
+        </p:spPr>
+        <p:txBody>
+          <a:bodyPr wrap="square" lIns="0" tIns="0" rIns="0" bIns="0" rtlCol="0" anchor="ctr"/>
+          <a:lstStyle/>
+          <a:p>
+            <a:pPr indent="0" marL="0">
+              <a:buNone/>
+            </a:pPr>
+            <a:r>
+              <a:rPr lang="en-US" sz="1500" dirty="0">
+                <a:solidFill>
+                  <a:srgbClr val="374151"/>
+                </a:solidFill>
+                <a:latin typeface="Arial" pitchFamily="34" charset="0"/>
+                <a:ea typeface="Arial" pitchFamily="34" charset="-122"/>
+                <a:cs typeface="Arial" pitchFamily="34" charset="-120"/>
+              </a:rPr>
+              <a:t>La checklist si salva da sola sul tuo dispositivo</a:t>
+            </a:r>
+            <a:endParaRPr lang="en-US" sz="1500" dirty="0"/>
+          </a:p>
+        </p:txBody>
+      </p:sp>
+      <p:sp>
+        <p:nvSpPr>
+          <p:cNvPr id="18" name="Programma titolo"/>
+          <p:cNvSpPr txBox="1"/>
+          <p:nvPr/>
+        </p:nvSpPr>
+        <p:spPr>
+          <a:xfrm>
+            <a:off x="5989320" y="2103120"/>
+            <a:ext cx="5516575" cy="274320"/>
+          </a:xfrm>
+          <a:prstGeom prst="rect">
+            <a:avLst/>
+          </a:prstGeom>
+          <a:noFill/>
+          <a:ln/>
+        </p:spPr>
+        <p:txBody>
+          <a:bodyPr wrap="square" lIns="0" tIns="0" rIns="0" bIns="0" rtlCol="0" anchor="t"/>
+          <a:lstStyle/>
+          <a:p>
+            <a:pPr indent="0" marL="0">
+              <a:buNone/>
+            </a:pPr>
+            <a:r>
+              <a:rPr lang="en-US" sz="1200" b="1" spc="200" kern="0" dirty="0">
+                <a:solidFill>
+                  <a:schemeClr val="accent1"/>
+                </a:solidFill>
+                <a:latin typeface="Arial" pitchFamily="34" charset="0"/>
+                <a:ea typeface="Arial" pitchFamily="34" charset="-122"/>
+                <a:cs typeface="Arial" pitchFamily="34" charset="-120"/>
+              </a:rPr>
+              <a:t>IL TUO PROGRAMMA</a:t>
+            </a:r>
+            <a:endParaRPr lang="en-US" sz="1200" dirty="0"/>
+          </a:p>
+        </p:txBody>
+      </p:sp>
+      <p:sp>
+        <p:nvSpPr>
+          <p:cNvPr id="19" name="Linea programma"/>
+          <p:cNvSpPr/>
+          <p:nvPr/>
+        </p:nvSpPr>
+        <p:spPr>
+          <a:xfrm>
+            <a:off x="6117336" y="2697480"/>
+            <a:ext cx="0" cy="2346960"/>
+          </a:xfrm>
+          <a:prstGeom prst="line">
+            <a:avLst/>
+          </a:prstGeom>
+          <a:noFill/>
+          <a:ln w="25400">
+            <a:solidFill>
+              <a:srgbClr val="E4E8EE"/>
+            </a:solidFill>
+            <a:prstDash val="solid"/>
+          </a:ln>
+        </p:spPr>
+      </p:sp>
+      <p:sp>
+        <p:nvSpPr>
+          <p:cNvPr id="20" name="Punto Entro una settimana"/>
+          <p:cNvSpPr/>
+          <p:nvPr/>
+        </p:nvSpPr>
+        <p:spPr>
+          <a:xfrm>
+            <a:off x="5989320" y="2624328"/>
+            <a:ext cx="256032" cy="256032"/>
+          </a:xfrm>
+          <a:prstGeom prst="ellipse">
+            <a:avLst/>
+          </a:prstGeom>
+          <a:solidFill>
+            <a:srgbClr val="1B4D89"/>
+          </a:solidFill>
+          <a:ln w="25400">
+            <a:solidFill>
+              <a:srgbClr val="FFFFFF"/>
+            </a:solidFill>
+            <a:prstDash val="solid"/>
+          </a:ln>
+        </p:spPr>
+      </p:sp>
+      <p:sp>
+        <p:nvSpPr>
+          <p:cNvPr id="21" name="Quando Entro una settimana"/>
+          <p:cNvSpPr txBox="1"/>
+          <p:nvPr/>
+        </p:nvSpPr>
+        <p:spPr>
+          <a:xfrm>
+            <a:off x="6492240" y="2560320"/>
+            <a:ext cx="5013655" cy="329184"/>
+          </a:xfrm>
+          <a:prstGeom prst="rect">
+            <a:avLst/>
+          </a:prstGeom>
+          <a:noFill/>
+          <a:ln/>
+        </p:spPr>
+        <p:txBody>
+          <a:bodyPr wrap="square" lIns="0" tIns="0" rIns="0" bIns="0" rtlCol="0" anchor="t"/>
+          <a:lstStyle/>
+          <a:p>
+            <a:pPr indent="0" marL="0">
+              <a:buNone/>
+            </a:pPr>
+            <a:r>
+              <a:rPr lang="en-US" sz="1600" b="1" dirty="0">
+                <a:solidFill>
+                  <a:schemeClr val="accent1"/>
+                </a:solidFill>
+                <a:latin typeface="Arial" pitchFamily="34" charset="0"/>
+                <a:ea typeface="Arial" pitchFamily="34" charset="-122"/>
+                <a:cs typeface="Arial" pitchFamily="34" charset="-120"/>
+              </a:rPr>
+              <a:t>Entro una settimana</a:t>
+            </a:r>
+            <a:endParaRPr lang="en-US" sz="1600" dirty="0"/>
+          </a:p>
+        </p:txBody>
+      </p:sp>
+      <p:sp>
+        <p:nvSpPr>
+          <p:cNvPr id="22" name="Cosa Entro una settimana"/>
+          <p:cNvSpPr txBox="1"/>
+          <p:nvPr/>
+        </p:nvSpPr>
+        <p:spPr>
+          <a:xfrm>
+            <a:off x="6492240" y="2907792"/>
+            <a:ext cx="5013655" cy="789432"/>
+          </a:xfrm>
+          <a:prstGeom prst="rect">
+            <a:avLst/>
+          </a:prstGeom>
+          <a:noFill/>
+          <a:ln/>
+        </p:spPr>
+        <p:txBody>
+          <a:bodyPr wrap="square" lIns="0" tIns="0" rIns="0" bIns="0" rtlCol="0" anchor="t"/>
+          <a:lstStyle/>
+          <a:p>
+            <a:pPr indent="0" marL="0">
+              <a:buNone/>
+            </a:pPr>
+            <a:r>
+              <a:rPr lang="en-US" sz="1500" dirty="0">
+                <a:solidFill>
+                  <a:srgbClr val="374151"/>
+                </a:solidFill>
+                <a:latin typeface="Arial" pitchFamily="34" charset="0"/>
+                <a:ea typeface="Arial" pitchFamily="34" charset="-122"/>
+                <a:cs typeface="Arial" pitchFamily="34" charset="-120"/>
+              </a:rPr>
+              <a:t>Leggi tutto il materiale, sezione D compresa. Circa 45 minuti.</a:t>
+            </a:r>
+            <a:endParaRPr lang="en-US" sz="1500" dirty="0"/>
+          </a:p>
+        </p:txBody>
+      </p:sp>
+      <p:sp>
+        <p:nvSpPr>
+          <p:cNvPr id="23" name="Punto Entro due settimane"/>
+          <p:cNvSpPr/>
+          <p:nvPr/>
+        </p:nvSpPr>
+        <p:spPr>
+          <a:xfrm>
+            <a:off x="5989320" y="3797808"/>
+            <a:ext cx="256032" cy="256032"/>
+          </a:xfrm>
+          <a:prstGeom prst="ellipse">
+            <a:avLst/>
+          </a:prstGeom>
+          <a:solidFill>
+            <a:srgbClr val="1B4D89"/>
+          </a:solidFill>
+          <a:ln w="25400">
+            <a:solidFill>
+              <a:srgbClr val="FFFFFF"/>
+            </a:solidFill>
+            <a:prstDash val="solid"/>
+          </a:ln>
+        </p:spPr>
+      </p:sp>
+      <p:sp>
+        <p:nvSpPr>
+          <p:cNvPr id="24" name="Quando Entro due settimane"/>
+          <p:cNvSpPr txBox="1"/>
+          <p:nvPr/>
+        </p:nvSpPr>
+        <p:spPr>
+          <a:xfrm>
+            <a:off x="6492240" y="3733800"/>
+            <a:ext cx="5013655" cy="329184"/>
+          </a:xfrm>
+          <a:prstGeom prst="rect">
+            <a:avLst/>
+          </a:prstGeom>
+          <a:noFill/>
+          <a:ln/>
+        </p:spPr>
+        <p:txBody>
+          <a:bodyPr wrap="square" lIns="0" tIns="0" rIns="0" bIns="0" rtlCol="0" anchor="t"/>
+          <a:lstStyle/>
+          <a:p>
+            <a:pPr indent="0" marL="0">
+              <a:buNone/>
+            </a:pPr>
+            <a:r>
+              <a:rPr lang="en-US" sz="1600" b="1" dirty="0">
+                <a:solidFill>
+                  <a:schemeClr val="accent1"/>
+                </a:solidFill>
+                <a:latin typeface="Arial" pitchFamily="34" charset="0"/>
+                <a:ea typeface="Arial" pitchFamily="34" charset="-122"/>
+                <a:cs typeface="Arial" pitchFamily="34" charset="-120"/>
+              </a:rPr>
+              <a:t>Entro due settimane</a:t>
+            </a:r>
+            <a:endParaRPr lang="en-US" sz="1600" dirty="0"/>
+          </a:p>
+        </p:txBody>
+      </p:sp>
+      <p:sp>
+        <p:nvSpPr>
+          <p:cNvPr id="25" name="Cosa Entro due settimane"/>
+          <p:cNvSpPr txBox="1"/>
+          <p:nvPr/>
+        </p:nvSpPr>
+        <p:spPr>
+          <a:xfrm>
+            <a:off x="6492240" y="4081272"/>
+            <a:ext cx="5013655" cy="789432"/>
+          </a:xfrm>
+          <a:prstGeom prst="rect">
+            <a:avLst/>
+          </a:prstGeom>
+          <a:noFill/>
+          <a:ln/>
+        </p:spPr>
+        <p:txBody>
+          <a:bodyPr wrap="square" lIns="0" tIns="0" rIns="0" bIns="0" rtlCol="0" anchor="t"/>
+          <a:lstStyle/>
+          <a:p>
+            <a:pPr indent="0" marL="0">
+              <a:buNone/>
+            </a:pPr>
+            <a:r>
+              <a:rPr lang="en-US" sz="1500" dirty="0">
+                <a:solidFill>
+                  <a:srgbClr val="374151"/>
+                </a:solidFill>
+                <a:latin typeface="Arial" pitchFamily="34" charset="0"/>
+                <a:ea typeface="Arial" pitchFamily="34" charset="-122"/>
+                <a:cs typeface="Arial" pitchFamily="34" charset="-120"/>
+              </a:rPr>
+              <a:t>Strumenti configurati, checklist da 18 punti e test. Circa 1 ora di pratica.</a:t>
+            </a:r>
+            <a:endParaRPr lang="en-US" sz="1500" dirty="0"/>
+          </a:p>
+        </p:txBody>
+      </p:sp>
+      <p:sp>
+        <p:nvSpPr>
+          <p:cNvPr id="26" name="Punto Poi"/>
+          <p:cNvSpPr/>
+          <p:nvPr/>
+        </p:nvSpPr>
+        <p:spPr>
+          <a:xfrm>
+            <a:off x="5989320" y="4971288"/>
+            <a:ext cx="256032" cy="256032"/>
+          </a:xfrm>
+          <a:prstGeom prst="ellipse">
+            <a:avLst/>
+          </a:prstGeom>
+          <a:solidFill>
+            <a:srgbClr val="1B4D89"/>
+          </a:solidFill>
+          <a:ln w="25400">
+            <a:solidFill>
+              <a:srgbClr val="FFFFFF"/>
+            </a:solidFill>
+            <a:prstDash val="solid"/>
+          </a:ln>
+        </p:spPr>
+      </p:sp>
+      <p:sp>
+        <p:nvSpPr>
+          <p:cNvPr id="27" name="Quando Poi"/>
+          <p:cNvSpPr txBox="1"/>
+          <p:nvPr/>
+        </p:nvSpPr>
+        <p:spPr>
+          <a:xfrm>
+            <a:off x="6492240" y="4907280"/>
+            <a:ext cx="5013655" cy="329184"/>
+          </a:xfrm>
+          <a:prstGeom prst="rect">
+            <a:avLst/>
+          </a:prstGeom>
+          <a:noFill/>
+          <a:ln/>
+        </p:spPr>
+        <p:txBody>
+          <a:bodyPr wrap="square" lIns="0" tIns="0" rIns="0" bIns="0" rtlCol="0" anchor="t"/>
+          <a:lstStyle/>
+          <a:p>
+            <a:pPr indent="0" marL="0">
+              <a:buNone/>
+            </a:pPr>
+            <a:r>
+              <a:rPr lang="en-US" sz="1600" b="1" dirty="0">
+                <a:solidFill>
+                  <a:schemeClr val="accent1"/>
+                </a:solidFill>
+                <a:latin typeface="Arial" pitchFamily="34" charset="0"/>
+                <a:ea typeface="Arial" pitchFamily="34" charset="-122"/>
+                <a:cs typeface="Arial" pitchFamily="34" charset="-120"/>
+              </a:rPr>
+              <a:t>Poi</a:t>
+            </a:r>
+            <a:endParaRPr lang="en-US" sz="1600" dirty="0"/>
+          </a:p>
+        </p:txBody>
+      </p:sp>
+      <p:sp>
+        <p:nvSpPr>
+          <p:cNvPr id="28" name="Cosa Poi"/>
+          <p:cNvSpPr txBox="1"/>
+          <p:nvPr/>
+        </p:nvSpPr>
+        <p:spPr>
+          <a:xfrm>
+            <a:off x="6492240" y="5254752"/>
+            <a:ext cx="5013655" cy="789432"/>
+          </a:xfrm>
+          <a:prstGeom prst="rect">
+            <a:avLst/>
+          </a:prstGeom>
+          <a:noFill/>
+          <a:ln/>
+        </p:spPr>
+        <p:txBody>
+          <a:bodyPr wrap="square" lIns="0" tIns="0" rIns="0" bIns="0" rtlCol="0" anchor="t"/>
+          <a:lstStyle/>
+          <a:p>
+            <a:pPr indent="0" marL="0">
+              <a:buNone/>
+            </a:pPr>
+            <a:r>
+              <a:rPr lang="en-US" sz="1500" dirty="0">
+                <a:solidFill>
+                  <a:srgbClr val="374151"/>
+                </a:solidFill>
+                <a:latin typeface="Arial" pitchFamily="34" charset="0"/>
+                <a:ea typeface="Arial" pitchFamily="34" charset="-122"/>
+                <a:cs typeface="Arial" pitchFamily="34" charset="-120"/>
+              </a:rPr>
+              <a:t>Collega i primi strumenti con la sezione D: connettori e skill, con accessi minimi. Ripasso ogni 6 mesi.</a:t>
+            </a:r>
+            <a:endParaRPr lang="en-US" sz="1500" dirty="0"/>
+          </a:p>
+        </p:txBody>
+      </p:sp>
+      <p:sp>
+        <p:nvSpPr>
+          <p:cNvPr id="25" name="Slide Number Placeholder 0"/>
+          <p:cNvSpPr>
+            <a:spLocks noGrp="1"/>
+          </p:cNvSpPr>
+          <p:nvPr>
+            <p:ph type="sldNum" sz="quarter" idx="4294967295"/>
+          </p:nvPr>
+        </p:nvSpPr>
+        <p:spPr>
+          <a:xfrm>
+            <a:off x="10957255" y="6382512"/>
+            <a:ext cx="548640" cy="228600"/>
+          </a:xfrm>
+          <a:prstGeom prst="rect">
+            <a:avLst/>
+          </a:prstGeom>
+          <a:extLst>
+            <a:ext uri="{C572A759-6A51-4108-AA02-DFA0A04FC94B}">
+              <ma14:wrappingTextBoxFlag xmlns:ma14="http://schemas.microsoft.com/office/mac/drawingml/2011/main" val="0"/>
+            </a:ext>
+          </a:extLst>
+        </p:spPr>
+        <p:txBody>
+          <a:bodyPr/>
+          <a:lstStyle>
+            <a:lvl1pPr>
+              <a:defRPr sz="1000">
+                <a:solidFill>
+                  <a:schemeClr val="accent6"/>
+                </a:solidFill>
+                <a:latin typeface="Arial"/>
+                <a:ea typeface="Arial"/>
+                <a:cs typeface="Arial"/>
+              </a:defRPr>
+            </a:lvl1pPr>
+          </a:lstStyle>
+          <a:p>
+            <a:pPr algn="r"/>
+            <a:fld id="{F7021451-1387-4CA6-816F-3879F97B5CBC}" type="slidenum">
+              <a:rPr b="0" lang="en-US"/>
+              <a:t>15</a:t>
+            </a:fld>
+            <a:endParaRPr lang="en-US"/>
+          </a:p>
+        </p:txBody>
+      </p:sp>
+    </p:spTree>
+  </p:cSld>
+  <p:clrMapOvr>
+    <a:masterClrMapping/>
+  </p:clrMapOvr>
+</p:sld>
+</file>
+
+<file path=ppt/slides/slide16.xml><?xml version="1.0" encoding="utf-8"?>
+<p:sld xmlns:a="http://schemas.openxmlformats.org/drawingml/2006/main" xmlns:r="http://schemas.openxmlformats.org/officeDocument/2006/relationships" xmlns:p="http://schemas.openxmlformats.org/presentationml/2006/main">
+  <p:cSld name="Slide 16">
+    <p:spTree>
+      <p:nvGrpSpPr>
+        <p:cNvPr id="1" name=""/>
+        <p:cNvGrpSpPr/>
+        <p:nvPr/>
+      </p:nvGrpSpPr>
+      <p:grpSpPr>
+        <a:xfrm>
+          <a:off x="0" y="0"/>
+          <a:ext cx="0" cy="0"/>
+          <a:chOff x="0" y="0"/>
+          <a:chExt cx="0" cy="0"/>
+        </a:xfrm>
+      </p:grpSpPr>
+      <p:sp>
+        <p:nvSpPr>
+          <p:cNvPr id="2" name="Text 0"/>
+          <p:cNvSpPr/>
+          <p:nvPr>
+            <p:ph idx="100" type="body" hasCustomPrompt="1"/>
+          </p:nvPr>
+        </p:nvSpPr>
+        <p:spPr>
+          <a:xfrm>
+            <a:off x="685800" y="685800"/>
+            <a:ext cx="10820095" cy="274320"/>
+          </a:xfrm>
+          <a:prstGeom prst="rect">
+            <a:avLst/>
+          </a:prstGeom>
+          <a:noFill/>
+          <a:ln/>
+        </p:spPr>
+        <p:txBody>
+          <a:bodyPr wrap="square" lIns="0" tIns="0" rIns="0" bIns="0" rtlCol="0" anchor="t"/>
+          <a:lstStyle/>
+          <a:p>
+            <a:pPr indent="0" marL="0">
+              <a:buNone/>
+            </a:pPr>
+            <a:r>
+              <a:rPr lang="en-US" sz="1200" b="1" spc="200" kern="0" dirty="0">
+                <a:solidFill>
+                  <a:schemeClr val="accent1"/>
+                </a:solidFill>
+                <a:latin typeface="Arial" pitchFamily="34" charset="0"/>
+                <a:ea typeface="Arial" pitchFamily="34" charset="-122"/>
+                <a:cs typeface="Arial" pitchFamily="34" charset="-120"/>
+              </a:rPr>
+              <a:t>PER CHIUDERE</a:t>
+            </a:r>
+            <a:endParaRPr lang="en-US" sz="1200" dirty="0"/>
+          </a:p>
+        </p:txBody>
+      </p:sp>
+      <p:sp>
+        <p:nvSpPr>
+          <p:cNvPr id="3" name="Domande"/>
+          <p:cNvSpPr txBox="1"/>
+          <p:nvPr/>
+        </p:nvSpPr>
+        <p:spPr>
+          <a:xfrm>
+            <a:off x="685800" y="1051560"/>
+            <a:ext cx="10820095" cy="914400"/>
+          </a:xfrm>
+          <a:prstGeom prst="rect">
+            <a:avLst/>
+          </a:prstGeom>
+          <a:noFill/>
+          <a:ln/>
+        </p:spPr>
+        <p:txBody>
+          <a:bodyPr wrap="square" lIns="0" tIns="0" rIns="0" bIns="0" rtlCol="0" anchor="t"/>
+          <a:lstStyle/>
+          <a:p>
+            <a:pPr indent="0" marL="0">
+              <a:buNone/>
+            </a:pPr>
+            <a:r>
+              <a:rPr lang="en-US" sz="5400" b="1" dirty="0">
+                <a:solidFill>
+                  <a:schemeClr val="accent1"/>
+                </a:solidFill>
+                <a:latin typeface="Georgia" pitchFamily="34" charset="0"/>
+                <a:ea typeface="Georgia" pitchFamily="34" charset="-122"/>
+                <a:cs typeface="Georgia" pitchFamily="34" charset="-120"/>
+              </a:rPr>
+              <a:t>Domande?</a:t>
+            </a:r>
+            <a:endParaRPr lang="en-US" sz="5400" dirty="0"/>
+          </a:p>
+        </p:txBody>
+      </p:sp>
+      <p:sp>
+        <p:nvSpPr>
+          <p:cNvPr id="4" name="Da portare a casa"/>
+          <p:cNvSpPr txBox="1"/>
+          <p:nvPr/>
+        </p:nvSpPr>
+        <p:spPr>
+          <a:xfrm>
+            <a:off x="685800" y="2286000"/>
+            <a:ext cx="10820095" cy="274320"/>
+          </a:xfrm>
+          <a:prstGeom prst="rect">
+            <a:avLst/>
+          </a:prstGeom>
+          <a:noFill/>
+          <a:ln/>
+        </p:spPr>
+        <p:txBody>
+          <a:bodyPr wrap="square" lIns="0" tIns="0" rIns="0" bIns="0" rtlCol="0" anchor="t"/>
+          <a:lstStyle/>
+          <a:p>
+            <a:pPr indent="0" marL="0">
+              <a:buNone/>
+            </a:pPr>
+            <a:r>
+              <a:rPr lang="en-US" sz="1200" b="1" spc="200" kern="0" dirty="0">
+                <a:solidFill>
+                  <a:srgbClr val="374151"/>
+                </a:solidFill>
+                <a:latin typeface="Arial" pitchFamily="34" charset="0"/>
+                <a:ea typeface="Arial" pitchFamily="34" charset="-122"/>
+                <a:cs typeface="Arial" pitchFamily="34" charset="-120"/>
+              </a:rPr>
+              <a:t>DA PORTARE A CASA</a:t>
+            </a:r>
+            <a:endParaRPr lang="en-US" sz="1200" dirty="0"/>
+          </a:p>
+        </p:txBody>
+      </p:sp>
+      <p:pic>
+        <p:nvPicPr>
+          <p:cNvPr id="5" name="Spunta 0" descr="preencoded.png">    </p:cNvPr>
+          <p:cNvPicPr>
+            <a:picLocks noChangeAspect="1"/>
+          </p:cNvPicPr>
+          <p:nvPr/>
+        </p:nvPicPr>
+        <p:blipFill>
+          <a:blip r:embed="rId1"/>
+          <a:stretch>
+            <a:fillRect/>
+          </a:stretch>
+        </p:blipFill>
+        <p:spPr>
+          <a:xfrm>
+            <a:off x="685800" y="2761488"/>
+            <a:ext cx="329184" cy="329184"/>
+          </a:xfrm>
+          <a:prstGeom prst="rect">
+            <a:avLst/>
+          </a:prstGeom>
+        </p:spPr>
+      </p:pic>
+      <p:sp>
+        <p:nvSpPr>
+          <p:cNvPr id="6" name="Punto 0"/>
+          <p:cNvSpPr txBox="1"/>
+          <p:nvPr/>
+        </p:nvSpPr>
+        <p:spPr>
+          <a:xfrm>
+            <a:off x="1234440" y="2697480"/>
+            <a:ext cx="10271455" cy="457200"/>
+          </a:xfrm>
+          <a:prstGeom prst="rect">
+            <a:avLst/>
+          </a:prstGeom>
+          <a:noFill/>
+          <a:ln/>
+        </p:spPr>
+        <p:txBody>
+          <a:bodyPr wrap="square" lIns="0" tIns="0" rIns="0" bIns="0" rtlCol="0" anchor="ctr"/>
+          <a:lstStyle/>
+          <a:p>
+            <a:pPr indent="0" marL="0">
+              <a:buNone/>
+            </a:pPr>
+            <a:r>
+              <a:rPr lang="en-US" sz="2100" dirty="0">
+                <a:solidFill>
+                  <a:schemeClr val="tx1"/>
+                </a:solidFill>
+                <a:latin typeface="Arial" pitchFamily="34" charset="0"/>
+                <a:ea typeface="Arial" pitchFamily="34" charset="-122"/>
+                <a:cs typeface="Arial" pitchFamily="34" charset="-120"/>
+              </a:rPr>
+              <a:t>Dati giusti nello strumento giusto. Segreto mai, in nessuna AI</a:t>
+            </a:r>
+            <a:endParaRPr lang="en-US" sz="2100" dirty="0"/>
+          </a:p>
+        </p:txBody>
+      </p:sp>
+      <p:pic>
+        <p:nvPicPr>
+          <p:cNvPr id="7" name="Spunta 1" descr="preencoded.png">    </p:cNvPr>
+          <p:cNvPicPr>
+            <a:picLocks noChangeAspect="1"/>
+          </p:cNvPicPr>
+          <p:nvPr/>
+        </p:nvPicPr>
+        <p:blipFill>
+          <a:blip r:embed="rId2"/>
+          <a:stretch>
+            <a:fillRect/>
+          </a:stretch>
+        </p:blipFill>
+        <p:spPr>
+          <a:xfrm>
+            <a:off x="685800" y="3419856"/>
+            <a:ext cx="329184" cy="329184"/>
+          </a:xfrm>
+          <a:prstGeom prst="rect">
+            <a:avLst/>
+          </a:prstGeom>
+        </p:spPr>
+      </p:pic>
+      <p:sp>
+        <p:nvSpPr>
+          <p:cNvPr id="8" name="Punto 1"/>
+          <p:cNvSpPr txBox="1"/>
+          <p:nvPr/>
+        </p:nvSpPr>
+        <p:spPr>
+          <a:xfrm>
+            <a:off x="1234440" y="3355848"/>
+            <a:ext cx="10271455" cy="457200"/>
+          </a:xfrm>
+          <a:prstGeom prst="rect">
+            <a:avLst/>
+          </a:prstGeom>
+          <a:noFill/>
+          <a:ln/>
+        </p:spPr>
+        <p:txBody>
+          <a:bodyPr wrap="square" lIns="0" tIns="0" rIns="0" bIns="0" rtlCol="0" anchor="ctr"/>
+          <a:lstStyle/>
+          <a:p>
+            <a:pPr indent="0" marL="0">
+              <a:buNone/>
+            </a:pPr>
+            <a:r>
+              <a:rPr lang="en-US" sz="2100" dirty="0">
+                <a:solidFill>
+                  <a:schemeClr val="tx1"/>
+                </a:solidFill>
+                <a:latin typeface="Arial" pitchFamily="34" charset="0"/>
+                <a:ea typeface="Arial" pitchFamily="34" charset="-122"/>
+                <a:cs typeface="Arial" pitchFamily="34" charset="-120"/>
+              </a:rPr>
+              <a:t>L’AI prevede, non sa: ricontrolla nomi, date e numeri</a:t>
+            </a:r>
+            <a:endParaRPr lang="en-US" sz="2100" dirty="0"/>
+          </a:p>
+        </p:txBody>
+      </p:sp>
+      <p:pic>
+        <p:nvPicPr>
+          <p:cNvPr id="9" name="Spunta 2" descr="preencoded.png">    </p:cNvPr>
+          <p:cNvPicPr>
+            <a:picLocks noChangeAspect="1"/>
+          </p:cNvPicPr>
+          <p:nvPr/>
+        </p:nvPicPr>
+        <p:blipFill>
+          <a:blip r:embed="rId3"/>
+          <a:stretch>
+            <a:fillRect/>
+          </a:stretch>
+        </p:blipFill>
+        <p:spPr>
+          <a:xfrm>
+            <a:off x="685800" y="4078224"/>
+            <a:ext cx="329184" cy="329184"/>
+          </a:xfrm>
+          <a:prstGeom prst="rect">
+            <a:avLst/>
+          </a:prstGeom>
+        </p:spPr>
+      </p:pic>
+      <p:sp>
+        <p:nvSpPr>
+          <p:cNvPr id="10" name="Punto 2"/>
+          <p:cNvSpPr txBox="1"/>
+          <p:nvPr/>
+        </p:nvSpPr>
+        <p:spPr>
+          <a:xfrm>
+            <a:off x="1234440" y="4014216"/>
+            <a:ext cx="10271455" cy="457200"/>
+          </a:xfrm>
+          <a:prstGeom prst="rect">
+            <a:avLst/>
+          </a:prstGeom>
+          <a:noFill/>
+          <a:ln/>
+        </p:spPr>
+        <p:txBody>
+          <a:bodyPr wrap="square" lIns="0" tIns="0" rIns="0" bIns="0" rtlCol="0" anchor="ctr"/>
+          <a:lstStyle/>
+          <a:p>
+            <a:pPr indent="0" marL="0">
+              <a:buNone/>
+            </a:pPr>
+            <a:r>
+              <a:rPr lang="en-US" sz="2100" dirty="0">
+                <a:solidFill>
+                  <a:schemeClr val="tx1"/>
+                </a:solidFill>
+                <a:latin typeface="Arial" pitchFamily="34" charset="0"/>
+                <a:ea typeface="Arial" pitchFamily="34" charset="-122"/>
+                <a:cs typeface="Arial" pitchFamily="34" charset="-120"/>
+              </a:rPr>
+              <a:t>Accesso minimo, come a un nuovo collaboratore</a:t>
+            </a:r>
+            <a:endParaRPr lang="en-US" sz="2100" dirty="0"/>
+          </a:p>
+        </p:txBody>
+      </p:sp>
+      <p:sp>
+        <p:nvSpPr>
+          <p:cNvPr id="11" name="Se succede"/>
+          <p:cNvSpPr/>
+          <p:nvPr/>
+        </p:nvSpPr>
+        <p:spPr>
+          <a:xfrm>
+            <a:off x="685800" y="4892040"/>
+            <a:ext cx="10820095" cy="960120"/>
+          </a:xfrm>
+          <a:prstGeom prst="roundRect">
+            <a:avLst>
+              <a:gd name="adj" fmla="val 13333"/>
+            </a:avLst>
+          </a:prstGeom>
+          <a:solidFill>
+            <a:srgbClr val="FFFFFF"/>
+          </a:solidFill>
+          <a:ln w="12700">
+            <a:solidFill>
+              <a:srgbClr val="FFFFFF"/>
+            </a:solidFill>
+            <a:prstDash val="solid"/>
+          </a:ln>
+        </p:spPr>
+      </p:sp>
+      <p:pic>
+        <p:nvPicPr>
+          <p:cNvPr id="12" name="Telefono" descr="preencoded.png">    </p:cNvPr>
+          <p:cNvPicPr>
+            <a:picLocks noChangeAspect="1"/>
+          </p:cNvPicPr>
+          <p:nvPr/>
+        </p:nvPicPr>
+        <p:blipFill>
+          <a:blip r:embed="rId4"/>
+          <a:stretch>
+            <a:fillRect/>
+          </a:stretch>
+        </p:blipFill>
+        <p:spPr>
+          <a:xfrm>
+            <a:off x="1005840" y="5166360"/>
+            <a:ext cx="411480" cy="411480"/>
+          </a:xfrm>
+          <a:prstGeom prst="rect">
+            <a:avLst/>
+          </a:prstGeom>
+        </p:spPr>
+      </p:pic>
+      <p:sp>
+        <p:nvSpPr>
+          <p:cNvPr id="13" name="Se succede testo"/>
+          <p:cNvSpPr txBox="1"/>
+          <p:nvPr/>
+        </p:nvSpPr>
+        <p:spPr>
+          <a:xfrm>
+            <a:off x="1645920" y="4892040"/>
+            <a:ext cx="9585655" cy="960120"/>
+          </a:xfrm>
+          <a:prstGeom prst="rect">
+            <a:avLst/>
+          </a:prstGeom>
+          <a:noFill/>
+          <a:ln/>
+        </p:spPr>
+        <p:txBody>
+          <a:bodyPr wrap="square" lIns="0" tIns="0" rIns="0" bIns="0" rtlCol="0" anchor="ctr"/>
+          <a:lstStyle/>
+          <a:p>
+            <a:pPr indent="0" marL="0">
+              <a:buNone/>
+            </a:pPr>
+            <a:r>
+              <a:rPr lang="en-US" sz="1800" b="1" dirty="0">
+                <a:solidFill>
+                  <a:srgbClr val="B42318"/>
+                </a:solidFill>
+                <a:latin typeface="Arial" pitchFamily="34" charset="0"/>
+                <a:ea typeface="Arial" pitchFamily="34" charset="-122"/>
+                <a:cs typeface="Arial" pitchFamily="34" charset="-120"/>
+              </a:rPr>
+              <a:t>Hai dato a un’AI un dato che non dovevi? </a:t>
+            </a:r>
+            <a:pPr indent="0" marL="0">
+              <a:buNone/>
+            </a:pPr>
+            <a:r>
+              <a:rPr lang="en-US" sz="1800" dirty="0">
+                <a:solidFill>
+                  <a:schemeClr val="tx1"/>
+                </a:solidFill>
+                <a:latin typeface="Arial" pitchFamily="34" charset="0"/>
+                <a:ea typeface="Arial" pitchFamily="34" charset="-122"/>
+                <a:cs typeface="Arial" pitchFamily="34" charset="-120"/>
+              </a:rPr>
+              <a:t>Avvisa subito il referente IT della tua azienda. Prima lo fai, meglio è. Senza vergogna.</a:t>
+            </a:r>
+            <a:endParaRPr lang="en-US" sz="1800" dirty="0"/>
+          </a:p>
+        </p:txBody>
+      </p:sp>
+      <p:sp>
+        <p:nvSpPr>
+          <p:cNvPr id="25" name="Slide Number Placeholder 0"/>
+          <p:cNvSpPr>
+            <a:spLocks noGrp="1"/>
+          </p:cNvSpPr>
+          <p:nvPr>
+            <p:ph type="sldNum" sz="quarter" idx="4294967295"/>
+          </p:nvPr>
+        </p:nvSpPr>
+        <p:spPr>
+          <a:xfrm>
+            <a:off x="10957255" y="6382512"/>
+            <a:ext cx="548640" cy="228600"/>
+          </a:xfrm>
+          <a:prstGeom prst="rect">
+            <a:avLst/>
+          </a:prstGeom>
+          <a:extLst>
+            <a:ext uri="{C572A759-6A51-4108-AA02-DFA0A04FC94B}">
+              <ma14:wrappingTextBoxFlag xmlns:ma14="http://schemas.microsoft.com/office/mac/drawingml/2011/main" val="0"/>
+            </a:ext>
+          </a:extLst>
+        </p:spPr>
+        <p:txBody>
+          <a:bodyPr/>
+          <a:lstStyle>
+            <a:lvl1pPr>
+              <a:defRPr sz="1000">
+                <a:solidFill>
+                  <a:schemeClr val="accent6"/>
+                </a:solidFill>
+                <a:latin typeface="Arial"/>
+                <a:ea typeface="Arial"/>
+                <a:cs typeface="Arial"/>
+              </a:defRPr>
+            </a:lvl1pPr>
+          </a:lstStyle>
+          <a:p>
+            <a:pPr algn="r"/>
+            <a:fld id="{F7021451-1387-4CA6-816F-3879F97B5CBC}" type="slidenum">
+              <a:rPr b="0" lang="en-US"/>
+              <a:t>16</a:t>
+            </a:fld>
+            <a:endParaRPr lang="en-US"/>
+          </a:p>
+        </p:txBody>
+      </p:sp>
+    </p:spTree>
+  </p:cSld>
+  <p:clrMapOvr>
+    <a:masterClrMapping/>
+  </p:clrMapOvr>
+</p:sld>
+</file>
+
+<file path=ppt/slides/slide17.xml><?xml version="1.0" encoding="utf-8"?>
+<p:sld xmlns:a="http://schemas.openxmlformats.org/drawingml/2006/main" xmlns:r="http://schemas.openxmlformats.org/officeDocument/2006/relationships" xmlns:p="http://schemas.openxmlformats.org/presentationml/2006/main">
+  <p:cSld name="Slide 17">
+    <p:spTree>
+      <p:nvGrpSpPr>
+        <p:cNvPr id="1" name=""/>
+        <p:cNvGrpSpPr/>
+        <p:nvPr/>
+      </p:nvGrpSpPr>
+      <p:grpSpPr>
+        <a:xfrm>
+          <a:off x="0" y="0"/>
+          <a:ext cx="0" cy="0"/>
+          <a:chOff x="0" y="0"/>
+          <a:chExt cx="0" cy="0"/>
+        </a:xfrm>
+      </p:grpSpPr>
+      <p:sp>
+        <p:nvSpPr>
+          <p:cNvPr id="2" name="Text 0"/>
+          <p:cNvSpPr/>
+          <p:nvPr>
+            <p:ph idx="100" type="body" hasCustomPrompt="1"/>
+          </p:nvPr>
+        </p:nvSpPr>
+        <p:spPr>
+          <a:xfrm>
+            <a:off x="685800" y="502920"/>
+            <a:ext cx="10820095" cy="274320"/>
+          </a:xfrm>
+          <a:prstGeom prst="rect">
+            <a:avLst/>
+          </a:prstGeom>
+          <a:noFill/>
+          <a:ln/>
+        </p:spPr>
+        <p:txBody>
+          <a:bodyPr wrap="square" lIns="0" tIns="0" rIns="0" bIns="0" rtlCol="0" anchor="t"/>
+          <a:lstStyle/>
+          <a:p>
+            <a:pPr indent="0" marL="0">
+              <a:buNone/>
+            </a:pPr>
+            <a:r>
+              <a:rPr lang="en-US" sz="1200" b="1" spc="200" kern="0" dirty="0">
+                <a:solidFill>
+                  <a:schemeClr val="accent1"/>
+                </a:solidFill>
+                <a:latin typeface="Arial" pitchFamily="34" charset="0"/>
+                <a:ea typeface="Arial" pitchFamily="34" charset="-122"/>
+                <a:cs typeface="Arial" pitchFamily="34" charset="-120"/>
+              </a:rPr>
               <a:t>FONTI</a:t>
             </a:r>
             <a:endParaRPr lang="en-US" sz="1200" dirty="0"/>
@@ -9041,7 +12505,7 @@
             <a:pPr algn="r"/>
             <a:fld id="{F7021451-1387-4CA6-816F-3879F97B5CBC}" type="slidenum">
               <a:rPr b="0" lang="en-US"/>
-              <a:t>15</a:t>
+              <a:t>17</a:t>
             </a:fld>
             <a:endParaRPr lang="en-US"/>
           </a:p>
